--- a/presentations/gen5_lit_mr_02_1_bollinger_evidence.pptx
+++ b/presentations/gen5_lit_mr_02_1_bollinger_evidence.pptx
@@ -2,21 +2,29 @@
 <file path=ppt/presentation.xml><?xml version="1.0" encoding="utf-8"?>
 <p:presentation xmlns:p="http://schemas.openxmlformats.org/presentationml/2006/main">
   <p:sldMasterIdLst>
-    <p:sldMasterId xmlns:r="http://schemas.openxmlformats.org/officeDocument/2006/relationships" id="2147483648" r:id="Ra7c82eaf3603451b"/>
+    <p:sldMasterId xmlns:r="http://schemas.openxmlformats.org/officeDocument/2006/relationships" id="2147483648" r:id="R17c84ce36962453f"/>
   </p:sldMasterIdLst>
   <p:notesMasterIdLst>
-    <p:notesMasterId xmlns:r="http://schemas.openxmlformats.org/officeDocument/2006/relationships" r:id="R61051eaa0bae4b1e"/>
+    <p:notesMasterId xmlns:r="http://schemas.openxmlformats.org/officeDocument/2006/relationships" r:id="R94f55e2bba05465a"/>
   </p:notesMasterIdLst>
   <p:sldIdLst>
-    <p:sldId xmlns:r="http://schemas.openxmlformats.org/officeDocument/2006/relationships" id="256" r:id="Rdc29bbbeb3184262"/>
-    <p:sldId xmlns:r="http://schemas.openxmlformats.org/officeDocument/2006/relationships" id="257" r:id="Rbacf10798a744e2d"/>
-    <p:sldId xmlns:r="http://schemas.openxmlformats.org/officeDocument/2006/relationships" id="258" r:id="Rb1015b9bc65a403d"/>
-    <p:sldId xmlns:r="http://schemas.openxmlformats.org/officeDocument/2006/relationships" id="259" r:id="R30b72e9fb5444cde"/>
-    <p:sldId xmlns:r="http://schemas.openxmlformats.org/officeDocument/2006/relationships" id="260" r:id="R66fcc3fab5174533"/>
-    <p:sldId xmlns:r="http://schemas.openxmlformats.org/officeDocument/2006/relationships" id="261" r:id="R5be0b4d6a23b427d"/>
-    <p:sldId xmlns:r="http://schemas.openxmlformats.org/officeDocument/2006/relationships" id="262" r:id="R9b9a144de67b433a"/>
-    <p:sldId xmlns:r="http://schemas.openxmlformats.org/officeDocument/2006/relationships" id="263" r:id="Rd794d2016fa94bc9"/>
-    <p:sldId xmlns:r="http://schemas.openxmlformats.org/officeDocument/2006/relationships" id="264" r:id="Rf8b240e1df9c4ff5"/>
+    <p:sldId xmlns:r="http://schemas.openxmlformats.org/officeDocument/2006/relationships" id="256" r:id="R7e6b386ca93b4dae"/>
+    <p:sldId xmlns:r="http://schemas.openxmlformats.org/officeDocument/2006/relationships" id="257" r:id="Rada144b9b32843e0"/>
+    <p:sldId xmlns:r="http://schemas.openxmlformats.org/officeDocument/2006/relationships" id="258" r:id="R444f03cd1f8143f4"/>
+    <p:sldId xmlns:r="http://schemas.openxmlformats.org/officeDocument/2006/relationships" id="259" r:id="R7781e796f8bf4daf"/>
+    <p:sldId xmlns:r="http://schemas.openxmlformats.org/officeDocument/2006/relationships" id="260" r:id="R944fe3b21b0e4370"/>
+    <p:sldId xmlns:r="http://schemas.openxmlformats.org/officeDocument/2006/relationships" id="261" r:id="R126d8c514dd64c1b"/>
+    <p:sldId xmlns:r="http://schemas.openxmlformats.org/officeDocument/2006/relationships" id="262" r:id="R79af14966def4bd0"/>
+    <p:sldId xmlns:r="http://schemas.openxmlformats.org/officeDocument/2006/relationships" id="263" r:id="R4ef7177d072b4478"/>
+    <p:sldId xmlns:r="http://schemas.openxmlformats.org/officeDocument/2006/relationships" id="264" r:id="R375751d6efef48b1"/>
+    <p:sldId xmlns:r="http://schemas.openxmlformats.org/officeDocument/2006/relationships" id="265" r:id="R4a459ee0e13a4af5"/>
+    <p:sldId xmlns:r="http://schemas.openxmlformats.org/officeDocument/2006/relationships" id="266" r:id="R4e4f23ed7dcc44f0"/>
+    <p:sldId xmlns:r="http://schemas.openxmlformats.org/officeDocument/2006/relationships" id="267" r:id="R00682393de884669"/>
+    <p:sldId xmlns:r="http://schemas.openxmlformats.org/officeDocument/2006/relationships" id="268" r:id="Ra5bb91fee489431a"/>
+    <p:sldId xmlns:r="http://schemas.openxmlformats.org/officeDocument/2006/relationships" id="269" r:id="R9f51cd6eb91d434a"/>
+    <p:sldId xmlns:r="http://schemas.openxmlformats.org/officeDocument/2006/relationships" id="270" r:id="R530c6c4d11b34229"/>
+    <p:sldId xmlns:r="http://schemas.openxmlformats.org/officeDocument/2006/relationships" id="271" r:id="Rb01088723c924cca"/>
+    <p:sldId xmlns:r="http://schemas.openxmlformats.org/officeDocument/2006/relationships" id="272" r:id="R298a5347781c4920"/>
   </p:sldIdLst>
   <p:sldSz cx="12192000" cy="6858000"/>
   <p:notesSz cx="6858000" cy="9144000"/>
@@ -450,7 +458,7 @@
           <a:lstStyle xmlns:a="http://schemas.openxmlformats.org/drawingml/2006/main"/>
           <a:p xmlns:a="http://schemas.openxmlformats.org/drawingml/2006/main">
             <a:r>
-              <a:t>The decision is a TRAIN-only STOP. Development and confirmation outcomes were never opened.</a:t>
+              <a:t>This revision preserves the canonical USO-GLD test and adds a fixed, economically motivated pair panel. No pair was added or removed after seeing outcomes.</a:t>
             </a:r>
           </a:p>
           <a:p xmlns:a="http://schemas.openxmlformats.org/drawingml/2006/main">
@@ -470,7 +478,772 @@
           </a:p>
           <a:p xmlns:a="http://schemas.openxmlformats.org/drawingml/2006/main">
             <a:r>
-              <a:t>- C:/Users/Franc/OneDrive/Documents/Francis/Peltata Project/Time-Series-Modeling-Gen5/runs/research_workbench/literature_grounded/lit_mr_02_1_bollinger_20260728/mr02_report.md</a:t>
+              <a:t>- C:/Users/Franc/OneDrive/Documents/Francis/Peltata Project/Time-Series-Modeling-Gen5/docs/GEN5_LIT_MR_02_1_PANEL_A_CONTRACT.md</a:t>
+            </a:r>
+          </a:p>
+          <a:p xmlns:a="http://schemas.openxmlformats.org/drawingml/2006/main">
+            <a:r>
+              <a:t>- C:/Users/Franc/OneDrive/Documents/Francis/Peltata Project/Time-Series-Modeling-Gen5/runs/research_workbench/literature_grounded/lit_mr_02_1_panel_a_20260728/mr02_panel_report.md</a:t>
+            </a:r>
+          </a:p>
+        </p:txBody>
+      </p:sp>
+      <p:sp>
+        <p:nvSpPr>
+          <p:cNvPr id="4" name="Slide Number Placeholder 3"/>
+          <p:cNvSpPr>
+            <a:spLocks xmlns:a="http://schemas.openxmlformats.org/drawingml/2006/main" noGrp="1"/>
+          </p:cNvSpPr>
+          <p:nvPr>
+            <p:ph type="sldNum" idx="5"/>
+          </p:nvPr>
+        </p:nvSpPr>
+        <p:spPr/>
+        <p:txBody>
+          <a:bodyPr xmlns:a="http://schemas.openxmlformats.org/drawingml/2006/main"/>
+          <a:lstStyle xmlns:a="http://schemas.openxmlformats.org/drawingml/2006/main"/>
+          <a:p xmlns:a="http://schemas.openxmlformats.org/drawingml/2006/main"/>
+        </p:txBody>
+      </p:sp>
+    </p:spTree>
+  </p:cSld>
+  <p:clrMapOvr>
+    <a:masterClrMapping xmlns:a="http://schemas.openxmlformats.org/drawingml/2006/main"/>
+  </p:clrMapOvr>
+</p:notes>
+</file>
+
+<file path=ppt/notesSlides/notesSlide10.xml><?xml version="1.0" encoding="utf-8"?>
+<p:notes xmlns:p="http://schemas.openxmlformats.org/presentationml/2006/main">
+  <p:cSld>
+    <p:spTree>
+      <p:nvGrpSpPr>
+        <p:cNvPr id="1" name=""/>
+        <p:cNvGrpSpPr/>
+        <p:nvPr/>
+      </p:nvGrpSpPr>
+      <p:grpSpPr>
+        <a:xfrm xmlns:a="http://schemas.openxmlformats.org/drawingml/2006/main"/>
+      </p:grpSpPr>
+      <p:sp>
+        <p:nvSpPr>
+          <p:cNvPr id="2" name="Slide Image Placeholder 1"/>
+          <p:cNvSpPr>
+            <a:spLocks xmlns:a="http://schemas.openxmlformats.org/drawingml/2006/main" noGrp="1"/>
+          </p:cNvSpPr>
+          <p:nvPr>
+            <p:ph type="sldImg" idx="0"/>
+          </p:nvPr>
+        </p:nvSpPr>
+        <p:spPr/>
+      </p:sp>
+      <p:sp>
+        <p:nvSpPr>
+          <p:cNvPr id="3" name="Notes Placeholder 2"/>
+          <p:cNvSpPr>
+            <a:spLocks xmlns:a="http://schemas.openxmlformats.org/drawingml/2006/main" noGrp="1"/>
+          </p:cNvSpPr>
+          <p:nvPr>
+            <p:ph type="body" idx="1"/>
+          </p:nvPr>
+        </p:nvSpPr>
+        <p:spPr/>
+        <p:txBody>
+          <a:bodyPr xmlns:a="http://schemas.openxmlformats.org/drawingml/2006/main"/>
+          <a:lstStyle xmlns:a="http://schemas.openxmlformats.org/drawingml/2006/main"/>
+          <a:p xmlns:a="http://schemas.openxmlformats.org/drawingml/2006/main">
+            <a:r>
+              <a:t>The matched random-sign control breaks only the mapping from signal sign to pair direction while preserving opportunities, holding periods, realized paths, and costs.</a:t>
+            </a:r>
+          </a:p>
+          <a:p xmlns:a="http://schemas.openxmlformats.org/drawingml/2006/main">
+            <a:r>
+              <a:t/>
+            </a:r>
+          </a:p>
+          <a:p xmlns:a="http://schemas.openxmlformats.org/drawingml/2006/main">
+            <a:r>
+              <a:t>[Sources]</a:t>
+            </a:r>
+          </a:p>
+          <a:p xmlns:a="http://schemas.openxmlformats.org/drawingml/2006/main">
+            <a:r>
+              <a:t>- C:/Users/Franc/OneDrive/Documents/Francis/Peltata Project/Time-Series-Modeling-Gen5/runs/research_workbench/literature_grounded/lit_mr_02_1_bollinger_20260728/mr02_train_trade_bootstrap_summary.csv</a:t>
+            </a:r>
+          </a:p>
+          <a:p xmlns:a="http://schemas.openxmlformats.org/drawingml/2006/main">
+            <a:r>
+              <a:t>- C:/Users/Franc/OneDrive/Documents/Francis/Peltata Project/Time-Series-Modeling-Gen5/runs/research_workbench/literature_grounded/lit_mr_02_1_bollinger_20260728/mr02_train_random_sign_distribution.csv</a:t>
+            </a:r>
+          </a:p>
+          <a:p xmlns:a="http://schemas.openxmlformats.org/drawingml/2006/main">
+            <a:r>
+              <a:t>- C:/Users/Franc/OneDrive/Documents/Francis/Peltata Project/Time-Series-Modeling-Gen5/runs/research_workbench/literature_grounded/lit_mr_02_1_bollinger_20260728/visuals/mr02_resampling.png</a:t>
+            </a:r>
+          </a:p>
+        </p:txBody>
+      </p:sp>
+      <p:sp>
+        <p:nvSpPr>
+          <p:cNvPr id="4" name="Slide Number Placeholder 3"/>
+          <p:cNvSpPr>
+            <a:spLocks xmlns:a="http://schemas.openxmlformats.org/drawingml/2006/main" noGrp="1"/>
+          </p:cNvSpPr>
+          <p:nvPr>
+            <p:ph type="sldNum" idx="5"/>
+          </p:nvPr>
+        </p:nvSpPr>
+        <p:spPr/>
+        <p:txBody>
+          <a:bodyPr xmlns:a="http://schemas.openxmlformats.org/drawingml/2006/main"/>
+          <a:lstStyle xmlns:a="http://schemas.openxmlformats.org/drawingml/2006/main"/>
+          <a:p xmlns:a="http://schemas.openxmlformats.org/drawingml/2006/main"/>
+        </p:txBody>
+      </p:sp>
+    </p:spTree>
+  </p:cSld>
+  <p:clrMapOvr>
+    <a:masterClrMapping xmlns:a="http://schemas.openxmlformats.org/drawingml/2006/main"/>
+  </p:clrMapOvr>
+</p:notes>
+</file>
+
+<file path=ppt/notesSlides/notesSlide11.xml><?xml version="1.0" encoding="utf-8"?>
+<p:notes xmlns:p="http://schemas.openxmlformats.org/presentationml/2006/main">
+  <p:cSld>
+    <p:spTree>
+      <p:nvGrpSpPr>
+        <p:cNvPr id="1" name=""/>
+        <p:cNvGrpSpPr/>
+        <p:nvPr/>
+      </p:nvGrpSpPr>
+      <p:grpSpPr>
+        <a:xfrm xmlns:a="http://schemas.openxmlformats.org/drawingml/2006/main"/>
+      </p:grpSpPr>
+      <p:sp>
+        <p:nvSpPr>
+          <p:cNvPr id="2" name="Slide Image Placeholder 1"/>
+          <p:cNvSpPr>
+            <a:spLocks xmlns:a="http://schemas.openxmlformats.org/drawingml/2006/main" noGrp="1"/>
+          </p:cNvSpPr>
+          <p:nvPr>
+            <p:ph type="sldImg" idx="0"/>
+          </p:nvPr>
+        </p:nvSpPr>
+        <p:spPr/>
+      </p:sp>
+      <p:sp>
+        <p:nvSpPr>
+          <p:cNvPr id="3" name="Notes Placeholder 2"/>
+          <p:cNvSpPr>
+            <a:spLocks xmlns:a="http://schemas.openxmlformats.org/drawingml/2006/main" noGrp="1"/>
+          </p:cNvSpPr>
+          <p:nvPr>
+            <p:ph type="body" idx="1"/>
+          </p:nvPr>
+        </p:nvSpPr>
+        <p:spPr/>
+        <p:txBody>
+          <a:bodyPr xmlns:a="http://schemas.openxmlformats.org/drawingml/2006/main"/>
+          <a:lstStyle xmlns:a="http://schemas.openxmlformats.org/drawingml/2006/main"/>
+          <a:p xmlns:a="http://schemas.openxmlformats.org/drawingml/2006/main">
+            <a:r>
+              <a:t>A z-score crossing its rolling zero is a signal-state event, not a P&amp;L guarantee: beta, the mean, and both tradable leg prices evolve.</a:t>
+            </a:r>
+          </a:p>
+          <a:p xmlns:a="http://schemas.openxmlformats.org/drawingml/2006/main">
+            <a:r>
+              <a:t/>
+            </a:r>
+          </a:p>
+          <a:p xmlns:a="http://schemas.openxmlformats.org/drawingml/2006/main">
+            <a:r>
+              <a:t>[Sources]</a:t>
+            </a:r>
+          </a:p>
+          <a:p xmlns:a="http://schemas.openxmlformats.org/drawingml/2006/main">
+            <a:r>
+              <a:t>- C:/Users/Franc/OneDrive/Documents/Francis/Peltata Project/Time-Series-Modeling-Gen5/runs/research_workbench/literature_grounded/lit_mr_02_1_bollinger_20260728/mr02_train_trades.csv</a:t>
+            </a:r>
+          </a:p>
+          <a:p xmlns:a="http://schemas.openxmlformats.org/drawingml/2006/main">
+            <a:r>
+              <a:t>- C:/Users/Franc/OneDrive/Documents/Francis/Peltata Project/Time-Series-Modeling-Gen5/runs/research_workbench/literature_grounded/lit_mr_02_1_bollinger_20260728/mr02_train_indicators.csv</a:t>
+            </a:r>
+          </a:p>
+          <a:p xmlns:a="http://schemas.openxmlformats.org/drawingml/2006/main">
+            <a:r>
+              <a:t>- C:/Users/Franc/OneDrive/Documents/Francis/Peltata Project/Time-Series-Modeling-Gen5/runs/research_workbench/literature_grounded/lit_mr_02_1_bollinger_20260728/visuals/mr02_representative_trades.png</a:t>
+            </a:r>
+          </a:p>
+        </p:txBody>
+      </p:sp>
+      <p:sp>
+        <p:nvSpPr>
+          <p:cNvPr id="4" name="Slide Number Placeholder 3"/>
+          <p:cNvSpPr>
+            <a:spLocks xmlns:a="http://schemas.openxmlformats.org/drawingml/2006/main" noGrp="1"/>
+          </p:cNvSpPr>
+          <p:nvPr>
+            <p:ph type="sldNum" idx="5"/>
+          </p:nvPr>
+        </p:nvSpPr>
+        <p:spPr/>
+        <p:txBody>
+          <a:bodyPr xmlns:a="http://schemas.openxmlformats.org/drawingml/2006/main"/>
+          <a:lstStyle xmlns:a="http://schemas.openxmlformats.org/drawingml/2006/main"/>
+          <a:p xmlns:a="http://schemas.openxmlformats.org/drawingml/2006/main"/>
+        </p:txBody>
+      </p:sp>
+    </p:spTree>
+  </p:cSld>
+  <p:clrMapOvr>
+    <a:masterClrMapping xmlns:a="http://schemas.openxmlformats.org/drawingml/2006/main"/>
+  </p:clrMapOvr>
+</p:notes>
+</file>
+
+<file path=ppt/notesSlides/notesSlide12.xml><?xml version="1.0" encoding="utf-8"?>
+<p:notes xmlns:p="http://schemas.openxmlformats.org/presentationml/2006/main">
+  <p:cSld>
+    <p:spTree>
+      <p:nvGrpSpPr>
+        <p:cNvPr id="1" name=""/>
+        <p:cNvGrpSpPr/>
+        <p:nvPr/>
+      </p:nvGrpSpPr>
+      <p:grpSpPr>
+        <a:xfrm xmlns:a="http://schemas.openxmlformats.org/drawingml/2006/main"/>
+      </p:grpSpPr>
+      <p:sp>
+        <p:nvSpPr>
+          <p:cNvPr id="2" name="Slide Image Placeholder 1"/>
+          <p:cNvSpPr>
+            <a:spLocks xmlns:a="http://schemas.openxmlformats.org/drawingml/2006/main" noGrp="1"/>
+          </p:cNvSpPr>
+          <p:nvPr>
+            <p:ph type="sldImg" idx="0"/>
+          </p:nvPr>
+        </p:nvSpPr>
+        <p:spPr/>
+      </p:sp>
+      <p:sp>
+        <p:nvSpPr>
+          <p:cNvPr id="3" name="Notes Placeholder 2"/>
+          <p:cNvSpPr>
+            <a:spLocks xmlns:a="http://schemas.openxmlformats.org/drawingml/2006/main" noGrp="1"/>
+          </p:cNvSpPr>
+          <p:nvPr>
+            <p:ph type="body" idx="1"/>
+          </p:nvPr>
+        </p:nvSpPr>
+        <p:spPr/>
+        <p:txBody>
+          <a:bodyPr xmlns:a="http://schemas.openxmlformats.org/drawingml/2006/main"/>
+          <a:lstStyle xmlns:a="http://schemas.openxmlformats.org/drawingml/2006/main"/>
+          <a:p xmlns:a="http://schemas.openxmlformats.org/drawingml/2006/main">
+            <a:r>
+              <a:t>The canonical USO-GLD example passed integrity and trade-support gates only. Later partitions remained sealed.</a:t>
+            </a:r>
+          </a:p>
+          <a:p xmlns:a="http://schemas.openxmlformats.org/drawingml/2006/main">
+            <a:r>
+              <a:t/>
+            </a:r>
+          </a:p>
+          <a:p xmlns:a="http://schemas.openxmlformats.org/drawingml/2006/main">
+            <a:r>
+              <a:t>[Sources]</a:t>
+            </a:r>
+          </a:p>
+          <a:p xmlns:a="http://schemas.openxmlformats.org/drawingml/2006/main">
+            <a:r>
+              <a:t>- C:/Users/Franc/OneDrive/Documents/Francis/Peltata Project/Time-Series-Modeling-Gen5/runs/research_workbench/literature_grounded/lit_mr_02_1_bollinger_20260728/mr02_gate_summary.csv</a:t>
+            </a:r>
+          </a:p>
+          <a:p xmlns:a="http://schemas.openxmlformats.org/drawingml/2006/main">
+            <a:r>
+              <a:t>- C:/Users/Franc/OneDrive/Documents/Francis/Peltata Project/Time-Series-Modeling-Gen5/runs/research_workbench/literature_grounded/lit_mr_02_1_bollinger_20260728/mr02_integrity_audit.csv</a:t>
+            </a:r>
+          </a:p>
+          <a:p xmlns:a="http://schemas.openxmlformats.org/drawingml/2006/main">
+            <a:r>
+              <a:t>- C:/Users/Franc/OneDrive/Documents/Francis/Peltata Project/Time-Series-Modeling-Gen5/runs/research_workbench/literature_grounded/lit_mr_02_1_bollinger_20260728/mr02_run_spec.csv</a:t>
+            </a:r>
+          </a:p>
+        </p:txBody>
+      </p:sp>
+      <p:sp>
+        <p:nvSpPr>
+          <p:cNvPr id="4" name="Slide Number Placeholder 3"/>
+          <p:cNvSpPr>
+            <a:spLocks xmlns:a="http://schemas.openxmlformats.org/drawingml/2006/main" noGrp="1"/>
+          </p:cNvSpPr>
+          <p:nvPr>
+            <p:ph type="sldNum" idx="5"/>
+          </p:nvPr>
+        </p:nvSpPr>
+        <p:spPr/>
+        <p:txBody>
+          <a:bodyPr xmlns:a="http://schemas.openxmlformats.org/drawingml/2006/main"/>
+          <a:lstStyle xmlns:a="http://schemas.openxmlformats.org/drawingml/2006/main"/>
+          <a:p xmlns:a="http://schemas.openxmlformats.org/drawingml/2006/main"/>
+        </p:txBody>
+      </p:sp>
+    </p:spTree>
+  </p:cSld>
+  <p:clrMapOvr>
+    <a:masterClrMapping xmlns:a="http://schemas.openxmlformats.org/drawingml/2006/main"/>
+  </p:clrMapOvr>
+</p:notes>
+</file>
+
+<file path=ppt/notesSlides/notesSlide13.xml><?xml version="1.0" encoding="utf-8"?>
+<p:notes xmlns:p="http://schemas.openxmlformats.org/presentationml/2006/main">
+  <p:cSld>
+    <p:spTree>
+      <p:nvGrpSpPr>
+        <p:cNvPr id="1" name=""/>
+        <p:cNvGrpSpPr/>
+        <p:nvPr/>
+      </p:nvGrpSpPr>
+      <p:grpSpPr>
+        <a:xfrm xmlns:a="http://schemas.openxmlformats.org/drawingml/2006/main"/>
+      </p:grpSpPr>
+      <p:sp>
+        <p:nvSpPr>
+          <p:cNvPr id="2" name="Slide Image Placeholder 1"/>
+          <p:cNvSpPr>
+            <a:spLocks xmlns:a="http://schemas.openxmlformats.org/drawingml/2006/main" noGrp="1"/>
+          </p:cNvSpPr>
+          <p:nvPr>
+            <p:ph type="sldImg" idx="0"/>
+          </p:nvPr>
+        </p:nvSpPr>
+        <p:spPr/>
+      </p:sp>
+      <p:sp>
+        <p:nvSpPr>
+          <p:cNvPr id="3" name="Notes Placeholder 2"/>
+          <p:cNvSpPr>
+            <a:spLocks xmlns:a="http://schemas.openxmlformats.org/drawingml/2006/main" noGrp="1"/>
+          </p:cNvSpPr>
+          <p:nvPr>
+            <p:ph type="body" idx="1"/>
+          </p:nvPr>
+        </p:nvSpPr>
+        <p:spPr/>
+        <p:txBody>
+          <a:bodyPr xmlns:a="http://schemas.openxmlformats.org/drawingml/2006/main"/>
+          <a:lstStyle xmlns:a="http://schemas.openxmlformats.org/drawingml/2006/main"/>
+          <a:p xmlns:a="http://schemas.openxmlformats.org/drawingml/2006/main">
+            <a:r>
+              <a:t>Pair names, Y/X orientation, categories, window, strategy mechanics, costs, and gates were frozen before running. The panel is breadth evidence, not an optimizer.</a:t>
+            </a:r>
+          </a:p>
+          <a:p xmlns:a="http://schemas.openxmlformats.org/drawingml/2006/main">
+            <a:r>
+              <a:t/>
+            </a:r>
+          </a:p>
+          <a:p xmlns:a="http://schemas.openxmlformats.org/drawingml/2006/main">
+            <a:r>
+              <a:t>[Sources]</a:t>
+            </a:r>
+          </a:p>
+          <a:p xmlns:a="http://schemas.openxmlformats.org/drawingml/2006/main">
+            <a:r>
+              <a:t>- C:/Users/Franc/OneDrive/Documents/Francis/Peltata Project/Time-Series-Modeling-Gen5/docs/GEN5_LIT_MR_02_1_PANEL_A_CONTRACT.md</a:t>
+            </a:r>
+          </a:p>
+          <a:p xmlns:a="http://schemas.openxmlformats.org/drawingml/2006/main">
+            <a:r>
+              <a:t>- C:/Users/Franc/OneDrive/Documents/Francis/Peltata Project/Time-Series-Modeling-Gen5/runs/research_workbench/literature_grounded/lit_mr_02_1_panel_a_20260728/mr02_panel_pair_registry.csv</a:t>
+            </a:r>
+          </a:p>
+          <a:p xmlns:a="http://schemas.openxmlformats.org/drawingml/2006/main">
+            <a:r>
+              <a:t>- C:/Users/Franc/OneDrive/Documents/Francis/Peltata Project/Time-Series-Modeling-Gen5/runs/research_workbench/literature_grounded/lit_mr_02_1_panel_a_20260728/mr02_panel_run_spec.csv</a:t>
+            </a:r>
+          </a:p>
+        </p:txBody>
+      </p:sp>
+      <p:sp>
+        <p:nvSpPr>
+          <p:cNvPr id="4" name="Slide Number Placeholder 3"/>
+          <p:cNvSpPr>
+            <a:spLocks xmlns:a="http://schemas.openxmlformats.org/drawingml/2006/main" noGrp="1"/>
+          </p:cNvSpPr>
+          <p:nvPr>
+            <p:ph type="sldNum" idx="5"/>
+          </p:nvPr>
+        </p:nvSpPr>
+        <p:spPr/>
+        <p:txBody>
+          <a:bodyPr xmlns:a="http://schemas.openxmlformats.org/drawingml/2006/main"/>
+          <a:lstStyle xmlns:a="http://schemas.openxmlformats.org/drawingml/2006/main"/>
+          <a:p xmlns:a="http://schemas.openxmlformats.org/drawingml/2006/main"/>
+        </p:txBody>
+      </p:sp>
+    </p:spTree>
+  </p:cSld>
+  <p:clrMapOvr>
+    <a:masterClrMapping xmlns:a="http://schemas.openxmlformats.org/drawingml/2006/main"/>
+  </p:clrMapOvr>
+</p:notes>
+</file>
+
+<file path=ppt/notesSlides/notesSlide14.xml><?xml version="1.0" encoding="utf-8"?>
+<p:notes xmlns:p="http://schemas.openxmlformats.org/presentationml/2006/main">
+  <p:cSld>
+    <p:spTree>
+      <p:nvGrpSpPr>
+        <p:cNvPr id="1" name=""/>
+        <p:cNvGrpSpPr/>
+        <p:nvPr/>
+      </p:nvGrpSpPr>
+      <p:grpSpPr>
+        <a:xfrm xmlns:a="http://schemas.openxmlformats.org/drawingml/2006/main"/>
+      </p:grpSpPr>
+      <p:sp>
+        <p:nvSpPr>
+          <p:cNvPr id="2" name="Slide Image Placeholder 1"/>
+          <p:cNvSpPr>
+            <a:spLocks xmlns:a="http://schemas.openxmlformats.org/drawingml/2006/main" noGrp="1"/>
+          </p:cNvSpPr>
+          <p:nvPr>
+            <p:ph type="sldImg" idx="0"/>
+          </p:nvPr>
+        </p:nvSpPr>
+        <p:spPr/>
+      </p:sp>
+      <p:sp>
+        <p:nvSpPr>
+          <p:cNvPr id="3" name="Notes Placeholder 2"/>
+          <p:cNvSpPr>
+            <a:spLocks xmlns:a="http://schemas.openxmlformats.org/drawingml/2006/main" noGrp="1"/>
+          </p:cNvSpPr>
+          <p:nvPr>
+            <p:ph type="body" idx="1"/>
+          </p:nvPr>
+        </p:nvSpPr>
+        <p:spPr/>
+        <p:txBody>
+          <a:bodyPr xmlns:a="http://schemas.openxmlformats.org/drawingml/2006/main"/>
+          <a:lstStyle xmlns:a="http://schemas.openxmlformats.org/drawingml/2006/main"/>
+          <a:p xmlns:a="http://schemas.openxmlformats.org/drawingml/2006/main">
+            <a:r>
+              <a:t>The plot retains the predeclared registry order. It is not outcome-sorted. USO-XLE's positive point estimate had a wide interval spanning zero and failed the random-sign and forward-convergence gates.</a:t>
+            </a:r>
+          </a:p>
+          <a:p xmlns:a="http://schemas.openxmlformats.org/drawingml/2006/main">
+            <a:r>
+              <a:t/>
+            </a:r>
+          </a:p>
+          <a:p xmlns:a="http://schemas.openxmlformats.org/drawingml/2006/main">
+            <a:r>
+              <a:t>[Sources]</a:t>
+            </a:r>
+          </a:p>
+          <a:p xmlns:a="http://schemas.openxmlformats.org/drawingml/2006/main">
+            <a:r>
+              <a:t>- C:/Users/Franc/OneDrive/Documents/Francis/Peltata Project/Time-Series-Modeling-Gen5/runs/research_workbench/literature_grounded/lit_mr_02_1_panel_a_20260728/mr02_panel_pair_summary.csv</a:t>
+            </a:r>
+          </a:p>
+          <a:p xmlns:a="http://schemas.openxmlformats.org/drawingml/2006/main">
+            <a:r>
+              <a:t>- C:/Users/Franc/OneDrive/Documents/Francis/Peltata Project/Time-Series-Modeling-Gen5/runs/research_workbench/literature_grounded/lit_mr_02_1_panel_a_20260728/mr02_panel_gate_summary.csv</a:t>
+            </a:r>
+          </a:p>
+          <a:p xmlns:a="http://schemas.openxmlformats.org/drawingml/2006/main">
+            <a:r>
+              <a:t>- C:/Users/Franc/OneDrive/Documents/Francis/Peltata Project/Time-Series-Modeling-Gen5/runs/research_workbench/literature_grounded/lit_mr_02_1_panel_a_20260728/visuals/mr02_panel_pair_net_return_ci.png</a:t>
+            </a:r>
+          </a:p>
+        </p:txBody>
+      </p:sp>
+      <p:sp>
+        <p:nvSpPr>
+          <p:cNvPr id="4" name="Slide Number Placeholder 3"/>
+          <p:cNvSpPr>
+            <a:spLocks xmlns:a="http://schemas.openxmlformats.org/drawingml/2006/main" noGrp="1"/>
+          </p:cNvSpPr>
+          <p:nvPr>
+            <p:ph type="sldNum" idx="5"/>
+          </p:nvPr>
+        </p:nvSpPr>
+        <p:spPr/>
+        <p:txBody>
+          <a:bodyPr xmlns:a="http://schemas.openxmlformats.org/drawingml/2006/main"/>
+          <a:lstStyle xmlns:a="http://schemas.openxmlformats.org/drawingml/2006/main"/>
+          <a:p xmlns:a="http://schemas.openxmlformats.org/drawingml/2006/main"/>
+        </p:txBody>
+      </p:sp>
+    </p:spTree>
+  </p:cSld>
+  <p:clrMapOvr>
+    <a:masterClrMapping xmlns:a="http://schemas.openxmlformats.org/drawingml/2006/main"/>
+  </p:clrMapOvr>
+</p:notes>
+</file>
+
+<file path=ppt/notesSlides/notesSlide15.xml><?xml version="1.0" encoding="utf-8"?>
+<p:notes xmlns:p="http://schemas.openxmlformats.org/presentationml/2006/main">
+  <p:cSld>
+    <p:spTree>
+      <p:nvGrpSpPr>
+        <p:cNvPr id="1" name=""/>
+        <p:cNvGrpSpPr/>
+        <p:nvPr/>
+      </p:nvGrpSpPr>
+      <p:grpSpPr>
+        <a:xfrm xmlns:a="http://schemas.openxmlformats.org/drawingml/2006/main"/>
+      </p:grpSpPr>
+      <p:sp>
+        <p:nvSpPr>
+          <p:cNvPr id="2" name="Slide Image Placeholder 1"/>
+          <p:cNvSpPr>
+            <a:spLocks xmlns:a="http://schemas.openxmlformats.org/drawingml/2006/main" noGrp="1"/>
+          </p:cNvSpPr>
+          <p:nvPr>
+            <p:ph type="sldImg" idx="0"/>
+          </p:nvPr>
+        </p:nvSpPr>
+        <p:spPr/>
+      </p:sp>
+      <p:sp>
+        <p:nvSpPr>
+          <p:cNvPr id="3" name="Notes Placeholder 2"/>
+          <p:cNvSpPr>
+            <a:spLocks xmlns:a="http://schemas.openxmlformats.org/drawingml/2006/main" noGrp="1"/>
+          </p:cNvSpPr>
+          <p:nvPr>
+            <p:ph type="body" idx="1"/>
+          </p:nvPr>
+        </p:nvSpPr>
+        <p:spPr/>
+        <p:txBody>
+          <a:bodyPr xmlns:a="http://schemas.openxmlformats.org/drawingml/2006/main"/>
+          <a:lstStyle xmlns:a="http://schemas.openxmlformats.org/drawingml/2006/main"/>
+          <a:p xmlns:a="http://schemas.openxmlformats.org/drawingml/2006/main">
+            <a:r>
+              <a:t>G4 is the cost-surviving trade-return gate. G8 is the signed forward-convergence gate. No primary pair passed either gate under the frozen definitions.</a:t>
+            </a:r>
+          </a:p>
+          <a:p xmlns:a="http://schemas.openxmlformats.org/drawingml/2006/main">
+            <a:r>
+              <a:t/>
+            </a:r>
+          </a:p>
+          <a:p xmlns:a="http://schemas.openxmlformats.org/drawingml/2006/main">
+            <a:r>
+              <a:t>[Sources]</a:t>
+            </a:r>
+          </a:p>
+          <a:p xmlns:a="http://schemas.openxmlformats.org/drawingml/2006/main">
+            <a:r>
+              <a:t>- C:/Users/Franc/OneDrive/Documents/Francis/Peltata Project/Time-Series-Modeling-Gen5/runs/research_workbench/literature_grounded/lit_mr_02_1_panel_a_20260728/mr02_panel_gate_summary.csv</a:t>
+            </a:r>
+          </a:p>
+          <a:p xmlns:a="http://schemas.openxmlformats.org/drawingml/2006/main">
+            <a:r>
+              <a:t>- C:/Users/Franc/OneDrive/Documents/Francis/Peltata Project/Time-Series-Modeling-Gen5/runs/research_workbench/literature_grounded/lit_mr_02_1_panel_a_20260728/mr02_panel_forward_convergence_summary.csv</a:t>
+            </a:r>
+          </a:p>
+          <a:p xmlns:a="http://schemas.openxmlformats.org/drawingml/2006/main">
+            <a:r>
+              <a:t>- C:/Users/Franc/OneDrive/Documents/Francis/Peltata Project/Time-Series-Modeling-Gen5/runs/research_workbench/literature_grounded/lit_mr_02_1_panel_a_20260728/visuals/mr02_panel_gate_heatmap.png</a:t>
+            </a:r>
+          </a:p>
+        </p:txBody>
+      </p:sp>
+      <p:sp>
+        <p:nvSpPr>
+          <p:cNvPr id="4" name="Slide Number Placeholder 3"/>
+          <p:cNvSpPr>
+            <a:spLocks xmlns:a="http://schemas.openxmlformats.org/drawingml/2006/main" noGrp="1"/>
+          </p:cNvSpPr>
+          <p:nvPr>
+            <p:ph type="sldNum" idx="5"/>
+          </p:nvPr>
+        </p:nvSpPr>
+        <p:spPr/>
+        <p:txBody>
+          <a:bodyPr xmlns:a="http://schemas.openxmlformats.org/drawingml/2006/main"/>
+          <a:lstStyle xmlns:a="http://schemas.openxmlformats.org/drawingml/2006/main"/>
+          <a:p xmlns:a="http://schemas.openxmlformats.org/drawingml/2006/main"/>
+        </p:txBody>
+      </p:sp>
+    </p:spTree>
+  </p:cSld>
+  <p:clrMapOvr>
+    <a:masterClrMapping xmlns:a="http://schemas.openxmlformats.org/drawingml/2006/main"/>
+  </p:clrMapOvr>
+</p:notes>
+</file>
+
+<file path=ppt/notesSlides/notesSlide16.xml><?xml version="1.0" encoding="utf-8"?>
+<p:notes xmlns:p="http://schemas.openxmlformats.org/presentationml/2006/main">
+  <p:cSld>
+    <p:spTree>
+      <p:nvGrpSpPr>
+        <p:cNvPr id="1" name=""/>
+        <p:cNvGrpSpPr/>
+        <p:nvPr/>
+      </p:nvGrpSpPr>
+      <p:grpSpPr>
+        <a:xfrm xmlns:a="http://schemas.openxmlformats.org/drawingml/2006/main"/>
+      </p:grpSpPr>
+      <p:sp>
+        <p:nvSpPr>
+          <p:cNvPr id="2" name="Slide Image Placeholder 1"/>
+          <p:cNvSpPr>
+            <a:spLocks xmlns:a="http://schemas.openxmlformats.org/drawingml/2006/main" noGrp="1"/>
+          </p:cNvSpPr>
+          <p:nvPr>
+            <p:ph type="sldImg" idx="0"/>
+          </p:nvPr>
+        </p:nvSpPr>
+        <p:spPr/>
+      </p:sp>
+      <p:sp>
+        <p:nvSpPr>
+          <p:cNvPr id="3" name="Notes Placeholder 2"/>
+          <p:cNvSpPr>
+            <a:spLocks xmlns:a="http://schemas.openxmlformats.org/drawingml/2006/main" noGrp="1"/>
+          </p:cNvSpPr>
+          <p:nvPr>
+            <p:ph type="body" idx="1"/>
+          </p:nvPr>
+        </p:nvSpPr>
+        <p:spPr/>
+        <p:txBody>
+          <a:bodyPr xmlns:a="http://schemas.openxmlformats.org/drawingml/2006/main"/>
+          <a:lstStyle xmlns:a="http://schemas.openxmlformats.org/drawingml/2006/main"/>
+          <a:p xmlns:a="http://schemas.openxmlformats.org/drawingml/2006/main">
+            <a:r>
+              <a:t>IVV-SPY and IAU-GLD were especially instructive: the relation was tight, but round-trip costs dominated the small gross spread movement. GLD-UUP and TLT-SPY showed frequent beta-sign changes, reinforcing the semantic warning.</a:t>
+            </a:r>
+          </a:p>
+          <a:p xmlns:a="http://schemas.openxmlformats.org/drawingml/2006/main">
+            <a:r>
+              <a:t/>
+            </a:r>
+          </a:p>
+          <a:p xmlns:a="http://schemas.openxmlformats.org/drawingml/2006/main">
+            <a:r>
+              <a:t>[Sources]</a:t>
+            </a:r>
+          </a:p>
+          <a:p xmlns:a="http://schemas.openxmlformats.org/drawingml/2006/main">
+            <a:r>
+              <a:t>- C:/Users/Franc/OneDrive/Documents/Francis/Peltata Project/Time-Series-Modeling-Gen5/runs/research_workbench/literature_grounded/lit_mr_02_1_panel_a_20260728/mr02_panel_category_summary.csv</a:t>
+            </a:r>
+          </a:p>
+          <a:p xmlns:a="http://schemas.openxmlformats.org/drawingml/2006/main">
+            <a:r>
+              <a:t>- C:/Users/Franc/OneDrive/Documents/Francis/Peltata Project/Time-Series-Modeling-Gen5/runs/research_workbench/literature_grounded/lit_mr_02_1_panel_a_20260728/mr02_panel_inverse_diagnostics.csv</a:t>
+            </a:r>
+          </a:p>
+          <a:p xmlns:a="http://schemas.openxmlformats.org/drawingml/2006/main">
+            <a:r>
+              <a:t>- C:/Users/Franc/OneDrive/Documents/Francis/Peltata Project/Time-Series-Modeling-Gen5/runs/research_workbench/literature_grounded/lit_mr_02_1_panel_a_20260728/mr02_panel_pair_summary.csv</a:t>
+            </a:r>
+          </a:p>
+        </p:txBody>
+      </p:sp>
+      <p:sp>
+        <p:nvSpPr>
+          <p:cNvPr id="4" name="Slide Number Placeholder 3"/>
+          <p:cNvSpPr>
+            <a:spLocks xmlns:a="http://schemas.openxmlformats.org/drawingml/2006/main" noGrp="1"/>
+          </p:cNvSpPr>
+          <p:nvPr>
+            <p:ph type="sldNum" idx="5"/>
+          </p:nvPr>
+        </p:nvSpPr>
+        <p:spPr/>
+        <p:txBody>
+          <a:bodyPr xmlns:a="http://schemas.openxmlformats.org/drawingml/2006/main"/>
+          <a:lstStyle xmlns:a="http://schemas.openxmlformats.org/drawingml/2006/main"/>
+          <a:p xmlns:a="http://schemas.openxmlformats.org/drawingml/2006/main"/>
+        </p:txBody>
+      </p:sp>
+    </p:spTree>
+  </p:cSld>
+  <p:clrMapOvr>
+    <a:masterClrMapping xmlns:a="http://schemas.openxmlformats.org/drawingml/2006/main"/>
+  </p:clrMapOvr>
+</p:notes>
+</file>
+
+<file path=ppt/notesSlides/notesSlide17.xml><?xml version="1.0" encoding="utf-8"?>
+<p:notes xmlns:p="http://schemas.openxmlformats.org/presentationml/2006/main">
+  <p:cSld>
+    <p:spTree>
+      <p:nvGrpSpPr>
+        <p:cNvPr id="1" name=""/>
+        <p:cNvGrpSpPr/>
+        <p:nvPr/>
+      </p:nvGrpSpPr>
+      <p:grpSpPr>
+        <a:xfrm xmlns:a="http://schemas.openxmlformats.org/drawingml/2006/main"/>
+      </p:grpSpPr>
+      <p:sp>
+        <p:nvSpPr>
+          <p:cNvPr id="2" name="Slide Image Placeholder 1"/>
+          <p:cNvSpPr>
+            <a:spLocks xmlns:a="http://schemas.openxmlformats.org/drawingml/2006/main" noGrp="1"/>
+          </p:cNvSpPr>
+          <p:nvPr>
+            <p:ph type="sldImg" idx="0"/>
+          </p:nvPr>
+        </p:nvSpPr>
+        <p:spPr/>
+      </p:sp>
+      <p:sp>
+        <p:nvSpPr>
+          <p:cNvPr id="3" name="Notes Placeholder 2"/>
+          <p:cNvSpPr>
+            <a:spLocks xmlns:a="http://schemas.openxmlformats.org/drawingml/2006/main" noGrp="1"/>
+          </p:cNvSpPr>
+          <p:nvPr>
+            <p:ph type="body" idx="1"/>
+          </p:nvPr>
+        </p:nvSpPr>
+        <p:spPr/>
+        <p:txBody>
+          <a:bodyPr xmlns:a="http://schemas.openxmlformats.org/drawingml/2006/main"/>
+          <a:lstStyle xmlns:a="http://schemas.openxmlformats.org/drawingml/2006/main"/>
+          <a:p xmlns:a="http://schemas.openxmlformats.org/drawingml/2006/main">
+            <a:r>
+              <a:t>A multi-window study, log-price construction, fixed-beta cointegration residual, or new exit logic would be a substantive new variant, not a reactive tweak to LIT-MR-02.1.</a:t>
+            </a:r>
+          </a:p>
+          <a:p xmlns:a="http://schemas.openxmlformats.org/drawingml/2006/main">
+            <a:r>
+              <a:t/>
+            </a:r>
+          </a:p>
+          <a:p xmlns:a="http://schemas.openxmlformats.org/drawingml/2006/main">
+            <a:r>
+              <a:t>[Sources]</a:t>
+            </a:r>
+          </a:p>
+          <a:p xmlns:a="http://schemas.openxmlformats.org/drawingml/2006/main">
+            <a:r>
+              <a:t>- C:/Users/Franc/OneDrive/Documents/Francis/Peltata Project/Time-Series-Modeling-Gen5/docs/GEN5_LIT_MR_02_1_PANEL_A_CONTRACT.md</a:t>
+            </a:r>
+          </a:p>
+          <a:p xmlns:a="http://schemas.openxmlformats.org/drawingml/2006/main">
+            <a:r>
+              <a:t>- C:/Users/Franc/OneDrive/Documents/Francis/Peltata Project/Time-Series-Modeling-Gen5/runs/research_workbench/literature_grounded/lit_mr_02_1_panel_a_20260728/mr02_panel_report.md</a:t>
+            </a:r>
+          </a:p>
+          <a:p xmlns:a="http://schemas.openxmlformats.org/drawingml/2006/main">
+            <a:r>
+              <a:t>- C:/Users/Franc/OneDrive/Documents/Francis/Peltata Project/Time-Series-Modeling-Gen5/docs/GEN5_LITERATURE_GROUNDED_STRATEGY_RESEARCH_NOMENCLATURE.md</a:t>
             </a:r>
           </a:p>
         </p:txBody>
@@ -540,7 +1313,7 @@
           <a:lstStyle xmlns:a="http://schemas.openxmlformats.org/drawingml/2006/main"/>
           <a:p xmlns:a="http://schemas.openxmlformats.org/drawingml/2006/main">
             <a:r>
-              <a:t>The book compares price spread, log-price spread, and ratio separately. Example 3.2 says its first program section is identical to PriceSpread.m.</a:t>
+              <a:t>The book compares price spread, log-price spread, and ratio separately. Example 3.2 reuses the raw-price spread construction from Example 3.1.</a:t>
             </a:r>
           </a:p>
           <a:p xmlns:a="http://schemas.openxmlformats.org/drawingml/2006/main">
@@ -630,7 +1403,7 @@
           <a:lstStyle xmlns:a="http://schemas.openxmlformats.org/drawingml/2006/main"/>
           <a:p xmlns:a="http://schemas.openxmlformats.org/drawingml/2006/main">
             <a:r>
-              <a:t>The printed code contains a sign ambiguity between the stated spread and displayed position weights. The implementation uses the economically consistent interpretation: buy a low USO-minus-beta-GLD spread and short a high spread.</a:t>
+              <a:t>OLS chooses alpha and beta to minimize the sum of squared residuals in the rolling window. Beta expresses price units: if beta is 2, one unit of X hedges roughly two price units of Y under the local fitted relationship.</a:t>
             </a:r>
           </a:p>
           <a:p xmlns:a="http://schemas.openxmlformats.org/drawingml/2006/main">
@@ -645,17 +1418,12 @@
           </a:p>
           <a:p xmlns:a="http://schemas.openxmlformats.org/drawingml/2006/main">
             <a:r>
-              <a:t>- C:/Users/Franc/OneDrive/Documents/Francis/Trading Literature/Algorithmic Trading - Winning Strategies and Their Rationale 2013.pdf, printed pp. 67-72; PDF pp. 85-90</a:t>
-            </a:r>
-          </a:p>
-          <a:p xmlns:a="http://schemas.openxmlformats.org/drawingml/2006/main">
-            <a:r>
-              <a:t>- C:/Users/Franc/OneDrive/Documents/Francis/Peltata Project/Time-Series-Modeling-Gen5/docs/GEN5_LIT_MR_02_1_ADAPTIVE_SPREAD_BOLLINGER_POC_CONTRACT.md</a:t>
-            </a:r>
-          </a:p>
-          <a:p xmlns:a="http://schemas.openxmlformats.org/drawingml/2006/main">
-            <a:r>
-              <a:t>- C:/Users/Franc/OneDrive/Documents/Francis/Peltata Project/Time-Series-Modeling-Gen5/runs/research_workbench/literature_grounded/lit_mr_02_1_bollinger_20260728/visuals/mr02_signal_tape.png</a:t>
+              <a:t>- C:/Users/Franc/OneDrive/Documents/Francis/Trading Literature/Algorithmic Trading - Winning Strategies and Their Rationale 2013.pdf, printed pp. 66-72; PDF pp. 84-90</a:t>
+            </a:r>
+          </a:p>
+          <a:p xmlns:a="http://schemas.openxmlformats.org/drawingml/2006/main">
+            <a:r>
+              <a:t>- C:/Users/Franc/OneDrive/Documents/Francis/Peltata Project/Time-Series-Modeling-Gen5/docs/GEN5_LIT_MR_02_1_PANEL_A_CONTRACT.md</a:t>
             </a:r>
           </a:p>
         </p:txBody>
@@ -725,7 +1493,7 @@
           <a:lstStyle xmlns:a="http://schemas.openxmlformats.org/drawingml/2006/main"/>
           <a:p xmlns:a="http://schemas.openxmlformats.org/drawingml/2006/main">
             <a:r>
-              <a:t>ADF, half-life, variance ratio, and conditional forward return test different ideas. The rolling beta also makes this dynamic spread unlike a fixed cointegrating residual.</a:t>
+              <a:t>A z-score is unitless. It says how many rolling standard deviations the current spread is from its rolling mean. It does not by itself prove stationarity, cointegration, or profitable convergence.</a:t>
             </a:r>
           </a:p>
           <a:p xmlns:a="http://schemas.openxmlformats.org/drawingml/2006/main">
@@ -740,22 +1508,12 @@
           </a:p>
           <a:p xmlns:a="http://schemas.openxmlformats.org/drawingml/2006/main">
             <a:r>
-              <a:t>- C:/Users/Franc/OneDrive/Documents/Francis/Peltata Project/Time-Series-Modeling-Gen5/runs/research_workbench/literature_grounded/lit_mr_02_1_bollinger_20260728/mr02_train_statistical_diagnostics.csv</a:t>
-            </a:r>
-          </a:p>
-          <a:p xmlns:a="http://schemas.openxmlformats.org/drawingml/2006/main">
-            <a:r>
-              <a:t>- C:/Users/Franc/OneDrive/Documents/Francis/Peltata Project/Time-Series-Modeling-Gen5/runs/research_workbench/literature_grounded/lit_mr_02_1_bollinger_20260728/mr02_train_forward_convergence_summary.csv</a:t>
-            </a:r>
-          </a:p>
-          <a:p xmlns:a="http://schemas.openxmlformats.org/drawingml/2006/main">
-            <a:r>
-              <a:t>- C:/Users/Franc/OneDrive/Documents/Francis/Peltata Project/Time-Series-Modeling-Gen5/runs/research_workbench/literature_grounded/lit_mr_02_1_bollinger_20260728/visuals/mr02_statistical_diagnostics.png</a:t>
-            </a:r>
-          </a:p>
-          <a:p xmlns:a="http://schemas.openxmlformats.org/drawingml/2006/main">
-            <a:r>
-              <a:t>- C:/Users/Franc/OneDrive/Documents/Francis/Trading Literature/Algorithmic Trading - Winning Strategies and Their Rationale 2013.pdf, printed pp. 42-47 and 66-72</a:t>
+              <a:t>- C:/Users/Franc/OneDrive/Documents/Francis/Trading Literature/Algorithmic Trading - Winning Strategies and Their Rationale 2013.pdf, printed pp. 66-72; PDF pp. 84-90</a:t>
+            </a:r>
+          </a:p>
+          <a:p xmlns:a="http://schemas.openxmlformats.org/drawingml/2006/main">
+            <a:r>
+              <a:t>- C:/Users/Franc/OneDrive/Documents/Francis/Peltata Project/Time-Series-Modeling-Gen5/docs/GEN5_LIT_MR_02_1_PANEL_A_CONTRACT.md</a:t>
             </a:r>
           </a:p>
         </p:txBody>
@@ -825,7 +1583,7 @@
           <a:lstStyle xmlns:a="http://schemas.openxmlformats.org/drawingml/2006/main"/>
           <a:p xmlns:a="http://schemas.openxmlformats.org/drawingml/2006/main">
             <a:r>
-              <a:t>Completed trades include entries, daily adaptive-hedge turnover, and exits. Bar returns are next-open to next-open and use the prior close's frozen target.</a:t>
+              <a:t>The denominator gross-normalizes the two legs. The numerator preserves the beta-scaled price-unit hedge. Because beta is recomputed daily, weights can change even while the directional position remains open.</a:t>
             </a:r>
           </a:p>
           <a:p xmlns:a="http://schemas.openxmlformats.org/drawingml/2006/main">
@@ -840,22 +1598,17 @@
           </a:p>
           <a:p xmlns:a="http://schemas.openxmlformats.org/drawingml/2006/main">
             <a:r>
-              <a:t>- C:/Users/Franc/OneDrive/Documents/Francis/Peltata Project/Time-Series-Modeling-Gen5/runs/research_workbench/literature_grounded/lit_mr_02_1_bollinger_20260728/mr02_train_trades.csv</a:t>
-            </a:r>
-          </a:p>
-          <a:p xmlns:a="http://schemas.openxmlformats.org/drawingml/2006/main">
-            <a:r>
-              <a:t>- C:/Users/Franc/OneDrive/Documents/Francis/Peltata Project/Time-Series-Modeling-Gen5/runs/research_workbench/literature_grounded/lit_mr_02_1_bollinger_20260728/mr02_train_bar_replay.csv</a:t>
-            </a:r>
-          </a:p>
-          <a:p xmlns:a="http://schemas.openxmlformats.org/drawingml/2006/main">
-            <a:r>
-              <a:t>- C:/Users/Franc/OneDrive/Documents/Francis/Peltata Project/Time-Series-Modeling-Gen5/runs/research_workbench/literature_grounded/lit_mr_02_1_bollinger_20260728/mr02_train_year_summary.csv</a:t>
-            </a:r>
-          </a:p>
-          <a:p xmlns:a="http://schemas.openxmlformats.org/drawingml/2006/main">
-            <a:r>
-              <a:t>- C:/Users/Franc/OneDrive/Documents/Francis/Peltata Project/Time-Series-Modeling-Gen5/runs/research_workbench/literature_grounded/lit_mr_02_1_bollinger_20260728/visuals/mr02_trade_and_year_summary.png</a:t>
+              <a:t>- C:/Users/Franc/OneDrive/Documents/Francis/Peltata Project/Time-Series-Modeling-Gen5/docs/GEN5_LIT_MR_02_1_ADAPTIVE_SPREAD_BOLLINGER_POC_CONTRACT.md</a:t>
+            </a:r>
+          </a:p>
+          <a:p xmlns:a="http://schemas.openxmlformats.org/drawingml/2006/main">
+            <a:r>
+              <a:t>- C:/Users/Franc/OneDrive/Documents/Francis/Peltata Project/Time-Series-Modeling-Gen5/docs/GEN5_LIT_MR_02_1_PANEL_A_CONTRACT.md</a:t>
+            </a:r>
+          </a:p>
+          <a:p xmlns:a="http://schemas.openxmlformats.org/drawingml/2006/main">
+            <a:r>
+              <a:t>- C:/Users/Franc/OneDrive/Documents/Francis/Peltata Project/Time-Series-Modeling-Gen5/runs/research_workbench/literature_grounded/lit_mr_02_1_panel_a_20260728/visuals/mr02_weight_mechanics.png</a:t>
             </a:r>
           </a:p>
         </p:txBody>
@@ -925,7 +1678,7 @@
           <a:lstStyle xmlns:a="http://schemas.openxmlformats.org/drawingml/2006/main"/>
           <a:p xmlns:a="http://schemas.openxmlformats.org/drawingml/2006/main">
             <a:r>
-              <a:t>The random-sign control breaks only the mapping from the Bollinger signal sign to the pair direction. It preserves the realized opportunities and costs.</a:t>
+              <a:t>For beta below zero, S = Y - beta X becomes Y + |beta|X. That can be statistically meaningful but it no longer describes the same opposite-leg relative-value strategy. A tradable inverse-pair design would require a new frozen variant.</a:t>
             </a:r>
           </a:p>
           <a:p xmlns:a="http://schemas.openxmlformats.org/drawingml/2006/main">
@@ -940,22 +1693,12 @@
           </a:p>
           <a:p xmlns:a="http://schemas.openxmlformats.org/drawingml/2006/main">
             <a:r>
-              <a:t>- C:/Users/Franc/OneDrive/Documents/Francis/Peltata Project/Time-Series-Modeling-Gen5/runs/research_workbench/literature_grounded/lit_mr_02_1_bollinger_20260728/mr02_train_trade_bootstrap_summary.csv</a:t>
-            </a:r>
-          </a:p>
-          <a:p xmlns:a="http://schemas.openxmlformats.org/drawingml/2006/main">
-            <a:r>
-              <a:t>- C:/Users/Franc/OneDrive/Documents/Francis/Peltata Project/Time-Series-Modeling-Gen5/runs/research_workbench/literature_grounded/lit_mr_02_1_bollinger_20260728/mr02_train_trade_bootstrap_draws.csv</a:t>
-            </a:r>
-          </a:p>
-          <a:p xmlns:a="http://schemas.openxmlformats.org/drawingml/2006/main">
-            <a:r>
-              <a:t>- C:/Users/Franc/OneDrive/Documents/Francis/Peltata Project/Time-Series-Modeling-Gen5/runs/research_workbench/literature_grounded/lit_mr_02_1_bollinger_20260728/mr02_train_random_sign_distribution.csv</a:t>
-            </a:r>
-          </a:p>
-          <a:p xmlns:a="http://schemas.openxmlformats.org/drawingml/2006/main">
-            <a:r>
-              <a:t>- C:/Users/Franc/OneDrive/Documents/Francis/Peltata Project/Time-Series-Modeling-Gen5/runs/research_workbench/literature_grounded/lit_mr_02_1_bollinger_20260728/visuals/mr02_resampling.png</a:t>
+              <a:t>- C:/Users/Franc/OneDrive/Documents/Francis/Peltata Project/Time-Series-Modeling-Gen5/docs/GEN5_LIT_MR_02_1_PANEL_A_CONTRACT.md</a:t>
+            </a:r>
+          </a:p>
+          <a:p xmlns:a="http://schemas.openxmlformats.org/drawingml/2006/main">
+            <a:r>
+              <a:t>- C:/Users/Franc/OneDrive/Documents/Francis/Peltata Project/Time-Series-Modeling-Gen5/runs/research_workbench/literature_grounded/lit_mr_02_1_panel_a_20260728/mr02_panel_inverse_diagnostics.csv</a:t>
             </a:r>
           </a:p>
         </p:txBody>
@@ -1025,7 +1768,7 @@
           <a:lstStyle xmlns:a="http://schemas.openxmlformats.org/drawingml/2006/main"/>
           <a:p xmlns:a="http://schemas.openxmlformats.org/drawingml/2006/main">
             <a:r>
-              <a:t>Green is entry and red is exit. The large asymmetry is important: crossing the rolling mean is a signal-state event, not an economic P&amp;L guarantee because beta and the mean evolve.</a:t>
+              <a:t>Canonical USO-GLD mechanics remain unchanged: raw adjusted prices, 20 sessions, +/-1 entry, zero exit, next-open execution, daily adaptive rehedging, and explicit turnover costs.</a:t>
             </a:r>
           </a:p>
           <a:p xmlns:a="http://schemas.openxmlformats.org/drawingml/2006/main">
@@ -1040,17 +1783,17 @@
           </a:p>
           <a:p xmlns:a="http://schemas.openxmlformats.org/drawingml/2006/main">
             <a:r>
-              <a:t>- C:/Users/Franc/OneDrive/Documents/Francis/Peltata Project/Time-Series-Modeling-Gen5/runs/research_workbench/literature_grounded/lit_mr_02_1_bollinger_20260728/mr02_train_trades.csv</a:t>
-            </a:r>
-          </a:p>
-          <a:p xmlns:a="http://schemas.openxmlformats.org/drawingml/2006/main">
-            <a:r>
-              <a:t>- C:/Users/Franc/OneDrive/Documents/Francis/Peltata Project/Time-Series-Modeling-Gen5/runs/research_workbench/literature_grounded/lit_mr_02_1_bollinger_20260728/mr02_train_indicators.csv</a:t>
-            </a:r>
-          </a:p>
-          <a:p xmlns:a="http://schemas.openxmlformats.org/drawingml/2006/main">
-            <a:r>
-              <a:t>- C:/Users/Franc/OneDrive/Documents/Francis/Peltata Project/Time-Series-Modeling-Gen5/runs/research_workbench/literature_grounded/lit_mr_02_1_bollinger_20260728/visuals/mr02_representative_trades.png</a:t>
+              <a:t>- C:/Users/Franc/OneDrive/Documents/Francis/Trading Literature/Algorithmic Trading - Winning Strategies and Their Rationale 2013.pdf, printed pp. 67-72; PDF pp. 85-90</a:t>
+            </a:r>
+          </a:p>
+          <a:p xmlns:a="http://schemas.openxmlformats.org/drawingml/2006/main">
+            <a:r>
+              <a:t>- C:/Users/Franc/OneDrive/Documents/Francis/Peltata Project/Time-Series-Modeling-Gen5/docs/GEN5_LIT_MR_02_1_ADAPTIVE_SPREAD_BOLLINGER_POC_CONTRACT.md</a:t>
+            </a:r>
+          </a:p>
+          <a:p xmlns:a="http://schemas.openxmlformats.org/drawingml/2006/main">
+            <a:r>
+              <a:t>- C:/Users/Franc/OneDrive/Documents/Francis/Peltata Project/Time-Series-Modeling-Gen5/runs/research_workbench/literature_grounded/lit_mr_02_1_bollinger_20260728/visuals/mr02_signal_tape.png</a:t>
             </a:r>
           </a:p>
         </p:txBody>
@@ -1120,7 +1863,7 @@
           <a:lstStyle xmlns:a="http://schemas.openxmlformats.org/drawingml/2006/main"/>
           <a:p xmlns:a="http://schemas.openxmlformats.org/drawingml/2006/main">
             <a:r>
-              <a:t>Only TRAIN was joined to state and returns. Development and confirmation metrics are structurally NOT_RUN.</a:t>
+              <a:t>ADF, half-life, variance ratio, and conditional forward return test different ideas. A rolling-beta spread is not the same object as a fixed cointegrating residual.</a:t>
             </a:r>
           </a:p>
           <a:p xmlns:a="http://schemas.openxmlformats.org/drawingml/2006/main">
@@ -1135,22 +1878,22 @@
           </a:p>
           <a:p xmlns:a="http://schemas.openxmlformats.org/drawingml/2006/main">
             <a:r>
-              <a:t>- C:/Users/Franc/OneDrive/Documents/Francis/Peltata Project/Time-Series-Modeling-Gen5/runs/research_workbench/literature_grounded/lit_mr_02_1_bollinger_20260728/mr02_gate_summary.csv</a:t>
-            </a:r>
-          </a:p>
-          <a:p xmlns:a="http://schemas.openxmlformats.org/drawingml/2006/main">
-            <a:r>
-              <a:t>- C:/Users/Franc/OneDrive/Documents/Francis/Peltata Project/Time-Series-Modeling-Gen5/runs/research_workbench/literature_grounded/lit_mr_02_1_bollinger_20260728/mr02_integrity_audit.csv</a:t>
-            </a:r>
-          </a:p>
-          <a:p xmlns:a="http://schemas.openxmlformats.org/drawingml/2006/main">
-            <a:r>
-              <a:t>- C:/Users/Franc/OneDrive/Documents/Francis/Peltata Project/Time-Series-Modeling-Gen5/runs/research_workbench/literature_grounded/lit_mr_02_1_bollinger_20260728/mr02_run_spec.csv</a:t>
-            </a:r>
-          </a:p>
-          <a:p xmlns:a="http://schemas.openxmlformats.org/drawingml/2006/main">
-            <a:r>
-              <a:t>- C:/Users/Franc/OneDrive/Documents/Francis/Peltata Project/Time-Series-Modeling-Gen5/runs/research_workbench/literature_grounded/lit_mr_02_1_bollinger_20260728/visuals/mr02_gate_summary.png</a:t>
+              <a:t>- C:/Users/Franc/OneDrive/Documents/Francis/Peltata Project/Time-Series-Modeling-Gen5/runs/research_workbench/literature_grounded/lit_mr_02_1_bollinger_20260728/mr02_train_statistical_diagnostics.csv</a:t>
+            </a:r>
+          </a:p>
+          <a:p xmlns:a="http://schemas.openxmlformats.org/drawingml/2006/main">
+            <a:r>
+              <a:t>- C:/Users/Franc/OneDrive/Documents/Francis/Peltata Project/Time-Series-Modeling-Gen5/runs/research_workbench/literature_grounded/lit_mr_02_1_bollinger_20260728/mr02_train_forward_convergence_summary.csv</a:t>
+            </a:r>
+          </a:p>
+          <a:p xmlns:a="http://schemas.openxmlformats.org/drawingml/2006/main">
+            <a:r>
+              <a:t>- C:/Users/Franc/OneDrive/Documents/Francis/Peltata Project/Time-Series-Modeling-Gen5/runs/research_workbench/literature_grounded/lit_mr_02_1_bollinger_20260728/visuals/mr02_statistical_diagnostics.png</a:t>
+            </a:r>
+          </a:p>
+          <a:p xmlns:a="http://schemas.openxmlformats.org/drawingml/2006/main">
+            <a:r>
+              <a:t>- C:/Users/Franc/OneDrive/Documents/Francis/Trading Literature/Algorithmic Trading - Winning Strategies and Their Rationale 2013.pdf, printed pp. 42-47 and 66-72</a:t>
             </a:r>
           </a:p>
         </p:txBody>
@@ -1220,7 +1963,7 @@
           <a:lstStyle xmlns:a="http://schemas.openxmlformats.org/drawingml/2006/main"/>
           <a:p xmlns:a="http://schemas.openxmlformats.org/drawingml/2006/main">
             <a:r>
-              <a:t>The next identifier depends on the operator's proposed mechanism. Do not alter GLD-USO, raw price, 20 sessions, +/-1 entry, zero exit, or costs on this inspected TRAIN sample.</a:t>
+              <a:t>Completed trades include entries, adaptive-hedge turnover, and exits. Bar returns are next-open to next-open and use the prior close's frozen target.</a:t>
             </a:r>
           </a:p>
           <a:p xmlns:a="http://schemas.openxmlformats.org/drawingml/2006/main">
@@ -1235,17 +1978,17 @@
           </a:p>
           <a:p xmlns:a="http://schemas.openxmlformats.org/drawingml/2006/main">
             <a:r>
-              <a:t>- C:/Users/Franc/OneDrive/Documents/Francis/Peltata Project/Time-Series-Modeling-Gen5/docs/GEN5_LIT_MR_02_1_ADAPTIVE_SPREAD_BOLLINGER_POC_CONTRACT.md</a:t>
-            </a:r>
-          </a:p>
-          <a:p xmlns:a="http://schemas.openxmlformats.org/drawingml/2006/main">
-            <a:r>
-              <a:t>- C:/Users/Franc/OneDrive/Documents/Francis/Peltata Project/Time-Series-Modeling-Gen5/runs/research_workbench/literature_grounded/lit_mr_02_1_bollinger_20260728/mr02_report.md</a:t>
-            </a:r>
-          </a:p>
-          <a:p xmlns:a="http://schemas.openxmlformats.org/drawingml/2006/main">
-            <a:r>
-              <a:t>- C:/Users/Franc/OneDrive/Documents/Francis/Peltata Project/Time-Series-Modeling-Gen5/docs/GEN5_LITERATURE_GROUNDED_STRATEGY_RESEARCH_NOMENCLATURE.md</a:t>
+              <a:t>- C:/Users/Franc/OneDrive/Documents/Francis/Peltata Project/Time-Series-Modeling-Gen5/runs/research_workbench/literature_grounded/lit_mr_02_1_bollinger_20260728/mr02_train_trades.csv</a:t>
+            </a:r>
+          </a:p>
+          <a:p xmlns:a="http://schemas.openxmlformats.org/drawingml/2006/main">
+            <a:r>
+              <a:t>- C:/Users/Franc/OneDrive/Documents/Francis/Peltata Project/Time-Series-Modeling-Gen5/runs/research_workbench/literature_grounded/lit_mr_02_1_bollinger_20260728/mr02_train_bar_replay.csv</a:t>
+            </a:r>
+          </a:p>
+          <a:p xmlns:a="http://schemas.openxmlformats.org/drawingml/2006/main">
+            <a:r>
+              <a:t>- C:/Users/Franc/OneDrive/Documents/Francis/Peltata Project/Time-Series-Modeling-Gen5/runs/research_workbench/literature_grounded/lit_mr_02_1_bollinger_20260728/mr02_train_year_summary.csv</a:t>
             </a:r>
           </a:p>
         </p:txBody>
@@ -1313,7 +2056,7 @@
   </p:cSld>
   <p:clrMap bg1="lt1" tx1="dk1" bg2="lt2" tx2="dk2" accent1="accent1" accent2="accent2" accent3="accent3" accent4="accent4" accent5="accent5" accent6="accent6" hlink="hlink" folHlink="folHlink"/>
   <p:sldLayoutIdLst>
-    <p:sldLayoutId xmlns:r="http://schemas.openxmlformats.org/officeDocument/2006/relationships" id="2147483649" r:id="Rebb75700030a4de2"/>
+    <p:sldLayoutId xmlns:r="http://schemas.openxmlformats.org/officeDocument/2006/relationships" id="2147483649" r:id="R23b317199c9a49fc"/>
   </p:sldLayoutIdLst>
   <p:txStyles>
     <p:titleStyle>
@@ -1882,6 +2625,7 @@
           <a:lstStyle xmlns:a="http://schemas.openxmlformats.org/drawingml/2006/main"/>
           <a:p xmlns:a="http://schemas.openxmlformats.org/drawingml/2006/main">
             <a:pPr algn="l">
+              <a:buNone/>
               <a:defRPr sz="5700">
                 <a:solidFill>
                   <a:srgbClr val="000000"/>
@@ -1893,7 +2637,7 @@
             </a:pPr>
             <a:r>
               <a:t>LIT-MR-02.1
-stops at TRAIN</a:t>
+from example to panel</a:t>
             </a:r>
           </a:p>
         </p:txBody>
@@ -1928,6 +2672,7 @@
           <a:lstStyle xmlns:a="http://schemas.openxmlformats.org/drawingml/2006/main"/>
           <a:p xmlns:a="http://schemas.openxmlformats.org/drawingml/2006/main">
             <a:pPr algn="l">
+              <a:buNone/>
               <a:defRPr sz="2250">
                 <a:solidFill>
                   <a:srgbClr val="000000"/>
@@ -1938,7 +2683,7 @@
               </a:defRPr>
             </a:pPr>
             <a:r>
-              <a:t>Chan's adaptive GLD-USO Bollinger spread looked mean reverting statistically - but not economically.</a:t>
+              <a:t>USO-GLD remains the canonical literature example. A predeclared 12-pair panel tests whether the same hypothesis template generalizes.</a:t>
             </a:r>
           </a:p>
         </p:txBody>
@@ -1973,6 +2718,7 @@
           <a:lstStyle xmlns:a="http://schemas.openxmlformats.org/drawingml/2006/main"/>
           <a:p xmlns:a="http://schemas.openxmlformats.org/drawingml/2006/main">
             <a:pPr algn="l">
+              <a:buNone/>
               <a:defRPr sz="2250">
                 <a:solidFill>
                   <a:srgbClr val="000000"/>
@@ -1992,6 +2738,3132 @@
     <p:extLst>
       <p:ext uri="{BB962C8B-B14F-4D97-AF65-F5344CB8AC3E}">
         <p14:creationId xmlns:p14="http://schemas.microsoft.com/office/powerpoint/2010/main" val="2092893396"/>
+      </p:ext>
+    </p:extLst>
+  </p:cSld>
+</p:sld>
+</file>
+
+<file path=ppt/slides/slide10.xml><?xml version="1.0" encoding="utf-8"?>
+<p:sld xmlns:p="http://schemas.openxmlformats.org/presentationml/2006/main">
+  <p:cSld>
+    <p:spTree>
+      <p:nvGrpSpPr>
+        <p:cNvPr id="1" name=""/>
+        <p:cNvGrpSpPr/>
+        <p:nvPr/>
+      </p:nvGrpSpPr>
+      <p:grpSpPr>
+        <a:xfrm xmlns:a="http://schemas.openxmlformats.org/drawingml/2006/main"/>
+      </p:grpSpPr>
+      <p:sp>
+        <p:nvSpPr>
+          <p:cNvPr id="11" name="footer">
+            <a:extLst xmlns:a="http://schemas.openxmlformats.org/drawingml/2006/main">
+              <a:ext uri="{FF2B5EF4-FFF2-40B4-BE49-F238E27FC236}">
+                <a16:creationId xmlns:a16="http://schemas.microsoft.com/office/drawing/2014/main" id="{A36482E3-0836-42EE-A424-2E869BA90946}"/>
+              </a:ext>
+            </a:extLst>
+          </p:cNvPr>
+          <p:cNvSpPr>
+            <a:spLocks xmlns:a="http://schemas.openxmlformats.org/drawingml/2006/main" noGrp="1"/>
+          </p:cNvSpPr>
+          <p:nvPr/>
+        </p:nvSpPr>
+        <p:spPr>
+          <a:xfrm xmlns:a="http://schemas.openxmlformats.org/drawingml/2006/main">
+            <a:off x="11279315" y="6279261"/>
+            <a:ext cx="518922" cy="241268"/>
+          </a:xfrm>
+          <a:prstGeom xmlns:a="http://schemas.openxmlformats.org/drawingml/2006/main" prst="rect">
+            <a:avLst/>
+          </a:prstGeom>
+        </p:spPr>
+        <p:txBody>
+          <a:bodyPr xmlns:a="http://schemas.openxmlformats.org/drawingml/2006/main" lIns="0" tIns="0" rIns="0" bIns="0" anchor="b"/>
+          <a:lstStyle xmlns:a="http://schemas.openxmlformats.org/drawingml/2006/main"/>
+          <a:p xmlns:a="http://schemas.openxmlformats.org/drawingml/2006/main">
+            <a:pPr algn="r">
+              <a:buNone/>
+              <a:defRPr sz="1000">
+                <a:solidFill>
+                  <a:srgbClr val="000000"/>
+                </a:solidFill>
+                <a:latin typeface="Helvetica Neue"/>
+                <a:ea typeface="Helvetica Neue"/>
+                <a:cs typeface="Helvetica Neue"/>
+              </a:defRPr>
+            </a:pPr>
+            <a:r>
+              <a:t>10</a:t>
+            </a:r>
+          </a:p>
+        </p:txBody>
+      </p:sp>
+      <p:sp>
+        <p:nvSpPr>
+          <p:cNvPr id="2" name="title">
+            <a:extLst xmlns:a="http://schemas.openxmlformats.org/drawingml/2006/main">
+              <a:ext uri="{FF2B5EF4-FFF2-40B4-BE49-F238E27FC236}">
+                <a16:creationId xmlns:a16="http://schemas.microsoft.com/office/drawing/2014/main" id="{1C7B3E2F-B15F-4CE7-9E93-D02FFAE5F60A}"/>
+              </a:ext>
+            </a:extLst>
+          </p:cNvPr>
+          <p:cNvSpPr>
+            <a:spLocks xmlns:a="http://schemas.openxmlformats.org/drawingml/2006/main" noGrp="1"/>
+          </p:cNvSpPr>
+          <p:nvPr/>
+        </p:nvSpPr>
+        <p:spPr>
+          <a:xfrm xmlns:a="http://schemas.openxmlformats.org/drawingml/2006/main">
+            <a:off x="393668" y="344043"/>
+            <a:ext cx="11404568" cy="1047464"/>
+          </a:xfrm>
+          <a:prstGeom xmlns:a="http://schemas.openxmlformats.org/drawingml/2006/main" prst="rect">
+            <a:avLst/>
+          </a:prstGeom>
+        </p:spPr>
+        <p:txBody>
+          <a:bodyPr xmlns:a="http://schemas.openxmlformats.org/drawingml/2006/main" lIns="0" tIns="0" rIns="0" bIns="0" anchor="t">
+            <a:normAutofit fontScale="100000"/>
+          </a:bodyPr>
+          <a:lstStyle xmlns:a="http://schemas.openxmlformats.org/drawingml/2006/main"/>
+          <a:p xmlns:a="http://schemas.openxmlformats.org/drawingml/2006/main">
+            <a:pPr algn="l">
+              <a:buNone/>
+              <a:defRPr sz="2900">
+                <a:solidFill>
+                  <a:srgbClr val="000000"/>
+                </a:solidFill>
+                <a:latin typeface="Helvetica Neue"/>
+                <a:ea typeface="Helvetica Neue"/>
+                <a:cs typeface="Helvetica Neue"/>
+              </a:defRPr>
+            </a:pPr>
+            <a:r>
+              <a:t>Uncertainty and falsification offered no rescue</a:t>
+            </a:r>
+          </a:p>
+        </p:txBody>
+      </p:sp>
+      <p:sp>
+        <p:nvSpPr>
+          <p:cNvPr id="3" name="left-stat-card">
+            <a:extLst xmlns:a="http://schemas.openxmlformats.org/drawingml/2006/main">
+              <a:ext uri="{FF2B5EF4-FFF2-40B4-BE49-F238E27FC236}">
+                <a16:creationId xmlns:a16="http://schemas.microsoft.com/office/drawing/2014/main" id="{0537132A-D0A9-4B26-9624-49D1E8829F72}"/>
+              </a:ext>
+            </a:extLst>
+          </p:cNvPr>
+          <p:cNvSpPr>
+            <a:spLocks xmlns:a="http://schemas.openxmlformats.org/drawingml/2006/main" noGrp="1"/>
+          </p:cNvSpPr>
+          <p:nvPr/>
+        </p:nvSpPr>
+        <p:spPr>
+          <a:xfrm xmlns:a="http://schemas.openxmlformats.org/drawingml/2006/main">
+            <a:off x="6272022" y="3360039"/>
+            <a:ext cx="2581942" cy="2656523"/>
+          </a:xfrm>
+          <a:prstGeom xmlns:a="http://schemas.openxmlformats.org/drawingml/2006/main" prst="roundRect">
+            <a:avLst>
+              <a:gd name="adj" fmla="val 2951"/>
+            </a:avLst>
+          </a:prstGeom>
+          <a:solidFill xmlns:a="http://schemas.openxmlformats.org/drawingml/2006/main">
+            <a:srgbClr val="F2F2F2"/>
+          </a:solidFill>
+        </p:spPr>
+      </p:sp>
+      <p:sp>
+        <p:nvSpPr>
+          <p:cNvPr id="4" name="right-stat-card">
+            <a:extLst xmlns:a="http://schemas.openxmlformats.org/drawingml/2006/main">
+              <a:ext uri="{FF2B5EF4-FFF2-40B4-BE49-F238E27FC236}">
+                <a16:creationId xmlns:a16="http://schemas.microsoft.com/office/drawing/2014/main" id="{9AF5A6DC-5240-4747-8A2C-59E91119B52D}"/>
+              </a:ext>
+            </a:extLst>
+          </p:cNvPr>
+          <p:cNvSpPr>
+            <a:spLocks xmlns:a="http://schemas.openxmlformats.org/drawingml/2006/main" noGrp="1"/>
+          </p:cNvSpPr>
+          <p:nvPr/>
+        </p:nvSpPr>
+        <p:spPr>
+          <a:xfrm xmlns:a="http://schemas.openxmlformats.org/drawingml/2006/main">
+            <a:off x="9224201" y="3360039"/>
+            <a:ext cx="2581942" cy="2656523"/>
+          </a:xfrm>
+          <a:prstGeom xmlns:a="http://schemas.openxmlformats.org/drawingml/2006/main" prst="roundRect">
+            <a:avLst>
+              <a:gd name="adj" fmla="val 2951"/>
+            </a:avLst>
+          </a:prstGeom>
+          <a:solidFill xmlns:a="http://schemas.openxmlformats.org/drawingml/2006/main">
+            <a:srgbClr val="F2F2F2"/>
+          </a:solidFill>
+        </p:spPr>
+      </p:sp>
+      <p:sp>
+        <p:nvSpPr>
+          <p:cNvPr id="5" name="summary">
+            <a:extLst xmlns:a="http://schemas.openxmlformats.org/drawingml/2006/main">
+              <a:ext uri="{FF2B5EF4-FFF2-40B4-BE49-F238E27FC236}">
+                <a16:creationId xmlns:a16="http://schemas.microsoft.com/office/drawing/2014/main" id="{87467A1C-2B62-4E3A-A37F-25E47B9BE9CD}"/>
+              </a:ext>
+            </a:extLst>
+          </p:cNvPr>
+          <p:cNvSpPr>
+            <a:spLocks xmlns:a="http://schemas.openxmlformats.org/drawingml/2006/main" noGrp="1"/>
+          </p:cNvSpPr>
+          <p:nvPr/>
+        </p:nvSpPr>
+        <p:spPr>
+          <a:xfrm xmlns:a="http://schemas.openxmlformats.org/drawingml/2006/main">
+            <a:off x="6261068" y="1714500"/>
+            <a:ext cx="5539835" cy="1381125"/>
+          </a:xfrm>
+          <a:prstGeom xmlns:a="http://schemas.openxmlformats.org/drawingml/2006/main" prst="rect">
+            <a:avLst/>
+          </a:prstGeom>
+        </p:spPr>
+        <p:txBody>
+          <a:bodyPr xmlns:a="http://schemas.openxmlformats.org/drawingml/2006/main" lIns="0" tIns="0" rIns="0" bIns="0" anchor="t">
+            <a:normAutofit fontScale="100000"/>
+          </a:bodyPr>
+          <a:lstStyle xmlns:a="http://schemas.openxmlformats.org/drawingml/2006/main"/>
+          <a:p xmlns:a="http://schemas.openxmlformats.org/drawingml/2006/main">
+            <a:pPr algn="l">
+              <a:buNone/>
+              <a:defRPr sz="1800">
+                <a:solidFill>
+                  <a:srgbClr val="000000"/>
+                </a:solidFill>
+                <a:latin typeface="Helvetica Neue"/>
+                <a:ea typeface="Helvetica Neue"/>
+                <a:cs typeface="Helvetica Neue"/>
+              </a:defRPr>
+            </a:pPr>
+            <a:r>
+              <a:t>The mean sat inside a very wide interval and below the p90 of random trade directions with the same timing, pair path, holding periods, and primary costs.</a:t>
+            </a:r>
+          </a:p>
+        </p:txBody>
+      </p:sp>
+      <p:sp>
+        <p:nvSpPr>
+          <p:cNvPr id="6" name="left-stat">
+            <a:extLst xmlns:a="http://schemas.openxmlformats.org/drawingml/2006/main">
+              <a:ext uri="{FF2B5EF4-FFF2-40B4-BE49-F238E27FC236}">
+                <a16:creationId xmlns:a16="http://schemas.microsoft.com/office/drawing/2014/main" id="{FE80A7F4-6D99-4C52-B848-EAE130561598}"/>
+              </a:ext>
+            </a:extLst>
+          </p:cNvPr>
+          <p:cNvSpPr>
+            <a:spLocks xmlns:a="http://schemas.openxmlformats.org/drawingml/2006/main" noGrp="1"/>
+          </p:cNvSpPr>
+          <p:nvPr/>
+        </p:nvSpPr>
+        <p:spPr>
+          <a:xfrm xmlns:a="http://schemas.openxmlformats.org/drawingml/2006/main">
+            <a:off x="6509385" y="3579971"/>
+            <a:ext cx="2133314" cy="1155859"/>
+          </a:xfrm>
+          <a:prstGeom xmlns:a="http://schemas.openxmlformats.org/drawingml/2006/main" prst="rect">
+            <a:avLst/>
+          </a:prstGeom>
+        </p:spPr>
+        <p:txBody>
+          <a:bodyPr xmlns:a="http://schemas.openxmlformats.org/drawingml/2006/main" lIns="0" tIns="0" rIns="0" bIns="0" anchor="b">
+            <a:normAutofit fontScale="100000"/>
+          </a:bodyPr>
+          <a:lstStyle xmlns:a="http://schemas.openxmlformats.org/drawingml/2006/main"/>
+          <a:p xmlns:a="http://schemas.openxmlformats.org/drawingml/2006/main">
+            <a:pPr algn="l">
+              <a:buNone/>
+              <a:defRPr sz="2700">
+                <a:solidFill>
+                  <a:srgbClr val="64748B"/>
+                </a:solidFill>
+                <a:latin typeface="Helvetica Neue"/>
+                <a:ea typeface="Helvetica Neue"/>
+                <a:cs typeface="Helvetica Neue"/>
+              </a:defRPr>
+            </a:pPr>
+            <a:r>
+              <a:t>[-121, +83]</a:t>
+            </a:r>
+          </a:p>
+        </p:txBody>
+      </p:sp>
+      <p:sp>
+        <p:nvSpPr>
+          <p:cNvPr id="7" name="left-stat-label">
+            <a:extLst xmlns:a="http://schemas.openxmlformats.org/drawingml/2006/main">
+              <a:ext uri="{FF2B5EF4-FFF2-40B4-BE49-F238E27FC236}">
+                <a16:creationId xmlns:a16="http://schemas.microsoft.com/office/drawing/2014/main" id="{E40BF187-37D5-4CDB-9030-4E2CB386A533}"/>
+              </a:ext>
+            </a:extLst>
+          </p:cNvPr>
+          <p:cNvSpPr>
+            <a:spLocks xmlns:a="http://schemas.openxmlformats.org/drawingml/2006/main" noGrp="1"/>
+          </p:cNvSpPr>
+          <p:nvPr/>
+        </p:nvSpPr>
+        <p:spPr>
+          <a:xfrm xmlns:a="http://schemas.openxmlformats.org/drawingml/2006/main">
+            <a:off x="6575965" y="4953000"/>
+            <a:ext cx="2066735" cy="762000"/>
+          </a:xfrm>
+          <a:prstGeom xmlns:a="http://schemas.openxmlformats.org/drawingml/2006/main" prst="rect">
+            <a:avLst/>
+          </a:prstGeom>
+        </p:spPr>
+        <p:txBody>
+          <a:bodyPr xmlns:a="http://schemas.openxmlformats.org/drawingml/2006/main" lIns="0" tIns="0" rIns="0" bIns="0">
+            <a:normAutofit fontScale="100000"/>
+          </a:bodyPr>
+          <a:lstStyle xmlns:a="http://schemas.openxmlformats.org/drawingml/2006/main"/>
+          <a:p xmlns:a="http://schemas.openxmlformats.org/drawingml/2006/main">
+            <a:pPr algn="l">
+              <a:buNone/>
+              <a:defRPr sz="1500">
+                <a:solidFill>
+                  <a:srgbClr val="000000"/>
+                </a:solidFill>
+                <a:latin typeface="Helvetica Neue"/>
+                <a:ea typeface="Helvetica Neue"/>
+                <a:cs typeface="Helvetica Neue"/>
+              </a:defRPr>
+            </a:pPr>
+            <a:r>
+              <a:t>95% interval
+bp per trade</a:t>
+            </a:r>
+          </a:p>
+        </p:txBody>
+      </p:sp>
+      <p:sp>
+        <p:nvSpPr>
+          <p:cNvPr id="8" name="right-stat">
+            <a:extLst xmlns:a="http://schemas.openxmlformats.org/drawingml/2006/main">
+              <a:ext uri="{FF2B5EF4-FFF2-40B4-BE49-F238E27FC236}">
+                <a16:creationId xmlns:a16="http://schemas.microsoft.com/office/drawing/2014/main" id="{D938F8F7-A9FF-49C0-ABE1-4CC871B48166}"/>
+              </a:ext>
+            </a:extLst>
+          </p:cNvPr>
+          <p:cNvSpPr>
+            <a:spLocks xmlns:a="http://schemas.openxmlformats.org/drawingml/2006/main" noGrp="1"/>
+          </p:cNvSpPr>
+          <p:nvPr/>
+        </p:nvSpPr>
+        <p:spPr>
+          <a:xfrm xmlns:a="http://schemas.openxmlformats.org/drawingml/2006/main">
+            <a:off x="9461564" y="3579971"/>
+            <a:ext cx="2133314" cy="1155859"/>
+          </a:xfrm>
+          <a:prstGeom xmlns:a="http://schemas.openxmlformats.org/drawingml/2006/main" prst="rect">
+            <a:avLst/>
+          </a:prstGeom>
+        </p:spPr>
+        <p:txBody>
+          <a:bodyPr xmlns:a="http://schemas.openxmlformats.org/drawingml/2006/main" lIns="0" tIns="0" rIns="0" bIns="0" anchor="b">
+            <a:normAutofit fontScale="100000"/>
+          </a:bodyPr>
+          <a:lstStyle xmlns:a="http://schemas.openxmlformats.org/drawingml/2006/main"/>
+          <a:p xmlns:a="http://schemas.openxmlformats.org/drawingml/2006/main">
+            <a:pPr algn="l">
+              <a:buNone/>
+              <a:defRPr sz="2700">
+                <a:solidFill>
+                  <a:srgbClr val="F59E0B"/>
+                </a:solidFill>
+                <a:latin typeface="Helvetica Neue"/>
+                <a:ea typeface="Helvetica Neue"/>
+                <a:cs typeface="Helvetica Neue"/>
+              </a:defRPr>
+            </a:pPr>
+            <a:r>
+              <a:t>+47.88 bp</a:t>
+            </a:r>
+          </a:p>
+        </p:txBody>
+      </p:sp>
+      <p:sp>
+        <p:nvSpPr>
+          <p:cNvPr id="9" name="right-stat-label">
+            <a:extLst xmlns:a="http://schemas.openxmlformats.org/drawingml/2006/main">
+              <a:ext uri="{FF2B5EF4-FFF2-40B4-BE49-F238E27FC236}">
+                <a16:creationId xmlns:a16="http://schemas.microsoft.com/office/drawing/2014/main" id="{197A8950-A2B2-4FCE-A738-88CF2DF9A981}"/>
+              </a:ext>
+            </a:extLst>
+          </p:cNvPr>
+          <p:cNvSpPr>
+            <a:spLocks xmlns:a="http://schemas.openxmlformats.org/drawingml/2006/main" noGrp="1"/>
+          </p:cNvSpPr>
+          <p:nvPr/>
+        </p:nvSpPr>
+        <p:spPr>
+          <a:xfrm xmlns:a="http://schemas.openxmlformats.org/drawingml/2006/main">
+            <a:off x="9528143" y="4953000"/>
+            <a:ext cx="2066735" cy="762000"/>
+          </a:xfrm>
+          <a:prstGeom xmlns:a="http://schemas.openxmlformats.org/drawingml/2006/main" prst="rect">
+            <a:avLst/>
+          </a:prstGeom>
+        </p:spPr>
+        <p:txBody>
+          <a:bodyPr xmlns:a="http://schemas.openxmlformats.org/drawingml/2006/main" lIns="0" tIns="0" rIns="0" bIns="0">
+            <a:normAutofit fontScale="100000"/>
+          </a:bodyPr>
+          <a:lstStyle xmlns:a="http://schemas.openxmlformats.org/drawingml/2006/main"/>
+          <a:p xmlns:a="http://schemas.openxmlformats.org/drawingml/2006/main">
+            <a:pPr algn="l">
+              <a:buNone/>
+              <a:defRPr sz="1500">
+                <a:solidFill>
+                  <a:srgbClr val="000000"/>
+                </a:solidFill>
+                <a:latin typeface="Helvetica Neue"/>
+                <a:ea typeface="Helvetica Neue"/>
+                <a:cs typeface="Helvetica Neue"/>
+              </a:defRPr>
+            </a:pPr>
+            <a:r>
+              <a:t>Matched random-sign p90
+Observed: -17.68 bp</a:t>
+            </a:r>
+          </a:p>
+        </p:txBody>
+      </p:sp>
+      <p:pic>
+        <p:nvPicPr>
+          <p:cNvPr id="22" name=""/>
+          <p:cNvPicPr>
+            <a:picLocks xmlns:a="http://schemas.openxmlformats.org/drawingml/2006/main" noChangeAspect="1"/>
+          </p:cNvPicPr>
+          <p:nvPr/>
+        </p:nvPicPr>
+        <p:blipFill>
+          <a:blip xmlns:r="http://schemas.openxmlformats.org/officeDocument/2006/relationships" xmlns:a="http://schemas.openxmlformats.org/drawingml/2006/main" r:embed="R2c8826080f6a4e38"/>
+          <a:stretch xmlns:a="http://schemas.openxmlformats.org/drawingml/2006/main"/>
+        </p:blipFill>
+        <p:spPr>
+          <a:xfrm xmlns:a="http://schemas.openxmlformats.org/drawingml/2006/main">
+            <a:off x="385858" y="2444705"/>
+            <a:ext cx="5534216" cy="2635341"/>
+          </a:xfrm>
+          <a:prstGeom xmlns:a="http://schemas.openxmlformats.org/drawingml/2006/main" prst="rect">
+            <a:avLst/>
+          </a:prstGeom>
+        </p:spPr>
+      </p:pic>
+    </p:spTree>
+    <p:extLst>
+      <p:ext uri="{BB962C8B-B14F-4D97-AF65-F5344CB8AC3E}">
+        <p14:creationId xmlns:p14="http://schemas.microsoft.com/office/powerpoint/2010/main" val="1953812728"/>
+      </p:ext>
+    </p:extLst>
+  </p:cSld>
+</p:sld>
+</file>
+
+<file path=ppt/slides/slide11.xml><?xml version="1.0" encoding="utf-8"?>
+<p:sld xmlns:p="http://schemas.openxmlformats.org/presentationml/2006/main">
+  <p:cSld>
+    <p:spTree>
+      <p:nvGrpSpPr>
+        <p:cNvPr id="1" name=""/>
+        <p:cNvGrpSpPr/>
+        <p:nvPr/>
+      </p:nvGrpSpPr>
+      <p:grpSpPr>
+        <a:xfrm xmlns:a="http://schemas.openxmlformats.org/drawingml/2006/main"/>
+      </p:grpSpPr>
+      <p:sp>
+        <p:nvSpPr>
+          <p:cNvPr id="6" name="footer">
+            <a:extLst xmlns:a="http://schemas.openxmlformats.org/drawingml/2006/main">
+              <a:ext uri="{FF2B5EF4-FFF2-40B4-BE49-F238E27FC236}">
+                <a16:creationId xmlns:a16="http://schemas.microsoft.com/office/drawing/2014/main" id="{5D1F4916-B18D-4F3F-8812-75A699D9A639}"/>
+              </a:ext>
+            </a:extLst>
+          </p:cNvPr>
+          <p:cNvSpPr>
+            <a:spLocks xmlns:a="http://schemas.openxmlformats.org/drawingml/2006/main" noGrp="1"/>
+          </p:cNvSpPr>
+          <p:nvPr/>
+        </p:nvSpPr>
+        <p:spPr>
+          <a:xfrm xmlns:a="http://schemas.openxmlformats.org/drawingml/2006/main">
+            <a:off x="11279315" y="6279261"/>
+            <a:ext cx="518922" cy="241268"/>
+          </a:xfrm>
+          <a:prstGeom xmlns:a="http://schemas.openxmlformats.org/drawingml/2006/main" prst="rect">
+            <a:avLst/>
+          </a:prstGeom>
+        </p:spPr>
+        <p:txBody>
+          <a:bodyPr xmlns:a="http://schemas.openxmlformats.org/drawingml/2006/main" lIns="0" tIns="0" rIns="0" bIns="0" anchor="b"/>
+          <a:lstStyle xmlns:a="http://schemas.openxmlformats.org/drawingml/2006/main"/>
+          <a:p xmlns:a="http://schemas.openxmlformats.org/drawingml/2006/main">
+            <a:pPr algn="r">
+              <a:buNone/>
+              <a:defRPr sz="1000">
+                <a:solidFill>
+                  <a:srgbClr val="000000"/>
+                </a:solidFill>
+                <a:latin typeface="Helvetica Neue"/>
+                <a:ea typeface="Helvetica Neue"/>
+                <a:cs typeface="Helvetica Neue"/>
+              </a:defRPr>
+            </a:pPr>
+            <a:r>
+              <a:t>11</a:t>
+            </a:r>
+          </a:p>
+        </p:txBody>
+      </p:sp>
+      <p:sp>
+        <p:nvSpPr>
+          <p:cNvPr id="2" name="title">
+            <a:extLst xmlns:a="http://schemas.openxmlformats.org/drawingml/2006/main">
+              <a:ext uri="{FF2B5EF4-FFF2-40B4-BE49-F238E27FC236}">
+                <a16:creationId xmlns:a16="http://schemas.microsoft.com/office/drawing/2014/main" id="{ECB77D9D-0CB0-4878-9A4A-2687A311CD30}"/>
+              </a:ext>
+            </a:extLst>
+          </p:cNvPr>
+          <p:cNvSpPr>
+            <a:spLocks xmlns:a="http://schemas.openxmlformats.org/drawingml/2006/main" noGrp="1"/>
+          </p:cNvSpPr>
+          <p:nvPr/>
+        </p:nvSpPr>
+        <p:spPr>
+          <a:xfrm xmlns:a="http://schemas.openxmlformats.org/drawingml/2006/main">
+            <a:off x="393668" y="344043"/>
+            <a:ext cx="5537168" cy="1143000"/>
+          </a:xfrm>
+          <a:prstGeom xmlns:a="http://schemas.openxmlformats.org/drawingml/2006/main" prst="rect">
+            <a:avLst/>
+          </a:prstGeom>
+        </p:spPr>
+        <p:txBody>
+          <a:bodyPr xmlns:a="http://schemas.openxmlformats.org/drawingml/2006/main" lIns="0" tIns="0" rIns="0" bIns="0" anchor="t">
+            <a:normAutofit fontScale="100000"/>
+          </a:bodyPr>
+          <a:lstStyle xmlns:a="http://schemas.openxmlformats.org/drawingml/2006/main"/>
+          <a:p xmlns:a="http://schemas.openxmlformats.org/drawingml/2006/main">
+            <a:pPr algn="l">
+              <a:buNone/>
+              <a:defRPr sz="2900">
+                <a:solidFill>
+                  <a:srgbClr val="000000"/>
+                </a:solidFill>
+                <a:latin typeface="Helvetica Neue"/>
+                <a:ea typeface="Helvetica Neue"/>
+                <a:cs typeface="Helvetica Neue"/>
+              </a:defRPr>
+            </a:pPr>
+            <a:r>
+              <a:t>Representative trades show why zero-crossing is not enough</a:t>
+            </a:r>
+          </a:p>
+        </p:txBody>
+      </p:sp>
+      <p:sp>
+        <p:nvSpPr>
+          <p:cNvPr id="3" name="image-backing">
+            <a:extLst xmlns:a="http://schemas.openxmlformats.org/drawingml/2006/main">
+              <a:ext uri="{FF2B5EF4-FFF2-40B4-BE49-F238E27FC236}">
+                <a16:creationId xmlns:a16="http://schemas.microsoft.com/office/drawing/2014/main" id="{6220C938-B9AD-4B79-90E3-107E303A9D02}"/>
+              </a:ext>
+            </a:extLst>
+          </p:cNvPr>
+          <p:cNvSpPr>
+            <a:spLocks xmlns:a="http://schemas.openxmlformats.org/drawingml/2006/main" noGrp="1"/>
+          </p:cNvSpPr>
+          <p:nvPr/>
+        </p:nvSpPr>
+        <p:spPr>
+          <a:xfrm xmlns:a="http://schemas.openxmlformats.org/drawingml/2006/main">
+            <a:off x="6269069" y="396431"/>
+            <a:ext cx="5539740" cy="5602034"/>
+          </a:xfrm>
+          <a:prstGeom xmlns:a="http://schemas.openxmlformats.org/drawingml/2006/main" prst="roundRect">
+            <a:avLst>
+              <a:gd name="adj" fmla="val 1376"/>
+            </a:avLst>
+          </a:prstGeom>
+          <a:solidFill xmlns:a="http://schemas.openxmlformats.org/drawingml/2006/main">
+            <a:srgbClr val="EAF5FB"/>
+          </a:solidFill>
+          <a:ln xmlns:a="http://schemas.openxmlformats.org/drawingml/2006/main" w="9525">
+            <a:solidFill>
+              <a:srgbClr val="B8BCC4"/>
+            </a:solidFill>
+            <a:prstDash val="solid"/>
+          </a:ln>
+        </p:spPr>
+      </p:sp>
+      <p:sp>
+        <p:nvSpPr>
+          <p:cNvPr id="4" name="body">
+            <a:extLst xmlns:a="http://schemas.openxmlformats.org/drawingml/2006/main">
+              <a:ext uri="{FF2B5EF4-FFF2-40B4-BE49-F238E27FC236}">
+                <a16:creationId xmlns:a16="http://schemas.microsoft.com/office/drawing/2014/main" id="{3F760EC2-C6B5-4968-A4B1-EBAD286BA351}"/>
+              </a:ext>
+            </a:extLst>
+          </p:cNvPr>
+          <p:cNvSpPr>
+            <a:spLocks xmlns:a="http://schemas.openxmlformats.org/drawingml/2006/main" noGrp="1"/>
+          </p:cNvSpPr>
+          <p:nvPr/>
+        </p:nvSpPr>
+        <p:spPr>
+          <a:xfrm xmlns:a="http://schemas.openxmlformats.org/drawingml/2006/main">
+            <a:off x="393668" y="1695450"/>
+            <a:ext cx="5537168" cy="4238625"/>
+          </a:xfrm>
+          <a:prstGeom xmlns:a="http://schemas.openxmlformats.org/drawingml/2006/main" prst="rect">
+            <a:avLst/>
+          </a:prstGeom>
+        </p:spPr>
+        <p:txBody>
+          <a:bodyPr xmlns:a="http://schemas.openxmlformats.org/drawingml/2006/main" lIns="0" tIns="0" rIns="0" bIns="0" anchor="t">
+            <a:normAutofit fontScale="100000"/>
+          </a:bodyPr>
+          <a:lstStyle xmlns:a="http://schemas.openxmlformats.org/drawingml/2006/main"/>
+          <a:p xmlns:a="http://schemas.openxmlformats.org/drawingml/2006/main">
+            <a:pPr algn="l">
+              <a:buNone/>
+              <a:defRPr sz="1950">
+                <a:solidFill>
+                  <a:srgbClr val="000000"/>
+                </a:solidFill>
+                <a:latin typeface="Helvetica Neue"/>
+                <a:ea typeface="Helvetica Neue"/>
+                <a:cs typeface="Helvetica Neue"/>
+              </a:defRPr>
+            </a:pPr>
+            <a:r>
+              <a:t>The tape includes both long- and short-spread trades across the return distribution.
+Some z-scores crossed zero only after large adverse pair moves. A normalized z-score crossing does not guarantee that the tradable legs produced a positive return.
+Worst shown: -1,254.7 bp
+Best shown: +809.6 bp</a:t>
+            </a:r>
+          </a:p>
+        </p:txBody>
+      </p:sp>
+      <p:pic>
+        <p:nvPicPr>
+          <p:cNvPr id="12" name=""/>
+          <p:cNvPicPr>
+            <a:picLocks xmlns:a="http://schemas.openxmlformats.org/drawingml/2006/main" noChangeAspect="1"/>
+          </p:cNvPicPr>
+          <p:nvPr/>
+        </p:nvPicPr>
+        <p:blipFill>
+          <a:blip xmlns:r="http://schemas.openxmlformats.org/officeDocument/2006/relationships" xmlns:a="http://schemas.openxmlformats.org/drawingml/2006/main" r:embed="Rc3e4612575e44d5e"/>
+          <a:stretch xmlns:a="http://schemas.openxmlformats.org/drawingml/2006/main"/>
+        </p:blipFill>
+        <p:spPr>
+          <a:xfrm xmlns:a="http://schemas.openxmlformats.org/drawingml/2006/main">
+            <a:off x="6381750" y="1595005"/>
+            <a:ext cx="5314950" cy="3382241"/>
+          </a:xfrm>
+          <a:prstGeom xmlns:a="http://schemas.openxmlformats.org/drawingml/2006/main" prst="roundRect">
+            <a:avLst/>
+          </a:prstGeom>
+        </p:spPr>
+      </p:pic>
+    </p:spTree>
+    <p:extLst>
+      <p:ext uri="{BB962C8B-B14F-4D97-AF65-F5344CB8AC3E}">
+        <p14:creationId xmlns:p14="http://schemas.microsoft.com/office/powerpoint/2010/main" val="463436756"/>
+      </p:ext>
+    </p:extLst>
+  </p:cSld>
+</p:sld>
+</file>
+
+<file path=ppt/slides/slide12.xml><?xml version="1.0" encoding="utf-8"?>
+<p:sld xmlns:p="http://schemas.openxmlformats.org/presentationml/2006/main">
+  <p:cSld>
+    <p:spTree>
+      <p:nvGrpSpPr>
+        <p:cNvPr id="1" name=""/>
+        <p:cNvGrpSpPr/>
+        <p:nvPr/>
+      </p:nvGrpSpPr>
+      <p:grpSpPr>
+        <a:xfrm xmlns:a="http://schemas.openxmlformats.org/drawingml/2006/main"/>
+      </p:grpSpPr>
+      <p:sp>
+        <p:nvSpPr>
+          <p:cNvPr id="13" name="stat-card-1">
+            <a:extLst xmlns:a="http://schemas.openxmlformats.org/drawingml/2006/main">
+              <a:ext uri="{FF2B5EF4-FFF2-40B4-BE49-F238E27FC236}">
+                <a16:creationId xmlns:a16="http://schemas.microsoft.com/office/drawing/2014/main" id="{E92BF88A-D985-4E89-9220-AED80DBBCF70}"/>
+              </a:ext>
+            </a:extLst>
+          </p:cNvPr>
+          <p:cNvSpPr>
+            <a:spLocks xmlns:a="http://schemas.openxmlformats.org/drawingml/2006/main" noGrp="1"/>
+          </p:cNvSpPr>
+          <p:nvPr/>
+        </p:nvSpPr>
+        <p:spPr>
+          <a:xfrm xmlns:a="http://schemas.openxmlformats.org/drawingml/2006/main">
+            <a:off x="393668" y="3022568"/>
+            <a:ext cx="3568732" cy="2971800"/>
+          </a:xfrm>
+          <a:prstGeom xmlns:a="http://schemas.openxmlformats.org/drawingml/2006/main" prst="roundRect">
+            <a:avLst>
+              <a:gd name="adj" fmla="val 2564"/>
+            </a:avLst>
+          </a:prstGeom>
+          <a:solidFill xmlns:a="http://schemas.openxmlformats.org/drawingml/2006/main">
+            <a:srgbClr val="F2F2F2"/>
+          </a:solidFill>
+        </p:spPr>
+      </p:sp>
+      <p:sp>
+        <p:nvSpPr>
+          <p:cNvPr id="2" name="stat-card-2">
+            <a:extLst xmlns:a="http://schemas.openxmlformats.org/drawingml/2006/main">
+              <a:ext uri="{FF2B5EF4-FFF2-40B4-BE49-F238E27FC236}">
+                <a16:creationId xmlns:a16="http://schemas.microsoft.com/office/drawing/2014/main" id="{18F3FD71-2B01-497E-B7A5-AD72E3A3FA93}"/>
+              </a:ext>
+            </a:extLst>
+          </p:cNvPr>
+          <p:cNvSpPr>
+            <a:spLocks xmlns:a="http://schemas.openxmlformats.org/drawingml/2006/main" noGrp="1"/>
+          </p:cNvSpPr>
+          <p:nvPr/>
+        </p:nvSpPr>
+        <p:spPr>
+          <a:xfrm xmlns:a="http://schemas.openxmlformats.org/drawingml/2006/main">
+            <a:off x="4311682" y="3022568"/>
+            <a:ext cx="3568732" cy="2971800"/>
+          </a:xfrm>
+          <a:prstGeom xmlns:a="http://schemas.openxmlformats.org/drawingml/2006/main" prst="roundRect">
+            <a:avLst>
+              <a:gd name="adj" fmla="val 2564"/>
+            </a:avLst>
+          </a:prstGeom>
+          <a:solidFill xmlns:a="http://schemas.openxmlformats.org/drawingml/2006/main">
+            <a:srgbClr val="F2F2F2"/>
+          </a:solidFill>
+        </p:spPr>
+      </p:sp>
+      <p:sp>
+        <p:nvSpPr>
+          <p:cNvPr id="3" name="stat-card-3">
+            <a:extLst xmlns:a="http://schemas.openxmlformats.org/drawingml/2006/main">
+              <a:ext uri="{FF2B5EF4-FFF2-40B4-BE49-F238E27FC236}">
+                <a16:creationId xmlns:a16="http://schemas.microsoft.com/office/drawing/2014/main" id="{A256A665-F93B-46DB-A120-F2929BE31EAA}"/>
+              </a:ext>
+            </a:extLst>
+          </p:cNvPr>
+          <p:cNvSpPr>
+            <a:spLocks xmlns:a="http://schemas.openxmlformats.org/drawingml/2006/main" noGrp="1"/>
+          </p:cNvSpPr>
+          <p:nvPr/>
+        </p:nvSpPr>
+        <p:spPr>
+          <a:xfrm xmlns:a="http://schemas.openxmlformats.org/drawingml/2006/main">
+            <a:off x="8232267" y="3022568"/>
+            <a:ext cx="3568732" cy="2971800"/>
+          </a:xfrm>
+          <a:prstGeom xmlns:a="http://schemas.openxmlformats.org/drawingml/2006/main" prst="roundRect">
+            <a:avLst>
+              <a:gd name="adj" fmla="val 2564"/>
+            </a:avLst>
+          </a:prstGeom>
+          <a:solidFill xmlns:a="http://schemas.openxmlformats.org/drawingml/2006/main">
+            <a:srgbClr val="F2F2F2"/>
+          </a:solidFill>
+        </p:spPr>
+      </p:sp>
+      <p:sp>
+        <p:nvSpPr>
+          <p:cNvPr id="4" name="footer">
+            <a:extLst xmlns:a="http://schemas.openxmlformats.org/drawingml/2006/main">
+              <a:ext uri="{FF2B5EF4-FFF2-40B4-BE49-F238E27FC236}">
+                <a16:creationId xmlns:a16="http://schemas.microsoft.com/office/drawing/2014/main" id="{8B8FEAA9-7122-4602-AAFA-C856C71CAA69}"/>
+              </a:ext>
+            </a:extLst>
+          </p:cNvPr>
+          <p:cNvSpPr>
+            <a:spLocks xmlns:a="http://schemas.openxmlformats.org/drawingml/2006/main" noGrp="1"/>
+          </p:cNvSpPr>
+          <p:nvPr/>
+        </p:nvSpPr>
+        <p:spPr>
+          <a:xfrm xmlns:a="http://schemas.openxmlformats.org/drawingml/2006/main">
+            <a:off x="11279315" y="6279261"/>
+            <a:ext cx="518922" cy="241268"/>
+          </a:xfrm>
+          <a:prstGeom xmlns:a="http://schemas.openxmlformats.org/drawingml/2006/main" prst="rect">
+            <a:avLst/>
+          </a:prstGeom>
+        </p:spPr>
+        <p:txBody>
+          <a:bodyPr xmlns:a="http://schemas.openxmlformats.org/drawingml/2006/main" lIns="0" tIns="0" rIns="0" bIns="0" anchor="b"/>
+          <a:lstStyle xmlns:a="http://schemas.openxmlformats.org/drawingml/2006/main"/>
+          <a:p xmlns:a="http://schemas.openxmlformats.org/drawingml/2006/main">
+            <a:pPr algn="r">
+              <a:buNone/>
+              <a:defRPr sz="1000">
+                <a:solidFill>
+                  <a:srgbClr val="000000"/>
+                </a:solidFill>
+                <a:latin typeface="Helvetica Neue"/>
+                <a:ea typeface="Helvetica Neue"/>
+                <a:cs typeface="Helvetica Neue"/>
+              </a:defRPr>
+            </a:pPr>
+            <a:r>
+              <a:t>12</a:t>
+            </a:r>
+          </a:p>
+        </p:txBody>
+      </p:sp>
+      <p:sp>
+        <p:nvSpPr>
+          <p:cNvPr id="5" name="title">
+            <a:extLst xmlns:a="http://schemas.openxmlformats.org/drawingml/2006/main">
+              <a:ext uri="{FF2B5EF4-FFF2-40B4-BE49-F238E27FC236}">
+                <a16:creationId xmlns:a16="http://schemas.microsoft.com/office/drawing/2014/main" id="{6B999DAA-321B-4DEF-AC22-1F41A5B8E8C7}"/>
+              </a:ext>
+            </a:extLst>
+          </p:cNvPr>
+          <p:cNvSpPr>
+            <a:spLocks xmlns:a="http://schemas.openxmlformats.org/drawingml/2006/main" noGrp="1"/>
+          </p:cNvSpPr>
+          <p:nvPr/>
+        </p:nvSpPr>
+        <p:spPr>
+          <a:xfrm xmlns:a="http://schemas.openxmlformats.org/drawingml/2006/main">
+            <a:off x="393668" y="344043"/>
+            <a:ext cx="11404568" cy="1047464"/>
+          </a:xfrm>
+          <a:prstGeom xmlns:a="http://schemas.openxmlformats.org/drawingml/2006/main" prst="rect">
+            <a:avLst/>
+          </a:prstGeom>
+        </p:spPr>
+        <p:txBody>
+          <a:bodyPr xmlns:a="http://schemas.openxmlformats.org/drawingml/2006/main" lIns="0" tIns="0" rIns="0" bIns="0" anchor="t">
+            <a:normAutofit fontScale="100000"/>
+          </a:bodyPr>
+          <a:lstStyle xmlns:a="http://schemas.openxmlformats.org/drawingml/2006/main"/>
+          <a:p xmlns:a="http://schemas.openxmlformats.org/drawingml/2006/main">
+            <a:pPr algn="l">
+              <a:buNone/>
+              <a:defRPr sz="2900">
+                <a:solidFill>
+                  <a:srgbClr val="000000"/>
+                </a:solidFill>
+                <a:latin typeface="Helvetica Neue"/>
+                <a:ea typeface="Helvetica Neue"/>
+                <a:cs typeface="Helvetica Neue"/>
+              </a:defRPr>
+            </a:pPr>
+            <a:r>
+              <a:t>Six substantive failures force a structural STOP</a:t>
+            </a:r>
+          </a:p>
+        </p:txBody>
+      </p:sp>
+      <p:sp>
+        <p:nvSpPr>
+          <p:cNvPr id="6" name="intro">
+            <a:extLst xmlns:a="http://schemas.openxmlformats.org/drawingml/2006/main">
+              <a:ext uri="{FF2B5EF4-FFF2-40B4-BE49-F238E27FC236}">
+                <a16:creationId xmlns:a16="http://schemas.microsoft.com/office/drawing/2014/main" id="{B83D39E3-1D42-4CA4-A507-6C07CD200977}"/>
+              </a:ext>
+            </a:extLst>
+          </p:cNvPr>
+          <p:cNvSpPr>
+            <a:spLocks xmlns:a="http://schemas.openxmlformats.org/drawingml/2006/main" noGrp="1"/>
+          </p:cNvSpPr>
+          <p:nvPr/>
+        </p:nvSpPr>
+        <p:spPr>
+          <a:xfrm xmlns:a="http://schemas.openxmlformats.org/drawingml/2006/main">
+            <a:off x="393668" y="1219200"/>
+            <a:ext cx="11404568" cy="1428750"/>
+          </a:xfrm>
+          <a:prstGeom xmlns:a="http://schemas.openxmlformats.org/drawingml/2006/main" prst="rect">
+            <a:avLst/>
+          </a:prstGeom>
+        </p:spPr>
+        <p:txBody>
+          <a:bodyPr xmlns:a="http://schemas.openxmlformats.org/drawingml/2006/main" lIns="0" tIns="0" rIns="0" bIns="0" anchor="t">
+            <a:normAutofit fontScale="100000"/>
+          </a:bodyPr>
+          <a:lstStyle xmlns:a="http://schemas.openxmlformats.org/drawingml/2006/main"/>
+          <a:p xmlns:a="http://schemas.openxmlformats.org/drawingml/2006/main">
+            <a:pPr algn="l">
+              <a:buNone/>
+              <a:defRPr sz="1650">
+                <a:solidFill>
+                  <a:srgbClr val="000000"/>
+                </a:solidFill>
+                <a:latin typeface="Helvetica Neue"/>
+                <a:ea typeface="Helvetica Neue"/>
+                <a:cs typeface="Helvetica Neue"/>
+              </a:defRPr>
+            </a:pPr>
+            <a:r>
+              <a:t>All 12 integrity checks passed and trade support was adequate. Positive-beta coverage, cost survival, hit rate, random-sign separation, yearly stability, and forward convergence all failed.</a:t>
+            </a:r>
+          </a:p>
+        </p:txBody>
+      </p:sp>
+      <p:sp>
+        <p:nvSpPr>
+          <p:cNvPr id="7" name="stat-1">
+            <a:extLst xmlns:a="http://schemas.openxmlformats.org/drawingml/2006/main">
+              <a:ext uri="{FF2B5EF4-FFF2-40B4-BE49-F238E27FC236}">
+                <a16:creationId xmlns:a16="http://schemas.microsoft.com/office/drawing/2014/main" id="{CE99FBCB-3F61-4E2C-9916-C8B37E005A45}"/>
+              </a:ext>
+            </a:extLst>
+          </p:cNvPr>
+          <p:cNvSpPr>
+            <a:spLocks xmlns:a="http://schemas.openxmlformats.org/drawingml/2006/main" noGrp="1"/>
+          </p:cNvSpPr>
+          <p:nvPr/>
+        </p:nvSpPr>
+        <p:spPr>
+          <a:xfrm xmlns:a="http://schemas.openxmlformats.org/drawingml/2006/main">
+            <a:off x="702374" y="3429000"/>
+            <a:ext cx="2940082" cy="1359313"/>
+          </a:xfrm>
+          <a:prstGeom xmlns:a="http://schemas.openxmlformats.org/drawingml/2006/main" prst="rect">
+            <a:avLst/>
+          </a:prstGeom>
+        </p:spPr>
+        <p:txBody>
+          <a:bodyPr xmlns:a="http://schemas.openxmlformats.org/drawingml/2006/main" lIns="0" tIns="0" rIns="0" bIns="0" anchor="b">
+            <a:normAutofit fontScale="100000"/>
+          </a:bodyPr>
+          <a:lstStyle xmlns:a="http://schemas.openxmlformats.org/drawingml/2006/main"/>
+          <a:p xmlns:a="http://schemas.openxmlformats.org/drawingml/2006/main">
+            <a:pPr algn="l">
+              <a:buNone/>
+              <a:defRPr sz="3225">
+                <a:solidFill>
+                  <a:srgbClr val="64748B"/>
+                </a:solidFill>
+                <a:latin typeface="Helvetica Neue"/>
+                <a:ea typeface="Helvetica Neue"/>
+                <a:cs typeface="Helvetica Neue"/>
+              </a:defRPr>
+            </a:pPr>
+            <a:r>
+              <a:t>2 / 8</a:t>
+            </a:r>
+          </a:p>
+        </p:txBody>
+      </p:sp>
+      <p:sp>
+        <p:nvSpPr>
+          <p:cNvPr id="8" name="stat-label-1">
+            <a:extLst xmlns:a="http://schemas.openxmlformats.org/drawingml/2006/main">
+              <a:ext uri="{FF2B5EF4-FFF2-40B4-BE49-F238E27FC236}">
+                <a16:creationId xmlns:a16="http://schemas.microsoft.com/office/drawing/2014/main" id="{8D7A7BD1-1D20-421E-BAC5-DFF695BBE1AF}"/>
+              </a:ext>
+            </a:extLst>
+          </p:cNvPr>
+          <p:cNvSpPr>
+            <a:spLocks xmlns:a="http://schemas.openxmlformats.org/drawingml/2006/main" noGrp="1"/>
+          </p:cNvSpPr>
+          <p:nvPr/>
+        </p:nvSpPr>
+        <p:spPr>
+          <a:xfrm xmlns:a="http://schemas.openxmlformats.org/drawingml/2006/main">
+            <a:off x="702374" y="4900613"/>
+            <a:ext cx="2949607" cy="819150"/>
+          </a:xfrm>
+          <a:prstGeom xmlns:a="http://schemas.openxmlformats.org/drawingml/2006/main" prst="rect">
+            <a:avLst/>
+          </a:prstGeom>
+        </p:spPr>
+        <p:txBody>
+          <a:bodyPr xmlns:a="http://schemas.openxmlformats.org/drawingml/2006/main" lIns="0" tIns="45720" rIns="91440" bIns="45720" anchor="t">
+            <a:normAutofit fontScale="100000"/>
+          </a:bodyPr>
+          <a:lstStyle xmlns:a="http://schemas.openxmlformats.org/drawingml/2006/main"/>
+          <a:p xmlns:a="http://schemas.openxmlformats.org/drawingml/2006/main">
+            <a:pPr algn="l">
+              <a:buNone/>
+              <a:defRPr sz="1575">
+                <a:solidFill>
+                  <a:srgbClr val="000000"/>
+                </a:solidFill>
+                <a:latin typeface="Helvetica Neue"/>
+                <a:ea typeface="Helvetica Neue"/>
+                <a:cs typeface="Helvetica Neue"/>
+              </a:defRPr>
+            </a:pPr>
+            <a:r>
+              <a:t>TRAIN gates passed
+Integrity and support</a:t>
+            </a:r>
+          </a:p>
+        </p:txBody>
+      </p:sp>
+      <p:sp>
+        <p:nvSpPr>
+          <p:cNvPr id="9" name="stat-2">
+            <a:extLst xmlns:a="http://schemas.openxmlformats.org/drawingml/2006/main">
+              <a:ext uri="{FF2B5EF4-FFF2-40B4-BE49-F238E27FC236}">
+                <a16:creationId xmlns:a16="http://schemas.microsoft.com/office/drawing/2014/main" id="{E572DBE1-8080-407B-A0FF-815818B837E6}"/>
+              </a:ext>
+            </a:extLst>
+          </p:cNvPr>
+          <p:cNvSpPr>
+            <a:spLocks xmlns:a="http://schemas.openxmlformats.org/drawingml/2006/main" noGrp="1"/>
+          </p:cNvSpPr>
+          <p:nvPr/>
+        </p:nvSpPr>
+        <p:spPr>
+          <a:xfrm xmlns:a="http://schemas.openxmlformats.org/drawingml/2006/main">
+            <a:off x="4612958" y="3429000"/>
+            <a:ext cx="2940082" cy="1359313"/>
+          </a:xfrm>
+          <a:prstGeom xmlns:a="http://schemas.openxmlformats.org/drawingml/2006/main" prst="rect">
+            <a:avLst/>
+          </a:prstGeom>
+        </p:spPr>
+        <p:txBody>
+          <a:bodyPr xmlns:a="http://schemas.openxmlformats.org/drawingml/2006/main" lIns="0" tIns="0" rIns="0" bIns="0" anchor="b">
+            <a:normAutofit fontScale="100000"/>
+          </a:bodyPr>
+          <a:lstStyle xmlns:a="http://schemas.openxmlformats.org/drawingml/2006/main"/>
+          <a:p xmlns:a="http://schemas.openxmlformats.org/drawingml/2006/main">
+            <a:pPr algn="l">
+              <a:buNone/>
+              <a:defRPr sz="3225">
+                <a:solidFill>
+                  <a:srgbClr val="B42318"/>
+                </a:solidFill>
+                <a:latin typeface="Helvetica Neue"/>
+                <a:ea typeface="Helvetica Neue"/>
+                <a:cs typeface="Helvetica Neue"/>
+              </a:defRPr>
+            </a:pPr>
+            <a:r>
+              <a:t>6 / 8</a:t>
+            </a:r>
+          </a:p>
+        </p:txBody>
+      </p:sp>
+      <p:sp>
+        <p:nvSpPr>
+          <p:cNvPr id="10" name="stat-label-2">
+            <a:extLst xmlns:a="http://schemas.openxmlformats.org/drawingml/2006/main">
+              <a:ext uri="{FF2B5EF4-FFF2-40B4-BE49-F238E27FC236}">
+                <a16:creationId xmlns:a16="http://schemas.microsoft.com/office/drawing/2014/main" id="{FD56EAD1-B269-48E0-9F23-33330F29DCE5}"/>
+              </a:ext>
+            </a:extLst>
+          </p:cNvPr>
+          <p:cNvSpPr>
+            <a:spLocks xmlns:a="http://schemas.openxmlformats.org/drawingml/2006/main" noGrp="1"/>
+          </p:cNvSpPr>
+          <p:nvPr/>
+        </p:nvSpPr>
+        <p:spPr>
+          <a:xfrm xmlns:a="http://schemas.openxmlformats.org/drawingml/2006/main">
+            <a:off x="4612958" y="4900613"/>
+            <a:ext cx="2949607" cy="819150"/>
+          </a:xfrm>
+          <a:prstGeom xmlns:a="http://schemas.openxmlformats.org/drawingml/2006/main" prst="rect">
+            <a:avLst/>
+          </a:prstGeom>
+        </p:spPr>
+        <p:txBody>
+          <a:bodyPr xmlns:a="http://schemas.openxmlformats.org/drawingml/2006/main" lIns="0" tIns="45720" rIns="91440" bIns="45720" anchor="t">
+            <a:normAutofit fontScale="100000"/>
+          </a:bodyPr>
+          <a:lstStyle xmlns:a="http://schemas.openxmlformats.org/drawingml/2006/main"/>
+          <a:p xmlns:a="http://schemas.openxmlformats.org/drawingml/2006/main">
+            <a:pPr algn="l">
+              <a:buNone/>
+              <a:defRPr sz="1575">
+                <a:solidFill>
+                  <a:srgbClr val="000000"/>
+                </a:solidFill>
+                <a:latin typeface="Helvetica Neue"/>
+                <a:ea typeface="Helvetica Neue"/>
+                <a:cs typeface="Helvetica Neue"/>
+              </a:defRPr>
+            </a:pPr>
+            <a:r>
+              <a:t>TRAIN gates failed
+Mechanism not admitted</a:t>
+            </a:r>
+          </a:p>
+        </p:txBody>
+      </p:sp>
+      <p:sp>
+        <p:nvSpPr>
+          <p:cNvPr id="11" name="stat-3">
+            <a:extLst xmlns:a="http://schemas.openxmlformats.org/drawingml/2006/main">
+              <a:ext uri="{FF2B5EF4-FFF2-40B4-BE49-F238E27FC236}">
+                <a16:creationId xmlns:a16="http://schemas.microsoft.com/office/drawing/2014/main" id="{9C6C64B0-28CA-4923-800E-94342CB69146}"/>
+              </a:ext>
+            </a:extLst>
+          </p:cNvPr>
+          <p:cNvSpPr>
+            <a:spLocks xmlns:a="http://schemas.openxmlformats.org/drawingml/2006/main" noGrp="1"/>
+          </p:cNvSpPr>
+          <p:nvPr/>
+        </p:nvSpPr>
+        <p:spPr>
+          <a:xfrm xmlns:a="http://schemas.openxmlformats.org/drawingml/2006/main">
+            <a:off x="8562404" y="3429000"/>
+            <a:ext cx="2940082" cy="1359313"/>
+          </a:xfrm>
+          <a:prstGeom xmlns:a="http://schemas.openxmlformats.org/drawingml/2006/main" prst="rect">
+            <a:avLst/>
+          </a:prstGeom>
+        </p:spPr>
+        <p:txBody>
+          <a:bodyPr xmlns:a="http://schemas.openxmlformats.org/drawingml/2006/main" lIns="0" tIns="0" rIns="0" bIns="0" anchor="b">
+            <a:normAutofit fontScale="100000"/>
+          </a:bodyPr>
+          <a:lstStyle xmlns:a="http://schemas.openxmlformats.org/drawingml/2006/main"/>
+          <a:p xmlns:a="http://schemas.openxmlformats.org/drawingml/2006/main">
+            <a:pPr algn="l">
+              <a:buNone/>
+              <a:defRPr sz="3225">
+                <a:solidFill>
+                  <a:srgbClr val="3D8DFF"/>
+                </a:solidFill>
+                <a:latin typeface="Helvetica Neue"/>
+                <a:ea typeface="Helvetica Neue"/>
+                <a:cs typeface="Helvetica Neue"/>
+              </a:defRPr>
+            </a:pPr>
+            <a:r>
+              <a:t>0</a:t>
+            </a:r>
+          </a:p>
+        </p:txBody>
+      </p:sp>
+      <p:sp>
+        <p:nvSpPr>
+          <p:cNvPr id="12" name="stat-label-3">
+            <a:extLst xmlns:a="http://schemas.openxmlformats.org/drawingml/2006/main">
+              <a:ext uri="{FF2B5EF4-FFF2-40B4-BE49-F238E27FC236}">
+                <a16:creationId xmlns:a16="http://schemas.microsoft.com/office/drawing/2014/main" id="{0ED31E12-360E-4FDB-B429-1A6368F41685}"/>
+              </a:ext>
+            </a:extLst>
+          </p:cNvPr>
+          <p:cNvSpPr>
+            <a:spLocks xmlns:a="http://schemas.openxmlformats.org/drawingml/2006/main" noGrp="1"/>
+          </p:cNvSpPr>
+          <p:nvPr/>
+        </p:nvSpPr>
+        <p:spPr>
+          <a:xfrm xmlns:a="http://schemas.openxmlformats.org/drawingml/2006/main">
+            <a:off x="8562404" y="4900613"/>
+            <a:ext cx="2949607" cy="819150"/>
+          </a:xfrm>
+          <a:prstGeom xmlns:a="http://schemas.openxmlformats.org/drawingml/2006/main" prst="rect">
+            <a:avLst/>
+          </a:prstGeom>
+        </p:spPr>
+        <p:txBody>
+          <a:bodyPr xmlns:a="http://schemas.openxmlformats.org/drawingml/2006/main" lIns="0" tIns="45720" rIns="91440" bIns="45720" anchor="t">
+            <a:normAutofit fontScale="100000"/>
+          </a:bodyPr>
+          <a:lstStyle xmlns:a="http://schemas.openxmlformats.org/drawingml/2006/main"/>
+          <a:p xmlns:a="http://schemas.openxmlformats.org/drawingml/2006/main">
+            <a:pPr algn="l">
+              <a:buNone/>
+              <a:defRPr sz="1575">
+                <a:solidFill>
+                  <a:srgbClr val="000000"/>
+                </a:solidFill>
+                <a:latin typeface="Helvetica Neue"/>
+                <a:ea typeface="Helvetica Neue"/>
+                <a:cs typeface="Helvetica Neue"/>
+              </a:defRPr>
+            </a:pPr>
+            <a:r>
+              <a:t>Later partitions opened
+No later evidence exists</a:t>
+            </a:r>
+          </a:p>
+        </p:txBody>
+      </p:sp>
+    </p:spTree>
+    <p:extLst>
+      <p:ext uri="{BB962C8B-B14F-4D97-AF65-F5344CB8AC3E}">
+        <p14:creationId xmlns:p14="http://schemas.microsoft.com/office/powerpoint/2010/main" val="1500261740"/>
+      </p:ext>
+    </p:extLst>
+  </p:cSld>
+</p:sld>
+</file>
+
+<file path=ppt/slides/slide13.xml><?xml version="1.0" encoding="utf-8"?>
+<p:sld xmlns:p="http://schemas.openxmlformats.org/presentationml/2006/main">
+  <p:cSld>
+    <p:spTree>
+      <p:nvGrpSpPr>
+        <p:cNvPr id="1" name=""/>
+        <p:cNvGrpSpPr/>
+        <p:nvPr/>
+      </p:nvGrpSpPr>
+      <p:grpSpPr>
+        <a:xfrm xmlns:a="http://schemas.openxmlformats.org/drawingml/2006/main"/>
+      </p:grpSpPr>
+      <p:sp>
+        <p:nvSpPr>
+          <p:cNvPr id="13" name="stat-card-1">
+            <a:extLst xmlns:a="http://schemas.openxmlformats.org/drawingml/2006/main">
+              <a:ext uri="{FF2B5EF4-FFF2-40B4-BE49-F238E27FC236}">
+                <a16:creationId xmlns:a16="http://schemas.microsoft.com/office/drawing/2014/main" id="{8D249104-692F-481F-82EC-326C84E9007D}"/>
+              </a:ext>
+            </a:extLst>
+          </p:cNvPr>
+          <p:cNvSpPr>
+            <a:spLocks xmlns:a="http://schemas.openxmlformats.org/drawingml/2006/main" noGrp="1"/>
+          </p:cNvSpPr>
+          <p:nvPr/>
+        </p:nvSpPr>
+        <p:spPr>
+          <a:xfrm xmlns:a="http://schemas.openxmlformats.org/drawingml/2006/main">
+            <a:off x="393668" y="3022568"/>
+            <a:ext cx="3568732" cy="2971800"/>
+          </a:xfrm>
+          <a:prstGeom xmlns:a="http://schemas.openxmlformats.org/drawingml/2006/main" prst="roundRect">
+            <a:avLst>
+              <a:gd name="adj" fmla="val 2564"/>
+            </a:avLst>
+          </a:prstGeom>
+          <a:solidFill xmlns:a="http://schemas.openxmlformats.org/drawingml/2006/main">
+            <a:srgbClr val="F2F2F2"/>
+          </a:solidFill>
+        </p:spPr>
+      </p:sp>
+      <p:sp>
+        <p:nvSpPr>
+          <p:cNvPr id="2" name="stat-card-2">
+            <a:extLst xmlns:a="http://schemas.openxmlformats.org/drawingml/2006/main">
+              <a:ext uri="{FF2B5EF4-FFF2-40B4-BE49-F238E27FC236}">
+                <a16:creationId xmlns:a16="http://schemas.microsoft.com/office/drawing/2014/main" id="{02412AD9-1F13-493C-BF6C-FD8BDE750CD9}"/>
+              </a:ext>
+            </a:extLst>
+          </p:cNvPr>
+          <p:cNvSpPr>
+            <a:spLocks xmlns:a="http://schemas.openxmlformats.org/drawingml/2006/main" noGrp="1"/>
+          </p:cNvSpPr>
+          <p:nvPr/>
+        </p:nvSpPr>
+        <p:spPr>
+          <a:xfrm xmlns:a="http://schemas.openxmlformats.org/drawingml/2006/main">
+            <a:off x="4311682" y="3022568"/>
+            <a:ext cx="3568732" cy="2971800"/>
+          </a:xfrm>
+          <a:prstGeom xmlns:a="http://schemas.openxmlformats.org/drawingml/2006/main" prst="roundRect">
+            <a:avLst>
+              <a:gd name="adj" fmla="val 2564"/>
+            </a:avLst>
+          </a:prstGeom>
+          <a:solidFill xmlns:a="http://schemas.openxmlformats.org/drawingml/2006/main">
+            <a:srgbClr val="F2F2F2"/>
+          </a:solidFill>
+        </p:spPr>
+      </p:sp>
+      <p:sp>
+        <p:nvSpPr>
+          <p:cNvPr id="3" name="stat-card-3">
+            <a:extLst xmlns:a="http://schemas.openxmlformats.org/drawingml/2006/main">
+              <a:ext uri="{FF2B5EF4-FFF2-40B4-BE49-F238E27FC236}">
+                <a16:creationId xmlns:a16="http://schemas.microsoft.com/office/drawing/2014/main" id="{63597CCF-F233-4A0C-BCFA-192F852FDBEA}"/>
+              </a:ext>
+            </a:extLst>
+          </p:cNvPr>
+          <p:cNvSpPr>
+            <a:spLocks xmlns:a="http://schemas.openxmlformats.org/drawingml/2006/main" noGrp="1"/>
+          </p:cNvSpPr>
+          <p:nvPr/>
+        </p:nvSpPr>
+        <p:spPr>
+          <a:xfrm xmlns:a="http://schemas.openxmlformats.org/drawingml/2006/main">
+            <a:off x="8232267" y="3022568"/>
+            <a:ext cx="3568732" cy="2971800"/>
+          </a:xfrm>
+          <a:prstGeom xmlns:a="http://schemas.openxmlformats.org/drawingml/2006/main" prst="roundRect">
+            <a:avLst>
+              <a:gd name="adj" fmla="val 2564"/>
+            </a:avLst>
+          </a:prstGeom>
+          <a:solidFill xmlns:a="http://schemas.openxmlformats.org/drawingml/2006/main">
+            <a:srgbClr val="F2F2F2"/>
+          </a:solidFill>
+        </p:spPr>
+      </p:sp>
+      <p:sp>
+        <p:nvSpPr>
+          <p:cNvPr id="4" name="footer">
+            <a:extLst xmlns:a="http://schemas.openxmlformats.org/drawingml/2006/main">
+              <a:ext uri="{FF2B5EF4-FFF2-40B4-BE49-F238E27FC236}">
+                <a16:creationId xmlns:a16="http://schemas.microsoft.com/office/drawing/2014/main" id="{11E272E4-82E7-4287-91C5-21E6B629F553}"/>
+              </a:ext>
+            </a:extLst>
+          </p:cNvPr>
+          <p:cNvSpPr>
+            <a:spLocks xmlns:a="http://schemas.openxmlformats.org/drawingml/2006/main" noGrp="1"/>
+          </p:cNvSpPr>
+          <p:nvPr/>
+        </p:nvSpPr>
+        <p:spPr>
+          <a:xfrm xmlns:a="http://schemas.openxmlformats.org/drawingml/2006/main">
+            <a:off x="11279315" y="6279261"/>
+            <a:ext cx="518922" cy="241268"/>
+          </a:xfrm>
+          <a:prstGeom xmlns:a="http://schemas.openxmlformats.org/drawingml/2006/main" prst="rect">
+            <a:avLst/>
+          </a:prstGeom>
+        </p:spPr>
+        <p:txBody>
+          <a:bodyPr xmlns:a="http://schemas.openxmlformats.org/drawingml/2006/main" lIns="0" tIns="0" rIns="0" bIns="0" anchor="b"/>
+          <a:lstStyle xmlns:a="http://schemas.openxmlformats.org/drawingml/2006/main"/>
+          <a:p xmlns:a="http://schemas.openxmlformats.org/drawingml/2006/main">
+            <a:pPr algn="r">
+              <a:buNone/>
+              <a:defRPr sz="1000">
+                <a:solidFill>
+                  <a:srgbClr val="000000"/>
+                </a:solidFill>
+                <a:latin typeface="Helvetica Neue"/>
+                <a:ea typeface="Helvetica Neue"/>
+                <a:cs typeface="Helvetica Neue"/>
+              </a:defRPr>
+            </a:pPr>
+            <a:r>
+              <a:t>13</a:t>
+            </a:r>
+          </a:p>
+        </p:txBody>
+      </p:sp>
+      <p:sp>
+        <p:nvSpPr>
+          <p:cNvPr id="5" name="title">
+            <a:extLst xmlns:a="http://schemas.openxmlformats.org/drawingml/2006/main">
+              <a:ext uri="{FF2B5EF4-FFF2-40B4-BE49-F238E27FC236}">
+                <a16:creationId xmlns:a16="http://schemas.microsoft.com/office/drawing/2014/main" id="{A0ED332F-4F42-421E-99CF-097B6CBB5C19}"/>
+              </a:ext>
+            </a:extLst>
+          </p:cNvPr>
+          <p:cNvSpPr>
+            <a:spLocks xmlns:a="http://schemas.openxmlformats.org/drawingml/2006/main" noGrp="1"/>
+          </p:cNvSpPr>
+          <p:nvPr/>
+        </p:nvSpPr>
+        <p:spPr>
+          <a:xfrm xmlns:a="http://schemas.openxmlformats.org/drawingml/2006/main">
+            <a:off x="393668" y="344043"/>
+            <a:ext cx="11404568" cy="1047464"/>
+          </a:xfrm>
+          <a:prstGeom xmlns:a="http://schemas.openxmlformats.org/drawingml/2006/main" prst="rect">
+            <a:avLst/>
+          </a:prstGeom>
+        </p:spPr>
+        <p:txBody>
+          <a:bodyPr xmlns:a="http://schemas.openxmlformats.org/drawingml/2006/main" lIns="0" tIns="0" rIns="0" bIns="0" anchor="t">
+            <a:normAutofit fontScale="100000"/>
+          </a:bodyPr>
+          <a:lstStyle xmlns:a="http://schemas.openxmlformats.org/drawingml/2006/main"/>
+          <a:p xmlns:a="http://schemas.openxmlformats.org/drawingml/2006/main">
+            <a:pPr algn="l">
+              <a:buNone/>
+              <a:defRPr sz="2900">
+                <a:solidFill>
+                  <a:srgbClr val="000000"/>
+                </a:solidFill>
+                <a:latin typeface="Helvetica Neue"/>
+                <a:ea typeface="Helvetica Neue"/>
+                <a:cs typeface="Helvetica Neue"/>
+              </a:defRPr>
+            </a:pPr>
+            <a:r>
+              <a:t>The panel was fixed before any outcomes were inspected</a:t>
+            </a:r>
+          </a:p>
+        </p:txBody>
+      </p:sp>
+      <p:sp>
+        <p:nvSpPr>
+          <p:cNvPr id="6" name="intro">
+            <a:extLst xmlns:a="http://schemas.openxmlformats.org/drawingml/2006/main">
+              <a:ext uri="{FF2B5EF4-FFF2-40B4-BE49-F238E27FC236}">
+                <a16:creationId xmlns:a16="http://schemas.microsoft.com/office/drawing/2014/main" id="{E3D1AF2D-950D-495D-BB07-182C768AD88F}"/>
+              </a:ext>
+            </a:extLst>
+          </p:cNvPr>
+          <p:cNvSpPr>
+            <a:spLocks xmlns:a="http://schemas.openxmlformats.org/drawingml/2006/main" noGrp="1"/>
+          </p:cNvSpPr>
+          <p:nvPr/>
+        </p:nvSpPr>
+        <p:spPr>
+          <a:xfrm xmlns:a="http://schemas.openxmlformats.org/drawingml/2006/main">
+            <a:off x="393668" y="1219200"/>
+            <a:ext cx="11404568" cy="1428750"/>
+          </a:xfrm>
+          <a:prstGeom xmlns:a="http://schemas.openxmlformats.org/drawingml/2006/main" prst="rect">
+            <a:avLst/>
+          </a:prstGeom>
+        </p:spPr>
+        <p:txBody>
+          <a:bodyPr xmlns:a="http://schemas.openxmlformats.org/drawingml/2006/main" lIns="0" tIns="0" rIns="0" bIns="0" anchor="t">
+            <a:normAutofit fontScale="100000"/>
+          </a:bodyPr>
+          <a:lstStyle xmlns:a="http://schemas.openxmlformats.org/drawingml/2006/main"/>
+          <a:p xmlns:a="http://schemas.openxmlformats.org/drawingml/2006/main">
+            <a:pPr algn="l">
+              <a:buNone/>
+              <a:defRPr sz="1650">
+                <a:solidFill>
+                  <a:srgbClr val="000000"/>
+                </a:solidFill>
+                <a:latin typeface="Helvetica Neue"/>
+                <a:ea typeface="Helvetica Neue"/>
+                <a:cs typeface="Helvetica Neue"/>
+              </a:defRPr>
+            </a:pPr>
+            <a:r>
+              <a:t>All 12 primary pairs use the identical 2016-2020 TRAIN window, raw-price orientation, 20-session rule, thresholds, execution timing, costs, diagnostics, and eight gates.</a:t>
+            </a:r>
+          </a:p>
+        </p:txBody>
+      </p:sp>
+      <p:sp>
+        <p:nvSpPr>
+          <p:cNvPr id="7" name="stat-1">
+            <a:extLst xmlns:a="http://schemas.openxmlformats.org/drawingml/2006/main">
+              <a:ext uri="{FF2B5EF4-FFF2-40B4-BE49-F238E27FC236}">
+                <a16:creationId xmlns:a16="http://schemas.microsoft.com/office/drawing/2014/main" id="{447A29C0-2600-4241-BF6B-6797417FC507}"/>
+              </a:ext>
+            </a:extLst>
+          </p:cNvPr>
+          <p:cNvSpPr>
+            <a:spLocks xmlns:a="http://schemas.openxmlformats.org/drawingml/2006/main" noGrp="1"/>
+          </p:cNvSpPr>
+          <p:nvPr/>
+        </p:nvSpPr>
+        <p:spPr>
+          <a:xfrm xmlns:a="http://schemas.openxmlformats.org/drawingml/2006/main">
+            <a:off x="702374" y="3429000"/>
+            <a:ext cx="2940082" cy="1359313"/>
+          </a:xfrm>
+          <a:prstGeom xmlns:a="http://schemas.openxmlformats.org/drawingml/2006/main" prst="rect">
+            <a:avLst/>
+          </a:prstGeom>
+        </p:spPr>
+        <p:txBody>
+          <a:bodyPr xmlns:a="http://schemas.openxmlformats.org/drawingml/2006/main" lIns="0" tIns="0" rIns="0" bIns="0" anchor="b">
+            <a:normAutofit fontScale="100000"/>
+          </a:bodyPr>
+          <a:lstStyle xmlns:a="http://schemas.openxmlformats.org/drawingml/2006/main"/>
+          <a:p xmlns:a="http://schemas.openxmlformats.org/drawingml/2006/main">
+            <a:pPr algn="l">
+              <a:buNone/>
+              <a:defRPr sz="3225">
+                <a:solidFill>
+                  <a:srgbClr val="3D8DFF"/>
+                </a:solidFill>
+                <a:latin typeface="Helvetica Neue"/>
+                <a:ea typeface="Helvetica Neue"/>
+                <a:cs typeface="Helvetica Neue"/>
+              </a:defRPr>
+            </a:pPr>
+            <a:r>
+              <a:t>5 near substitutes</a:t>
+            </a:r>
+          </a:p>
+        </p:txBody>
+      </p:sp>
+      <p:sp>
+        <p:nvSpPr>
+          <p:cNvPr id="8" name="stat-label-1">
+            <a:extLst xmlns:a="http://schemas.openxmlformats.org/drawingml/2006/main">
+              <a:ext uri="{FF2B5EF4-FFF2-40B4-BE49-F238E27FC236}">
+                <a16:creationId xmlns:a16="http://schemas.microsoft.com/office/drawing/2014/main" id="{1D2A853D-A304-477D-B8B8-F77F0101AC08}"/>
+              </a:ext>
+            </a:extLst>
+          </p:cNvPr>
+          <p:cNvSpPr>
+            <a:spLocks xmlns:a="http://schemas.openxmlformats.org/drawingml/2006/main" noGrp="1"/>
+          </p:cNvSpPr>
+          <p:nvPr/>
+        </p:nvSpPr>
+        <p:spPr>
+          <a:xfrm xmlns:a="http://schemas.openxmlformats.org/drawingml/2006/main">
+            <a:off x="702374" y="4900613"/>
+            <a:ext cx="2949607" cy="819150"/>
+          </a:xfrm>
+          <a:prstGeom xmlns:a="http://schemas.openxmlformats.org/drawingml/2006/main" prst="rect">
+            <a:avLst/>
+          </a:prstGeom>
+        </p:spPr>
+        <p:txBody>
+          <a:bodyPr xmlns:a="http://schemas.openxmlformats.org/drawingml/2006/main" lIns="0" tIns="45720" rIns="91440" bIns="45720" anchor="t">
+            <a:normAutofit fontScale="100000"/>
+          </a:bodyPr>
+          <a:lstStyle xmlns:a="http://schemas.openxmlformats.org/drawingml/2006/main"/>
+          <a:p xmlns:a="http://schemas.openxmlformats.org/drawingml/2006/main">
+            <a:pPr algn="l">
+              <a:buNone/>
+              <a:defRPr sz="1575">
+                <a:solidFill>
+                  <a:srgbClr val="000000"/>
+                </a:solidFill>
+                <a:latin typeface="Helvetica Neue"/>
+                <a:ea typeface="Helvetica Neue"/>
+                <a:cs typeface="Helvetica Neue"/>
+              </a:defRPr>
+            </a:pPr>
+            <a:r>
+              <a:t>IVV-SPY · IAU-GLD · SOXX-SMH
+VEA-EFA · VWO-EEM</a:t>
+            </a:r>
+          </a:p>
+        </p:txBody>
+      </p:sp>
+      <p:sp>
+        <p:nvSpPr>
+          <p:cNvPr id="9" name="stat-2">
+            <a:extLst xmlns:a="http://schemas.openxmlformats.org/drawingml/2006/main">
+              <a:ext uri="{FF2B5EF4-FFF2-40B4-BE49-F238E27FC236}">
+                <a16:creationId xmlns:a16="http://schemas.microsoft.com/office/drawing/2014/main" id="{342C60B8-5C35-4607-932D-DFD8E206B634}"/>
+              </a:ext>
+            </a:extLst>
+          </p:cNvPr>
+          <p:cNvSpPr>
+            <a:spLocks xmlns:a="http://schemas.openxmlformats.org/drawingml/2006/main" noGrp="1"/>
+          </p:cNvSpPr>
+          <p:nvPr/>
+        </p:nvSpPr>
+        <p:spPr>
+          <a:xfrm xmlns:a="http://schemas.openxmlformats.org/drawingml/2006/main">
+            <a:off x="4612958" y="3429000"/>
+            <a:ext cx="2940082" cy="1359313"/>
+          </a:xfrm>
+          <a:prstGeom xmlns:a="http://schemas.openxmlformats.org/drawingml/2006/main" prst="rect">
+            <a:avLst/>
+          </a:prstGeom>
+        </p:spPr>
+        <p:txBody>
+          <a:bodyPr xmlns:a="http://schemas.openxmlformats.org/drawingml/2006/main" lIns="0" tIns="0" rIns="0" bIns="0" anchor="b">
+            <a:normAutofit fontScale="100000"/>
+          </a:bodyPr>
+          <a:lstStyle xmlns:a="http://schemas.openxmlformats.org/drawingml/2006/main"/>
+          <a:p xmlns:a="http://schemas.openxmlformats.org/drawingml/2006/main">
+            <a:pPr algn="l">
+              <a:buNone/>
+              <a:defRPr sz="3225">
+                <a:solidFill>
+                  <a:srgbClr val="000000"/>
+                </a:solidFill>
+                <a:latin typeface="Helvetica Neue"/>
+                <a:ea typeface="Helvetica Neue"/>
+                <a:cs typeface="Helvetica Neue"/>
+              </a:defRPr>
+            </a:pPr>
+            <a:r>
+              <a:t>7 related exposures</a:t>
+            </a:r>
+          </a:p>
+        </p:txBody>
+      </p:sp>
+      <p:sp>
+        <p:nvSpPr>
+          <p:cNvPr id="10" name="stat-label-2">
+            <a:extLst xmlns:a="http://schemas.openxmlformats.org/drawingml/2006/main">
+              <a:ext uri="{FF2B5EF4-FFF2-40B4-BE49-F238E27FC236}">
+                <a16:creationId xmlns:a16="http://schemas.microsoft.com/office/drawing/2014/main" id="{3123331A-6BB6-4FC3-B18C-EE98C6A8FF13}"/>
+              </a:ext>
+            </a:extLst>
+          </p:cNvPr>
+          <p:cNvSpPr>
+            <a:spLocks xmlns:a="http://schemas.openxmlformats.org/drawingml/2006/main" noGrp="1"/>
+          </p:cNvSpPr>
+          <p:nvPr/>
+        </p:nvSpPr>
+        <p:spPr>
+          <a:xfrm xmlns:a="http://schemas.openxmlformats.org/drawingml/2006/main">
+            <a:off x="4612958" y="4900613"/>
+            <a:ext cx="2949607" cy="819150"/>
+          </a:xfrm>
+          <a:prstGeom xmlns:a="http://schemas.openxmlformats.org/drawingml/2006/main" prst="rect">
+            <a:avLst/>
+          </a:prstGeom>
+        </p:spPr>
+        <p:txBody>
+          <a:bodyPr xmlns:a="http://schemas.openxmlformats.org/drawingml/2006/main" lIns="0" tIns="45720" rIns="91440" bIns="45720" anchor="t">
+            <a:normAutofit fontScale="100000"/>
+          </a:bodyPr>
+          <a:lstStyle xmlns:a="http://schemas.openxmlformats.org/drawingml/2006/main"/>
+          <a:p xmlns:a="http://schemas.openxmlformats.org/drawingml/2006/main">
+            <a:pPr algn="l">
+              <a:buNone/>
+              <a:defRPr sz="1575">
+                <a:solidFill>
+                  <a:srgbClr val="000000"/>
+                </a:solidFill>
+                <a:latin typeface="Helvetica Neue"/>
+                <a:ea typeface="Helvetica Neue"/>
+                <a:cs typeface="Helvetica Neue"/>
+              </a:defRPr>
+            </a:pPr>
+            <a:r>
+              <a:t>QQQ-XLK · IJR-IWM · KRE-XLF · IBB-XLV
+USO-XLE · TLT-IEF · HYG-LQD</a:t>
+            </a:r>
+          </a:p>
+        </p:txBody>
+      </p:sp>
+      <p:sp>
+        <p:nvSpPr>
+          <p:cNvPr id="11" name="stat-3">
+            <a:extLst xmlns:a="http://schemas.openxmlformats.org/drawingml/2006/main">
+              <a:ext uri="{FF2B5EF4-FFF2-40B4-BE49-F238E27FC236}">
+                <a16:creationId xmlns:a16="http://schemas.microsoft.com/office/drawing/2014/main" id="{A0AD0C21-BC31-4957-B0CB-525311D4386F}"/>
+              </a:ext>
+            </a:extLst>
+          </p:cNvPr>
+          <p:cNvSpPr>
+            <a:spLocks xmlns:a="http://schemas.openxmlformats.org/drawingml/2006/main" noGrp="1"/>
+          </p:cNvSpPr>
+          <p:nvPr/>
+        </p:nvSpPr>
+        <p:spPr>
+          <a:xfrm xmlns:a="http://schemas.openxmlformats.org/drawingml/2006/main">
+            <a:off x="8562404" y="3429000"/>
+            <a:ext cx="2940082" cy="1359313"/>
+          </a:xfrm>
+          <a:prstGeom xmlns:a="http://schemas.openxmlformats.org/drawingml/2006/main" prst="rect">
+            <a:avLst/>
+          </a:prstGeom>
+        </p:spPr>
+        <p:txBody>
+          <a:bodyPr xmlns:a="http://schemas.openxmlformats.org/drawingml/2006/main" lIns="0" tIns="0" rIns="0" bIns="0" anchor="b">
+            <a:normAutofit fontScale="100000"/>
+          </a:bodyPr>
+          <a:lstStyle xmlns:a="http://schemas.openxmlformats.org/drawingml/2006/main"/>
+          <a:p xmlns:a="http://schemas.openxmlformats.org/drawingml/2006/main">
+            <a:pPr algn="l">
+              <a:buNone/>
+              <a:defRPr sz="3225">
+                <a:solidFill>
+                  <a:srgbClr val="000000"/>
+                </a:solidFill>
+                <a:latin typeface="Helvetica Neue"/>
+                <a:ea typeface="Helvetica Neue"/>
+                <a:cs typeface="Helvetica Neue"/>
+              </a:defRPr>
+            </a:pPr>
+            <a:r>
+              <a:t>2 inverse diagnostics</a:t>
+            </a:r>
+          </a:p>
+        </p:txBody>
+      </p:sp>
+      <p:sp>
+        <p:nvSpPr>
+          <p:cNvPr id="12" name="stat-label-3">
+            <a:extLst xmlns:a="http://schemas.openxmlformats.org/drawingml/2006/main">
+              <a:ext uri="{FF2B5EF4-FFF2-40B4-BE49-F238E27FC236}">
+                <a16:creationId xmlns:a16="http://schemas.microsoft.com/office/drawing/2014/main" id="{86C9D445-5711-4319-B967-D72E959CA06D}"/>
+              </a:ext>
+            </a:extLst>
+          </p:cNvPr>
+          <p:cNvSpPr>
+            <a:spLocks xmlns:a="http://schemas.openxmlformats.org/drawingml/2006/main" noGrp="1"/>
+          </p:cNvSpPr>
+          <p:nvPr/>
+        </p:nvSpPr>
+        <p:spPr>
+          <a:xfrm xmlns:a="http://schemas.openxmlformats.org/drawingml/2006/main">
+            <a:off x="8562404" y="4900613"/>
+            <a:ext cx="2949607" cy="819150"/>
+          </a:xfrm>
+          <a:prstGeom xmlns:a="http://schemas.openxmlformats.org/drawingml/2006/main" prst="rect">
+            <a:avLst/>
+          </a:prstGeom>
+        </p:spPr>
+        <p:txBody>
+          <a:bodyPr xmlns:a="http://schemas.openxmlformats.org/drawingml/2006/main" lIns="0" tIns="45720" rIns="91440" bIns="45720" anchor="t">
+            <a:normAutofit fontScale="100000"/>
+          </a:bodyPr>
+          <a:lstStyle xmlns:a="http://schemas.openxmlformats.org/drawingml/2006/main"/>
+          <a:p xmlns:a="http://schemas.openxmlformats.org/drawingml/2006/main">
+            <a:pPr algn="l">
+              <a:buNone/>
+              <a:defRPr sz="1575">
+                <a:solidFill>
+                  <a:srgbClr val="000000"/>
+                </a:solidFill>
+                <a:latin typeface="Helvetica Neue"/>
+                <a:ea typeface="Helvetica Neue"/>
+                <a:cs typeface="Helvetica Neue"/>
+              </a:defRPr>
+            </a:pPr>
+            <a:r>
+              <a:t>GLD-UUP · TLT-SPY
+Semantics tested; no trades</a:t>
+            </a:r>
+          </a:p>
+        </p:txBody>
+      </p:sp>
+    </p:spTree>
+    <p:extLst>
+      <p:ext uri="{BB962C8B-B14F-4D97-AF65-F5344CB8AC3E}">
+        <p14:creationId xmlns:p14="http://schemas.microsoft.com/office/powerpoint/2010/main" val="2098249639"/>
+      </p:ext>
+    </p:extLst>
+  </p:cSld>
+</p:sld>
+</file>
+
+<file path=ppt/slides/slide14.xml><?xml version="1.0" encoding="utf-8"?>
+<p:sld xmlns:p="http://schemas.openxmlformats.org/presentationml/2006/main">
+  <p:cSld>
+    <p:spTree>
+      <p:nvGrpSpPr>
+        <p:cNvPr id="1" name=""/>
+        <p:cNvGrpSpPr/>
+        <p:nvPr/>
+      </p:nvGrpSpPr>
+      <p:grpSpPr>
+        <a:xfrm xmlns:a="http://schemas.openxmlformats.org/drawingml/2006/main"/>
+      </p:grpSpPr>
+      <p:sp>
+        <p:nvSpPr>
+          <p:cNvPr id="11" name="footer">
+            <a:extLst xmlns:a="http://schemas.openxmlformats.org/drawingml/2006/main">
+              <a:ext uri="{FF2B5EF4-FFF2-40B4-BE49-F238E27FC236}">
+                <a16:creationId xmlns:a16="http://schemas.microsoft.com/office/drawing/2014/main" id="{9833E848-7434-4F2E-A17C-B17541CAE597}"/>
+              </a:ext>
+            </a:extLst>
+          </p:cNvPr>
+          <p:cNvSpPr>
+            <a:spLocks xmlns:a="http://schemas.openxmlformats.org/drawingml/2006/main" noGrp="1"/>
+          </p:cNvSpPr>
+          <p:nvPr/>
+        </p:nvSpPr>
+        <p:spPr>
+          <a:xfrm xmlns:a="http://schemas.openxmlformats.org/drawingml/2006/main">
+            <a:off x="11279315" y="6279261"/>
+            <a:ext cx="518922" cy="241268"/>
+          </a:xfrm>
+          <a:prstGeom xmlns:a="http://schemas.openxmlformats.org/drawingml/2006/main" prst="rect">
+            <a:avLst/>
+          </a:prstGeom>
+        </p:spPr>
+        <p:txBody>
+          <a:bodyPr xmlns:a="http://schemas.openxmlformats.org/drawingml/2006/main" lIns="0" tIns="0" rIns="0" bIns="0" anchor="b"/>
+          <a:lstStyle xmlns:a="http://schemas.openxmlformats.org/drawingml/2006/main"/>
+          <a:p xmlns:a="http://schemas.openxmlformats.org/drawingml/2006/main">
+            <a:pPr algn="r">
+              <a:buNone/>
+              <a:defRPr sz="1000">
+                <a:solidFill>
+                  <a:srgbClr val="000000"/>
+                </a:solidFill>
+                <a:latin typeface="Helvetica Neue"/>
+                <a:ea typeface="Helvetica Neue"/>
+                <a:cs typeface="Helvetica Neue"/>
+              </a:defRPr>
+            </a:pPr>
+            <a:r>
+              <a:t>14</a:t>
+            </a:r>
+          </a:p>
+        </p:txBody>
+      </p:sp>
+      <p:sp>
+        <p:nvSpPr>
+          <p:cNvPr id="2" name="title">
+            <a:extLst xmlns:a="http://schemas.openxmlformats.org/drawingml/2006/main">
+              <a:ext uri="{FF2B5EF4-FFF2-40B4-BE49-F238E27FC236}">
+                <a16:creationId xmlns:a16="http://schemas.microsoft.com/office/drawing/2014/main" id="{317B658F-9EDE-4B04-B790-BFC2AB1127A9}"/>
+              </a:ext>
+            </a:extLst>
+          </p:cNvPr>
+          <p:cNvSpPr>
+            <a:spLocks xmlns:a="http://schemas.openxmlformats.org/drawingml/2006/main" noGrp="1"/>
+          </p:cNvSpPr>
+          <p:nvPr/>
+        </p:nvSpPr>
+        <p:spPr>
+          <a:xfrm xmlns:a="http://schemas.openxmlformats.org/drawingml/2006/main">
+            <a:off x="393668" y="344043"/>
+            <a:ext cx="11404568" cy="1047464"/>
+          </a:xfrm>
+          <a:prstGeom xmlns:a="http://schemas.openxmlformats.org/drawingml/2006/main" prst="rect">
+            <a:avLst/>
+          </a:prstGeom>
+        </p:spPr>
+        <p:txBody>
+          <a:bodyPr xmlns:a="http://schemas.openxmlformats.org/drawingml/2006/main" lIns="0" tIns="0" rIns="0" bIns="0" anchor="t">
+            <a:normAutofit fontScale="100000"/>
+          </a:bodyPr>
+          <a:lstStyle xmlns:a="http://schemas.openxmlformats.org/drawingml/2006/main"/>
+          <a:p xmlns:a="http://schemas.openxmlformats.org/drawingml/2006/main">
+            <a:pPr algn="l">
+              <a:buNone/>
+              <a:defRPr sz="2900">
+                <a:solidFill>
+                  <a:srgbClr val="000000"/>
+                </a:solidFill>
+                <a:latin typeface="Helvetica Neue"/>
+                <a:ea typeface="Helvetica Neue"/>
+                <a:cs typeface="Helvetica Neue"/>
+              </a:defRPr>
+            </a:pPr>
+            <a:r>
+              <a:t>The fixed panel produced no full validation pass</a:t>
+            </a:r>
+          </a:p>
+        </p:txBody>
+      </p:sp>
+      <p:sp>
+        <p:nvSpPr>
+          <p:cNvPr id="3" name="left-stat-card">
+            <a:extLst xmlns:a="http://schemas.openxmlformats.org/drawingml/2006/main">
+              <a:ext uri="{FF2B5EF4-FFF2-40B4-BE49-F238E27FC236}">
+                <a16:creationId xmlns:a16="http://schemas.microsoft.com/office/drawing/2014/main" id="{CB5A1905-9B52-4859-9721-FAA37599F253}"/>
+              </a:ext>
+            </a:extLst>
+          </p:cNvPr>
+          <p:cNvSpPr>
+            <a:spLocks xmlns:a="http://schemas.openxmlformats.org/drawingml/2006/main" noGrp="1"/>
+          </p:cNvSpPr>
+          <p:nvPr/>
+        </p:nvSpPr>
+        <p:spPr>
+          <a:xfrm xmlns:a="http://schemas.openxmlformats.org/drawingml/2006/main">
+            <a:off x="6272022" y="3360039"/>
+            <a:ext cx="2581942" cy="2656523"/>
+          </a:xfrm>
+          <a:prstGeom xmlns:a="http://schemas.openxmlformats.org/drawingml/2006/main" prst="roundRect">
+            <a:avLst>
+              <a:gd name="adj" fmla="val 2951"/>
+            </a:avLst>
+          </a:prstGeom>
+          <a:solidFill xmlns:a="http://schemas.openxmlformats.org/drawingml/2006/main">
+            <a:srgbClr val="F2F2F2"/>
+          </a:solidFill>
+        </p:spPr>
+      </p:sp>
+      <p:sp>
+        <p:nvSpPr>
+          <p:cNvPr id="4" name="right-stat-card">
+            <a:extLst xmlns:a="http://schemas.openxmlformats.org/drawingml/2006/main">
+              <a:ext uri="{FF2B5EF4-FFF2-40B4-BE49-F238E27FC236}">
+                <a16:creationId xmlns:a16="http://schemas.microsoft.com/office/drawing/2014/main" id="{6D7A92E4-990F-443E-AA22-280485C87531}"/>
+              </a:ext>
+            </a:extLst>
+          </p:cNvPr>
+          <p:cNvSpPr>
+            <a:spLocks xmlns:a="http://schemas.openxmlformats.org/drawingml/2006/main" noGrp="1"/>
+          </p:cNvSpPr>
+          <p:nvPr/>
+        </p:nvSpPr>
+        <p:spPr>
+          <a:xfrm xmlns:a="http://schemas.openxmlformats.org/drawingml/2006/main">
+            <a:off x="9224201" y="3360039"/>
+            <a:ext cx="2581942" cy="2656523"/>
+          </a:xfrm>
+          <a:prstGeom xmlns:a="http://schemas.openxmlformats.org/drawingml/2006/main" prst="roundRect">
+            <a:avLst>
+              <a:gd name="adj" fmla="val 2951"/>
+            </a:avLst>
+          </a:prstGeom>
+          <a:solidFill xmlns:a="http://schemas.openxmlformats.org/drawingml/2006/main">
+            <a:srgbClr val="F2F2F2"/>
+          </a:solidFill>
+        </p:spPr>
+      </p:sp>
+      <p:sp>
+        <p:nvSpPr>
+          <p:cNvPr id="5" name="summary">
+            <a:extLst xmlns:a="http://schemas.openxmlformats.org/drawingml/2006/main">
+              <a:ext uri="{FF2B5EF4-FFF2-40B4-BE49-F238E27FC236}">
+                <a16:creationId xmlns:a16="http://schemas.microsoft.com/office/drawing/2014/main" id="{56D2558C-A20F-4C70-893B-6EAB7EAAD1B2}"/>
+              </a:ext>
+            </a:extLst>
+          </p:cNvPr>
+          <p:cNvSpPr>
+            <a:spLocks xmlns:a="http://schemas.openxmlformats.org/drawingml/2006/main" noGrp="1"/>
+          </p:cNvSpPr>
+          <p:nvPr/>
+        </p:nvSpPr>
+        <p:spPr>
+          <a:xfrm xmlns:a="http://schemas.openxmlformats.org/drawingml/2006/main">
+            <a:off x="6261068" y="1714500"/>
+            <a:ext cx="5539835" cy="1381125"/>
+          </a:xfrm>
+          <a:prstGeom xmlns:a="http://schemas.openxmlformats.org/drawingml/2006/main" prst="rect">
+            <a:avLst/>
+          </a:prstGeom>
+        </p:spPr>
+        <p:txBody>
+          <a:bodyPr xmlns:a="http://schemas.openxmlformats.org/drawingml/2006/main" lIns="0" tIns="0" rIns="0" bIns="0" anchor="t">
+            <a:normAutofit fontScale="100000"/>
+          </a:bodyPr>
+          <a:lstStyle xmlns:a="http://schemas.openxmlformats.org/drawingml/2006/main"/>
+          <a:p xmlns:a="http://schemas.openxmlformats.org/drawingml/2006/main">
+            <a:pPr algn="l">
+              <a:buNone/>
+              <a:defRPr sz="1800">
+                <a:solidFill>
+                  <a:srgbClr val="000000"/>
+                </a:solidFill>
+                <a:latin typeface="Helvetica Neue"/>
+                <a:ea typeface="Helvetica Neue"/>
+                <a:cs typeface="Helvetica Neue"/>
+              </a:defRPr>
+            </a:pPr>
+            <a:r>
+              <a:t>Eleven of twelve primary pairs had negative mean net trade returns. Confidence intervals and forward-convergence tests prevented the one positive point estimate from becoming a selected winner.</a:t>
+            </a:r>
+          </a:p>
+        </p:txBody>
+      </p:sp>
+      <p:sp>
+        <p:nvSpPr>
+          <p:cNvPr id="6" name="left-stat">
+            <a:extLst xmlns:a="http://schemas.openxmlformats.org/drawingml/2006/main">
+              <a:ext uri="{FF2B5EF4-FFF2-40B4-BE49-F238E27FC236}">
+                <a16:creationId xmlns:a16="http://schemas.microsoft.com/office/drawing/2014/main" id="{5C6C71CB-7475-4DF6-B7F0-0931DF047551}"/>
+              </a:ext>
+            </a:extLst>
+          </p:cNvPr>
+          <p:cNvSpPr>
+            <a:spLocks xmlns:a="http://schemas.openxmlformats.org/drawingml/2006/main" noGrp="1"/>
+          </p:cNvSpPr>
+          <p:nvPr/>
+        </p:nvSpPr>
+        <p:spPr>
+          <a:xfrm xmlns:a="http://schemas.openxmlformats.org/drawingml/2006/main">
+            <a:off x="6509385" y="3579971"/>
+            <a:ext cx="2133314" cy="1155859"/>
+          </a:xfrm>
+          <a:prstGeom xmlns:a="http://schemas.openxmlformats.org/drawingml/2006/main" prst="rect">
+            <a:avLst/>
+          </a:prstGeom>
+        </p:spPr>
+        <p:txBody>
+          <a:bodyPr xmlns:a="http://schemas.openxmlformats.org/drawingml/2006/main" lIns="0" tIns="0" rIns="0" bIns="0" anchor="b">
+            <a:normAutofit fontScale="100000"/>
+          </a:bodyPr>
+          <a:lstStyle xmlns:a="http://schemas.openxmlformats.org/drawingml/2006/main"/>
+          <a:p xmlns:a="http://schemas.openxmlformats.org/drawingml/2006/main">
+            <a:pPr algn="l">
+              <a:buNone/>
+              <a:defRPr sz="2700">
+                <a:solidFill>
+                  <a:srgbClr val="3D8DFF"/>
+                </a:solidFill>
+                <a:latin typeface="Helvetica Neue"/>
+                <a:ea typeface="Helvetica Neue"/>
+                <a:cs typeface="Helvetica Neue"/>
+              </a:defRPr>
+            </a:pPr>
+            <a:r>
+              <a:t>0 / 12</a:t>
+            </a:r>
+          </a:p>
+        </p:txBody>
+      </p:sp>
+      <p:sp>
+        <p:nvSpPr>
+          <p:cNvPr id="7" name="left-stat-label">
+            <a:extLst xmlns:a="http://schemas.openxmlformats.org/drawingml/2006/main">
+              <a:ext uri="{FF2B5EF4-FFF2-40B4-BE49-F238E27FC236}">
+                <a16:creationId xmlns:a16="http://schemas.microsoft.com/office/drawing/2014/main" id="{471C1151-75AF-40A2-A5A1-4F7713D23356}"/>
+              </a:ext>
+            </a:extLst>
+          </p:cNvPr>
+          <p:cNvSpPr>
+            <a:spLocks xmlns:a="http://schemas.openxmlformats.org/drawingml/2006/main" noGrp="1"/>
+          </p:cNvSpPr>
+          <p:nvPr/>
+        </p:nvSpPr>
+        <p:spPr>
+          <a:xfrm xmlns:a="http://schemas.openxmlformats.org/drawingml/2006/main">
+            <a:off x="6575965" y="4953000"/>
+            <a:ext cx="2066735" cy="762000"/>
+          </a:xfrm>
+          <a:prstGeom xmlns:a="http://schemas.openxmlformats.org/drawingml/2006/main" prst="rect">
+            <a:avLst/>
+          </a:prstGeom>
+        </p:spPr>
+        <p:txBody>
+          <a:bodyPr xmlns:a="http://schemas.openxmlformats.org/drawingml/2006/main" lIns="0" tIns="0" rIns="0" bIns="0">
+            <a:normAutofit fontScale="100000"/>
+          </a:bodyPr>
+          <a:lstStyle xmlns:a="http://schemas.openxmlformats.org/drawingml/2006/main"/>
+          <a:p xmlns:a="http://schemas.openxmlformats.org/drawingml/2006/main">
+            <a:pPr algn="l">
+              <a:buNone/>
+              <a:defRPr sz="1500">
+                <a:solidFill>
+                  <a:srgbClr val="000000"/>
+                </a:solidFill>
+                <a:latin typeface="Helvetica Neue"/>
+                <a:ea typeface="Helvetica Neue"/>
+                <a:cs typeface="Helvetica Neue"/>
+              </a:defRPr>
+            </a:pPr>
+            <a:r>
+              <a:t>Primary pairs passing
+all eight gates</a:t>
+            </a:r>
+          </a:p>
+        </p:txBody>
+      </p:sp>
+      <p:sp>
+        <p:nvSpPr>
+          <p:cNvPr id="8" name="right-stat">
+            <a:extLst xmlns:a="http://schemas.openxmlformats.org/drawingml/2006/main">
+              <a:ext uri="{FF2B5EF4-FFF2-40B4-BE49-F238E27FC236}">
+                <a16:creationId xmlns:a16="http://schemas.microsoft.com/office/drawing/2014/main" id="{423A9D83-D670-4C26-B583-F1C469F9EC40}"/>
+              </a:ext>
+            </a:extLst>
+          </p:cNvPr>
+          <p:cNvSpPr>
+            <a:spLocks xmlns:a="http://schemas.openxmlformats.org/drawingml/2006/main" noGrp="1"/>
+          </p:cNvSpPr>
+          <p:nvPr/>
+        </p:nvSpPr>
+        <p:spPr>
+          <a:xfrm xmlns:a="http://schemas.openxmlformats.org/drawingml/2006/main">
+            <a:off x="9461564" y="3579971"/>
+            <a:ext cx="2133314" cy="1155859"/>
+          </a:xfrm>
+          <a:prstGeom xmlns:a="http://schemas.openxmlformats.org/drawingml/2006/main" prst="rect">
+            <a:avLst/>
+          </a:prstGeom>
+        </p:spPr>
+        <p:txBody>
+          <a:bodyPr xmlns:a="http://schemas.openxmlformats.org/drawingml/2006/main" lIns="0" tIns="0" rIns="0" bIns="0" anchor="b">
+            <a:normAutofit fontScale="100000"/>
+          </a:bodyPr>
+          <a:lstStyle xmlns:a="http://schemas.openxmlformats.org/drawingml/2006/main"/>
+          <a:p xmlns:a="http://schemas.openxmlformats.org/drawingml/2006/main">
+            <a:pPr algn="l">
+              <a:buNone/>
+              <a:defRPr sz="2700">
+                <a:solidFill>
+                  <a:srgbClr val="B42318"/>
+                </a:solidFill>
+                <a:latin typeface="Helvetica Neue"/>
+                <a:ea typeface="Helvetica Neue"/>
+                <a:cs typeface="Helvetica Neue"/>
+              </a:defRPr>
+            </a:pPr>
+            <a:r>
+              <a:t>1 / 12</a:t>
+            </a:r>
+          </a:p>
+        </p:txBody>
+      </p:sp>
+      <p:sp>
+        <p:nvSpPr>
+          <p:cNvPr id="9" name="right-stat-label">
+            <a:extLst xmlns:a="http://schemas.openxmlformats.org/drawingml/2006/main">
+              <a:ext uri="{FF2B5EF4-FFF2-40B4-BE49-F238E27FC236}">
+                <a16:creationId xmlns:a16="http://schemas.microsoft.com/office/drawing/2014/main" id="{F039A1C2-F7F7-4D0E-BDC1-2BD29C9D7E4C}"/>
+              </a:ext>
+            </a:extLst>
+          </p:cNvPr>
+          <p:cNvSpPr>
+            <a:spLocks xmlns:a="http://schemas.openxmlformats.org/drawingml/2006/main" noGrp="1"/>
+          </p:cNvSpPr>
+          <p:nvPr/>
+        </p:nvSpPr>
+        <p:spPr>
+          <a:xfrm xmlns:a="http://schemas.openxmlformats.org/drawingml/2006/main">
+            <a:off x="9528143" y="4953000"/>
+            <a:ext cx="2066735" cy="762000"/>
+          </a:xfrm>
+          <a:prstGeom xmlns:a="http://schemas.openxmlformats.org/drawingml/2006/main" prst="rect">
+            <a:avLst/>
+          </a:prstGeom>
+        </p:spPr>
+        <p:txBody>
+          <a:bodyPr xmlns:a="http://schemas.openxmlformats.org/drawingml/2006/main" lIns="0" tIns="0" rIns="0" bIns="0">
+            <a:normAutofit fontScale="100000"/>
+          </a:bodyPr>
+          <a:lstStyle xmlns:a="http://schemas.openxmlformats.org/drawingml/2006/main"/>
+          <a:p xmlns:a="http://schemas.openxmlformats.org/drawingml/2006/main">
+            <a:pPr algn="l">
+              <a:buNone/>
+              <a:defRPr sz="1500">
+                <a:solidFill>
+                  <a:srgbClr val="000000"/>
+                </a:solidFill>
+                <a:latin typeface="Helvetica Neue"/>
+                <a:ea typeface="Helvetica Neue"/>
+                <a:cs typeface="Helvetica Neue"/>
+              </a:defRPr>
+            </a:pPr>
+            <a:r>
+              <a:t>Positive mean net return
+USO-XLE only</a:t>
+            </a:r>
+          </a:p>
+        </p:txBody>
+      </p:sp>
+      <p:pic>
+        <p:nvPicPr>
+          <p:cNvPr id="24" name=""/>
+          <p:cNvPicPr>
+            <a:picLocks xmlns:a="http://schemas.openxmlformats.org/drawingml/2006/main" noChangeAspect="1"/>
+          </p:cNvPicPr>
+          <p:nvPr/>
+        </p:nvPicPr>
+        <p:blipFill>
+          <a:blip xmlns:r="http://schemas.openxmlformats.org/officeDocument/2006/relationships" xmlns:a="http://schemas.openxmlformats.org/drawingml/2006/main" r:embed="R2dd8938e1a3548dd"/>
+          <a:stretch xmlns:a="http://schemas.openxmlformats.org/drawingml/2006/main"/>
+        </p:blipFill>
+        <p:spPr>
+          <a:xfrm xmlns:a="http://schemas.openxmlformats.org/drawingml/2006/main">
+            <a:off x="385858" y="2576472"/>
+            <a:ext cx="5534216" cy="2371807"/>
+          </a:xfrm>
+          <a:prstGeom xmlns:a="http://schemas.openxmlformats.org/drawingml/2006/main" prst="rect">
+            <a:avLst/>
+          </a:prstGeom>
+        </p:spPr>
+      </p:pic>
+      <p:sp>
+        <p:nvSpPr>
+          <p:cNvPr id="13" name="">
+            <a:extLst xmlns:a="http://schemas.openxmlformats.org/drawingml/2006/main">
+              <a:ext uri="{FF2B5EF4-FFF2-40B4-BE49-F238E27FC236}">
+                <a16:creationId xmlns:a16="http://schemas.microsoft.com/office/drawing/2014/main" id="{D95C8B50-6D11-41E2-81BC-7768CA7E2749}"/>
+              </a:ext>
+            </a:extLst>
+          </p:cNvPr>
+          <p:cNvSpPr>
+            <a:spLocks xmlns:a="http://schemas.openxmlformats.org/drawingml/2006/main" noGrp="1"/>
+          </p:cNvSpPr>
+          <p:nvPr/>
+        </p:nvSpPr>
+        <p:spPr>
+          <a:xfrm xmlns:a="http://schemas.openxmlformats.org/drawingml/2006/main">
+            <a:off x="385858" y="2576472"/>
+            <a:ext cx="5534216" cy="2371807"/>
+          </a:xfrm>
+          <a:prstGeom xmlns:a="http://schemas.openxmlformats.org/drawingml/2006/main" prst="rect">
+            <a:avLst/>
+          </a:prstGeom>
+          <a:solidFill xmlns:a="http://schemas.openxmlformats.org/drawingml/2006/main">
+            <a:srgbClr val="FFFFFF"/>
+          </a:solidFill>
+          <a:ln xmlns:a="http://schemas.openxmlformats.org/drawingml/2006/main" w="0">
+            <a:solidFill>
+              <a:srgbClr val="FFFFFF"/>
+            </a:solidFill>
+            <a:prstDash val="solid"/>
+          </a:ln>
+        </p:spPr>
+      </p:sp>
+      <p:pic>
+        <p:nvPicPr>
+          <p:cNvPr id="26" name=""/>
+          <p:cNvPicPr>
+            <a:picLocks xmlns:a="http://schemas.openxmlformats.org/drawingml/2006/main" noChangeAspect="1"/>
+          </p:cNvPicPr>
+          <p:nvPr/>
+        </p:nvPicPr>
+        <p:blipFill>
+          <a:blip xmlns:r="http://schemas.openxmlformats.org/officeDocument/2006/relationships" xmlns:a="http://schemas.openxmlformats.org/drawingml/2006/main" r:embed="Rbb00bad3fafc4d9b"/>
+          <a:stretch xmlns:a="http://schemas.openxmlformats.org/drawingml/2006/main"/>
+        </p:blipFill>
+        <p:spPr>
+          <a:xfrm xmlns:a="http://schemas.openxmlformats.org/drawingml/2006/main">
+            <a:off x="1350393" y="2576472"/>
+            <a:ext cx="3605147" cy="2371807"/>
+          </a:xfrm>
+          <a:prstGeom xmlns:a="http://schemas.openxmlformats.org/drawingml/2006/main" prst="rect">
+            <a:avLst/>
+          </a:prstGeom>
+        </p:spPr>
+      </p:pic>
+    </p:spTree>
+    <p:extLst>
+      <p:ext uri="{BB962C8B-B14F-4D97-AF65-F5344CB8AC3E}">
+        <p14:creationId xmlns:p14="http://schemas.microsoft.com/office/powerpoint/2010/main" val="227946046"/>
+      </p:ext>
+    </p:extLst>
+  </p:cSld>
+</p:sld>
+</file>
+
+<file path=ppt/slides/slide15.xml><?xml version="1.0" encoding="utf-8"?>
+<p:sld xmlns:p="http://schemas.openxmlformats.org/presentationml/2006/main">
+  <p:cSld>
+    <p:spTree>
+      <p:nvGrpSpPr>
+        <p:cNvPr id="1" name=""/>
+        <p:cNvGrpSpPr/>
+        <p:nvPr/>
+      </p:nvGrpSpPr>
+      <p:grpSpPr>
+        <a:xfrm xmlns:a="http://schemas.openxmlformats.org/drawingml/2006/main"/>
+      </p:grpSpPr>
+      <p:sp>
+        <p:nvSpPr>
+          <p:cNvPr id="6" name="footer">
+            <a:extLst xmlns:a="http://schemas.openxmlformats.org/drawingml/2006/main">
+              <a:ext uri="{FF2B5EF4-FFF2-40B4-BE49-F238E27FC236}">
+                <a16:creationId xmlns:a16="http://schemas.microsoft.com/office/drawing/2014/main" id="{5D1F4916-B18D-4F3F-8812-75A699D9A639}"/>
+              </a:ext>
+            </a:extLst>
+          </p:cNvPr>
+          <p:cNvSpPr>
+            <a:spLocks xmlns:a="http://schemas.openxmlformats.org/drawingml/2006/main" noGrp="1"/>
+          </p:cNvSpPr>
+          <p:nvPr/>
+        </p:nvSpPr>
+        <p:spPr>
+          <a:xfrm xmlns:a="http://schemas.openxmlformats.org/drawingml/2006/main">
+            <a:off x="11279315" y="6279261"/>
+            <a:ext cx="518922" cy="241268"/>
+          </a:xfrm>
+          <a:prstGeom xmlns:a="http://schemas.openxmlformats.org/drawingml/2006/main" prst="rect">
+            <a:avLst/>
+          </a:prstGeom>
+        </p:spPr>
+        <p:txBody>
+          <a:bodyPr xmlns:a="http://schemas.openxmlformats.org/drawingml/2006/main" lIns="0" tIns="0" rIns="0" bIns="0" anchor="b"/>
+          <a:lstStyle xmlns:a="http://schemas.openxmlformats.org/drawingml/2006/main"/>
+          <a:p xmlns:a="http://schemas.openxmlformats.org/drawingml/2006/main">
+            <a:pPr algn="r">
+              <a:buNone/>
+              <a:defRPr sz="1000">
+                <a:solidFill>
+                  <a:srgbClr val="000000"/>
+                </a:solidFill>
+                <a:latin typeface="Helvetica Neue"/>
+                <a:ea typeface="Helvetica Neue"/>
+                <a:cs typeface="Helvetica Neue"/>
+              </a:defRPr>
+            </a:pPr>
+            <a:r>
+              <a:t>15</a:t>
+            </a:r>
+          </a:p>
+        </p:txBody>
+      </p:sp>
+      <p:sp>
+        <p:nvSpPr>
+          <p:cNvPr id="2" name="title">
+            <a:extLst xmlns:a="http://schemas.openxmlformats.org/drawingml/2006/main">
+              <a:ext uri="{FF2B5EF4-FFF2-40B4-BE49-F238E27FC236}">
+                <a16:creationId xmlns:a16="http://schemas.microsoft.com/office/drawing/2014/main" id="{ECB77D9D-0CB0-4878-9A4A-2687A311CD30}"/>
+              </a:ext>
+            </a:extLst>
+          </p:cNvPr>
+          <p:cNvSpPr>
+            <a:spLocks xmlns:a="http://schemas.openxmlformats.org/drawingml/2006/main" noGrp="1"/>
+          </p:cNvSpPr>
+          <p:nvPr/>
+        </p:nvSpPr>
+        <p:spPr>
+          <a:xfrm xmlns:a="http://schemas.openxmlformats.org/drawingml/2006/main">
+            <a:off x="393668" y="344043"/>
+            <a:ext cx="5537168" cy="1143000"/>
+          </a:xfrm>
+          <a:prstGeom xmlns:a="http://schemas.openxmlformats.org/drawingml/2006/main" prst="rect">
+            <a:avLst/>
+          </a:prstGeom>
+        </p:spPr>
+        <p:txBody>
+          <a:bodyPr xmlns:a="http://schemas.openxmlformats.org/drawingml/2006/main" lIns="0" tIns="0" rIns="0" bIns="0" anchor="t">
+            <a:normAutofit fontScale="100000"/>
+          </a:bodyPr>
+          <a:lstStyle xmlns:a="http://schemas.openxmlformats.org/drawingml/2006/main"/>
+          <a:p xmlns:a="http://schemas.openxmlformats.org/drawingml/2006/main">
+            <a:pPr algn="l">
+              <a:buNone/>
+              <a:defRPr sz="2900">
+                <a:solidFill>
+                  <a:srgbClr val="000000"/>
+                </a:solidFill>
+                <a:latin typeface="Helvetica Neue"/>
+                <a:ea typeface="Helvetica Neue"/>
+                <a:cs typeface="Helvetica Neue"/>
+              </a:defRPr>
+            </a:pPr>
+            <a:r>
+              <a:t>Breadth did not rescue the 20-session template</a:t>
+            </a:r>
+          </a:p>
+        </p:txBody>
+      </p:sp>
+      <p:sp>
+        <p:nvSpPr>
+          <p:cNvPr id="3" name="image-backing">
+            <a:extLst xmlns:a="http://schemas.openxmlformats.org/drawingml/2006/main">
+              <a:ext uri="{FF2B5EF4-FFF2-40B4-BE49-F238E27FC236}">
+                <a16:creationId xmlns:a16="http://schemas.microsoft.com/office/drawing/2014/main" id="{6220C938-B9AD-4B79-90E3-107E303A9D02}"/>
+              </a:ext>
+            </a:extLst>
+          </p:cNvPr>
+          <p:cNvSpPr>
+            <a:spLocks xmlns:a="http://schemas.openxmlformats.org/drawingml/2006/main" noGrp="1"/>
+          </p:cNvSpPr>
+          <p:nvPr/>
+        </p:nvSpPr>
+        <p:spPr>
+          <a:xfrm xmlns:a="http://schemas.openxmlformats.org/drawingml/2006/main">
+            <a:off x="6269069" y="396431"/>
+            <a:ext cx="5539740" cy="5602034"/>
+          </a:xfrm>
+          <a:prstGeom xmlns:a="http://schemas.openxmlformats.org/drawingml/2006/main" prst="roundRect">
+            <a:avLst>
+              <a:gd name="adj" fmla="val 1376"/>
+            </a:avLst>
+          </a:prstGeom>
+          <a:solidFill xmlns:a="http://schemas.openxmlformats.org/drawingml/2006/main">
+            <a:srgbClr val="EAF5FB"/>
+          </a:solidFill>
+          <a:ln xmlns:a="http://schemas.openxmlformats.org/drawingml/2006/main" w="9525">
+            <a:solidFill>
+              <a:srgbClr val="B8BCC4"/>
+            </a:solidFill>
+            <a:prstDash val="solid"/>
+          </a:ln>
+        </p:spPr>
+      </p:sp>
+      <p:sp>
+        <p:nvSpPr>
+          <p:cNvPr id="4" name="body">
+            <a:extLst xmlns:a="http://schemas.openxmlformats.org/drawingml/2006/main">
+              <a:ext uri="{FF2B5EF4-FFF2-40B4-BE49-F238E27FC236}">
+                <a16:creationId xmlns:a16="http://schemas.microsoft.com/office/drawing/2014/main" id="{3F760EC2-C6B5-4968-A4B1-EBAD286BA351}"/>
+              </a:ext>
+            </a:extLst>
+          </p:cNvPr>
+          <p:cNvSpPr>
+            <a:spLocks xmlns:a="http://schemas.openxmlformats.org/drawingml/2006/main" noGrp="1"/>
+          </p:cNvSpPr>
+          <p:nvPr/>
+        </p:nvSpPr>
+        <p:spPr>
+          <a:xfrm xmlns:a="http://schemas.openxmlformats.org/drawingml/2006/main">
+            <a:off x="393668" y="1695450"/>
+            <a:ext cx="5537168" cy="4238625"/>
+          </a:xfrm>
+          <a:prstGeom xmlns:a="http://schemas.openxmlformats.org/drawingml/2006/main" prst="rect">
+            <a:avLst/>
+          </a:prstGeom>
+        </p:spPr>
+        <p:txBody>
+          <a:bodyPr xmlns:a="http://schemas.openxmlformats.org/drawingml/2006/main" lIns="0" tIns="0" rIns="0" bIns="0" anchor="t">
+            <a:normAutofit fontScale="100000"/>
+          </a:bodyPr>
+          <a:lstStyle xmlns:a="http://schemas.openxmlformats.org/drawingml/2006/main"/>
+          <a:p xmlns:a="http://schemas.openxmlformats.org/drawingml/2006/main">
+            <a:pPr algn="l">
+              <a:buNone/>
+              <a:defRPr sz="1950">
+                <a:solidFill>
+                  <a:srgbClr val="000000"/>
+                </a:solidFill>
+                <a:latin typeface="Helvetica Neue"/>
+                <a:ea typeface="Helvetica Neue"/>
+                <a:cs typeface="Helvetica Neue"/>
+              </a:defRPr>
+            </a:pPr>
+            <a:r>
+              <a:t>Every primary pair failed the positive-mean-with-positive-lower-bound gate.
+Every primary pair also failed the forward-convergence requirement that the upper confidence bound remain below zero.
+This matters: a spread can look statistically structured yet still offer no robust, cost-surviving directional forecast.</a:t>
+            </a:r>
+          </a:p>
+        </p:txBody>
+      </p:sp>
+      <p:pic>
+        <p:nvPicPr>
+          <p:cNvPr id="14" name=""/>
+          <p:cNvPicPr>
+            <a:picLocks xmlns:a="http://schemas.openxmlformats.org/drawingml/2006/main" noChangeAspect="1"/>
+          </p:cNvPicPr>
+          <p:nvPr/>
+        </p:nvPicPr>
+        <p:blipFill>
+          <a:blip xmlns:r="http://schemas.openxmlformats.org/officeDocument/2006/relationships" xmlns:a="http://schemas.openxmlformats.org/drawingml/2006/main" r:embed="R7f37dc135b5846f7"/>
+          <a:stretch xmlns:a="http://schemas.openxmlformats.org/drawingml/2006/main"/>
+        </p:blipFill>
+        <p:spPr>
+          <a:xfrm xmlns:a="http://schemas.openxmlformats.org/drawingml/2006/main">
+            <a:off x="6381750" y="1595005"/>
+            <a:ext cx="5314950" cy="3382241"/>
+          </a:xfrm>
+          <a:prstGeom xmlns:a="http://schemas.openxmlformats.org/drawingml/2006/main" prst="roundRect">
+            <a:avLst/>
+          </a:prstGeom>
+        </p:spPr>
+      </p:pic>
+      <p:sp>
+        <p:nvSpPr>
+          <p:cNvPr id="8" name="">
+            <a:extLst xmlns:a="http://schemas.openxmlformats.org/drawingml/2006/main">
+              <a:ext uri="{FF2B5EF4-FFF2-40B4-BE49-F238E27FC236}">
+                <a16:creationId xmlns:a16="http://schemas.microsoft.com/office/drawing/2014/main" id="{5F1B8A64-ACC9-4498-AEAE-0060DC180571}"/>
+              </a:ext>
+            </a:extLst>
+          </p:cNvPr>
+          <p:cNvSpPr>
+            <a:spLocks xmlns:a="http://schemas.openxmlformats.org/drawingml/2006/main" noGrp="1"/>
+          </p:cNvSpPr>
+          <p:nvPr/>
+        </p:nvSpPr>
+        <p:spPr>
+          <a:xfrm xmlns:a="http://schemas.openxmlformats.org/drawingml/2006/main">
+            <a:off x="6381750" y="1595005"/>
+            <a:ext cx="5314950" cy="3382241"/>
+          </a:xfrm>
+          <a:prstGeom xmlns:a="http://schemas.openxmlformats.org/drawingml/2006/main" prst="rect">
+            <a:avLst/>
+          </a:prstGeom>
+          <a:solidFill xmlns:a="http://schemas.openxmlformats.org/drawingml/2006/main">
+            <a:srgbClr val="FFFFFF"/>
+          </a:solidFill>
+          <a:ln xmlns:a="http://schemas.openxmlformats.org/drawingml/2006/main" w="0">
+            <a:solidFill>
+              <a:srgbClr val="FFFFFF"/>
+            </a:solidFill>
+            <a:prstDash val="solid"/>
+          </a:ln>
+        </p:spPr>
+      </p:sp>
+      <p:pic>
+        <p:nvPicPr>
+          <p:cNvPr id="16" name=""/>
+          <p:cNvPicPr>
+            <a:picLocks xmlns:a="http://schemas.openxmlformats.org/drawingml/2006/main" noChangeAspect="1"/>
+          </p:cNvPicPr>
+          <p:nvPr/>
+        </p:nvPicPr>
+        <p:blipFill>
+          <a:blip xmlns:r="http://schemas.openxmlformats.org/officeDocument/2006/relationships" xmlns:a="http://schemas.openxmlformats.org/drawingml/2006/main" r:embed="R3ac9a89ea0cb44af"/>
+          <a:stretch xmlns:a="http://schemas.openxmlformats.org/drawingml/2006/main"/>
+        </p:blipFill>
+        <p:spPr>
+          <a:xfrm xmlns:a="http://schemas.openxmlformats.org/drawingml/2006/main">
+            <a:off x="6381750" y="1704295"/>
+            <a:ext cx="5314950" cy="3163661"/>
+          </a:xfrm>
+          <a:prstGeom xmlns:a="http://schemas.openxmlformats.org/drawingml/2006/main" prst="roundRect">
+            <a:avLst/>
+          </a:prstGeom>
+        </p:spPr>
+      </p:pic>
+    </p:spTree>
+    <p:extLst>
+      <p:ext uri="{BB962C8B-B14F-4D97-AF65-F5344CB8AC3E}">
+        <p14:creationId xmlns:p14="http://schemas.microsoft.com/office/powerpoint/2010/main" val="463436756"/>
+      </p:ext>
+    </p:extLst>
+  </p:cSld>
+</p:sld>
+</file>
+
+<file path=ppt/slides/slide16.xml><?xml version="1.0" encoding="utf-8"?>
+<p:sld xmlns:p="http://schemas.openxmlformats.org/presentationml/2006/main">
+  <p:cSld>
+    <p:spTree>
+      <p:nvGrpSpPr>
+        <p:cNvPr id="1" name=""/>
+        <p:cNvGrpSpPr/>
+        <p:nvPr/>
+      </p:nvGrpSpPr>
+      <p:grpSpPr>
+        <a:xfrm xmlns:a="http://schemas.openxmlformats.org/drawingml/2006/main"/>
+      </p:grpSpPr>
+      <p:sp>
+        <p:nvSpPr>
+          <p:cNvPr id="13" name="stat-card-1">
+            <a:extLst xmlns:a="http://schemas.openxmlformats.org/drawingml/2006/main">
+              <a:ext uri="{FF2B5EF4-FFF2-40B4-BE49-F238E27FC236}">
+                <a16:creationId xmlns:a16="http://schemas.microsoft.com/office/drawing/2014/main" id="{E92BF88A-D985-4E89-9220-AED80DBBCF70}"/>
+              </a:ext>
+            </a:extLst>
+          </p:cNvPr>
+          <p:cNvSpPr>
+            <a:spLocks xmlns:a="http://schemas.openxmlformats.org/drawingml/2006/main" noGrp="1"/>
+          </p:cNvSpPr>
+          <p:nvPr/>
+        </p:nvSpPr>
+        <p:spPr>
+          <a:xfrm xmlns:a="http://schemas.openxmlformats.org/drawingml/2006/main">
+            <a:off x="393668" y="3022568"/>
+            <a:ext cx="3568732" cy="2971800"/>
+          </a:xfrm>
+          <a:prstGeom xmlns:a="http://schemas.openxmlformats.org/drawingml/2006/main" prst="roundRect">
+            <a:avLst>
+              <a:gd name="adj" fmla="val 2564"/>
+            </a:avLst>
+          </a:prstGeom>
+          <a:solidFill xmlns:a="http://schemas.openxmlformats.org/drawingml/2006/main">
+            <a:srgbClr val="F2F2F2"/>
+          </a:solidFill>
+        </p:spPr>
+      </p:sp>
+      <p:sp>
+        <p:nvSpPr>
+          <p:cNvPr id="2" name="stat-card-2">
+            <a:extLst xmlns:a="http://schemas.openxmlformats.org/drawingml/2006/main">
+              <a:ext uri="{FF2B5EF4-FFF2-40B4-BE49-F238E27FC236}">
+                <a16:creationId xmlns:a16="http://schemas.microsoft.com/office/drawing/2014/main" id="{18F3FD71-2B01-497E-B7A5-AD72E3A3FA93}"/>
+              </a:ext>
+            </a:extLst>
+          </p:cNvPr>
+          <p:cNvSpPr>
+            <a:spLocks xmlns:a="http://schemas.openxmlformats.org/drawingml/2006/main" noGrp="1"/>
+          </p:cNvSpPr>
+          <p:nvPr/>
+        </p:nvSpPr>
+        <p:spPr>
+          <a:xfrm xmlns:a="http://schemas.openxmlformats.org/drawingml/2006/main">
+            <a:off x="4311682" y="3022568"/>
+            <a:ext cx="3568732" cy="2971800"/>
+          </a:xfrm>
+          <a:prstGeom xmlns:a="http://schemas.openxmlformats.org/drawingml/2006/main" prst="roundRect">
+            <a:avLst>
+              <a:gd name="adj" fmla="val 2564"/>
+            </a:avLst>
+          </a:prstGeom>
+          <a:solidFill xmlns:a="http://schemas.openxmlformats.org/drawingml/2006/main">
+            <a:srgbClr val="F2F2F2"/>
+          </a:solidFill>
+        </p:spPr>
+      </p:sp>
+      <p:sp>
+        <p:nvSpPr>
+          <p:cNvPr id="3" name="stat-card-3">
+            <a:extLst xmlns:a="http://schemas.openxmlformats.org/drawingml/2006/main">
+              <a:ext uri="{FF2B5EF4-FFF2-40B4-BE49-F238E27FC236}">
+                <a16:creationId xmlns:a16="http://schemas.microsoft.com/office/drawing/2014/main" id="{A256A665-F93B-46DB-A120-F2929BE31EAA}"/>
+              </a:ext>
+            </a:extLst>
+          </p:cNvPr>
+          <p:cNvSpPr>
+            <a:spLocks xmlns:a="http://schemas.openxmlformats.org/drawingml/2006/main" noGrp="1"/>
+          </p:cNvSpPr>
+          <p:nvPr/>
+        </p:nvSpPr>
+        <p:spPr>
+          <a:xfrm xmlns:a="http://schemas.openxmlformats.org/drawingml/2006/main">
+            <a:off x="8232267" y="3022568"/>
+            <a:ext cx="3568732" cy="2971800"/>
+          </a:xfrm>
+          <a:prstGeom xmlns:a="http://schemas.openxmlformats.org/drawingml/2006/main" prst="roundRect">
+            <a:avLst>
+              <a:gd name="adj" fmla="val 2564"/>
+            </a:avLst>
+          </a:prstGeom>
+          <a:solidFill xmlns:a="http://schemas.openxmlformats.org/drawingml/2006/main">
+            <a:srgbClr val="F2F2F2"/>
+          </a:solidFill>
+        </p:spPr>
+      </p:sp>
+      <p:sp>
+        <p:nvSpPr>
+          <p:cNvPr id="4" name="footer">
+            <a:extLst xmlns:a="http://schemas.openxmlformats.org/drawingml/2006/main">
+              <a:ext uri="{FF2B5EF4-FFF2-40B4-BE49-F238E27FC236}">
+                <a16:creationId xmlns:a16="http://schemas.microsoft.com/office/drawing/2014/main" id="{8B8FEAA9-7122-4602-AAFA-C856C71CAA69}"/>
+              </a:ext>
+            </a:extLst>
+          </p:cNvPr>
+          <p:cNvSpPr>
+            <a:spLocks xmlns:a="http://schemas.openxmlformats.org/drawingml/2006/main" noGrp="1"/>
+          </p:cNvSpPr>
+          <p:nvPr/>
+        </p:nvSpPr>
+        <p:spPr>
+          <a:xfrm xmlns:a="http://schemas.openxmlformats.org/drawingml/2006/main">
+            <a:off x="11279315" y="6279261"/>
+            <a:ext cx="518922" cy="241268"/>
+          </a:xfrm>
+          <a:prstGeom xmlns:a="http://schemas.openxmlformats.org/drawingml/2006/main" prst="rect">
+            <a:avLst/>
+          </a:prstGeom>
+        </p:spPr>
+        <p:txBody>
+          <a:bodyPr xmlns:a="http://schemas.openxmlformats.org/drawingml/2006/main" lIns="0" tIns="0" rIns="0" bIns="0" anchor="b"/>
+          <a:lstStyle xmlns:a="http://schemas.openxmlformats.org/drawingml/2006/main"/>
+          <a:p xmlns:a="http://schemas.openxmlformats.org/drawingml/2006/main">
+            <a:pPr algn="r">
+              <a:buNone/>
+              <a:defRPr sz="1000">
+                <a:solidFill>
+                  <a:srgbClr val="000000"/>
+                </a:solidFill>
+                <a:latin typeface="Helvetica Neue"/>
+                <a:ea typeface="Helvetica Neue"/>
+                <a:cs typeface="Helvetica Neue"/>
+              </a:defRPr>
+            </a:pPr>
+            <a:r>
+              <a:t>16</a:t>
+            </a:r>
+          </a:p>
+        </p:txBody>
+      </p:sp>
+      <p:sp>
+        <p:nvSpPr>
+          <p:cNvPr id="5" name="title">
+            <a:extLst xmlns:a="http://schemas.openxmlformats.org/drawingml/2006/main">
+              <a:ext uri="{FF2B5EF4-FFF2-40B4-BE49-F238E27FC236}">
+                <a16:creationId xmlns:a16="http://schemas.microsoft.com/office/drawing/2014/main" id="{6B999DAA-321B-4DEF-AC22-1F41A5B8E8C7}"/>
+              </a:ext>
+            </a:extLst>
+          </p:cNvPr>
+          <p:cNvSpPr>
+            <a:spLocks xmlns:a="http://schemas.openxmlformats.org/drawingml/2006/main" noGrp="1"/>
+          </p:cNvSpPr>
+          <p:nvPr/>
+        </p:nvSpPr>
+        <p:spPr>
+          <a:xfrm xmlns:a="http://schemas.openxmlformats.org/drawingml/2006/main">
+            <a:off x="393668" y="344043"/>
+            <a:ext cx="11404568" cy="1047464"/>
+          </a:xfrm>
+          <a:prstGeom xmlns:a="http://schemas.openxmlformats.org/drawingml/2006/main" prst="rect">
+            <a:avLst/>
+          </a:prstGeom>
+        </p:spPr>
+        <p:txBody>
+          <a:bodyPr xmlns:a="http://schemas.openxmlformats.org/drawingml/2006/main" lIns="0" tIns="0" rIns="0" bIns="0" anchor="t">
+            <a:normAutofit fontScale="100000"/>
+          </a:bodyPr>
+          <a:lstStyle xmlns:a="http://schemas.openxmlformats.org/drawingml/2006/main"/>
+          <a:p xmlns:a="http://schemas.openxmlformats.org/drawingml/2006/main">
+            <a:pPr algn="l">
+              <a:buNone/>
+              <a:defRPr sz="2900">
+                <a:solidFill>
+                  <a:srgbClr val="000000"/>
+                </a:solidFill>
+                <a:latin typeface="Helvetica Neue"/>
+                <a:ea typeface="Helvetica Neue"/>
+                <a:cs typeface="Helvetica Neue"/>
+              </a:defRPr>
+            </a:pPr>
+            <a:r>
+              <a:t>The categories failed for different reasons</a:t>
+            </a:r>
+          </a:p>
+        </p:txBody>
+      </p:sp>
+      <p:sp>
+        <p:nvSpPr>
+          <p:cNvPr id="6" name="intro">
+            <a:extLst xmlns:a="http://schemas.openxmlformats.org/drawingml/2006/main">
+              <a:ext uri="{FF2B5EF4-FFF2-40B4-BE49-F238E27FC236}">
+                <a16:creationId xmlns:a16="http://schemas.microsoft.com/office/drawing/2014/main" id="{B83D39E3-1D42-4CA4-A507-6C07CD200977}"/>
+              </a:ext>
+            </a:extLst>
+          </p:cNvPr>
+          <p:cNvSpPr>
+            <a:spLocks xmlns:a="http://schemas.openxmlformats.org/drawingml/2006/main" noGrp="1"/>
+          </p:cNvSpPr>
+          <p:nvPr/>
+        </p:nvSpPr>
+        <p:spPr>
+          <a:xfrm xmlns:a="http://schemas.openxmlformats.org/drawingml/2006/main">
+            <a:off x="393668" y="1219200"/>
+            <a:ext cx="11404568" cy="1428750"/>
+          </a:xfrm>
+          <a:prstGeom xmlns:a="http://schemas.openxmlformats.org/drawingml/2006/main" prst="rect">
+            <a:avLst/>
+          </a:prstGeom>
+        </p:spPr>
+        <p:txBody>
+          <a:bodyPr xmlns:a="http://schemas.openxmlformats.org/drawingml/2006/main" lIns="0" tIns="0" rIns="0" bIns="0" anchor="t">
+            <a:normAutofit fontScale="100000"/>
+          </a:bodyPr>
+          <a:lstStyle xmlns:a="http://schemas.openxmlformats.org/drawingml/2006/main"/>
+          <a:p xmlns:a="http://schemas.openxmlformats.org/drawingml/2006/main">
+            <a:pPr algn="l">
+              <a:buNone/>
+              <a:defRPr sz="1650">
+                <a:solidFill>
+                  <a:srgbClr val="000000"/>
+                </a:solidFill>
+                <a:latin typeface="Helvetica Neue"/>
+                <a:ea typeface="Helvetica Neue"/>
+                <a:cs typeface="Helvetica Neue"/>
+              </a:defRPr>
+            </a:pPr>
+            <a:r>
+              <a:t>This is more informative than a single failed pair: tight substitutes had too little gross movement after costs; looser exposures offered more movement but unreliable convergence; inverse pairs changed the trade itself.</a:t>
+            </a:r>
+          </a:p>
+        </p:txBody>
+      </p:sp>
+      <p:sp>
+        <p:nvSpPr>
+          <p:cNvPr id="7" name="stat-1">
+            <a:extLst xmlns:a="http://schemas.openxmlformats.org/drawingml/2006/main">
+              <a:ext uri="{FF2B5EF4-FFF2-40B4-BE49-F238E27FC236}">
+                <a16:creationId xmlns:a16="http://schemas.microsoft.com/office/drawing/2014/main" id="{CE99FBCB-3F61-4E2C-9916-C8B37E005A45}"/>
+              </a:ext>
+            </a:extLst>
+          </p:cNvPr>
+          <p:cNvSpPr>
+            <a:spLocks xmlns:a="http://schemas.openxmlformats.org/drawingml/2006/main" noGrp="1"/>
+          </p:cNvSpPr>
+          <p:nvPr/>
+        </p:nvSpPr>
+        <p:spPr>
+          <a:xfrm xmlns:a="http://schemas.openxmlformats.org/drawingml/2006/main">
+            <a:off x="702374" y="3429000"/>
+            <a:ext cx="2940082" cy="1359313"/>
+          </a:xfrm>
+          <a:prstGeom xmlns:a="http://schemas.openxmlformats.org/drawingml/2006/main" prst="rect">
+            <a:avLst/>
+          </a:prstGeom>
+        </p:spPr>
+        <p:txBody>
+          <a:bodyPr xmlns:a="http://schemas.openxmlformats.org/drawingml/2006/main" lIns="0" tIns="0" rIns="0" bIns="0" anchor="b">
+            <a:normAutofit fontScale="100000"/>
+          </a:bodyPr>
+          <a:lstStyle xmlns:a="http://schemas.openxmlformats.org/drawingml/2006/main"/>
+          <a:p xmlns:a="http://schemas.openxmlformats.org/drawingml/2006/main">
+            <a:pPr algn="l">
+              <a:buNone/>
+              <a:defRPr sz="3225">
+                <a:solidFill>
+                  <a:srgbClr val="64748B"/>
+                </a:solidFill>
+                <a:latin typeface="Helvetica Neue"/>
+                <a:ea typeface="Helvetica Neue"/>
+                <a:cs typeface="Helvetica Neue"/>
+              </a:defRPr>
+            </a:pPr>
+            <a:r>
+              <a:t>0 / 5</a:t>
+            </a:r>
+          </a:p>
+        </p:txBody>
+      </p:sp>
+      <p:sp>
+        <p:nvSpPr>
+          <p:cNvPr id="8" name="stat-label-1">
+            <a:extLst xmlns:a="http://schemas.openxmlformats.org/drawingml/2006/main">
+              <a:ext uri="{FF2B5EF4-FFF2-40B4-BE49-F238E27FC236}">
+                <a16:creationId xmlns:a16="http://schemas.microsoft.com/office/drawing/2014/main" id="{8D7A7BD1-1D20-421E-BAC5-DFF695BBE1AF}"/>
+              </a:ext>
+            </a:extLst>
+          </p:cNvPr>
+          <p:cNvSpPr>
+            <a:spLocks xmlns:a="http://schemas.openxmlformats.org/drawingml/2006/main" noGrp="1"/>
+          </p:cNvSpPr>
+          <p:nvPr/>
+        </p:nvSpPr>
+        <p:spPr>
+          <a:xfrm xmlns:a="http://schemas.openxmlformats.org/drawingml/2006/main">
+            <a:off x="702374" y="4900613"/>
+            <a:ext cx="2949607" cy="819150"/>
+          </a:xfrm>
+          <a:prstGeom xmlns:a="http://schemas.openxmlformats.org/drawingml/2006/main" prst="rect">
+            <a:avLst/>
+          </a:prstGeom>
+        </p:spPr>
+        <p:txBody>
+          <a:bodyPr xmlns:a="http://schemas.openxmlformats.org/drawingml/2006/main" lIns="0" tIns="45720" rIns="91440" bIns="45720" anchor="t">
+            <a:normAutofit fontScale="98050"/>
+          </a:bodyPr>
+          <a:lstStyle xmlns:a="http://schemas.openxmlformats.org/drawingml/2006/main"/>
+          <a:p xmlns:a="http://schemas.openxmlformats.org/drawingml/2006/main">
+            <a:pPr algn="l">
+              <a:buNone/>
+              <a:defRPr sz="1575">
+                <a:solidFill>
+                  <a:srgbClr val="000000"/>
+                </a:solidFill>
+                <a:latin typeface="Helvetica Neue"/>
+                <a:ea typeface="Helvetica Neue"/>
+                <a:cs typeface="Helvetica Neue"/>
+              </a:defRPr>
+            </a:pPr>
+            <a:r>
+              <a:t>Near substitutes with positive mean
+Costs overwhelmed tiny convergence</a:t>
+            </a:r>
+          </a:p>
+        </p:txBody>
+      </p:sp>
+      <p:sp>
+        <p:nvSpPr>
+          <p:cNvPr id="9" name="stat-2">
+            <a:extLst xmlns:a="http://schemas.openxmlformats.org/drawingml/2006/main">
+              <a:ext uri="{FF2B5EF4-FFF2-40B4-BE49-F238E27FC236}">
+                <a16:creationId xmlns:a16="http://schemas.microsoft.com/office/drawing/2014/main" id="{E572DBE1-8080-407B-A0FF-815818B837E6}"/>
+              </a:ext>
+            </a:extLst>
+          </p:cNvPr>
+          <p:cNvSpPr>
+            <a:spLocks xmlns:a="http://schemas.openxmlformats.org/drawingml/2006/main" noGrp="1"/>
+          </p:cNvSpPr>
+          <p:nvPr/>
+        </p:nvSpPr>
+        <p:spPr>
+          <a:xfrm xmlns:a="http://schemas.openxmlformats.org/drawingml/2006/main">
+            <a:off x="4612958" y="3429000"/>
+            <a:ext cx="2940082" cy="1359313"/>
+          </a:xfrm>
+          <a:prstGeom xmlns:a="http://schemas.openxmlformats.org/drawingml/2006/main" prst="rect">
+            <a:avLst/>
+          </a:prstGeom>
+        </p:spPr>
+        <p:txBody>
+          <a:bodyPr xmlns:a="http://schemas.openxmlformats.org/drawingml/2006/main" lIns="0" tIns="0" rIns="0" bIns="0" anchor="b">
+            <a:normAutofit fontScale="100000"/>
+          </a:bodyPr>
+          <a:lstStyle xmlns:a="http://schemas.openxmlformats.org/drawingml/2006/main"/>
+          <a:p xmlns:a="http://schemas.openxmlformats.org/drawingml/2006/main">
+            <a:pPr algn="l">
+              <a:buNone/>
+              <a:defRPr sz="3225">
+                <a:solidFill>
+                  <a:srgbClr val="B42318"/>
+                </a:solidFill>
+                <a:latin typeface="Helvetica Neue"/>
+                <a:ea typeface="Helvetica Neue"/>
+                <a:cs typeface="Helvetica Neue"/>
+              </a:defRPr>
+            </a:pPr>
+            <a:r>
+              <a:t>1 / 7</a:t>
+            </a:r>
+          </a:p>
+        </p:txBody>
+      </p:sp>
+      <p:sp>
+        <p:nvSpPr>
+          <p:cNvPr id="10" name="stat-label-2">
+            <a:extLst xmlns:a="http://schemas.openxmlformats.org/drawingml/2006/main">
+              <a:ext uri="{FF2B5EF4-FFF2-40B4-BE49-F238E27FC236}">
+                <a16:creationId xmlns:a16="http://schemas.microsoft.com/office/drawing/2014/main" id="{FD56EAD1-B269-48E0-9F23-33330F29DCE5}"/>
+              </a:ext>
+            </a:extLst>
+          </p:cNvPr>
+          <p:cNvSpPr>
+            <a:spLocks xmlns:a="http://schemas.openxmlformats.org/drawingml/2006/main" noGrp="1"/>
+          </p:cNvSpPr>
+          <p:nvPr/>
+        </p:nvSpPr>
+        <p:spPr>
+          <a:xfrm xmlns:a="http://schemas.openxmlformats.org/drawingml/2006/main">
+            <a:off x="4612958" y="4900613"/>
+            <a:ext cx="2949607" cy="819150"/>
+          </a:xfrm>
+          <a:prstGeom xmlns:a="http://schemas.openxmlformats.org/drawingml/2006/main" prst="rect">
+            <a:avLst/>
+          </a:prstGeom>
+        </p:spPr>
+        <p:txBody>
+          <a:bodyPr xmlns:a="http://schemas.openxmlformats.org/drawingml/2006/main" lIns="0" tIns="45720" rIns="91440" bIns="45720" anchor="t">
+            <a:normAutofit fontScale="100000"/>
+          </a:bodyPr>
+          <a:lstStyle xmlns:a="http://schemas.openxmlformats.org/drawingml/2006/main"/>
+          <a:p xmlns:a="http://schemas.openxmlformats.org/drawingml/2006/main">
+            <a:pPr algn="l">
+              <a:buNone/>
+              <a:defRPr sz="1575">
+                <a:solidFill>
+                  <a:srgbClr val="000000"/>
+                </a:solidFill>
+                <a:latin typeface="Helvetica Neue"/>
+                <a:ea typeface="Helvetica Neue"/>
+                <a:cs typeface="Helvetica Neue"/>
+              </a:defRPr>
+            </a:pPr>
+            <a:r>
+              <a:t>Related exposures with positive mean
+USO-XLE still failed four gates</a:t>
+            </a:r>
+          </a:p>
+        </p:txBody>
+      </p:sp>
+      <p:sp>
+        <p:nvSpPr>
+          <p:cNvPr id="11" name="stat-3">
+            <a:extLst xmlns:a="http://schemas.openxmlformats.org/drawingml/2006/main">
+              <a:ext uri="{FF2B5EF4-FFF2-40B4-BE49-F238E27FC236}">
+                <a16:creationId xmlns:a16="http://schemas.microsoft.com/office/drawing/2014/main" id="{9C6C64B0-28CA-4923-800E-94342CB69146}"/>
+              </a:ext>
+            </a:extLst>
+          </p:cNvPr>
+          <p:cNvSpPr>
+            <a:spLocks xmlns:a="http://schemas.openxmlformats.org/drawingml/2006/main" noGrp="1"/>
+          </p:cNvSpPr>
+          <p:nvPr/>
+        </p:nvSpPr>
+        <p:spPr>
+          <a:xfrm xmlns:a="http://schemas.openxmlformats.org/drawingml/2006/main">
+            <a:off x="8562404" y="3429000"/>
+            <a:ext cx="2940082" cy="1359313"/>
+          </a:xfrm>
+          <a:prstGeom xmlns:a="http://schemas.openxmlformats.org/drawingml/2006/main" prst="rect">
+            <a:avLst/>
+          </a:prstGeom>
+        </p:spPr>
+        <p:txBody>
+          <a:bodyPr xmlns:a="http://schemas.openxmlformats.org/drawingml/2006/main" lIns="0" tIns="0" rIns="0" bIns="0" anchor="b">
+            <a:normAutofit fontScale="100000"/>
+          </a:bodyPr>
+          <a:lstStyle xmlns:a="http://schemas.openxmlformats.org/drawingml/2006/main"/>
+          <a:p xmlns:a="http://schemas.openxmlformats.org/drawingml/2006/main">
+            <a:pPr algn="l">
+              <a:buNone/>
+              <a:defRPr sz="3225">
+                <a:solidFill>
+                  <a:srgbClr val="3D8DFF"/>
+                </a:solidFill>
+                <a:latin typeface="Helvetica Neue"/>
+                <a:ea typeface="Helvetica Neue"/>
+                <a:cs typeface="Helvetica Neue"/>
+              </a:defRPr>
+            </a:pPr>
+            <a:r>
+              <a:t>No trades</a:t>
+            </a:r>
+          </a:p>
+        </p:txBody>
+      </p:sp>
+      <p:sp>
+        <p:nvSpPr>
+          <p:cNvPr id="12" name="stat-label-3">
+            <a:extLst xmlns:a="http://schemas.openxmlformats.org/drawingml/2006/main">
+              <a:ext uri="{FF2B5EF4-FFF2-40B4-BE49-F238E27FC236}">
+                <a16:creationId xmlns:a16="http://schemas.microsoft.com/office/drawing/2014/main" id="{0ED31E12-360E-4FDB-B429-1A6368F41685}"/>
+              </a:ext>
+            </a:extLst>
+          </p:cNvPr>
+          <p:cNvSpPr>
+            <a:spLocks xmlns:a="http://schemas.openxmlformats.org/drawingml/2006/main" noGrp="1"/>
+          </p:cNvSpPr>
+          <p:nvPr/>
+        </p:nvSpPr>
+        <p:spPr>
+          <a:xfrm xmlns:a="http://schemas.openxmlformats.org/drawingml/2006/main">
+            <a:off x="8562404" y="4900613"/>
+            <a:ext cx="2949607" cy="819150"/>
+          </a:xfrm>
+          <a:prstGeom xmlns:a="http://schemas.openxmlformats.org/drawingml/2006/main" prst="rect">
+            <a:avLst/>
+          </a:prstGeom>
+        </p:spPr>
+        <p:txBody>
+          <a:bodyPr xmlns:a="http://schemas.openxmlformats.org/drawingml/2006/main" lIns="0" tIns="45720" rIns="91440" bIns="45720" anchor="t">
+            <a:normAutofit fontScale="100000"/>
+          </a:bodyPr>
+          <a:lstStyle xmlns:a="http://schemas.openxmlformats.org/drawingml/2006/main"/>
+          <a:p xmlns:a="http://schemas.openxmlformats.org/drawingml/2006/main">
+            <a:pPr algn="l">
+              <a:buNone/>
+              <a:defRPr sz="1575">
+                <a:solidFill>
+                  <a:srgbClr val="000000"/>
+                </a:solidFill>
+                <a:latin typeface="Helvetica Neue"/>
+                <a:ea typeface="Helvetica Neue"/>
+                <a:cs typeface="Helvetica Neue"/>
+              </a:defRPr>
+            </a:pPr>
+            <a:r>
+              <a:t>Inverse challengers had same-side semantics
+and unstable beta signs</a:t>
+            </a:r>
+          </a:p>
+        </p:txBody>
+      </p:sp>
+    </p:spTree>
+    <p:extLst>
+      <p:ext uri="{BB962C8B-B14F-4D97-AF65-F5344CB8AC3E}">
+        <p14:creationId xmlns:p14="http://schemas.microsoft.com/office/powerpoint/2010/main" val="1500261740"/>
+      </p:ext>
+    </p:extLst>
+  </p:cSld>
+</p:sld>
+</file>
+
+<file path=ppt/slides/slide17.xml><?xml version="1.0" encoding="utf-8"?>
+<p:sld xmlns:p="http://schemas.openxmlformats.org/presentationml/2006/main">
+  <p:cSld>
+    <p:spTree>
+      <p:nvGrpSpPr>
+        <p:cNvPr id="1" name=""/>
+        <p:cNvGrpSpPr/>
+        <p:nvPr/>
+      </p:nvGrpSpPr>
+      <p:grpSpPr>
+        <a:xfrm xmlns:a="http://schemas.openxmlformats.org/drawingml/2006/main"/>
+      </p:grpSpPr>
+      <p:sp>
+        <p:nvSpPr>
+          <p:cNvPr id="4" name="cover-headline">
+            <a:extLst xmlns:a="http://schemas.openxmlformats.org/drawingml/2006/main">
+              <a:ext uri="{FF2B5EF4-FFF2-40B4-BE49-F238E27FC236}">
+                <a16:creationId xmlns:a16="http://schemas.microsoft.com/office/drawing/2014/main" id="{E9F43BB9-4202-4A42-9916-7A06678333BD}"/>
+              </a:ext>
+            </a:extLst>
+          </p:cNvPr>
+          <p:cNvSpPr>
+            <a:spLocks xmlns:a="http://schemas.openxmlformats.org/drawingml/2006/main" noGrp="1"/>
+          </p:cNvSpPr>
+          <p:nvPr/>
+        </p:nvSpPr>
+        <p:spPr>
+          <a:xfrm xmlns:a="http://schemas.openxmlformats.org/drawingml/2006/main">
+            <a:off x="393668" y="1738789"/>
+            <a:ext cx="10287000" cy="2491454"/>
+          </a:xfrm>
+          <a:prstGeom xmlns:a="http://schemas.openxmlformats.org/drawingml/2006/main" prst="rect">
+            <a:avLst/>
+          </a:prstGeom>
+        </p:spPr>
+        <p:txBody>
+          <a:bodyPr xmlns:a="http://schemas.openxmlformats.org/drawingml/2006/main" lIns="0" tIns="0" rIns="0" bIns="0" anchor="b">
+            <a:normAutofit fontScale="99123"/>
+          </a:bodyPr>
+          <a:lstStyle xmlns:a="http://schemas.openxmlformats.org/drawingml/2006/main"/>
+          <a:p xmlns:a="http://schemas.openxmlformats.org/drawingml/2006/main">
+            <a:pPr algn="l">
+              <a:buNone/>
+              <a:defRPr sz="5700">
+                <a:solidFill>
+                  <a:srgbClr val="000000"/>
+                </a:solidFill>
+                <a:latin typeface="Helvetica Neue"/>
+                <a:ea typeface="Helvetica Neue"/>
+                <a:cs typeface="Helvetica Neue"/>
+              </a:defRPr>
+            </a:pPr>
+            <a:r>
+              <a:t>The template is useful.
+The frozen panel did not validate it.</a:t>
+            </a:r>
+          </a:p>
+        </p:txBody>
+      </p:sp>
+      <p:sp>
+        <p:nvSpPr>
+          <p:cNvPr id="2" name="cover-subtitle">
+            <a:extLst xmlns:a="http://schemas.openxmlformats.org/drawingml/2006/main">
+              <a:ext uri="{FF2B5EF4-FFF2-40B4-BE49-F238E27FC236}">
+                <a16:creationId xmlns:a16="http://schemas.microsoft.com/office/drawing/2014/main" id="{F6F90063-BA30-438B-9FD3-13AA22719785}"/>
+              </a:ext>
+            </a:extLst>
+          </p:cNvPr>
+          <p:cNvSpPr>
+            <a:spLocks xmlns:a="http://schemas.openxmlformats.org/drawingml/2006/main" noGrp="1"/>
+          </p:cNvSpPr>
+          <p:nvPr/>
+        </p:nvSpPr>
+        <p:spPr>
+          <a:xfrm xmlns:a="http://schemas.openxmlformats.org/drawingml/2006/main">
+            <a:off x="393668" y="4762500"/>
+            <a:ext cx="8001000" cy="1238250"/>
+          </a:xfrm>
+          <a:prstGeom xmlns:a="http://schemas.openxmlformats.org/drawingml/2006/main" prst="rect">
+            <a:avLst/>
+          </a:prstGeom>
+        </p:spPr>
+        <p:txBody>
+          <a:bodyPr xmlns:a="http://schemas.openxmlformats.org/drawingml/2006/main" lIns="0" tIns="0" rIns="0" bIns="0">
+            <a:normAutofit fontScale="100000"/>
+          </a:bodyPr>
+          <a:lstStyle xmlns:a="http://schemas.openxmlformats.org/drawingml/2006/main"/>
+          <a:p xmlns:a="http://schemas.openxmlformats.org/drawingml/2006/main">
+            <a:pPr algn="l">
+              <a:buNone/>
+              <a:defRPr sz="2250">
+                <a:solidFill>
+                  <a:srgbClr val="000000"/>
+                </a:solidFill>
+                <a:latin typeface="Helvetica Neue"/>
+                <a:ea typeface="Helvetica Neue"/>
+                <a:cs typeface="Helvetica Neue"/>
+              </a:defRPr>
+            </a:pPr>
+            <a:r>
+              <a:t>Keep USO-GLD as the canonical literature example and Panel A as breadth evidence. Do not select USO-XLE or vary the window after seeing these outcomes.</a:t>
+            </a:r>
+          </a:p>
+        </p:txBody>
+      </p:sp>
+      <p:sp>
+        <p:nvSpPr>
+          <p:cNvPr id="3" name="cover-eyebrow">
+            <a:extLst xmlns:a="http://schemas.openxmlformats.org/drawingml/2006/main">
+              <a:ext uri="{FF2B5EF4-FFF2-40B4-BE49-F238E27FC236}">
+                <a16:creationId xmlns:a16="http://schemas.microsoft.com/office/drawing/2014/main" id="{45129715-75DE-4D50-B44D-3AFE3EBA3F0E}"/>
+              </a:ext>
+            </a:extLst>
+          </p:cNvPr>
+          <p:cNvSpPr>
+            <a:spLocks xmlns:a="http://schemas.openxmlformats.org/drawingml/2006/main" noGrp="1"/>
+          </p:cNvSpPr>
+          <p:nvPr/>
+        </p:nvSpPr>
+        <p:spPr>
+          <a:xfrm xmlns:a="http://schemas.openxmlformats.org/drawingml/2006/main">
+            <a:off x="393668" y="392240"/>
+            <a:ext cx="7239000" cy="649129"/>
+          </a:xfrm>
+          <a:prstGeom xmlns:a="http://schemas.openxmlformats.org/drawingml/2006/main" prst="rect">
+            <a:avLst/>
+          </a:prstGeom>
+        </p:spPr>
+        <p:txBody>
+          <a:bodyPr xmlns:a="http://schemas.openxmlformats.org/drawingml/2006/main" lIns="0" tIns="0" rIns="0" bIns="0">
+            <a:normAutofit fontScale="100000"/>
+          </a:bodyPr>
+          <a:lstStyle xmlns:a="http://schemas.openxmlformats.org/drawingml/2006/main"/>
+          <a:p xmlns:a="http://schemas.openxmlformats.org/drawingml/2006/main">
+            <a:pPr algn="l">
+              <a:buNone/>
+              <a:defRPr sz="2250">
+                <a:solidFill>
+                  <a:srgbClr val="000000"/>
+                </a:solidFill>
+                <a:latin typeface="Helvetica Neue"/>
+                <a:ea typeface="Helvetica Neue"/>
+                <a:cs typeface="Helvetica Neue"/>
+              </a:defRPr>
+            </a:pPr>
+            <a:r>
+              <a:t>DECISION</a:t>
+            </a:r>
+          </a:p>
+        </p:txBody>
+      </p:sp>
+    </p:spTree>
+    <p:extLst>
+      <p:ext uri="{BB962C8B-B14F-4D97-AF65-F5344CB8AC3E}">
+        <p14:creationId xmlns:p14="http://schemas.microsoft.com/office/powerpoint/2010/main" val="1664240194"/>
       </p:ext>
     </p:extLst>
   </p:cSld>
@@ -2125,6 +5997,7 @@
           <a:lstStyle xmlns:a="http://schemas.openxmlformats.org/drawingml/2006/main"/>
           <a:p xmlns:a="http://schemas.openxmlformats.org/drawingml/2006/main">
             <a:pPr algn="r">
+              <a:buNone/>
               <a:defRPr sz="1000">
                 <a:solidFill>
                   <a:srgbClr val="000000"/>
@@ -2170,6 +6043,7 @@
           <a:lstStyle xmlns:a="http://schemas.openxmlformats.org/drawingml/2006/main"/>
           <a:p xmlns:a="http://schemas.openxmlformats.org/drawingml/2006/main">
             <a:pPr algn="l">
+              <a:buNone/>
               <a:defRPr sz="2900">
                 <a:solidFill>
                   <a:srgbClr val="000000"/>
@@ -2215,6 +6089,7 @@
           <a:lstStyle xmlns:a="http://schemas.openxmlformats.org/drawingml/2006/main"/>
           <a:p xmlns:a="http://schemas.openxmlformats.org/drawingml/2006/main">
             <a:pPr algn="l">
+              <a:buNone/>
               <a:defRPr sz="1650">
                 <a:solidFill>
                   <a:srgbClr val="000000"/>
@@ -2260,6 +6135,7 @@
           <a:lstStyle xmlns:a="http://schemas.openxmlformats.org/drawingml/2006/main"/>
           <a:p xmlns:a="http://schemas.openxmlformats.org/drawingml/2006/main">
             <a:pPr algn="l">
+              <a:buNone/>
               <a:defRPr sz="3225">
                 <a:solidFill>
                   <a:srgbClr val="3D8DFF"/>
@@ -2305,6 +6181,7 @@
           <a:lstStyle xmlns:a="http://schemas.openxmlformats.org/drawingml/2006/main"/>
           <a:p xmlns:a="http://schemas.openxmlformats.org/drawingml/2006/main">
             <a:pPr algn="l">
+              <a:buNone/>
               <a:defRPr sz="1575">
                 <a:solidFill>
                   <a:srgbClr val="000000"/>
@@ -2351,6 +6228,7 @@
           <a:lstStyle xmlns:a="http://schemas.openxmlformats.org/drawingml/2006/main"/>
           <a:p xmlns:a="http://schemas.openxmlformats.org/drawingml/2006/main">
             <a:pPr algn="l">
+              <a:buNone/>
               <a:defRPr sz="3225">
                 <a:solidFill>
                   <a:srgbClr val="000000"/>
@@ -2396,6 +6274,7 @@
           <a:lstStyle xmlns:a="http://schemas.openxmlformats.org/drawingml/2006/main"/>
           <a:p xmlns:a="http://schemas.openxmlformats.org/drawingml/2006/main">
             <a:pPr algn="l">
+              <a:buNone/>
               <a:defRPr sz="1575">
                 <a:solidFill>
                   <a:srgbClr val="000000"/>
@@ -2442,6 +6321,7 @@
           <a:lstStyle xmlns:a="http://schemas.openxmlformats.org/drawingml/2006/main"/>
           <a:p xmlns:a="http://schemas.openxmlformats.org/drawingml/2006/main">
             <a:pPr algn="l">
+              <a:buNone/>
               <a:defRPr sz="3225">
                 <a:solidFill>
                   <a:srgbClr val="000000"/>
@@ -2487,6 +6367,7 @@
           <a:lstStyle xmlns:a="http://schemas.openxmlformats.org/drawingml/2006/main"/>
           <a:p xmlns:a="http://schemas.openxmlformats.org/drawingml/2006/main">
             <a:pPr algn="l">
+              <a:buNone/>
               <a:defRPr sz="1575">
                 <a:solidFill>
                   <a:srgbClr val="000000"/>
@@ -2527,10 +6408,97 @@
       </p:grpSpPr>
       <p:sp>
         <p:nvSpPr>
-          <p:cNvPr id="6" name="footer">
-            <a:extLst xmlns:a="http://schemas.openxmlformats.org/drawingml/2006/main">
-              <a:ext uri="{FF2B5EF4-FFF2-40B4-BE49-F238E27FC236}">
-                <a16:creationId xmlns:a16="http://schemas.microsoft.com/office/drawing/2014/main" id="{4F272998-B60C-44E0-849E-A04A87223BAE}"/>
+          <p:cNvPr id="13" name="stat-card-1">
+            <a:extLst xmlns:a="http://schemas.openxmlformats.org/drawingml/2006/main">
+              <a:ext uri="{FF2B5EF4-FFF2-40B4-BE49-F238E27FC236}">
+                <a16:creationId xmlns:a16="http://schemas.microsoft.com/office/drawing/2014/main" id="{8D249104-692F-481F-82EC-326C84E9007D}"/>
+              </a:ext>
+            </a:extLst>
+          </p:cNvPr>
+          <p:cNvSpPr>
+            <a:spLocks xmlns:a="http://schemas.openxmlformats.org/drawingml/2006/main" noGrp="1"/>
+          </p:cNvSpPr>
+          <p:nvPr/>
+        </p:nvSpPr>
+        <p:spPr>
+          <a:xfrm xmlns:a="http://schemas.openxmlformats.org/drawingml/2006/main">
+            <a:off x="393668" y="3022568"/>
+            <a:ext cx="3568732" cy="2971800"/>
+          </a:xfrm>
+          <a:prstGeom xmlns:a="http://schemas.openxmlformats.org/drawingml/2006/main" prst="roundRect">
+            <a:avLst>
+              <a:gd name="adj" fmla="val 2564"/>
+            </a:avLst>
+          </a:prstGeom>
+          <a:solidFill xmlns:a="http://schemas.openxmlformats.org/drawingml/2006/main">
+            <a:srgbClr val="F2F2F2"/>
+          </a:solidFill>
+        </p:spPr>
+      </p:sp>
+      <p:sp>
+        <p:nvSpPr>
+          <p:cNvPr id="2" name="stat-card-2">
+            <a:extLst xmlns:a="http://schemas.openxmlformats.org/drawingml/2006/main">
+              <a:ext uri="{FF2B5EF4-FFF2-40B4-BE49-F238E27FC236}">
+                <a16:creationId xmlns:a16="http://schemas.microsoft.com/office/drawing/2014/main" id="{02412AD9-1F13-493C-BF6C-FD8BDE750CD9}"/>
+              </a:ext>
+            </a:extLst>
+          </p:cNvPr>
+          <p:cNvSpPr>
+            <a:spLocks xmlns:a="http://schemas.openxmlformats.org/drawingml/2006/main" noGrp="1"/>
+          </p:cNvSpPr>
+          <p:nvPr/>
+        </p:nvSpPr>
+        <p:spPr>
+          <a:xfrm xmlns:a="http://schemas.openxmlformats.org/drawingml/2006/main">
+            <a:off x="4311682" y="3022568"/>
+            <a:ext cx="3568732" cy="2971800"/>
+          </a:xfrm>
+          <a:prstGeom xmlns:a="http://schemas.openxmlformats.org/drawingml/2006/main" prst="roundRect">
+            <a:avLst>
+              <a:gd name="adj" fmla="val 2564"/>
+            </a:avLst>
+          </a:prstGeom>
+          <a:solidFill xmlns:a="http://schemas.openxmlformats.org/drawingml/2006/main">
+            <a:srgbClr val="F2F2F2"/>
+          </a:solidFill>
+        </p:spPr>
+      </p:sp>
+      <p:sp>
+        <p:nvSpPr>
+          <p:cNvPr id="3" name="stat-card-3">
+            <a:extLst xmlns:a="http://schemas.openxmlformats.org/drawingml/2006/main">
+              <a:ext uri="{FF2B5EF4-FFF2-40B4-BE49-F238E27FC236}">
+                <a16:creationId xmlns:a16="http://schemas.microsoft.com/office/drawing/2014/main" id="{63597CCF-F233-4A0C-BCFA-192F852FDBEA}"/>
+              </a:ext>
+            </a:extLst>
+          </p:cNvPr>
+          <p:cNvSpPr>
+            <a:spLocks xmlns:a="http://schemas.openxmlformats.org/drawingml/2006/main" noGrp="1"/>
+          </p:cNvSpPr>
+          <p:nvPr/>
+        </p:nvSpPr>
+        <p:spPr>
+          <a:xfrm xmlns:a="http://schemas.openxmlformats.org/drawingml/2006/main">
+            <a:off x="8232267" y="3022568"/>
+            <a:ext cx="3568732" cy="2971800"/>
+          </a:xfrm>
+          <a:prstGeom xmlns:a="http://schemas.openxmlformats.org/drawingml/2006/main" prst="roundRect">
+            <a:avLst>
+              <a:gd name="adj" fmla="val 2564"/>
+            </a:avLst>
+          </a:prstGeom>
+          <a:solidFill xmlns:a="http://schemas.openxmlformats.org/drawingml/2006/main">
+            <a:srgbClr val="F2F2F2"/>
+          </a:solidFill>
+        </p:spPr>
+      </p:sp>
+      <p:sp>
+        <p:nvSpPr>
+          <p:cNvPr id="4" name="footer">
+            <a:extLst xmlns:a="http://schemas.openxmlformats.org/drawingml/2006/main">
+              <a:ext uri="{FF2B5EF4-FFF2-40B4-BE49-F238E27FC236}">
+                <a16:creationId xmlns:a16="http://schemas.microsoft.com/office/drawing/2014/main" id="{11E272E4-82E7-4287-91C5-21E6B629F553}"/>
               </a:ext>
             </a:extLst>
           </p:cNvPr>
@@ -2553,6 +6521,7 @@
           <a:lstStyle xmlns:a="http://schemas.openxmlformats.org/drawingml/2006/main"/>
           <a:p xmlns:a="http://schemas.openxmlformats.org/drawingml/2006/main">
             <a:pPr algn="r">
+              <a:buNone/>
               <a:defRPr sz="1000">
                 <a:solidFill>
                   <a:srgbClr val="000000"/>
@@ -2570,10 +6539,10 @@
       </p:sp>
       <p:sp>
         <p:nvSpPr>
-          <p:cNvPr id="2" name="title">
-            <a:extLst xmlns:a="http://schemas.openxmlformats.org/drawingml/2006/main">
-              <a:ext uri="{FF2B5EF4-FFF2-40B4-BE49-F238E27FC236}">
-                <a16:creationId xmlns:a16="http://schemas.microsoft.com/office/drawing/2014/main" id="{8A16F9E5-1AF4-43B0-AB25-E3AE98294DF6}"/>
+          <p:cNvPr id="5" name="title">
+            <a:extLst xmlns:a="http://schemas.openxmlformats.org/drawingml/2006/main">
+              <a:ext uri="{FF2B5EF4-FFF2-40B4-BE49-F238E27FC236}">
+                <a16:creationId xmlns:a16="http://schemas.microsoft.com/office/drawing/2014/main" id="{A0ED332F-4F42-421E-99CF-097B6CBB5C19}"/>
               </a:ext>
             </a:extLst>
           </p:cNvPr>
@@ -2585,7 +6554,7 @@
         <p:spPr>
           <a:xfrm xmlns:a="http://schemas.openxmlformats.org/drawingml/2006/main">
             <a:off x="393668" y="344043"/>
-            <a:ext cx="5537168" cy="1143000"/>
+            <a:ext cx="11404568" cy="1047464"/>
           </a:xfrm>
           <a:prstGeom xmlns:a="http://schemas.openxmlformats.org/drawingml/2006/main" prst="rect">
             <a:avLst/>
@@ -2598,6 +6567,7 @@
           <a:lstStyle xmlns:a="http://schemas.openxmlformats.org/drawingml/2006/main"/>
           <a:p xmlns:a="http://schemas.openxmlformats.org/drawingml/2006/main">
             <a:pPr algn="l">
+              <a:buNone/>
               <a:defRPr sz="2900">
                 <a:solidFill>
                   <a:srgbClr val="000000"/>
@@ -2608,64 +6578,29 @@
               </a:defRPr>
             </a:pPr>
             <a:r>
-              <a:t>The frozen rule preserved the book's core mechanics</a:t>
-            </a:r>
-          </a:p>
-        </p:txBody>
-      </p:sp>
-      <p:sp>
-        <p:nvSpPr>
-          <p:cNvPr id="3" name="image-backing">
-            <a:extLst xmlns:a="http://schemas.openxmlformats.org/drawingml/2006/main">
-              <a:ext uri="{FF2B5EF4-FFF2-40B4-BE49-F238E27FC236}">
-                <a16:creationId xmlns:a16="http://schemas.microsoft.com/office/drawing/2014/main" id="{5EE0E946-4B2C-4DE9-8839-3DE0D30C8B61}"/>
-              </a:ext>
-            </a:extLst>
-          </p:cNvPr>
-          <p:cNvSpPr>
-            <a:spLocks xmlns:a="http://schemas.openxmlformats.org/drawingml/2006/main" noGrp="1"/>
-          </p:cNvSpPr>
-          <p:nvPr/>
-        </p:nvSpPr>
-        <p:spPr>
-          <a:xfrm xmlns:a="http://schemas.openxmlformats.org/drawingml/2006/main">
-            <a:off x="6269069" y="396431"/>
-            <a:ext cx="5539740" cy="5602034"/>
-          </a:xfrm>
-          <a:prstGeom xmlns:a="http://schemas.openxmlformats.org/drawingml/2006/main" prst="roundRect">
-            <a:avLst>
-              <a:gd name="adj" fmla="val 1376"/>
-            </a:avLst>
-          </a:prstGeom>
-          <a:solidFill xmlns:a="http://schemas.openxmlformats.org/drawingml/2006/main">
-            <a:srgbClr val="EAF5FB"/>
-          </a:solidFill>
-          <a:ln xmlns:a="http://schemas.openxmlformats.org/drawingml/2006/main" w="9525">
-            <a:solidFill>
-              <a:srgbClr val="B8BCC4"/>
-            </a:solidFill>
-            <a:prstDash val="solid"/>
-          </a:ln>
-        </p:spPr>
-      </p:sp>
-      <p:sp>
-        <p:nvSpPr>
-          <p:cNvPr id="4" name="body">
-            <a:extLst xmlns:a="http://schemas.openxmlformats.org/drawingml/2006/main">
-              <a:ext uri="{FF2B5EF4-FFF2-40B4-BE49-F238E27FC236}">
-                <a16:creationId xmlns:a16="http://schemas.microsoft.com/office/drawing/2014/main" id="{3E0CA677-50AA-4CCF-BC5C-CB90210AF27E}"/>
-              </a:ext>
-            </a:extLst>
-          </p:cNvPr>
-          <p:cNvSpPr>
-            <a:spLocks xmlns:a="http://schemas.openxmlformats.org/drawingml/2006/main" noGrp="1"/>
-          </p:cNvSpPr>
-          <p:nvPr/>
-        </p:nvSpPr>
-        <p:spPr>
-          <a:xfrm xmlns:a="http://schemas.openxmlformats.org/drawingml/2006/main">
-            <a:off x="393668" y="1695450"/>
-            <a:ext cx="5537168" cy="4238625"/>
+              <a:t>The hedge ratio is a local price-unit conversion</a:t>
+            </a:r>
+          </a:p>
+        </p:txBody>
+      </p:sp>
+      <p:sp>
+        <p:nvSpPr>
+          <p:cNvPr id="6" name="intro">
+            <a:extLst xmlns:a="http://schemas.openxmlformats.org/drawingml/2006/main">
+              <a:ext uri="{FF2B5EF4-FFF2-40B4-BE49-F238E27FC236}">
+                <a16:creationId xmlns:a16="http://schemas.microsoft.com/office/drawing/2014/main" id="{E3D1AF2D-950D-495D-BB07-182C768AD88F}"/>
+              </a:ext>
+            </a:extLst>
+          </p:cNvPr>
+          <p:cNvSpPr>
+            <a:spLocks xmlns:a="http://schemas.openxmlformats.org/drawingml/2006/main" noGrp="1"/>
+          </p:cNvSpPr>
+          <p:nvPr/>
+        </p:nvSpPr>
+        <p:spPr>
+          <a:xfrm xmlns:a="http://schemas.openxmlformats.org/drawingml/2006/main">
+            <a:off x="393668" y="1219200"/>
+            <a:ext cx="11404568" cy="1428750"/>
           </a:xfrm>
           <a:prstGeom xmlns:a="http://schemas.openxmlformats.org/drawingml/2006/main" prst="rect">
             <a:avLst/>
@@ -2678,7 +6613,8 @@
           <a:lstStyle xmlns:a="http://schemas.openxmlformats.org/drawingml/2006/main"/>
           <a:p xmlns:a="http://schemas.openxmlformats.org/drawingml/2006/main">
             <a:pPr algn="l">
-              <a:defRPr sz="1950">
+              <a:buNone/>
+              <a:defRPr sz="1650">
                 <a:solidFill>
                   <a:srgbClr val="000000"/>
                 </a:solidFill>
@@ -2688,45 +6624,294 @@
               </a:defRPr>
             </a:pPr>
             <a:r>
-              <a:t>Signal after close
-Execute next open
-Enter long below -1z
-Enter short above +1z
-Exit at zero
-One gross-normalized unit
-Daily adaptive rehedging
-5 bp per one-way weight change
-No stop, target, max hold, or retuning.</a:t>
-            </a:r>
-          </a:p>
-        </p:txBody>
-      </p:sp>
-      <p:pic>
-        <p:nvPicPr>
-          <p:cNvPr id="10" name=""/>
-          <p:cNvPicPr>
-            <a:picLocks xmlns:a="http://schemas.openxmlformats.org/drawingml/2006/main" noChangeAspect="1"/>
-          </p:cNvPicPr>
-          <p:nvPr/>
-        </p:nvPicPr>
-        <p:blipFill>
-          <a:blip xmlns:r="http://schemas.openxmlformats.org/officeDocument/2006/relationships" xmlns:a="http://schemas.openxmlformats.org/drawingml/2006/main" r:embed="R837b7a1f0bc04e08"/>
-          <a:stretch xmlns:a="http://schemas.openxmlformats.org/drawingml/2006/main"/>
-        </p:blipFill>
-        <p:spPr>
-          <a:xfrm xmlns:a="http://schemas.openxmlformats.org/drawingml/2006/main">
-            <a:off x="6381750" y="1776196"/>
-            <a:ext cx="5314950" cy="3019858"/>
-          </a:xfrm>
-          <a:prstGeom xmlns:a="http://schemas.openxmlformats.org/drawingml/2006/main" prst="roundRect">
-            <a:avLst/>
-          </a:prstGeom>
-        </p:spPr>
-      </p:pic>
+              <a:t>At each close, regress Y on X using only the latest 20 closes: Y = alpha + beta X + error. Beta is an OLS slope, not correlation and not a claim of causality.</a:t>
+            </a:r>
+          </a:p>
+        </p:txBody>
+      </p:sp>
+      <p:sp>
+        <p:nvSpPr>
+          <p:cNvPr id="7" name="stat-1">
+            <a:extLst xmlns:a="http://schemas.openxmlformats.org/drawingml/2006/main">
+              <a:ext uri="{FF2B5EF4-FFF2-40B4-BE49-F238E27FC236}">
+                <a16:creationId xmlns:a16="http://schemas.microsoft.com/office/drawing/2014/main" id="{447A29C0-2600-4241-BF6B-6797417FC507}"/>
+              </a:ext>
+            </a:extLst>
+          </p:cNvPr>
+          <p:cNvSpPr>
+            <a:spLocks xmlns:a="http://schemas.openxmlformats.org/drawingml/2006/main" noGrp="1"/>
+          </p:cNvSpPr>
+          <p:nvPr/>
+        </p:nvSpPr>
+        <p:spPr>
+          <a:xfrm xmlns:a="http://schemas.openxmlformats.org/drawingml/2006/main">
+            <a:off x="702374" y="3429000"/>
+            <a:ext cx="2940082" cy="1359313"/>
+          </a:xfrm>
+          <a:prstGeom xmlns:a="http://schemas.openxmlformats.org/drawingml/2006/main" prst="rect">
+            <a:avLst/>
+          </a:prstGeom>
+        </p:spPr>
+        <p:txBody>
+          <a:bodyPr xmlns:a="http://schemas.openxmlformats.org/drawingml/2006/main" lIns="0" tIns="0" rIns="0" bIns="0" anchor="b">
+            <a:normAutofit fontScale="100000"/>
+          </a:bodyPr>
+          <a:lstStyle xmlns:a="http://schemas.openxmlformats.org/drawingml/2006/main"/>
+          <a:p xmlns:a="http://schemas.openxmlformats.org/drawingml/2006/main">
+            <a:pPr algn="l">
+              <a:buNone/>
+              <a:defRPr sz="3225">
+                <a:solidFill>
+                  <a:srgbClr val="3D8DFF"/>
+                </a:solidFill>
+                <a:latin typeface="Helvetica Neue"/>
+                <a:ea typeface="Helvetica Neue"/>
+                <a:cs typeface="Helvetica Neue"/>
+              </a:defRPr>
+            </a:pPr>
+            <a:r>
+              <a:t>β = Cov(X,Y) / Var(X)</a:t>
+            </a:r>
+          </a:p>
+        </p:txBody>
+      </p:sp>
+      <p:sp>
+        <p:nvSpPr>
+          <p:cNvPr id="8" name="stat-label-1">
+            <a:extLst xmlns:a="http://schemas.openxmlformats.org/drawingml/2006/main">
+              <a:ext uri="{FF2B5EF4-FFF2-40B4-BE49-F238E27FC236}">
+                <a16:creationId xmlns:a16="http://schemas.microsoft.com/office/drawing/2014/main" id="{1D2A853D-A304-477D-B8B8-F77F0101AC08}"/>
+              </a:ext>
+            </a:extLst>
+          </p:cNvPr>
+          <p:cNvSpPr>
+            <a:spLocks xmlns:a="http://schemas.openxmlformats.org/drawingml/2006/main" noGrp="1"/>
+          </p:cNvSpPr>
+          <p:nvPr/>
+        </p:nvSpPr>
+        <p:spPr>
+          <a:xfrm xmlns:a="http://schemas.openxmlformats.org/drawingml/2006/main">
+            <a:off x="702374" y="4900613"/>
+            <a:ext cx="2949607" cy="819150"/>
+          </a:xfrm>
+          <a:prstGeom xmlns:a="http://schemas.openxmlformats.org/drawingml/2006/main" prst="rect">
+            <a:avLst/>
+          </a:prstGeom>
+        </p:spPr>
+        <p:txBody>
+          <a:bodyPr xmlns:a="http://schemas.openxmlformats.org/drawingml/2006/main" lIns="0" tIns="45720" rIns="91440" bIns="45720" anchor="t">
+            <a:normAutofit fontScale="100000"/>
+          </a:bodyPr>
+          <a:lstStyle xmlns:a="http://schemas.openxmlformats.org/drawingml/2006/main"/>
+          <a:p xmlns:a="http://schemas.openxmlformats.org/drawingml/2006/main">
+            <a:pPr algn="l">
+              <a:buNone/>
+              <a:defRPr sz="1575">
+                <a:solidFill>
+                  <a:srgbClr val="000000"/>
+                </a:solidFill>
+                <a:latin typeface="Helvetica Neue"/>
+                <a:ea typeface="Helvetica Neue"/>
+                <a:cs typeface="Helvetica Neue"/>
+              </a:defRPr>
+            </a:pPr>
+            <a:r>
+              <a:t>Slope: expected price-unit change in Y
+per one-unit change in X</a:t>
+            </a:r>
+          </a:p>
+        </p:txBody>
+      </p:sp>
+      <p:sp>
+        <p:nvSpPr>
+          <p:cNvPr id="9" name="stat-2">
+            <a:extLst xmlns:a="http://schemas.openxmlformats.org/drawingml/2006/main">
+              <a:ext uri="{FF2B5EF4-FFF2-40B4-BE49-F238E27FC236}">
+                <a16:creationId xmlns:a16="http://schemas.microsoft.com/office/drawing/2014/main" id="{342C60B8-5C35-4607-932D-DFD8E206B634}"/>
+              </a:ext>
+            </a:extLst>
+          </p:cNvPr>
+          <p:cNvSpPr>
+            <a:spLocks xmlns:a="http://schemas.openxmlformats.org/drawingml/2006/main" noGrp="1"/>
+          </p:cNvSpPr>
+          <p:nvPr/>
+        </p:nvSpPr>
+        <p:spPr>
+          <a:xfrm xmlns:a="http://schemas.openxmlformats.org/drawingml/2006/main">
+            <a:off x="4612958" y="3429000"/>
+            <a:ext cx="2940082" cy="1359313"/>
+          </a:xfrm>
+          <a:prstGeom xmlns:a="http://schemas.openxmlformats.org/drawingml/2006/main" prst="rect">
+            <a:avLst/>
+          </a:prstGeom>
+        </p:spPr>
+        <p:txBody>
+          <a:bodyPr xmlns:a="http://schemas.openxmlformats.org/drawingml/2006/main" lIns="0" tIns="0" rIns="0" bIns="0" anchor="b">
+            <a:normAutofit fontScale="100000"/>
+          </a:bodyPr>
+          <a:lstStyle xmlns:a="http://schemas.openxmlformats.org/drawingml/2006/main"/>
+          <a:p xmlns:a="http://schemas.openxmlformats.org/drawingml/2006/main">
+            <a:pPr algn="l">
+              <a:buNone/>
+              <a:defRPr sz="3225">
+                <a:solidFill>
+                  <a:srgbClr val="000000"/>
+                </a:solidFill>
+                <a:latin typeface="Helvetica Neue"/>
+                <a:ea typeface="Helvetica Neue"/>
+                <a:cs typeface="Helvetica Neue"/>
+              </a:defRPr>
+            </a:pPr>
+            <a:r>
+              <a:t>α = Ȳ − βX̄</a:t>
+            </a:r>
+          </a:p>
+        </p:txBody>
+      </p:sp>
+      <p:sp>
+        <p:nvSpPr>
+          <p:cNvPr id="10" name="stat-label-2">
+            <a:extLst xmlns:a="http://schemas.openxmlformats.org/drawingml/2006/main">
+              <a:ext uri="{FF2B5EF4-FFF2-40B4-BE49-F238E27FC236}">
+                <a16:creationId xmlns:a16="http://schemas.microsoft.com/office/drawing/2014/main" id="{3123331A-6BB6-4FC3-B18C-EE98C6A8FF13}"/>
+              </a:ext>
+            </a:extLst>
+          </p:cNvPr>
+          <p:cNvSpPr>
+            <a:spLocks xmlns:a="http://schemas.openxmlformats.org/drawingml/2006/main" noGrp="1"/>
+          </p:cNvSpPr>
+          <p:nvPr/>
+        </p:nvSpPr>
+        <p:spPr>
+          <a:xfrm xmlns:a="http://schemas.openxmlformats.org/drawingml/2006/main">
+            <a:off x="4612958" y="4900613"/>
+            <a:ext cx="2949607" cy="819150"/>
+          </a:xfrm>
+          <a:prstGeom xmlns:a="http://schemas.openxmlformats.org/drawingml/2006/main" prst="rect">
+            <a:avLst/>
+          </a:prstGeom>
+        </p:spPr>
+        <p:txBody>
+          <a:bodyPr xmlns:a="http://schemas.openxmlformats.org/drawingml/2006/main" lIns="0" tIns="45720" rIns="91440" bIns="45720" anchor="t">
+            <a:normAutofit fontScale="100000"/>
+          </a:bodyPr>
+          <a:lstStyle xmlns:a="http://schemas.openxmlformats.org/drawingml/2006/main"/>
+          <a:p xmlns:a="http://schemas.openxmlformats.org/drawingml/2006/main">
+            <a:pPr algn="l">
+              <a:buNone/>
+              <a:defRPr sz="1575">
+                <a:solidFill>
+                  <a:srgbClr val="000000"/>
+                </a:solidFill>
+                <a:latin typeface="Helvetica Neue"/>
+                <a:ea typeface="Helvetica Neue"/>
+                <a:cs typeface="Helvetica Neue"/>
+              </a:defRPr>
+            </a:pPr>
+            <a:r>
+              <a:t>Estimated in the regression
+but omitted from the traded spread</a:t>
+            </a:r>
+          </a:p>
+        </p:txBody>
+      </p:sp>
+      <p:sp>
+        <p:nvSpPr>
+          <p:cNvPr id="11" name="stat-3">
+            <a:extLst xmlns:a="http://schemas.openxmlformats.org/drawingml/2006/main">
+              <a:ext uri="{FF2B5EF4-FFF2-40B4-BE49-F238E27FC236}">
+                <a16:creationId xmlns:a16="http://schemas.microsoft.com/office/drawing/2014/main" id="{A0AD0C21-BC31-4957-B0CB-525311D4386F}"/>
+              </a:ext>
+            </a:extLst>
+          </p:cNvPr>
+          <p:cNvSpPr>
+            <a:spLocks xmlns:a="http://schemas.openxmlformats.org/drawingml/2006/main" noGrp="1"/>
+          </p:cNvSpPr>
+          <p:nvPr/>
+        </p:nvSpPr>
+        <p:spPr>
+          <a:xfrm xmlns:a="http://schemas.openxmlformats.org/drawingml/2006/main">
+            <a:off x="8562404" y="3429000"/>
+            <a:ext cx="2940082" cy="1359313"/>
+          </a:xfrm>
+          <a:prstGeom xmlns:a="http://schemas.openxmlformats.org/drawingml/2006/main" prst="rect">
+            <a:avLst/>
+          </a:prstGeom>
+        </p:spPr>
+        <p:txBody>
+          <a:bodyPr xmlns:a="http://schemas.openxmlformats.org/drawingml/2006/main" lIns="0" tIns="0" rIns="0" bIns="0" anchor="b">
+            <a:normAutofit fontScale="100000"/>
+          </a:bodyPr>
+          <a:lstStyle xmlns:a="http://schemas.openxmlformats.org/drawingml/2006/main"/>
+          <a:p xmlns:a="http://schemas.openxmlformats.org/drawingml/2006/main">
+            <a:pPr algn="l">
+              <a:buNone/>
+              <a:defRPr sz="3225">
+                <a:solidFill>
+                  <a:srgbClr val="000000"/>
+                </a:solidFill>
+                <a:latin typeface="Helvetica Neue"/>
+                <a:ea typeface="Helvetica Neue"/>
+                <a:cs typeface="Helvetica Neue"/>
+              </a:defRPr>
+            </a:pPr>
+            <a:r>
+              <a:t>Backward only</a:t>
+            </a:r>
+          </a:p>
+        </p:txBody>
+      </p:sp>
+      <p:sp>
+        <p:nvSpPr>
+          <p:cNvPr id="12" name="stat-label-3">
+            <a:extLst xmlns:a="http://schemas.openxmlformats.org/drawingml/2006/main">
+              <a:ext uri="{FF2B5EF4-FFF2-40B4-BE49-F238E27FC236}">
+                <a16:creationId xmlns:a16="http://schemas.microsoft.com/office/drawing/2014/main" id="{86C9D445-5711-4319-B967-D72E959CA06D}"/>
+              </a:ext>
+            </a:extLst>
+          </p:cNvPr>
+          <p:cNvSpPr>
+            <a:spLocks xmlns:a="http://schemas.openxmlformats.org/drawingml/2006/main" noGrp="1"/>
+          </p:cNvSpPr>
+          <p:nvPr/>
+        </p:nvSpPr>
+        <p:spPr>
+          <a:xfrm xmlns:a="http://schemas.openxmlformats.org/drawingml/2006/main">
+            <a:off x="8562404" y="4900613"/>
+            <a:ext cx="2949607" cy="819150"/>
+          </a:xfrm>
+          <a:prstGeom xmlns:a="http://schemas.openxmlformats.org/drawingml/2006/main" prst="rect">
+            <a:avLst/>
+          </a:prstGeom>
+        </p:spPr>
+        <p:txBody>
+          <a:bodyPr xmlns:a="http://schemas.openxmlformats.org/drawingml/2006/main" lIns="0" tIns="45720" rIns="91440" bIns="45720" anchor="t">
+            <a:normAutofit fontScale="100000"/>
+          </a:bodyPr>
+          <a:lstStyle xmlns:a="http://schemas.openxmlformats.org/drawingml/2006/main"/>
+          <a:p xmlns:a="http://schemas.openxmlformats.org/drawingml/2006/main">
+            <a:pPr algn="l">
+              <a:buNone/>
+              <a:defRPr sz="1575">
+                <a:solidFill>
+                  <a:srgbClr val="000000"/>
+                </a:solidFill>
+                <a:latin typeface="Helvetica Neue"/>
+                <a:ea typeface="Helvetica Neue"/>
+                <a:cs typeface="Helvetica Neue"/>
+              </a:defRPr>
+            </a:pPr>
+            <a:r>
+              <a:t>The window ends at close t
+No future observations</a:t>
+            </a:r>
+          </a:p>
+        </p:txBody>
+      </p:sp>
     </p:spTree>
     <p:extLst>
       <p:ext uri="{BB962C8B-B14F-4D97-AF65-F5344CB8AC3E}">
-        <p14:creationId xmlns:p14="http://schemas.microsoft.com/office/powerpoint/2010/main" val="1873340891"/>
+        <p14:creationId xmlns:p14="http://schemas.microsoft.com/office/powerpoint/2010/main" val="2098249639"/>
       </p:ext>
     </p:extLst>
   </p:cSld>
@@ -2747,10 +6932,97 @@
       </p:grpSpPr>
       <p:sp>
         <p:nvSpPr>
-          <p:cNvPr id="11" name="footer">
-            <a:extLst xmlns:a="http://schemas.openxmlformats.org/drawingml/2006/main">
-              <a:ext uri="{FF2B5EF4-FFF2-40B4-BE49-F238E27FC236}">
-                <a16:creationId xmlns:a16="http://schemas.microsoft.com/office/drawing/2014/main" id="{9833E848-7434-4F2E-A17C-B17541CAE597}"/>
+          <p:cNvPr id="13" name="stat-card-1">
+            <a:extLst xmlns:a="http://schemas.openxmlformats.org/drawingml/2006/main">
+              <a:ext uri="{FF2B5EF4-FFF2-40B4-BE49-F238E27FC236}">
+                <a16:creationId xmlns:a16="http://schemas.microsoft.com/office/drawing/2014/main" id="{8D249104-692F-481F-82EC-326C84E9007D}"/>
+              </a:ext>
+            </a:extLst>
+          </p:cNvPr>
+          <p:cNvSpPr>
+            <a:spLocks xmlns:a="http://schemas.openxmlformats.org/drawingml/2006/main" noGrp="1"/>
+          </p:cNvSpPr>
+          <p:nvPr/>
+        </p:nvSpPr>
+        <p:spPr>
+          <a:xfrm xmlns:a="http://schemas.openxmlformats.org/drawingml/2006/main">
+            <a:off x="393668" y="3022568"/>
+            <a:ext cx="3568732" cy="2971800"/>
+          </a:xfrm>
+          <a:prstGeom xmlns:a="http://schemas.openxmlformats.org/drawingml/2006/main" prst="roundRect">
+            <a:avLst>
+              <a:gd name="adj" fmla="val 2564"/>
+            </a:avLst>
+          </a:prstGeom>
+          <a:solidFill xmlns:a="http://schemas.openxmlformats.org/drawingml/2006/main">
+            <a:srgbClr val="F2F2F2"/>
+          </a:solidFill>
+        </p:spPr>
+      </p:sp>
+      <p:sp>
+        <p:nvSpPr>
+          <p:cNvPr id="2" name="stat-card-2">
+            <a:extLst xmlns:a="http://schemas.openxmlformats.org/drawingml/2006/main">
+              <a:ext uri="{FF2B5EF4-FFF2-40B4-BE49-F238E27FC236}">
+                <a16:creationId xmlns:a16="http://schemas.microsoft.com/office/drawing/2014/main" id="{02412AD9-1F13-493C-BF6C-FD8BDE750CD9}"/>
+              </a:ext>
+            </a:extLst>
+          </p:cNvPr>
+          <p:cNvSpPr>
+            <a:spLocks xmlns:a="http://schemas.openxmlformats.org/drawingml/2006/main" noGrp="1"/>
+          </p:cNvSpPr>
+          <p:nvPr/>
+        </p:nvSpPr>
+        <p:spPr>
+          <a:xfrm xmlns:a="http://schemas.openxmlformats.org/drawingml/2006/main">
+            <a:off x="4311682" y="3022568"/>
+            <a:ext cx="3568732" cy="2971800"/>
+          </a:xfrm>
+          <a:prstGeom xmlns:a="http://schemas.openxmlformats.org/drawingml/2006/main" prst="roundRect">
+            <a:avLst>
+              <a:gd name="adj" fmla="val 2564"/>
+            </a:avLst>
+          </a:prstGeom>
+          <a:solidFill xmlns:a="http://schemas.openxmlformats.org/drawingml/2006/main">
+            <a:srgbClr val="F2F2F2"/>
+          </a:solidFill>
+        </p:spPr>
+      </p:sp>
+      <p:sp>
+        <p:nvSpPr>
+          <p:cNvPr id="3" name="stat-card-3">
+            <a:extLst xmlns:a="http://schemas.openxmlformats.org/drawingml/2006/main">
+              <a:ext uri="{FF2B5EF4-FFF2-40B4-BE49-F238E27FC236}">
+                <a16:creationId xmlns:a16="http://schemas.microsoft.com/office/drawing/2014/main" id="{63597CCF-F233-4A0C-BCFA-192F852FDBEA}"/>
+              </a:ext>
+            </a:extLst>
+          </p:cNvPr>
+          <p:cNvSpPr>
+            <a:spLocks xmlns:a="http://schemas.openxmlformats.org/drawingml/2006/main" noGrp="1"/>
+          </p:cNvSpPr>
+          <p:nvPr/>
+        </p:nvSpPr>
+        <p:spPr>
+          <a:xfrm xmlns:a="http://schemas.openxmlformats.org/drawingml/2006/main">
+            <a:off x="8232267" y="3022568"/>
+            <a:ext cx="3568732" cy="2971800"/>
+          </a:xfrm>
+          <a:prstGeom xmlns:a="http://schemas.openxmlformats.org/drawingml/2006/main" prst="roundRect">
+            <a:avLst>
+              <a:gd name="adj" fmla="val 2564"/>
+            </a:avLst>
+          </a:prstGeom>
+          <a:solidFill xmlns:a="http://schemas.openxmlformats.org/drawingml/2006/main">
+            <a:srgbClr val="F2F2F2"/>
+          </a:solidFill>
+        </p:spPr>
+      </p:sp>
+      <p:sp>
+        <p:nvSpPr>
+          <p:cNvPr id="4" name="footer">
+            <a:extLst xmlns:a="http://schemas.openxmlformats.org/drawingml/2006/main">
+              <a:ext uri="{FF2B5EF4-FFF2-40B4-BE49-F238E27FC236}">
+                <a16:creationId xmlns:a16="http://schemas.microsoft.com/office/drawing/2014/main" id="{11E272E4-82E7-4287-91C5-21E6B629F553}"/>
               </a:ext>
             </a:extLst>
           </p:cNvPr>
@@ -2773,6 +7045,7 @@
           <a:lstStyle xmlns:a="http://schemas.openxmlformats.org/drawingml/2006/main"/>
           <a:p xmlns:a="http://schemas.openxmlformats.org/drawingml/2006/main">
             <a:pPr algn="r">
+              <a:buNone/>
               <a:defRPr sz="1000">
                 <a:solidFill>
                   <a:srgbClr val="000000"/>
@@ -2790,10 +7063,10 @@
       </p:sp>
       <p:sp>
         <p:nvSpPr>
-          <p:cNvPr id="2" name="title">
-            <a:extLst xmlns:a="http://schemas.openxmlformats.org/drawingml/2006/main">
-              <a:ext uri="{FF2B5EF4-FFF2-40B4-BE49-F238E27FC236}">
-                <a16:creationId xmlns:a16="http://schemas.microsoft.com/office/drawing/2014/main" id="{317B658F-9EDE-4B04-B790-BFC2AB1127A9}"/>
+          <p:cNvPr id="5" name="title">
+            <a:extLst xmlns:a="http://schemas.openxmlformats.org/drawingml/2006/main">
+              <a:ext uri="{FF2B5EF4-FFF2-40B4-BE49-F238E27FC236}">
+                <a16:creationId xmlns:a16="http://schemas.microsoft.com/office/drawing/2014/main" id="{A0ED332F-4F42-421E-99CF-097B6CBB5C19}"/>
               </a:ext>
             </a:extLst>
           </p:cNvPr>
@@ -2818,6 +7091,7 @@
           <a:lstStyle xmlns:a="http://schemas.openxmlformats.org/drawingml/2006/main"/>
           <a:p xmlns:a="http://schemas.openxmlformats.org/drawingml/2006/main">
             <a:pPr algn="l">
+              <a:buNone/>
               <a:defRPr sz="2900">
                 <a:solidFill>
                   <a:srgbClr val="000000"/>
@@ -2828,87 +7102,29 @@
               </a:defRPr>
             </a:pPr>
             <a:r>
-              <a:t>A stationary-looking spread was not a trading edge</a:t>
-            </a:r>
-          </a:p>
-        </p:txBody>
-      </p:sp>
-      <p:sp>
-        <p:nvSpPr>
-          <p:cNvPr id="3" name="left-stat-card">
-            <a:extLst xmlns:a="http://schemas.openxmlformats.org/drawingml/2006/main">
-              <a:ext uri="{FF2B5EF4-FFF2-40B4-BE49-F238E27FC236}">
-                <a16:creationId xmlns:a16="http://schemas.microsoft.com/office/drawing/2014/main" id="{CB5A1905-9B52-4859-9721-FAA37599F253}"/>
-              </a:ext>
-            </a:extLst>
-          </p:cNvPr>
-          <p:cNvSpPr>
-            <a:spLocks xmlns:a="http://schemas.openxmlformats.org/drawingml/2006/main" noGrp="1"/>
-          </p:cNvSpPr>
-          <p:nvPr/>
-        </p:nvSpPr>
-        <p:spPr>
-          <a:xfrm xmlns:a="http://schemas.openxmlformats.org/drawingml/2006/main">
-            <a:off x="6272022" y="3360039"/>
-            <a:ext cx="2581942" cy="2656523"/>
-          </a:xfrm>
-          <a:prstGeom xmlns:a="http://schemas.openxmlformats.org/drawingml/2006/main" prst="roundRect">
-            <a:avLst>
-              <a:gd name="adj" fmla="val 2951"/>
-            </a:avLst>
-          </a:prstGeom>
-          <a:solidFill xmlns:a="http://schemas.openxmlformats.org/drawingml/2006/main">
-            <a:srgbClr val="F2F2F2"/>
-          </a:solidFill>
-        </p:spPr>
-      </p:sp>
-      <p:sp>
-        <p:nvSpPr>
-          <p:cNvPr id="4" name="right-stat-card">
-            <a:extLst xmlns:a="http://schemas.openxmlformats.org/drawingml/2006/main">
-              <a:ext uri="{FF2B5EF4-FFF2-40B4-BE49-F238E27FC236}">
-                <a16:creationId xmlns:a16="http://schemas.microsoft.com/office/drawing/2014/main" id="{6D7A92E4-990F-443E-AA22-280485C87531}"/>
-              </a:ext>
-            </a:extLst>
-          </p:cNvPr>
-          <p:cNvSpPr>
-            <a:spLocks xmlns:a="http://schemas.openxmlformats.org/drawingml/2006/main" noGrp="1"/>
-          </p:cNvSpPr>
-          <p:nvPr/>
-        </p:nvSpPr>
-        <p:spPr>
-          <a:xfrm xmlns:a="http://schemas.openxmlformats.org/drawingml/2006/main">
-            <a:off x="9224201" y="3360039"/>
-            <a:ext cx="2581942" cy="2656523"/>
-          </a:xfrm>
-          <a:prstGeom xmlns:a="http://schemas.openxmlformats.org/drawingml/2006/main" prst="roundRect">
-            <a:avLst>
-              <a:gd name="adj" fmla="val 2951"/>
-            </a:avLst>
-          </a:prstGeom>
-          <a:solidFill xmlns:a="http://schemas.openxmlformats.org/drawingml/2006/main">
-            <a:srgbClr val="F2F2F2"/>
-          </a:solidFill>
-        </p:spPr>
-      </p:sp>
-      <p:sp>
-        <p:nvSpPr>
-          <p:cNvPr id="5" name="summary">
-            <a:extLst xmlns:a="http://schemas.openxmlformats.org/drawingml/2006/main">
-              <a:ext uri="{FF2B5EF4-FFF2-40B4-BE49-F238E27FC236}">
-                <a16:creationId xmlns:a16="http://schemas.microsoft.com/office/drawing/2014/main" id="{56D2558C-A20F-4C70-893B-6EAB7EAAD1B2}"/>
-              </a:ext>
-            </a:extLst>
-          </p:cNvPr>
-          <p:cNvSpPr>
-            <a:spLocks xmlns:a="http://schemas.openxmlformats.org/drawingml/2006/main" noGrp="1"/>
-          </p:cNvSpPr>
-          <p:nvPr/>
-        </p:nvSpPr>
-        <p:spPr>
-          <a:xfrm xmlns:a="http://schemas.openxmlformats.org/drawingml/2006/main">
-            <a:off x="6261068" y="1714500"/>
-            <a:ext cx="5539835" cy="1381125"/>
+              <a:t>The z-score asks how unusual today's spread is</a:t>
+            </a:r>
+          </a:p>
+        </p:txBody>
+      </p:sp>
+      <p:sp>
+        <p:nvSpPr>
+          <p:cNvPr id="6" name="intro">
+            <a:extLst xmlns:a="http://schemas.openxmlformats.org/drawingml/2006/main">
+              <a:ext uri="{FF2B5EF4-FFF2-40B4-BE49-F238E27FC236}">
+                <a16:creationId xmlns:a16="http://schemas.microsoft.com/office/drawing/2014/main" id="{E3D1AF2D-950D-495D-BB07-182C768AD88F}"/>
+              </a:ext>
+            </a:extLst>
+          </p:cNvPr>
+          <p:cNvSpPr>
+            <a:spLocks xmlns:a="http://schemas.openxmlformats.org/drawingml/2006/main" noGrp="1"/>
+          </p:cNvSpPr>
+          <p:nvPr/>
+        </p:nvSpPr>
+        <p:spPr>
+          <a:xfrm xmlns:a="http://schemas.openxmlformats.org/drawingml/2006/main">
+            <a:off x="393668" y="1219200"/>
+            <a:ext cx="11404568" cy="1428750"/>
           </a:xfrm>
           <a:prstGeom xmlns:a="http://schemas.openxmlformats.org/drawingml/2006/main" prst="rect">
             <a:avLst/>
@@ -2921,7 +7137,8 @@
           <a:lstStyle xmlns:a="http://schemas.openxmlformats.org/drawingml/2006/main"/>
           <a:p xmlns:a="http://schemas.openxmlformats.org/drawingml/2006/main">
             <a:pPr algn="l">
-              <a:defRPr sz="1800">
+              <a:buNone/>
+              <a:defRPr sz="1650">
                 <a:solidFill>
                   <a:srgbClr val="000000"/>
                 </a:solidFill>
@@ -2931,29 +7148,29 @@
               </a:defRPr>
             </a:pPr>
             <a:r>
-              <a:t>The dynamic spread produced a strongly negative ADF-style statistic and a 16.7-session half-life. But variance ratios exceeded one, and high z-scores predicted higher—not lower—forward spread returns.</a:t>
-            </a:r>
-          </a:p>
-        </p:txBody>
-      </p:sp>
-      <p:sp>
-        <p:nvSpPr>
-          <p:cNvPr id="6" name="left-stat">
-            <a:extLst xmlns:a="http://schemas.openxmlformats.org/drawingml/2006/main">
-              <a:ext uri="{FF2B5EF4-FFF2-40B4-BE49-F238E27FC236}">
-                <a16:creationId xmlns:a16="http://schemas.microsoft.com/office/drawing/2014/main" id="{5C6C71CB-7475-4DF6-B7F0-0931DF047551}"/>
-              </a:ext>
-            </a:extLst>
-          </p:cNvPr>
-          <p:cNvSpPr>
-            <a:spLocks xmlns:a="http://schemas.openxmlformats.org/drawingml/2006/main" noGrp="1"/>
-          </p:cNvSpPr>
-          <p:nvPr/>
-        </p:nvSpPr>
-        <p:spPr>
-          <a:xfrm xmlns:a="http://schemas.openxmlformats.org/drawingml/2006/main">
-            <a:off x="6509385" y="3579971"/>
-            <a:ext cx="2133314" cy="1155859"/>
+              <a:t>First form the two-asset spread. Then compare today's spread with its own recent level and volatility. The bands belong to the relationship, not to either asset alone.</a:t>
+            </a:r>
+          </a:p>
+        </p:txBody>
+      </p:sp>
+      <p:sp>
+        <p:nvSpPr>
+          <p:cNvPr id="7" name="stat-1">
+            <a:extLst xmlns:a="http://schemas.openxmlformats.org/drawingml/2006/main">
+              <a:ext uri="{FF2B5EF4-FFF2-40B4-BE49-F238E27FC236}">
+                <a16:creationId xmlns:a16="http://schemas.microsoft.com/office/drawing/2014/main" id="{447A29C0-2600-4241-BF6B-6797417FC507}"/>
+              </a:ext>
+            </a:extLst>
+          </p:cNvPr>
+          <p:cNvSpPr>
+            <a:spLocks xmlns:a="http://schemas.openxmlformats.org/drawingml/2006/main" noGrp="1"/>
+          </p:cNvSpPr>
+          <p:nvPr/>
+        </p:nvSpPr>
+        <p:spPr>
+          <a:xfrm xmlns:a="http://schemas.openxmlformats.org/drawingml/2006/main">
+            <a:off x="702374" y="3429000"/>
+            <a:ext cx="2940082" cy="1359313"/>
           </a:xfrm>
           <a:prstGeom xmlns:a="http://schemas.openxmlformats.org/drawingml/2006/main" prst="rect">
             <a:avLst/>
@@ -2966,7 +7183,8 @@
           <a:lstStyle xmlns:a="http://schemas.openxmlformats.org/drawingml/2006/main"/>
           <a:p xmlns:a="http://schemas.openxmlformats.org/drawingml/2006/main">
             <a:pPr algn="l">
-              <a:defRPr sz="2700">
+              <a:buNone/>
+              <a:defRPr sz="3225">
                 <a:solidFill>
                   <a:srgbClr val="3D8DFF"/>
                 </a:solidFill>
@@ -2976,42 +7194,43 @@
               </a:defRPr>
             </a:pPr>
             <a:r>
-              <a:t>-8.43</a:t>
-            </a:r>
-          </a:p>
-        </p:txBody>
-      </p:sp>
-      <p:sp>
-        <p:nvSpPr>
-          <p:cNvPr id="7" name="left-stat-label">
-            <a:extLst xmlns:a="http://schemas.openxmlformats.org/drawingml/2006/main">
-              <a:ext uri="{FF2B5EF4-FFF2-40B4-BE49-F238E27FC236}">
-                <a16:creationId xmlns:a16="http://schemas.microsoft.com/office/drawing/2014/main" id="{471C1151-75AF-40A2-A5A1-4F7713D23356}"/>
-              </a:ext>
-            </a:extLst>
-          </p:cNvPr>
-          <p:cNvSpPr>
-            <a:spLocks xmlns:a="http://schemas.openxmlformats.org/drawingml/2006/main" noGrp="1"/>
-          </p:cNvSpPr>
-          <p:nvPr/>
-        </p:nvSpPr>
-        <p:spPr>
-          <a:xfrm xmlns:a="http://schemas.openxmlformats.org/drawingml/2006/main">
-            <a:off x="6575965" y="4953000"/>
-            <a:ext cx="2066735" cy="762000"/>
-          </a:xfrm>
-          <a:prstGeom xmlns:a="http://schemas.openxmlformats.org/drawingml/2006/main" prst="rect">
-            <a:avLst/>
-          </a:prstGeom>
-        </p:spPr>
-        <p:txBody>
-          <a:bodyPr xmlns:a="http://schemas.openxmlformats.org/drawingml/2006/main" lIns="0" tIns="0" rIns="0" bIns="0">
+              <a:t>Sₜ = Yₜ − βₜXₜ</a:t>
+            </a:r>
+          </a:p>
+        </p:txBody>
+      </p:sp>
+      <p:sp>
+        <p:nvSpPr>
+          <p:cNvPr id="8" name="stat-label-1">
+            <a:extLst xmlns:a="http://schemas.openxmlformats.org/drawingml/2006/main">
+              <a:ext uri="{FF2B5EF4-FFF2-40B4-BE49-F238E27FC236}">
+                <a16:creationId xmlns:a16="http://schemas.microsoft.com/office/drawing/2014/main" id="{1D2A853D-A304-477D-B8B8-F77F0101AC08}"/>
+              </a:ext>
+            </a:extLst>
+          </p:cNvPr>
+          <p:cNvSpPr>
+            <a:spLocks xmlns:a="http://schemas.openxmlformats.org/drawingml/2006/main" noGrp="1"/>
+          </p:cNvSpPr>
+          <p:nvPr/>
+        </p:nvSpPr>
+        <p:spPr>
+          <a:xfrm xmlns:a="http://schemas.openxmlformats.org/drawingml/2006/main">
+            <a:off x="702374" y="4900613"/>
+            <a:ext cx="2949607" cy="819150"/>
+          </a:xfrm>
+          <a:prstGeom xmlns:a="http://schemas.openxmlformats.org/drawingml/2006/main" prst="rect">
+            <a:avLst/>
+          </a:prstGeom>
+        </p:spPr>
+        <p:txBody>
+          <a:bodyPr xmlns:a="http://schemas.openxmlformats.org/drawingml/2006/main" lIns="0" tIns="45720" rIns="91440" bIns="45720" anchor="t">
             <a:normAutofit fontScale="100000"/>
           </a:bodyPr>
           <a:lstStyle xmlns:a="http://schemas.openxmlformats.org/drawingml/2006/main"/>
           <a:p xmlns:a="http://schemas.openxmlformats.org/drawingml/2006/main">
             <a:pPr algn="l">
-              <a:defRPr sz="1500">
+              <a:buNone/>
+              <a:defRPr sz="1575">
                 <a:solidFill>
                   <a:srgbClr val="000000"/>
                 </a:solidFill>
@@ -3021,30 +7240,30 @@
               </a:defRPr>
             </a:pPr>
             <a:r>
-              <a:t>Dynamic-spread ADF t
-Descriptive, not a verdict</a:t>
-            </a:r>
-          </a:p>
-        </p:txBody>
-      </p:sp>
-      <p:sp>
-        <p:nvSpPr>
-          <p:cNvPr id="8" name="right-stat">
-            <a:extLst xmlns:a="http://schemas.openxmlformats.org/drawingml/2006/main">
-              <a:ext uri="{FF2B5EF4-FFF2-40B4-BE49-F238E27FC236}">
-                <a16:creationId xmlns:a16="http://schemas.microsoft.com/office/drawing/2014/main" id="{423A9D83-D670-4C26-B583-F1C469F9EC40}"/>
-              </a:ext>
-            </a:extLst>
-          </p:cNvPr>
-          <p:cNvSpPr>
-            <a:spLocks xmlns:a="http://schemas.openxmlformats.org/drawingml/2006/main" noGrp="1"/>
-          </p:cNvSpPr>
-          <p:nvPr/>
-        </p:nvSpPr>
-        <p:spPr>
-          <a:xfrm xmlns:a="http://schemas.openxmlformats.org/drawingml/2006/main">
-            <a:off x="9461564" y="3579971"/>
-            <a:ext cx="2133314" cy="1155859"/>
+              <a:t>A low spread means Y is cheap
+relative to the fitted X leg</a:t>
+            </a:r>
+          </a:p>
+        </p:txBody>
+      </p:sp>
+      <p:sp>
+        <p:nvSpPr>
+          <p:cNvPr id="9" name="stat-2">
+            <a:extLst xmlns:a="http://schemas.openxmlformats.org/drawingml/2006/main">
+              <a:ext uri="{FF2B5EF4-FFF2-40B4-BE49-F238E27FC236}">
+                <a16:creationId xmlns:a16="http://schemas.microsoft.com/office/drawing/2014/main" id="{342C60B8-5C35-4607-932D-DFD8E206B634}"/>
+              </a:ext>
+            </a:extLst>
+          </p:cNvPr>
+          <p:cNvSpPr>
+            <a:spLocks xmlns:a="http://schemas.openxmlformats.org/drawingml/2006/main" noGrp="1"/>
+          </p:cNvSpPr>
+          <p:nvPr/>
+        </p:nvSpPr>
+        <p:spPr>
+          <a:xfrm xmlns:a="http://schemas.openxmlformats.org/drawingml/2006/main">
+            <a:off x="4612958" y="3429000"/>
+            <a:ext cx="2940082" cy="1359313"/>
           </a:xfrm>
           <a:prstGeom xmlns:a="http://schemas.openxmlformats.org/drawingml/2006/main" prst="rect">
             <a:avLst/>
@@ -3057,52 +7276,54 @@
           <a:lstStyle xmlns:a="http://schemas.openxmlformats.org/drawingml/2006/main"/>
           <a:p xmlns:a="http://schemas.openxmlformats.org/drawingml/2006/main">
             <a:pPr algn="l">
-              <a:defRPr sz="2700">
-                <a:solidFill>
-                  <a:srgbClr val="B42318"/>
-                </a:solidFill>
-                <a:latin typeface="Helvetica Neue"/>
-                <a:ea typeface="Helvetica Neue"/>
-                <a:cs typeface="Helvetica Neue"/>
-              </a:defRPr>
-            </a:pPr>
-            <a:r>
-              <a:t>+0.095</a:t>
-            </a:r>
-          </a:p>
-        </p:txBody>
-      </p:sp>
-      <p:sp>
-        <p:nvSpPr>
-          <p:cNvPr id="9" name="right-stat-label">
-            <a:extLst xmlns:a="http://schemas.openxmlformats.org/drawingml/2006/main">
-              <a:ext uri="{FF2B5EF4-FFF2-40B4-BE49-F238E27FC236}">
-                <a16:creationId xmlns:a16="http://schemas.microsoft.com/office/drawing/2014/main" id="{F039A1C2-F7F7-4D0E-BDC1-2BD29C9D7E4C}"/>
-              </a:ext>
-            </a:extLst>
-          </p:cNvPr>
-          <p:cNvSpPr>
-            <a:spLocks xmlns:a="http://schemas.openxmlformats.org/drawingml/2006/main" noGrp="1"/>
-          </p:cNvSpPr>
-          <p:nvPr/>
-        </p:nvSpPr>
-        <p:spPr>
-          <a:xfrm xmlns:a="http://schemas.openxmlformats.org/drawingml/2006/main">
-            <a:off x="9528143" y="4953000"/>
-            <a:ext cx="2066735" cy="762000"/>
-          </a:xfrm>
-          <a:prstGeom xmlns:a="http://schemas.openxmlformats.org/drawingml/2006/main" prst="rect">
-            <a:avLst/>
-          </a:prstGeom>
-        </p:spPr>
-        <p:txBody>
-          <a:bodyPr xmlns:a="http://schemas.openxmlformats.org/drawingml/2006/main" lIns="0" tIns="0" rIns="0" bIns="0">
+              <a:buNone/>
+              <a:defRPr sz="3225">
+                <a:solidFill>
+                  <a:srgbClr val="000000"/>
+                </a:solidFill>
+                <a:latin typeface="Helvetica Neue"/>
+                <a:ea typeface="Helvetica Neue"/>
+                <a:cs typeface="Helvetica Neue"/>
+              </a:defRPr>
+            </a:pPr>
+            <a:r>
+              <a:t>μₜ and σₜ</a:t>
+            </a:r>
+          </a:p>
+        </p:txBody>
+      </p:sp>
+      <p:sp>
+        <p:nvSpPr>
+          <p:cNvPr id="10" name="stat-label-2">
+            <a:extLst xmlns:a="http://schemas.openxmlformats.org/drawingml/2006/main">
+              <a:ext uri="{FF2B5EF4-FFF2-40B4-BE49-F238E27FC236}">
+                <a16:creationId xmlns:a16="http://schemas.microsoft.com/office/drawing/2014/main" id="{3123331A-6BB6-4FC3-B18C-EE98C6A8FF13}"/>
+              </a:ext>
+            </a:extLst>
+          </p:cNvPr>
+          <p:cNvSpPr>
+            <a:spLocks xmlns:a="http://schemas.openxmlformats.org/drawingml/2006/main" noGrp="1"/>
+          </p:cNvSpPr>
+          <p:nvPr/>
+        </p:nvSpPr>
+        <p:spPr>
+          <a:xfrm xmlns:a="http://schemas.openxmlformats.org/drawingml/2006/main">
+            <a:off x="4612958" y="4900613"/>
+            <a:ext cx="2949607" cy="819150"/>
+          </a:xfrm>
+          <a:prstGeom xmlns:a="http://schemas.openxmlformats.org/drawingml/2006/main" prst="rect">
+            <a:avLst/>
+          </a:prstGeom>
+        </p:spPr>
+        <p:txBody>
+          <a:bodyPr xmlns:a="http://schemas.openxmlformats.org/drawingml/2006/main" lIns="0" tIns="45720" rIns="91440" bIns="45720" anchor="t">
             <a:normAutofit fontScale="100000"/>
           </a:bodyPr>
           <a:lstStyle xmlns:a="http://schemas.openxmlformats.org/drawingml/2006/main"/>
           <a:p xmlns:a="http://schemas.openxmlformats.org/drawingml/2006/main">
             <a:pPr algn="l">
-              <a:defRPr sz="1500">
+              <a:buNone/>
+              <a:defRPr sz="1575">
                 <a:solidFill>
                   <a:srgbClr val="000000"/>
                 </a:solidFill>
@@ -3112,38 +7333,109 @@
               </a:defRPr>
             </a:pPr>
             <a:r>
-              <a:t>z vs forward-five return
-Wrong sign for reversion</a:t>
-            </a:r>
-          </a:p>
-        </p:txBody>
-      </p:sp>
-      <p:pic>
-        <p:nvPicPr>
-          <p:cNvPr id="20" name=""/>
-          <p:cNvPicPr>
-            <a:picLocks xmlns:a="http://schemas.openxmlformats.org/drawingml/2006/main" noChangeAspect="1"/>
-          </p:cNvPicPr>
-          <p:nvPr/>
-        </p:nvPicPr>
-        <p:blipFill>
-          <a:blip xmlns:r="http://schemas.openxmlformats.org/officeDocument/2006/relationships" xmlns:a="http://schemas.openxmlformats.org/drawingml/2006/main" r:embed="R33eb5c27edde4758"/>
-          <a:stretch xmlns:a="http://schemas.openxmlformats.org/drawingml/2006/main"/>
-        </p:blipFill>
-        <p:spPr>
-          <a:xfrm xmlns:a="http://schemas.openxmlformats.org/drawingml/2006/main">
-            <a:off x="385858" y="2576472"/>
-            <a:ext cx="5534216" cy="2371807"/>
-          </a:xfrm>
-          <a:prstGeom xmlns:a="http://schemas.openxmlformats.org/drawingml/2006/main" prst="rect">
-            <a:avLst/>
-          </a:prstGeom>
-        </p:spPr>
-      </p:pic>
+              <a:t>Rolling mean and standard deviation
+of the latest 20 spread values</a:t>
+            </a:r>
+          </a:p>
+        </p:txBody>
+      </p:sp>
+      <p:sp>
+        <p:nvSpPr>
+          <p:cNvPr id="11" name="stat-3">
+            <a:extLst xmlns:a="http://schemas.openxmlformats.org/drawingml/2006/main">
+              <a:ext uri="{FF2B5EF4-FFF2-40B4-BE49-F238E27FC236}">
+                <a16:creationId xmlns:a16="http://schemas.microsoft.com/office/drawing/2014/main" id="{A0AD0C21-BC31-4957-B0CB-525311D4386F}"/>
+              </a:ext>
+            </a:extLst>
+          </p:cNvPr>
+          <p:cNvSpPr>
+            <a:spLocks xmlns:a="http://schemas.openxmlformats.org/drawingml/2006/main" noGrp="1"/>
+          </p:cNvSpPr>
+          <p:nvPr/>
+        </p:nvSpPr>
+        <p:spPr>
+          <a:xfrm xmlns:a="http://schemas.openxmlformats.org/drawingml/2006/main">
+            <a:off x="8562404" y="3429000"/>
+            <a:ext cx="2940082" cy="1359313"/>
+          </a:xfrm>
+          <a:prstGeom xmlns:a="http://schemas.openxmlformats.org/drawingml/2006/main" prst="rect">
+            <a:avLst/>
+          </a:prstGeom>
+        </p:spPr>
+        <p:txBody>
+          <a:bodyPr xmlns:a="http://schemas.openxmlformats.org/drawingml/2006/main" lIns="0" tIns="0" rIns="0" bIns="0" anchor="b">
+            <a:normAutofit fontScale="100000"/>
+          </a:bodyPr>
+          <a:lstStyle xmlns:a="http://schemas.openxmlformats.org/drawingml/2006/main"/>
+          <a:p xmlns:a="http://schemas.openxmlformats.org/drawingml/2006/main">
+            <a:pPr algn="l">
+              <a:buNone/>
+              <a:defRPr sz="3225">
+                <a:solidFill>
+                  <a:srgbClr val="000000"/>
+                </a:solidFill>
+                <a:latin typeface="Helvetica Neue"/>
+                <a:ea typeface="Helvetica Neue"/>
+                <a:cs typeface="Helvetica Neue"/>
+              </a:defRPr>
+            </a:pPr>
+            <a:r>
+              <a:t>zₜ = (Sₜ − μₜ) / σₜ</a:t>
+            </a:r>
+          </a:p>
+        </p:txBody>
+      </p:sp>
+      <p:sp>
+        <p:nvSpPr>
+          <p:cNvPr id="12" name="stat-label-3">
+            <a:extLst xmlns:a="http://schemas.openxmlformats.org/drawingml/2006/main">
+              <a:ext uri="{FF2B5EF4-FFF2-40B4-BE49-F238E27FC236}">
+                <a16:creationId xmlns:a16="http://schemas.microsoft.com/office/drawing/2014/main" id="{86C9D445-5711-4319-B967-D72E959CA06D}"/>
+              </a:ext>
+            </a:extLst>
+          </p:cNvPr>
+          <p:cNvSpPr>
+            <a:spLocks xmlns:a="http://schemas.openxmlformats.org/drawingml/2006/main" noGrp="1"/>
+          </p:cNvSpPr>
+          <p:nvPr/>
+        </p:nvSpPr>
+        <p:spPr>
+          <a:xfrm xmlns:a="http://schemas.openxmlformats.org/drawingml/2006/main">
+            <a:off x="8562404" y="4900613"/>
+            <a:ext cx="2949607" cy="819150"/>
+          </a:xfrm>
+          <a:prstGeom xmlns:a="http://schemas.openxmlformats.org/drawingml/2006/main" prst="rect">
+            <a:avLst/>
+          </a:prstGeom>
+        </p:spPr>
+        <p:txBody>
+          <a:bodyPr xmlns:a="http://schemas.openxmlformats.org/drawingml/2006/main" lIns="0" tIns="45720" rIns="91440" bIns="45720" anchor="t">
+            <a:normAutofit fontScale="100000"/>
+          </a:bodyPr>
+          <a:lstStyle xmlns:a="http://schemas.openxmlformats.org/drawingml/2006/main"/>
+          <a:p xmlns:a="http://schemas.openxmlformats.org/drawingml/2006/main">
+            <a:pPr algn="l">
+              <a:buNone/>
+              <a:defRPr sz="1575">
+                <a:solidFill>
+                  <a:srgbClr val="000000"/>
+                </a:solidFill>
+                <a:latin typeface="Helvetica Neue"/>
+                <a:ea typeface="Helvetica Neue"/>
+                <a:cs typeface="Helvetica Neue"/>
+              </a:defRPr>
+            </a:pPr>
+            <a:r>
+              <a:t>Distance from the rolling mean
+measured in recent spread volatility</a:t>
+            </a:r>
+          </a:p>
+        </p:txBody>
+      </p:sp>
     </p:spTree>
     <p:extLst>
       <p:ext uri="{BB962C8B-B14F-4D97-AF65-F5344CB8AC3E}">
-        <p14:creationId xmlns:p14="http://schemas.microsoft.com/office/powerpoint/2010/main" val="227946046"/>
+        <p14:creationId xmlns:p14="http://schemas.microsoft.com/office/powerpoint/2010/main" val="2098249639"/>
       </p:ext>
     </p:extLst>
   </p:cSld>
@@ -3164,10 +7456,10 @@
       </p:grpSpPr>
       <p:sp>
         <p:nvSpPr>
-          <p:cNvPr id="11" name="footer">
-            <a:extLst xmlns:a="http://schemas.openxmlformats.org/drawingml/2006/main">
-              <a:ext uri="{FF2B5EF4-FFF2-40B4-BE49-F238E27FC236}">
-                <a16:creationId xmlns:a16="http://schemas.microsoft.com/office/drawing/2014/main" id="{231B1CDB-9946-498B-901E-0A0C9C772112}"/>
+          <p:cNvPr id="6" name="footer">
+            <a:extLst xmlns:a="http://schemas.openxmlformats.org/drawingml/2006/main">
+              <a:ext uri="{FF2B5EF4-FFF2-40B4-BE49-F238E27FC236}">
+                <a16:creationId xmlns:a16="http://schemas.microsoft.com/office/drawing/2014/main" id="{4F272998-B60C-44E0-849E-A04A87223BAE}"/>
               </a:ext>
             </a:extLst>
           </p:cNvPr>
@@ -3190,6 +7482,7 @@
           <a:lstStyle xmlns:a="http://schemas.openxmlformats.org/drawingml/2006/main"/>
           <a:p xmlns:a="http://schemas.openxmlformats.org/drawingml/2006/main">
             <a:pPr algn="r">
+              <a:buNone/>
               <a:defRPr sz="1000">
                 <a:solidFill>
                   <a:srgbClr val="000000"/>
@@ -3210,7 +7503,7 @@
           <p:cNvPr id="2" name="title">
             <a:extLst xmlns:a="http://schemas.openxmlformats.org/drawingml/2006/main">
               <a:ext uri="{FF2B5EF4-FFF2-40B4-BE49-F238E27FC236}">
-                <a16:creationId xmlns:a16="http://schemas.microsoft.com/office/drawing/2014/main" id="{EE1FC061-EE2C-48CF-9799-D8537102BA12}"/>
+                <a16:creationId xmlns:a16="http://schemas.microsoft.com/office/drawing/2014/main" id="{8A16F9E5-1AF4-43B0-AB25-E3AE98294DF6}"/>
               </a:ext>
             </a:extLst>
           </p:cNvPr>
@@ -3222,7 +7515,7 @@
         <p:spPr>
           <a:xfrm xmlns:a="http://schemas.openxmlformats.org/drawingml/2006/main">
             <a:off x="393668" y="344043"/>
-            <a:ext cx="11404568" cy="1047464"/>
+            <a:ext cx="5537168" cy="1143000"/>
           </a:xfrm>
           <a:prstGeom xmlns:a="http://schemas.openxmlformats.org/drawingml/2006/main" prst="rect">
             <a:avLst/>
@@ -3235,6 +7528,7 @@
           <a:lstStyle xmlns:a="http://schemas.openxmlformats.org/drawingml/2006/main"/>
           <a:p xmlns:a="http://schemas.openxmlformats.org/drawingml/2006/main">
             <a:pPr algn="l">
+              <a:buNone/>
               <a:defRPr sz="2900">
                 <a:solidFill>
                   <a:srgbClr val="000000"/>
@@ -3245,87 +7539,64 @@
               </a:defRPr>
             </a:pPr>
             <a:r>
-              <a:t>Trade-level and bar-level evidence both failed</a:t>
-            </a:r>
-          </a:p>
-        </p:txBody>
-      </p:sp>
-      <p:sp>
-        <p:nvSpPr>
-          <p:cNvPr id="3" name="left-stat-card">
-            <a:extLst xmlns:a="http://schemas.openxmlformats.org/drawingml/2006/main">
-              <a:ext uri="{FF2B5EF4-FFF2-40B4-BE49-F238E27FC236}">
-                <a16:creationId xmlns:a16="http://schemas.microsoft.com/office/drawing/2014/main" id="{EF0AF18E-87A6-431F-8D4F-59EC894570D3}"/>
-              </a:ext>
-            </a:extLst>
-          </p:cNvPr>
-          <p:cNvSpPr>
-            <a:spLocks xmlns:a="http://schemas.openxmlformats.org/drawingml/2006/main" noGrp="1"/>
-          </p:cNvSpPr>
-          <p:nvPr/>
-        </p:nvSpPr>
-        <p:spPr>
-          <a:xfrm xmlns:a="http://schemas.openxmlformats.org/drawingml/2006/main">
-            <a:off x="6272022" y="3360039"/>
-            <a:ext cx="2581942" cy="2656523"/>
+              <a:t>A spread signal becomes two executable dollar weights</a:t>
+            </a:r>
+          </a:p>
+        </p:txBody>
+      </p:sp>
+      <p:sp>
+        <p:nvSpPr>
+          <p:cNvPr id="3" name="image-backing">
+            <a:extLst xmlns:a="http://schemas.openxmlformats.org/drawingml/2006/main">
+              <a:ext uri="{FF2B5EF4-FFF2-40B4-BE49-F238E27FC236}">
+                <a16:creationId xmlns:a16="http://schemas.microsoft.com/office/drawing/2014/main" id="{5EE0E946-4B2C-4DE9-8839-3DE0D30C8B61}"/>
+              </a:ext>
+            </a:extLst>
+          </p:cNvPr>
+          <p:cNvSpPr>
+            <a:spLocks xmlns:a="http://schemas.openxmlformats.org/drawingml/2006/main" noGrp="1"/>
+          </p:cNvSpPr>
+          <p:nvPr/>
+        </p:nvSpPr>
+        <p:spPr>
+          <a:xfrm xmlns:a="http://schemas.openxmlformats.org/drawingml/2006/main">
+            <a:off x="6269069" y="396431"/>
+            <a:ext cx="5539740" cy="5602034"/>
           </a:xfrm>
           <a:prstGeom xmlns:a="http://schemas.openxmlformats.org/drawingml/2006/main" prst="roundRect">
             <a:avLst>
-              <a:gd name="adj" fmla="val 2951"/>
+              <a:gd name="adj" fmla="val 1376"/>
             </a:avLst>
           </a:prstGeom>
           <a:solidFill xmlns:a="http://schemas.openxmlformats.org/drawingml/2006/main">
-            <a:srgbClr val="F2F2F2"/>
+            <a:srgbClr val="EAF5FB"/>
           </a:solidFill>
-        </p:spPr>
-      </p:sp>
-      <p:sp>
-        <p:nvSpPr>
-          <p:cNvPr id="4" name="right-stat-card">
-            <a:extLst xmlns:a="http://schemas.openxmlformats.org/drawingml/2006/main">
-              <a:ext uri="{FF2B5EF4-FFF2-40B4-BE49-F238E27FC236}">
-                <a16:creationId xmlns:a16="http://schemas.microsoft.com/office/drawing/2014/main" id="{9C01B021-FDE1-4776-B2EE-ACB76D126DAD}"/>
-              </a:ext>
-            </a:extLst>
-          </p:cNvPr>
-          <p:cNvSpPr>
-            <a:spLocks xmlns:a="http://schemas.openxmlformats.org/drawingml/2006/main" noGrp="1"/>
-          </p:cNvSpPr>
-          <p:nvPr/>
-        </p:nvSpPr>
-        <p:spPr>
-          <a:xfrm xmlns:a="http://schemas.openxmlformats.org/drawingml/2006/main">
-            <a:off x="9224201" y="3360039"/>
-            <a:ext cx="2581942" cy="2656523"/>
-          </a:xfrm>
-          <a:prstGeom xmlns:a="http://schemas.openxmlformats.org/drawingml/2006/main" prst="roundRect">
-            <a:avLst>
-              <a:gd name="adj" fmla="val 2951"/>
-            </a:avLst>
-          </a:prstGeom>
-          <a:solidFill xmlns:a="http://schemas.openxmlformats.org/drawingml/2006/main">
-            <a:srgbClr val="F2F2F2"/>
-          </a:solidFill>
-        </p:spPr>
-      </p:sp>
-      <p:sp>
-        <p:nvSpPr>
-          <p:cNvPr id="5" name="summary">
-            <a:extLst xmlns:a="http://schemas.openxmlformats.org/drawingml/2006/main">
-              <a:ext uri="{FF2B5EF4-FFF2-40B4-BE49-F238E27FC236}">
-                <a16:creationId xmlns:a16="http://schemas.microsoft.com/office/drawing/2014/main" id="{A2F82FC1-3249-4254-ABAA-A2D0E0F95848}"/>
-              </a:ext>
-            </a:extLst>
-          </p:cNvPr>
-          <p:cNvSpPr>
-            <a:spLocks xmlns:a="http://schemas.openxmlformats.org/drawingml/2006/main" noGrp="1"/>
-          </p:cNvSpPr>
-          <p:nvPr/>
-        </p:nvSpPr>
-        <p:spPr>
-          <a:xfrm xmlns:a="http://schemas.openxmlformats.org/drawingml/2006/main">
-            <a:off x="6261068" y="1714500"/>
-            <a:ext cx="5539835" cy="1381125"/>
+          <a:ln xmlns:a="http://schemas.openxmlformats.org/drawingml/2006/main" w="9525">
+            <a:solidFill>
+              <a:srgbClr val="B8BCC4"/>
+            </a:solidFill>
+            <a:prstDash val="solid"/>
+          </a:ln>
+        </p:spPr>
+      </p:sp>
+      <p:sp>
+        <p:nvSpPr>
+          <p:cNvPr id="4" name="body">
+            <a:extLst xmlns:a="http://schemas.openxmlformats.org/drawingml/2006/main">
+              <a:ext uri="{FF2B5EF4-FFF2-40B4-BE49-F238E27FC236}">
+                <a16:creationId xmlns:a16="http://schemas.microsoft.com/office/drawing/2014/main" id="{3E0CA677-50AA-4CCF-BC5C-CB90210AF27E}"/>
+              </a:ext>
+            </a:extLst>
+          </p:cNvPr>
+          <p:cNvSpPr>
+            <a:spLocks xmlns:a="http://schemas.openxmlformats.org/drawingml/2006/main" noGrp="1"/>
+          </p:cNvSpPr>
+          <p:nvPr/>
+        </p:nvSpPr>
+        <p:spPr>
+          <a:xfrm xmlns:a="http://schemas.openxmlformats.org/drawingml/2006/main">
+            <a:off x="393668" y="1695450"/>
+            <a:ext cx="5537168" cy="4238625"/>
           </a:xfrm>
           <a:prstGeom xmlns:a="http://schemas.openxmlformats.org/drawingml/2006/main" prst="rect">
             <a:avLst/>
@@ -3338,7 +7609,8 @@
           <a:lstStyle xmlns:a="http://schemas.openxmlformats.org/drawingml/2006/main"/>
           <a:p xmlns:a="http://schemas.openxmlformats.org/drawingml/2006/main">
             <a:pPr algn="l">
-              <a:defRPr sz="1800">
+              <a:buNone/>
+              <a:defRPr sz="1950">
                 <a:solidFill>
                   <a:srgbClr val="000000"/>
                 </a:solidFill>
@@ -3348,211 +7620,92 @@
               </a:defRPr>
             </a:pPr>
             <a:r>
-              <a:t>The rule generated enough trades in both directions, but the mean trade lost money, the hit rate was below 50%, and only two of five TRAIN years were positive.</a:t>
-            </a:r>
-          </a:p>
-        </p:txBody>
-      </p:sp>
-      <p:sp>
-        <p:nvSpPr>
-          <p:cNvPr id="6" name="left-stat">
-            <a:extLst xmlns:a="http://schemas.openxmlformats.org/drawingml/2006/main">
-              <a:ext uri="{FF2B5EF4-FFF2-40B4-BE49-F238E27FC236}">
-                <a16:creationId xmlns:a16="http://schemas.microsoft.com/office/drawing/2014/main" id="{06B274F5-6F7E-4432-B0F1-4874DA3CABBF}"/>
-              </a:ext>
-            </a:extLst>
-          </p:cNvPr>
-          <p:cNvSpPr>
-            <a:spLocks xmlns:a="http://schemas.openxmlformats.org/drawingml/2006/main" noGrp="1"/>
-          </p:cNvSpPr>
-          <p:nvPr/>
-        </p:nvSpPr>
-        <p:spPr>
-          <a:xfrm xmlns:a="http://schemas.openxmlformats.org/drawingml/2006/main">
-            <a:off x="6509385" y="3579971"/>
-            <a:ext cx="2133314" cy="1155859"/>
-          </a:xfrm>
-          <a:prstGeom xmlns:a="http://schemas.openxmlformats.org/drawingml/2006/main" prst="rect">
-            <a:avLst/>
-          </a:prstGeom>
-        </p:spPr>
-        <p:txBody>
-          <a:bodyPr xmlns:a="http://schemas.openxmlformats.org/drawingml/2006/main" lIns="0" tIns="0" rIns="0" bIns="0" anchor="b">
-            <a:normAutofit fontScale="100000"/>
-          </a:bodyPr>
-          <a:lstStyle xmlns:a="http://schemas.openxmlformats.org/drawingml/2006/main"/>
-          <a:p xmlns:a="http://schemas.openxmlformats.org/drawingml/2006/main">
-            <a:pPr algn="l">
-              <a:defRPr sz="2700">
-                <a:solidFill>
-                  <a:srgbClr val="B42318"/>
-                </a:solidFill>
-                <a:latin typeface="Helvetica Neue"/>
-                <a:ea typeface="Helvetica Neue"/>
-                <a:cs typeface="Helvetica Neue"/>
-              </a:defRPr>
-            </a:pPr>
-            <a:r>
-              <a:t>-17.68 bp</a:t>
-            </a:r>
-          </a:p>
-        </p:txBody>
-      </p:sp>
-      <p:sp>
-        <p:nvSpPr>
-          <p:cNvPr id="7" name="left-stat-label">
-            <a:extLst xmlns:a="http://schemas.openxmlformats.org/drawingml/2006/main">
-              <a:ext uri="{FF2B5EF4-FFF2-40B4-BE49-F238E27FC236}">
-                <a16:creationId xmlns:a16="http://schemas.microsoft.com/office/drawing/2014/main" id="{99D2BB32-1C11-4B29-AF23-ED9F32D0BCEB}"/>
-              </a:ext>
-            </a:extLst>
-          </p:cNvPr>
-          <p:cNvSpPr>
-            <a:spLocks xmlns:a="http://schemas.openxmlformats.org/drawingml/2006/main" noGrp="1"/>
-          </p:cNvSpPr>
-          <p:nvPr/>
-        </p:nvSpPr>
-        <p:spPr>
-          <a:xfrm xmlns:a="http://schemas.openxmlformats.org/drawingml/2006/main">
-            <a:off x="6575965" y="4953000"/>
-            <a:ext cx="2066735" cy="762000"/>
-          </a:xfrm>
-          <a:prstGeom xmlns:a="http://schemas.openxmlformats.org/drawingml/2006/main" prst="rect">
-            <a:avLst/>
-          </a:prstGeom>
-        </p:spPr>
-        <p:txBody>
-          <a:bodyPr xmlns:a="http://schemas.openxmlformats.org/drawingml/2006/main" lIns="0" tIns="0" rIns="0" bIns="0">
-            <a:normAutofit fontScale="100000"/>
-          </a:bodyPr>
-          <a:lstStyle xmlns:a="http://schemas.openxmlformats.org/drawingml/2006/main"/>
-          <a:p xmlns:a="http://schemas.openxmlformats.org/drawingml/2006/main">
-            <a:pPr algn="l">
-              <a:defRPr sz="1500">
-                <a:solidFill>
-                  <a:srgbClr val="000000"/>
-                </a:solidFill>
-                <a:latin typeface="Helvetica Neue"/>
-                <a:ea typeface="Helvetica Neue"/>
-                <a:cs typeface="Helvetica Neue"/>
-              </a:defRPr>
-            </a:pPr>
-            <a:r>
-              <a:t>Mean primary-cost
-net return per trade</a:t>
-            </a:r>
-          </a:p>
-        </p:txBody>
-      </p:sp>
-      <p:sp>
-        <p:nvSpPr>
-          <p:cNvPr id="8" name="right-stat">
-            <a:extLst xmlns:a="http://schemas.openxmlformats.org/drawingml/2006/main">
-              <a:ext uri="{FF2B5EF4-FFF2-40B4-BE49-F238E27FC236}">
-                <a16:creationId xmlns:a16="http://schemas.microsoft.com/office/drawing/2014/main" id="{2EAFD608-776D-46A1-95EA-79AF4E6F5599}"/>
-              </a:ext>
-            </a:extLst>
-          </p:cNvPr>
-          <p:cNvSpPr>
-            <a:spLocks xmlns:a="http://schemas.openxmlformats.org/drawingml/2006/main" noGrp="1"/>
-          </p:cNvSpPr>
-          <p:nvPr/>
-        </p:nvSpPr>
-        <p:spPr>
-          <a:xfrm xmlns:a="http://schemas.openxmlformats.org/drawingml/2006/main">
-            <a:off x="9461564" y="3579971"/>
-            <a:ext cx="2133314" cy="1155859"/>
-          </a:xfrm>
-          <a:prstGeom xmlns:a="http://schemas.openxmlformats.org/drawingml/2006/main" prst="rect">
-            <a:avLst/>
-          </a:prstGeom>
-        </p:spPr>
-        <p:txBody>
-          <a:bodyPr xmlns:a="http://schemas.openxmlformats.org/drawingml/2006/main" lIns="0" tIns="0" rIns="0" bIns="0" anchor="b">
-            <a:normAutofit fontScale="100000"/>
-          </a:bodyPr>
-          <a:lstStyle xmlns:a="http://schemas.openxmlformats.org/drawingml/2006/main"/>
-          <a:p xmlns:a="http://schemas.openxmlformats.org/drawingml/2006/main">
-            <a:pPr algn="l">
-              <a:defRPr sz="2700">
-                <a:solidFill>
-                  <a:srgbClr val="B42318"/>
-                </a:solidFill>
-                <a:latin typeface="Helvetica Neue"/>
-                <a:ea typeface="Helvetica Neue"/>
-                <a:cs typeface="Helvetica Neue"/>
-              </a:defRPr>
-            </a:pPr>
-            <a:r>
-              <a:t>49.1%</a:t>
-            </a:r>
-          </a:p>
-        </p:txBody>
-      </p:sp>
-      <p:sp>
-        <p:nvSpPr>
-          <p:cNvPr id="9" name="right-stat-label">
-            <a:extLst xmlns:a="http://schemas.openxmlformats.org/drawingml/2006/main">
-              <a:ext uri="{FF2B5EF4-FFF2-40B4-BE49-F238E27FC236}">
-                <a16:creationId xmlns:a16="http://schemas.microsoft.com/office/drawing/2014/main" id="{691BF8AE-236E-4677-8EAF-3CF0D5A20DB6}"/>
-              </a:ext>
-            </a:extLst>
-          </p:cNvPr>
-          <p:cNvSpPr>
-            <a:spLocks xmlns:a="http://schemas.openxmlformats.org/drawingml/2006/main" noGrp="1"/>
-          </p:cNvSpPr>
-          <p:nvPr/>
-        </p:nvSpPr>
-        <p:spPr>
-          <a:xfrm xmlns:a="http://schemas.openxmlformats.org/drawingml/2006/main">
-            <a:off x="9528143" y="4953000"/>
-            <a:ext cx="2066735" cy="762000"/>
-          </a:xfrm>
-          <a:prstGeom xmlns:a="http://schemas.openxmlformats.org/drawingml/2006/main" prst="rect">
-            <a:avLst/>
-          </a:prstGeom>
-        </p:spPr>
-        <p:txBody>
-          <a:bodyPr xmlns:a="http://schemas.openxmlformats.org/drawingml/2006/main" lIns="0" tIns="0" rIns="0" bIns="0">
-            <a:normAutofit fontScale="100000"/>
-          </a:bodyPr>
-          <a:lstStyle xmlns:a="http://schemas.openxmlformats.org/drawingml/2006/main"/>
-          <a:p xmlns:a="http://schemas.openxmlformats.org/drawingml/2006/main">
-            <a:pPr algn="l">
-              <a:defRPr sz="1500">
-                <a:solidFill>
-                  <a:srgbClr val="000000"/>
-                </a:solidFill>
-                <a:latin typeface="Helvetica Neue"/>
-                <a:ea typeface="Helvetica Neue"/>
-                <a:cs typeface="Helvetica Neue"/>
-              </a:defRPr>
-            </a:pPr>
-            <a:r>
-              <a:t>Completed-trade
-hit rate</a:t>
+              <a:t>Direction d = +1 when z &lt; −1
+Direction d = −1 when z &gt; +1
+Exit when z crosses zero
+wY = dY / (Y + |β|X)
+wX = −dβX / (Y + |β|X)
+Gross exposure sums to one.
+Signal at close; trade next open.
+Daily beta changes create turnover.
+Primary cost: 5 bp per one-way weight change.</a:t>
             </a:r>
           </a:p>
         </p:txBody>
       </p:sp>
       <p:pic>
         <p:nvPicPr>
-          <p:cNvPr id="20" name=""/>
+          <p:cNvPr id="14" name=""/>
           <p:cNvPicPr>
             <a:picLocks xmlns:a="http://schemas.openxmlformats.org/drawingml/2006/main" noChangeAspect="1"/>
           </p:cNvPicPr>
           <p:nvPr/>
         </p:nvPicPr>
         <p:blipFill>
-          <a:blip xmlns:r="http://schemas.openxmlformats.org/officeDocument/2006/relationships" xmlns:a="http://schemas.openxmlformats.org/drawingml/2006/main" r:embed="Rcbc8604812fd48f8"/>
+          <a:blip xmlns:r="http://schemas.openxmlformats.org/officeDocument/2006/relationships" xmlns:a="http://schemas.openxmlformats.org/drawingml/2006/main" r:embed="Re5f69c39882742cf"/>
           <a:stretch xmlns:a="http://schemas.openxmlformats.org/drawingml/2006/main"/>
         </p:blipFill>
         <p:spPr>
           <a:xfrm xmlns:a="http://schemas.openxmlformats.org/drawingml/2006/main">
-            <a:off x="385858" y="2378821"/>
-            <a:ext cx="5534216" cy="2767108"/>
-          </a:xfrm>
-          <a:prstGeom xmlns:a="http://schemas.openxmlformats.org/drawingml/2006/main" prst="rect">
+            <a:off x="6381750" y="1776196"/>
+            <a:ext cx="5314950" cy="3019858"/>
+          </a:xfrm>
+          <a:prstGeom xmlns:a="http://schemas.openxmlformats.org/drawingml/2006/main" prst="roundRect">
+            <a:avLst/>
+          </a:prstGeom>
+        </p:spPr>
+      </p:pic>
+      <p:sp>
+        <p:nvSpPr>
+          <p:cNvPr id="8" name="">
+            <a:extLst xmlns:a="http://schemas.openxmlformats.org/drawingml/2006/main">
+              <a:ext uri="{FF2B5EF4-FFF2-40B4-BE49-F238E27FC236}">
+                <a16:creationId xmlns:a16="http://schemas.microsoft.com/office/drawing/2014/main" id="{08228C7B-FAD1-4EFC-8057-453D13C988CF}"/>
+              </a:ext>
+            </a:extLst>
+          </p:cNvPr>
+          <p:cNvSpPr>
+            <a:spLocks xmlns:a="http://schemas.openxmlformats.org/drawingml/2006/main" noGrp="1"/>
+          </p:cNvSpPr>
+          <p:nvPr/>
+        </p:nvSpPr>
+        <p:spPr>
+          <a:xfrm xmlns:a="http://schemas.openxmlformats.org/drawingml/2006/main">
+            <a:off x="6381750" y="1776196"/>
+            <a:ext cx="5314950" cy="3019858"/>
+          </a:xfrm>
+          <a:prstGeom xmlns:a="http://schemas.openxmlformats.org/drawingml/2006/main" prst="rect">
+            <a:avLst/>
+          </a:prstGeom>
+          <a:solidFill xmlns:a="http://schemas.openxmlformats.org/drawingml/2006/main">
+            <a:srgbClr val="FFFFFF"/>
+          </a:solidFill>
+          <a:ln xmlns:a="http://schemas.openxmlformats.org/drawingml/2006/main" w="0">
+            <a:solidFill>
+              <a:srgbClr val="FFFFFF"/>
+            </a:solidFill>
+            <a:prstDash val="solid"/>
+          </a:ln>
+        </p:spPr>
+      </p:sp>
+      <p:pic>
+        <p:nvPicPr>
+          <p:cNvPr id="16" name=""/>
+          <p:cNvPicPr>
+            <a:picLocks xmlns:a="http://schemas.openxmlformats.org/drawingml/2006/main" noChangeAspect="1"/>
+          </p:cNvPicPr>
+          <p:nvPr/>
+        </p:nvPicPr>
+        <p:blipFill>
+          <a:blip xmlns:r="http://schemas.openxmlformats.org/officeDocument/2006/relationships" xmlns:a="http://schemas.openxmlformats.org/drawingml/2006/main" r:embed="R178cba244e0240b5"/>
+          <a:stretch xmlns:a="http://schemas.openxmlformats.org/drawingml/2006/main"/>
+        </p:blipFill>
+        <p:spPr>
+          <a:xfrm xmlns:a="http://schemas.openxmlformats.org/drawingml/2006/main">
+            <a:off x="6381750" y="1817520"/>
+            <a:ext cx="5314950" cy="2937209"/>
+          </a:xfrm>
+          <a:prstGeom xmlns:a="http://schemas.openxmlformats.org/drawingml/2006/main" prst="roundRect">
             <a:avLst/>
           </a:prstGeom>
         </p:spPr>
@@ -3560,7 +7713,7 @@
     </p:spTree>
     <p:extLst>
       <p:ext uri="{BB962C8B-B14F-4D97-AF65-F5344CB8AC3E}">
-        <p14:creationId xmlns:p14="http://schemas.microsoft.com/office/powerpoint/2010/main" val="91287502"/>
+        <p14:creationId xmlns:p14="http://schemas.microsoft.com/office/powerpoint/2010/main" val="1873340891"/>
       </p:ext>
     </p:extLst>
   </p:cSld>
@@ -3581,10 +7734,97 @@
       </p:grpSpPr>
       <p:sp>
         <p:nvSpPr>
-          <p:cNvPr id="11" name="footer">
-            <a:extLst xmlns:a="http://schemas.openxmlformats.org/drawingml/2006/main">
-              <a:ext uri="{FF2B5EF4-FFF2-40B4-BE49-F238E27FC236}">
-                <a16:creationId xmlns:a16="http://schemas.microsoft.com/office/drawing/2014/main" id="{A36482E3-0836-42EE-A424-2E869BA90946}"/>
+          <p:cNvPr id="13" name="stat-card-1">
+            <a:extLst xmlns:a="http://schemas.openxmlformats.org/drawingml/2006/main">
+              <a:ext uri="{FF2B5EF4-FFF2-40B4-BE49-F238E27FC236}">
+                <a16:creationId xmlns:a16="http://schemas.microsoft.com/office/drawing/2014/main" id="{E92BF88A-D985-4E89-9220-AED80DBBCF70}"/>
+              </a:ext>
+            </a:extLst>
+          </p:cNvPr>
+          <p:cNvSpPr>
+            <a:spLocks xmlns:a="http://schemas.openxmlformats.org/drawingml/2006/main" noGrp="1"/>
+          </p:cNvSpPr>
+          <p:nvPr/>
+        </p:nvSpPr>
+        <p:spPr>
+          <a:xfrm xmlns:a="http://schemas.openxmlformats.org/drawingml/2006/main">
+            <a:off x="393668" y="3022568"/>
+            <a:ext cx="3568732" cy="2971800"/>
+          </a:xfrm>
+          <a:prstGeom xmlns:a="http://schemas.openxmlformats.org/drawingml/2006/main" prst="roundRect">
+            <a:avLst>
+              <a:gd name="adj" fmla="val 2564"/>
+            </a:avLst>
+          </a:prstGeom>
+          <a:solidFill xmlns:a="http://schemas.openxmlformats.org/drawingml/2006/main">
+            <a:srgbClr val="F2F2F2"/>
+          </a:solidFill>
+        </p:spPr>
+      </p:sp>
+      <p:sp>
+        <p:nvSpPr>
+          <p:cNvPr id="2" name="stat-card-2">
+            <a:extLst xmlns:a="http://schemas.openxmlformats.org/drawingml/2006/main">
+              <a:ext uri="{FF2B5EF4-FFF2-40B4-BE49-F238E27FC236}">
+                <a16:creationId xmlns:a16="http://schemas.microsoft.com/office/drawing/2014/main" id="{18F3FD71-2B01-497E-B7A5-AD72E3A3FA93}"/>
+              </a:ext>
+            </a:extLst>
+          </p:cNvPr>
+          <p:cNvSpPr>
+            <a:spLocks xmlns:a="http://schemas.openxmlformats.org/drawingml/2006/main" noGrp="1"/>
+          </p:cNvSpPr>
+          <p:nvPr/>
+        </p:nvSpPr>
+        <p:spPr>
+          <a:xfrm xmlns:a="http://schemas.openxmlformats.org/drawingml/2006/main">
+            <a:off x="4311682" y="3022568"/>
+            <a:ext cx="3568732" cy="2971800"/>
+          </a:xfrm>
+          <a:prstGeom xmlns:a="http://schemas.openxmlformats.org/drawingml/2006/main" prst="roundRect">
+            <a:avLst>
+              <a:gd name="adj" fmla="val 2564"/>
+            </a:avLst>
+          </a:prstGeom>
+          <a:solidFill xmlns:a="http://schemas.openxmlformats.org/drawingml/2006/main">
+            <a:srgbClr val="F2F2F2"/>
+          </a:solidFill>
+        </p:spPr>
+      </p:sp>
+      <p:sp>
+        <p:nvSpPr>
+          <p:cNvPr id="3" name="stat-card-3">
+            <a:extLst xmlns:a="http://schemas.openxmlformats.org/drawingml/2006/main">
+              <a:ext uri="{FF2B5EF4-FFF2-40B4-BE49-F238E27FC236}">
+                <a16:creationId xmlns:a16="http://schemas.microsoft.com/office/drawing/2014/main" id="{A256A665-F93B-46DB-A120-F2929BE31EAA}"/>
+              </a:ext>
+            </a:extLst>
+          </p:cNvPr>
+          <p:cNvSpPr>
+            <a:spLocks xmlns:a="http://schemas.openxmlformats.org/drawingml/2006/main" noGrp="1"/>
+          </p:cNvSpPr>
+          <p:nvPr/>
+        </p:nvSpPr>
+        <p:spPr>
+          <a:xfrm xmlns:a="http://schemas.openxmlformats.org/drawingml/2006/main">
+            <a:off x="8232267" y="3022568"/>
+            <a:ext cx="3568732" cy="2971800"/>
+          </a:xfrm>
+          <a:prstGeom xmlns:a="http://schemas.openxmlformats.org/drawingml/2006/main" prst="roundRect">
+            <a:avLst>
+              <a:gd name="adj" fmla="val 2564"/>
+            </a:avLst>
+          </a:prstGeom>
+          <a:solidFill xmlns:a="http://schemas.openxmlformats.org/drawingml/2006/main">
+            <a:srgbClr val="F2F2F2"/>
+          </a:solidFill>
+        </p:spPr>
+      </p:sp>
+      <p:sp>
+        <p:nvSpPr>
+          <p:cNvPr id="4" name="footer">
+            <a:extLst xmlns:a="http://schemas.openxmlformats.org/drawingml/2006/main">
+              <a:ext uri="{FF2B5EF4-FFF2-40B4-BE49-F238E27FC236}">
+                <a16:creationId xmlns:a16="http://schemas.microsoft.com/office/drawing/2014/main" id="{8B8FEAA9-7122-4602-AAFA-C856C71CAA69}"/>
               </a:ext>
             </a:extLst>
           </p:cNvPr>
@@ -3607,6 +7847,7 @@
           <a:lstStyle xmlns:a="http://schemas.openxmlformats.org/drawingml/2006/main"/>
           <a:p xmlns:a="http://schemas.openxmlformats.org/drawingml/2006/main">
             <a:pPr algn="r">
+              <a:buNone/>
               <a:defRPr sz="1000">
                 <a:solidFill>
                   <a:srgbClr val="000000"/>
@@ -3624,10 +7865,10 @@
       </p:sp>
       <p:sp>
         <p:nvSpPr>
-          <p:cNvPr id="2" name="title">
-            <a:extLst xmlns:a="http://schemas.openxmlformats.org/drawingml/2006/main">
-              <a:ext uri="{FF2B5EF4-FFF2-40B4-BE49-F238E27FC236}">
-                <a16:creationId xmlns:a16="http://schemas.microsoft.com/office/drawing/2014/main" id="{1C7B3E2F-B15F-4CE7-9E93-D02FFAE5F60A}"/>
+          <p:cNvPr id="5" name="title">
+            <a:extLst xmlns:a="http://schemas.openxmlformats.org/drawingml/2006/main">
+              <a:ext uri="{FF2B5EF4-FFF2-40B4-BE49-F238E27FC236}">
+                <a16:creationId xmlns:a16="http://schemas.microsoft.com/office/drawing/2014/main" id="{6B999DAA-321B-4DEF-AC22-1F41A5B8E8C7}"/>
               </a:ext>
             </a:extLst>
           </p:cNvPr>
@@ -3652,6 +7893,7 @@
           <a:lstStyle xmlns:a="http://schemas.openxmlformats.org/drawingml/2006/main"/>
           <a:p xmlns:a="http://schemas.openxmlformats.org/drawingml/2006/main">
             <a:pPr algn="l">
+              <a:buNone/>
               <a:defRPr sz="2900">
                 <a:solidFill>
                   <a:srgbClr val="000000"/>
@@ -3662,87 +7904,29 @@
               </a:defRPr>
             </a:pPr>
             <a:r>
-              <a:t>Uncertainty and falsification offered no rescue</a:t>
-            </a:r>
-          </a:p>
-        </p:txBody>
-      </p:sp>
-      <p:sp>
-        <p:nvSpPr>
-          <p:cNvPr id="3" name="left-stat-card">
-            <a:extLst xmlns:a="http://schemas.openxmlformats.org/drawingml/2006/main">
-              <a:ext uri="{FF2B5EF4-FFF2-40B4-BE49-F238E27FC236}">
-                <a16:creationId xmlns:a16="http://schemas.microsoft.com/office/drawing/2014/main" id="{0537132A-D0A9-4B26-9624-49D1E8829F72}"/>
-              </a:ext>
-            </a:extLst>
-          </p:cNvPr>
-          <p:cNvSpPr>
-            <a:spLocks xmlns:a="http://schemas.openxmlformats.org/drawingml/2006/main" noGrp="1"/>
-          </p:cNvSpPr>
-          <p:nvPr/>
-        </p:nvSpPr>
-        <p:spPr>
-          <a:xfrm xmlns:a="http://schemas.openxmlformats.org/drawingml/2006/main">
-            <a:off x="6272022" y="3360039"/>
-            <a:ext cx="2581942" cy="2656523"/>
-          </a:xfrm>
-          <a:prstGeom xmlns:a="http://schemas.openxmlformats.org/drawingml/2006/main" prst="roundRect">
-            <a:avLst>
-              <a:gd name="adj" fmla="val 2951"/>
-            </a:avLst>
-          </a:prstGeom>
-          <a:solidFill xmlns:a="http://schemas.openxmlformats.org/drawingml/2006/main">
-            <a:srgbClr val="F2F2F2"/>
-          </a:solidFill>
-        </p:spPr>
-      </p:sp>
-      <p:sp>
-        <p:nvSpPr>
-          <p:cNvPr id="4" name="right-stat-card">
-            <a:extLst xmlns:a="http://schemas.openxmlformats.org/drawingml/2006/main">
-              <a:ext uri="{FF2B5EF4-FFF2-40B4-BE49-F238E27FC236}">
-                <a16:creationId xmlns:a16="http://schemas.microsoft.com/office/drawing/2014/main" id="{9AF5A6DC-5240-4747-8A2C-59E91119B52D}"/>
-              </a:ext>
-            </a:extLst>
-          </p:cNvPr>
-          <p:cNvSpPr>
-            <a:spLocks xmlns:a="http://schemas.openxmlformats.org/drawingml/2006/main" noGrp="1"/>
-          </p:cNvSpPr>
-          <p:nvPr/>
-        </p:nvSpPr>
-        <p:spPr>
-          <a:xfrm xmlns:a="http://schemas.openxmlformats.org/drawingml/2006/main">
-            <a:off x="9224201" y="3360039"/>
-            <a:ext cx="2581942" cy="2656523"/>
-          </a:xfrm>
-          <a:prstGeom xmlns:a="http://schemas.openxmlformats.org/drawingml/2006/main" prst="roundRect">
-            <a:avLst>
-              <a:gd name="adj" fmla="val 2951"/>
-            </a:avLst>
-          </a:prstGeom>
-          <a:solidFill xmlns:a="http://schemas.openxmlformats.org/drawingml/2006/main">
-            <a:srgbClr val="F2F2F2"/>
-          </a:solidFill>
-        </p:spPr>
-      </p:sp>
-      <p:sp>
-        <p:nvSpPr>
-          <p:cNvPr id="5" name="summary">
-            <a:extLst xmlns:a="http://schemas.openxmlformats.org/drawingml/2006/main">
-              <a:ext uri="{FF2B5EF4-FFF2-40B4-BE49-F238E27FC236}">
-                <a16:creationId xmlns:a16="http://schemas.microsoft.com/office/drawing/2014/main" id="{87467A1C-2B62-4E3A-A37F-25E47B9BE9CD}"/>
-              </a:ext>
-            </a:extLst>
-          </p:cNvPr>
-          <p:cNvSpPr>
-            <a:spLocks xmlns:a="http://schemas.openxmlformats.org/drawingml/2006/main" noGrp="1"/>
-          </p:cNvSpPr>
-          <p:nvPr/>
-        </p:nvSpPr>
-        <p:spPr>
-          <a:xfrm xmlns:a="http://schemas.openxmlformats.org/drawingml/2006/main">
-            <a:off x="6261068" y="1714500"/>
-            <a:ext cx="5539835" cy="1381125"/>
+              <a:t>Positive and negative beta imply different trades</a:t>
+            </a:r>
+          </a:p>
+        </p:txBody>
+      </p:sp>
+      <p:sp>
+        <p:nvSpPr>
+          <p:cNvPr id="6" name="intro">
+            <a:extLst xmlns:a="http://schemas.openxmlformats.org/drawingml/2006/main">
+              <a:ext uri="{FF2B5EF4-FFF2-40B4-BE49-F238E27FC236}">
+                <a16:creationId xmlns:a16="http://schemas.microsoft.com/office/drawing/2014/main" id="{B83D39E3-1D42-4CA4-A507-6C07CD200977}"/>
+              </a:ext>
+            </a:extLst>
+          </p:cNvPr>
+          <p:cNvSpPr>
+            <a:spLocks xmlns:a="http://schemas.openxmlformats.org/drawingml/2006/main" noGrp="1"/>
+          </p:cNvSpPr>
+          <p:nvPr/>
+        </p:nvSpPr>
+        <p:spPr>
+          <a:xfrm xmlns:a="http://schemas.openxmlformats.org/drawingml/2006/main">
+            <a:off x="393668" y="1219200"/>
+            <a:ext cx="11404568" cy="1428750"/>
           </a:xfrm>
           <a:prstGeom xmlns:a="http://schemas.openxmlformats.org/drawingml/2006/main" prst="rect">
             <a:avLst/>
@@ -3755,7 +7939,8 @@
           <a:lstStyle xmlns:a="http://schemas.openxmlformats.org/drawingml/2006/main"/>
           <a:p xmlns:a="http://schemas.openxmlformats.org/drawingml/2006/main">
             <a:pPr algn="l">
-              <a:defRPr sz="1800">
+              <a:buNone/>
+              <a:defRPr sz="1650">
                 <a:solidFill>
                   <a:srgbClr val="000000"/>
                 </a:solidFill>
@@ -3765,29 +7950,29 @@
               </a:defRPr>
             </a:pPr>
             <a:r>
-              <a:t>The mean sat inside a very wide interval and below the p90 of random trade directions with the same timing, pair path, holding periods, and primary costs.</a:t>
-            </a:r>
-          </a:p>
-        </p:txBody>
-      </p:sp>
-      <p:sp>
-        <p:nvSpPr>
-          <p:cNvPr id="6" name="left-stat">
-            <a:extLst xmlns:a="http://schemas.openxmlformats.org/drawingml/2006/main">
-              <a:ext uri="{FF2B5EF4-FFF2-40B4-BE49-F238E27FC236}">
-                <a16:creationId xmlns:a16="http://schemas.microsoft.com/office/drawing/2014/main" id="{FE80A7F4-6D99-4C52-B848-EAE130561598}"/>
-              </a:ext>
-            </a:extLst>
-          </p:cNvPr>
-          <p:cNvSpPr>
-            <a:spLocks xmlns:a="http://schemas.openxmlformats.org/drawingml/2006/main" noGrp="1"/>
-          </p:cNvSpPr>
-          <p:nvPr/>
-        </p:nvSpPr>
-        <p:spPr>
-          <a:xfrm xmlns:a="http://schemas.openxmlformats.org/drawingml/2006/main">
-            <a:off x="6509385" y="3579971"/>
-            <a:ext cx="2133314" cy="1155859"/>
+              <a:t>The algebra can fit co-moving or oppositely moving assets, but the portfolio meaning changes. We therefore trade only positive-beta pairs in this panel and treat inverse relationships as diagnostics.</a:t>
+            </a:r>
+          </a:p>
+        </p:txBody>
+      </p:sp>
+      <p:sp>
+        <p:nvSpPr>
+          <p:cNvPr id="7" name="stat-1">
+            <a:extLst xmlns:a="http://schemas.openxmlformats.org/drawingml/2006/main">
+              <a:ext uri="{FF2B5EF4-FFF2-40B4-BE49-F238E27FC236}">
+                <a16:creationId xmlns:a16="http://schemas.microsoft.com/office/drawing/2014/main" id="{CE99FBCB-3F61-4E2C-9916-C8B37E005A45}"/>
+              </a:ext>
+            </a:extLst>
+          </p:cNvPr>
+          <p:cNvSpPr>
+            <a:spLocks xmlns:a="http://schemas.openxmlformats.org/drawingml/2006/main" noGrp="1"/>
+          </p:cNvSpPr>
+          <p:nvPr/>
+        </p:nvSpPr>
+        <p:spPr>
+          <a:xfrm xmlns:a="http://schemas.openxmlformats.org/drawingml/2006/main">
+            <a:off x="702374" y="3429000"/>
+            <a:ext cx="2940082" cy="1359313"/>
           </a:xfrm>
           <a:prstGeom xmlns:a="http://schemas.openxmlformats.org/drawingml/2006/main" prst="rect">
             <a:avLst/>
@@ -3800,7 +7985,8 @@
           <a:lstStyle xmlns:a="http://schemas.openxmlformats.org/drawingml/2006/main"/>
           <a:p xmlns:a="http://schemas.openxmlformats.org/drawingml/2006/main">
             <a:pPr algn="l">
-              <a:defRPr sz="2700">
+              <a:buNone/>
+              <a:defRPr sz="3225">
                 <a:solidFill>
                   <a:srgbClr val="64748B"/>
                 </a:solidFill>
@@ -3810,42 +7996,43 @@
               </a:defRPr>
             </a:pPr>
             <a:r>
-              <a:t>[-121, +83]</a:t>
-            </a:r>
-          </a:p>
-        </p:txBody>
-      </p:sp>
-      <p:sp>
-        <p:nvSpPr>
-          <p:cNvPr id="7" name="left-stat-label">
-            <a:extLst xmlns:a="http://schemas.openxmlformats.org/drawingml/2006/main">
-              <a:ext uri="{FF2B5EF4-FFF2-40B4-BE49-F238E27FC236}">
-                <a16:creationId xmlns:a16="http://schemas.microsoft.com/office/drawing/2014/main" id="{E40BF187-37D5-4CDB-9030-4E2CB386A533}"/>
-              </a:ext>
-            </a:extLst>
-          </p:cNvPr>
-          <p:cNvSpPr>
-            <a:spLocks xmlns:a="http://schemas.openxmlformats.org/drawingml/2006/main" noGrp="1"/>
-          </p:cNvSpPr>
-          <p:nvPr/>
-        </p:nvSpPr>
-        <p:spPr>
-          <a:xfrm xmlns:a="http://schemas.openxmlformats.org/drawingml/2006/main">
-            <a:off x="6575965" y="4953000"/>
-            <a:ext cx="2066735" cy="762000"/>
-          </a:xfrm>
-          <a:prstGeom xmlns:a="http://schemas.openxmlformats.org/drawingml/2006/main" prst="rect">
-            <a:avLst/>
-          </a:prstGeom>
-        </p:spPr>
-        <p:txBody>
-          <a:bodyPr xmlns:a="http://schemas.openxmlformats.org/drawingml/2006/main" lIns="0" tIns="0" rIns="0" bIns="0">
+              <a:t>β &gt; 0</a:t>
+            </a:r>
+          </a:p>
+        </p:txBody>
+      </p:sp>
+      <p:sp>
+        <p:nvSpPr>
+          <p:cNvPr id="8" name="stat-label-1">
+            <a:extLst xmlns:a="http://schemas.openxmlformats.org/drawingml/2006/main">
+              <a:ext uri="{FF2B5EF4-FFF2-40B4-BE49-F238E27FC236}">
+                <a16:creationId xmlns:a16="http://schemas.microsoft.com/office/drawing/2014/main" id="{8D7A7BD1-1D20-421E-BAC5-DFF695BBE1AF}"/>
+              </a:ext>
+            </a:extLst>
+          </p:cNvPr>
+          <p:cNvSpPr>
+            <a:spLocks xmlns:a="http://schemas.openxmlformats.org/drawingml/2006/main" noGrp="1"/>
+          </p:cNvSpPr>
+          <p:nvPr/>
+        </p:nvSpPr>
+        <p:spPr>
+          <a:xfrm xmlns:a="http://schemas.openxmlformats.org/drawingml/2006/main">
+            <a:off x="702374" y="4900613"/>
+            <a:ext cx="2949607" cy="819150"/>
+          </a:xfrm>
+          <a:prstGeom xmlns:a="http://schemas.openxmlformats.org/drawingml/2006/main" prst="rect">
+            <a:avLst/>
+          </a:prstGeom>
+        </p:spPr>
+        <p:txBody>
+          <a:bodyPr xmlns:a="http://schemas.openxmlformats.org/drawingml/2006/main" lIns="0" tIns="45720" rIns="91440" bIns="45720" anchor="t">
             <a:normAutofit fontScale="100000"/>
           </a:bodyPr>
           <a:lstStyle xmlns:a="http://schemas.openxmlformats.org/drawingml/2006/main"/>
           <a:p xmlns:a="http://schemas.openxmlformats.org/drawingml/2006/main">
             <a:pPr algn="l">
-              <a:defRPr sz="1500">
+              <a:buNone/>
+              <a:defRPr sz="1575">
                 <a:solidFill>
                   <a:srgbClr val="000000"/>
                 </a:solidFill>
@@ -3855,30 +8042,30 @@
               </a:defRPr>
             </a:pPr>
             <a:r>
-              <a:t>95% interval
-bp per trade</a:t>
-            </a:r>
-          </a:p>
-        </p:txBody>
-      </p:sp>
-      <p:sp>
-        <p:nvSpPr>
-          <p:cNvPr id="8" name="right-stat">
-            <a:extLst xmlns:a="http://schemas.openxmlformats.org/drawingml/2006/main">
-              <a:ext uri="{FF2B5EF4-FFF2-40B4-BE49-F238E27FC236}">
-                <a16:creationId xmlns:a16="http://schemas.microsoft.com/office/drawing/2014/main" id="{D938F8F7-A9FF-49C0-ABE1-4CC871B48166}"/>
-              </a:ext>
-            </a:extLst>
-          </p:cNvPr>
-          <p:cNvSpPr>
-            <a:spLocks xmlns:a="http://schemas.openxmlformats.org/drawingml/2006/main" noGrp="1"/>
-          </p:cNvSpPr>
-          <p:nvPr/>
-        </p:nvSpPr>
-        <p:spPr>
-          <a:xfrm xmlns:a="http://schemas.openxmlformats.org/drawingml/2006/main">
-            <a:off x="9461564" y="3579971"/>
-            <a:ext cx="2133314" cy="1155859"/>
+              <a:t>Relative value: long one leg,
+short the other</a:t>
+            </a:r>
+          </a:p>
+        </p:txBody>
+      </p:sp>
+      <p:sp>
+        <p:nvSpPr>
+          <p:cNvPr id="9" name="stat-2">
+            <a:extLst xmlns:a="http://schemas.openxmlformats.org/drawingml/2006/main">
+              <a:ext uri="{FF2B5EF4-FFF2-40B4-BE49-F238E27FC236}">
+                <a16:creationId xmlns:a16="http://schemas.microsoft.com/office/drawing/2014/main" id="{E572DBE1-8080-407B-A0FF-815818B837E6}"/>
+              </a:ext>
+            </a:extLst>
+          </p:cNvPr>
+          <p:cNvSpPr>
+            <a:spLocks xmlns:a="http://schemas.openxmlformats.org/drawingml/2006/main" noGrp="1"/>
+          </p:cNvSpPr>
+          <p:nvPr/>
+        </p:nvSpPr>
+        <p:spPr>
+          <a:xfrm xmlns:a="http://schemas.openxmlformats.org/drawingml/2006/main">
+            <a:off x="4612958" y="3429000"/>
+            <a:ext cx="2940082" cy="1359313"/>
           </a:xfrm>
           <a:prstGeom xmlns:a="http://schemas.openxmlformats.org/drawingml/2006/main" prst="rect">
             <a:avLst/>
@@ -3891,52 +8078,54 @@
           <a:lstStyle xmlns:a="http://schemas.openxmlformats.org/drawingml/2006/main"/>
           <a:p xmlns:a="http://schemas.openxmlformats.org/drawingml/2006/main">
             <a:pPr algn="l">
-              <a:defRPr sz="2700">
-                <a:solidFill>
-                  <a:srgbClr val="F59E0B"/>
-                </a:solidFill>
-                <a:latin typeface="Helvetica Neue"/>
-                <a:ea typeface="Helvetica Neue"/>
-                <a:cs typeface="Helvetica Neue"/>
-              </a:defRPr>
-            </a:pPr>
-            <a:r>
-              <a:t>+47.88 bp</a:t>
-            </a:r>
-          </a:p>
-        </p:txBody>
-      </p:sp>
-      <p:sp>
-        <p:nvSpPr>
-          <p:cNvPr id="9" name="right-stat-label">
-            <a:extLst xmlns:a="http://schemas.openxmlformats.org/drawingml/2006/main">
-              <a:ext uri="{FF2B5EF4-FFF2-40B4-BE49-F238E27FC236}">
-                <a16:creationId xmlns:a16="http://schemas.microsoft.com/office/drawing/2014/main" id="{197A8950-A2B2-4FCE-A738-88CF2DF9A981}"/>
-              </a:ext>
-            </a:extLst>
-          </p:cNvPr>
-          <p:cNvSpPr>
-            <a:spLocks xmlns:a="http://schemas.openxmlformats.org/drawingml/2006/main" noGrp="1"/>
-          </p:cNvSpPr>
-          <p:nvPr/>
-        </p:nvSpPr>
-        <p:spPr>
-          <a:xfrm xmlns:a="http://schemas.openxmlformats.org/drawingml/2006/main">
-            <a:off x="9528143" y="4953000"/>
-            <a:ext cx="2066735" cy="762000"/>
-          </a:xfrm>
-          <a:prstGeom xmlns:a="http://schemas.openxmlformats.org/drawingml/2006/main" prst="rect">
-            <a:avLst/>
-          </a:prstGeom>
-        </p:spPr>
-        <p:txBody>
-          <a:bodyPr xmlns:a="http://schemas.openxmlformats.org/drawingml/2006/main" lIns="0" tIns="0" rIns="0" bIns="0">
+              <a:buNone/>
+              <a:defRPr sz="3225">
+                <a:solidFill>
+                  <a:srgbClr val="B42318"/>
+                </a:solidFill>
+                <a:latin typeface="Helvetica Neue"/>
+                <a:ea typeface="Helvetica Neue"/>
+                <a:cs typeface="Helvetica Neue"/>
+              </a:defRPr>
+            </a:pPr>
+            <a:r>
+              <a:t>β &lt; 0</a:t>
+            </a:r>
+          </a:p>
+        </p:txBody>
+      </p:sp>
+      <p:sp>
+        <p:nvSpPr>
+          <p:cNvPr id="10" name="stat-label-2">
+            <a:extLst xmlns:a="http://schemas.openxmlformats.org/drawingml/2006/main">
+              <a:ext uri="{FF2B5EF4-FFF2-40B4-BE49-F238E27FC236}">
+                <a16:creationId xmlns:a16="http://schemas.microsoft.com/office/drawing/2014/main" id="{FD56EAD1-B269-48E0-9F23-33330F29DCE5}"/>
+              </a:ext>
+            </a:extLst>
+          </p:cNvPr>
+          <p:cNvSpPr>
+            <a:spLocks xmlns:a="http://schemas.openxmlformats.org/drawingml/2006/main" noGrp="1"/>
+          </p:cNvSpPr>
+          <p:nvPr/>
+        </p:nvSpPr>
+        <p:spPr>
+          <a:xfrm xmlns:a="http://schemas.openxmlformats.org/drawingml/2006/main">
+            <a:off x="4612958" y="4900613"/>
+            <a:ext cx="2949607" cy="819150"/>
+          </a:xfrm>
+          <a:prstGeom xmlns:a="http://schemas.openxmlformats.org/drawingml/2006/main" prst="rect">
+            <a:avLst/>
+          </a:prstGeom>
+        </p:spPr>
+        <p:txBody>
+          <a:bodyPr xmlns:a="http://schemas.openxmlformats.org/drawingml/2006/main" lIns="0" tIns="45720" rIns="91440" bIns="45720" anchor="t">
             <a:normAutofit fontScale="100000"/>
           </a:bodyPr>
           <a:lstStyle xmlns:a="http://schemas.openxmlformats.org/drawingml/2006/main"/>
           <a:p xmlns:a="http://schemas.openxmlformats.org/drawingml/2006/main">
             <a:pPr algn="l">
-              <a:defRPr sz="1500">
+              <a:buNone/>
+              <a:defRPr sz="1575">
                 <a:solidFill>
                   <a:srgbClr val="000000"/>
                 </a:solidFill>
@@ -3946,38 +8135,109 @@
               </a:defRPr>
             </a:pPr>
             <a:r>
-              <a:t>Matched random-sign p90
-Observed: -17.68 bp</a:t>
-            </a:r>
-          </a:p>
-        </p:txBody>
-      </p:sp>
-      <p:pic>
-        <p:nvPicPr>
-          <p:cNvPr id="20" name=""/>
-          <p:cNvPicPr>
-            <a:picLocks xmlns:a="http://schemas.openxmlformats.org/drawingml/2006/main" noChangeAspect="1"/>
-          </p:cNvPicPr>
-          <p:nvPr/>
-        </p:nvPicPr>
-        <p:blipFill>
-          <a:blip xmlns:r="http://schemas.openxmlformats.org/officeDocument/2006/relationships" xmlns:a="http://schemas.openxmlformats.org/drawingml/2006/main" r:embed="R444a0db030544be7"/>
-          <a:stretch xmlns:a="http://schemas.openxmlformats.org/drawingml/2006/main"/>
-        </p:blipFill>
-        <p:spPr>
-          <a:xfrm xmlns:a="http://schemas.openxmlformats.org/drawingml/2006/main">
-            <a:off x="385858" y="2444705"/>
-            <a:ext cx="5534216" cy="2635341"/>
-          </a:xfrm>
-          <a:prstGeom xmlns:a="http://schemas.openxmlformats.org/drawingml/2006/main" prst="rect">
-            <a:avLst/>
-          </a:prstGeom>
-        </p:spPr>
-      </p:pic>
+              <a:t>Long spread can mean long both assets;
+not the same market-neutral trade</a:t>
+            </a:r>
+          </a:p>
+        </p:txBody>
+      </p:sp>
+      <p:sp>
+        <p:nvSpPr>
+          <p:cNvPr id="11" name="stat-3">
+            <a:extLst xmlns:a="http://schemas.openxmlformats.org/drawingml/2006/main">
+              <a:ext uri="{FF2B5EF4-FFF2-40B4-BE49-F238E27FC236}">
+                <a16:creationId xmlns:a16="http://schemas.microsoft.com/office/drawing/2014/main" id="{9C6C64B0-28CA-4923-800E-94342CB69146}"/>
+              </a:ext>
+            </a:extLst>
+          </p:cNvPr>
+          <p:cNvSpPr>
+            <a:spLocks xmlns:a="http://schemas.openxmlformats.org/drawingml/2006/main" noGrp="1"/>
+          </p:cNvSpPr>
+          <p:nvPr/>
+        </p:nvSpPr>
+        <p:spPr>
+          <a:xfrm xmlns:a="http://schemas.openxmlformats.org/drawingml/2006/main">
+            <a:off x="8562404" y="3429000"/>
+            <a:ext cx="2940082" cy="1359313"/>
+          </a:xfrm>
+          <a:prstGeom xmlns:a="http://schemas.openxmlformats.org/drawingml/2006/main" prst="rect">
+            <a:avLst/>
+          </a:prstGeom>
+        </p:spPr>
+        <p:txBody>
+          <a:bodyPr xmlns:a="http://schemas.openxmlformats.org/drawingml/2006/main" lIns="0" tIns="0" rIns="0" bIns="0" anchor="b">
+            <a:normAutofit fontScale="100000"/>
+          </a:bodyPr>
+          <a:lstStyle xmlns:a="http://schemas.openxmlformats.org/drawingml/2006/main"/>
+          <a:p xmlns:a="http://schemas.openxmlformats.org/drawingml/2006/main">
+            <a:pPr algn="l">
+              <a:buNone/>
+              <a:defRPr sz="3225">
+                <a:solidFill>
+                  <a:srgbClr val="3D8DFF"/>
+                </a:solidFill>
+                <a:latin typeface="Helvetica Neue"/>
+                <a:ea typeface="Helvetica Neue"/>
+                <a:cs typeface="Helvetica Neue"/>
+              </a:defRPr>
+            </a:pPr>
+            <a:r>
+              <a:t>β sign flips</a:t>
+            </a:r>
+          </a:p>
+        </p:txBody>
+      </p:sp>
+      <p:sp>
+        <p:nvSpPr>
+          <p:cNvPr id="12" name="stat-label-3">
+            <a:extLst xmlns:a="http://schemas.openxmlformats.org/drawingml/2006/main">
+              <a:ext uri="{FF2B5EF4-FFF2-40B4-BE49-F238E27FC236}">
+                <a16:creationId xmlns:a16="http://schemas.microsoft.com/office/drawing/2014/main" id="{0ED31E12-360E-4FDB-B429-1A6368F41685}"/>
+              </a:ext>
+            </a:extLst>
+          </p:cNvPr>
+          <p:cNvSpPr>
+            <a:spLocks xmlns:a="http://schemas.openxmlformats.org/drawingml/2006/main" noGrp="1"/>
+          </p:cNvSpPr>
+          <p:nvPr/>
+        </p:nvSpPr>
+        <p:spPr>
+          <a:xfrm xmlns:a="http://schemas.openxmlformats.org/drawingml/2006/main">
+            <a:off x="8562404" y="4900613"/>
+            <a:ext cx="2949607" cy="819150"/>
+          </a:xfrm>
+          <a:prstGeom xmlns:a="http://schemas.openxmlformats.org/drawingml/2006/main" prst="rect">
+            <a:avLst/>
+          </a:prstGeom>
+        </p:spPr>
+        <p:txBody>
+          <a:bodyPr xmlns:a="http://schemas.openxmlformats.org/drawingml/2006/main" lIns="0" tIns="45720" rIns="91440" bIns="45720" anchor="t">
+            <a:normAutofit fontScale="100000"/>
+          </a:bodyPr>
+          <a:lstStyle xmlns:a="http://schemas.openxmlformats.org/drawingml/2006/main"/>
+          <a:p xmlns:a="http://schemas.openxmlformats.org/drawingml/2006/main">
+            <a:pPr algn="l">
+              <a:buNone/>
+              <a:defRPr sz="1575">
+                <a:solidFill>
+                  <a:srgbClr val="000000"/>
+                </a:solidFill>
+                <a:latin typeface="Helvetica Neue"/>
+                <a:ea typeface="Helvetica Neue"/>
+                <a:cs typeface="Helvetica Neue"/>
+              </a:defRPr>
+            </a:pPr>
+            <a:r>
+              <a:t>Position semantics can change
+inside one backtest</a:t>
+            </a:r>
+          </a:p>
+        </p:txBody>
+      </p:sp>
     </p:spTree>
     <p:extLst>
       <p:ext uri="{BB962C8B-B14F-4D97-AF65-F5344CB8AC3E}">
-        <p14:creationId xmlns:p14="http://schemas.microsoft.com/office/powerpoint/2010/main" val="1953812728"/>
+        <p14:creationId xmlns:p14="http://schemas.microsoft.com/office/powerpoint/2010/main" val="1500261740"/>
       </p:ext>
     </p:extLst>
   </p:cSld>
@@ -4001,7 +8261,7 @@
           <p:cNvPr id="6" name="footer">
             <a:extLst xmlns:a="http://schemas.openxmlformats.org/drawingml/2006/main">
               <a:ext uri="{FF2B5EF4-FFF2-40B4-BE49-F238E27FC236}">
-                <a16:creationId xmlns:a16="http://schemas.microsoft.com/office/drawing/2014/main" id="{5D1F4916-B18D-4F3F-8812-75A699D9A639}"/>
+                <a16:creationId xmlns:a16="http://schemas.microsoft.com/office/drawing/2014/main" id="{4F272998-B60C-44E0-849E-A04A87223BAE}"/>
               </a:ext>
             </a:extLst>
           </p:cNvPr>
@@ -4024,6 +8284,7 @@
           <a:lstStyle xmlns:a="http://schemas.openxmlformats.org/drawingml/2006/main"/>
           <a:p xmlns:a="http://schemas.openxmlformats.org/drawingml/2006/main">
             <a:pPr algn="r">
+              <a:buNone/>
               <a:defRPr sz="1000">
                 <a:solidFill>
                   <a:srgbClr val="000000"/>
@@ -4044,7 +8305,7 @@
           <p:cNvPr id="2" name="title">
             <a:extLst xmlns:a="http://schemas.openxmlformats.org/drawingml/2006/main">
               <a:ext uri="{FF2B5EF4-FFF2-40B4-BE49-F238E27FC236}">
-                <a16:creationId xmlns:a16="http://schemas.microsoft.com/office/drawing/2014/main" id="{ECB77D9D-0CB0-4878-9A4A-2687A311CD30}"/>
+                <a16:creationId xmlns:a16="http://schemas.microsoft.com/office/drawing/2014/main" id="{8A16F9E5-1AF4-43B0-AB25-E3AE98294DF6}"/>
               </a:ext>
             </a:extLst>
           </p:cNvPr>
@@ -4069,6 +8330,7 @@
           <a:lstStyle xmlns:a="http://schemas.openxmlformats.org/drawingml/2006/main"/>
           <a:p xmlns:a="http://schemas.openxmlformats.org/drawingml/2006/main">
             <a:pPr algn="l">
+              <a:buNone/>
               <a:defRPr sz="2900">
                 <a:solidFill>
                   <a:srgbClr val="000000"/>
@@ -4079,7 +8341,7 @@
               </a:defRPr>
             </a:pPr>
             <a:r>
-              <a:t>Representative trades show why zero-crossing is not enough</a:t>
+              <a:t>The frozen rule preserved the book's core mechanics</a:t>
             </a:r>
           </a:p>
         </p:txBody>
@@ -4089,7 +8351,7 @@
           <p:cNvPr id="3" name="image-backing">
             <a:extLst xmlns:a="http://schemas.openxmlformats.org/drawingml/2006/main">
               <a:ext uri="{FF2B5EF4-FFF2-40B4-BE49-F238E27FC236}">
-                <a16:creationId xmlns:a16="http://schemas.microsoft.com/office/drawing/2014/main" id="{6220C938-B9AD-4B79-90E3-107E303A9D02}"/>
+                <a16:creationId xmlns:a16="http://schemas.microsoft.com/office/drawing/2014/main" id="{5EE0E946-4B2C-4DE9-8839-3DE0D30C8B61}"/>
               </a:ext>
             </a:extLst>
           </p:cNvPr>
@@ -4124,7 +8386,7 @@
           <p:cNvPr id="4" name="body">
             <a:extLst xmlns:a="http://schemas.openxmlformats.org/drawingml/2006/main">
               <a:ext uri="{FF2B5EF4-FFF2-40B4-BE49-F238E27FC236}">
-                <a16:creationId xmlns:a16="http://schemas.microsoft.com/office/drawing/2014/main" id="{3F760EC2-C6B5-4968-A4B1-EBAD286BA351}"/>
+                <a16:creationId xmlns:a16="http://schemas.microsoft.com/office/drawing/2014/main" id="{3E0CA677-50AA-4CCF-BC5C-CB90210AF27E}"/>
               </a:ext>
             </a:extLst>
           </p:cNvPr>
@@ -4149,6 +8411,7 @@
           <a:lstStyle xmlns:a="http://schemas.openxmlformats.org/drawingml/2006/main"/>
           <a:p xmlns:a="http://schemas.openxmlformats.org/drawingml/2006/main">
             <a:pPr algn="l">
+              <a:buNone/>
               <a:defRPr sz="1950">
                 <a:solidFill>
                   <a:srgbClr val="000000"/>
@@ -4159,30 +8422,35 @@
               </a:defRPr>
             </a:pPr>
             <a:r>
-              <a:t>The tape includes both long- and short-spread trades across the return distribution.
-Some z-scores crossed zero only after large adverse pair moves. A normalized z-score crossing does not guarantee that the tradable legs produced a positive return.
-Worst shown: -1,254.7 bp
-Best shown: +809.6 bp</a:t>
+              <a:t>Signal after close
+Execute next open
+Enter long below -1z
+Enter short above +1z
+Exit at zero
+One gross-normalized unit
+Daily adaptive rehedging
+5 bp per one-way weight change
+No stop, target, max hold, or retuning.</a:t>
             </a:r>
           </a:p>
         </p:txBody>
       </p:sp>
       <p:pic>
         <p:nvPicPr>
-          <p:cNvPr id="10" name=""/>
+          <p:cNvPr id="12" name=""/>
           <p:cNvPicPr>
             <a:picLocks xmlns:a="http://schemas.openxmlformats.org/drawingml/2006/main" noChangeAspect="1"/>
           </p:cNvPicPr>
           <p:nvPr/>
         </p:nvPicPr>
         <p:blipFill>
-          <a:blip xmlns:r="http://schemas.openxmlformats.org/officeDocument/2006/relationships" xmlns:a="http://schemas.openxmlformats.org/drawingml/2006/main" r:embed="R8817f35401fb4805"/>
+          <a:blip xmlns:r="http://schemas.openxmlformats.org/officeDocument/2006/relationships" xmlns:a="http://schemas.openxmlformats.org/drawingml/2006/main" r:embed="Rd20e7075770149ce"/>
           <a:stretch xmlns:a="http://schemas.openxmlformats.org/drawingml/2006/main"/>
         </p:blipFill>
         <p:spPr>
           <a:xfrm xmlns:a="http://schemas.openxmlformats.org/drawingml/2006/main">
-            <a:off x="6381750" y="1595005"/>
-            <a:ext cx="5314950" cy="3382241"/>
+            <a:off x="6381750" y="1776196"/>
+            <a:ext cx="5314950" cy="3019858"/>
           </a:xfrm>
           <a:prstGeom xmlns:a="http://schemas.openxmlformats.org/drawingml/2006/main" prst="roundRect">
             <a:avLst/>
@@ -4192,7 +8460,7 @@
     </p:spTree>
     <p:extLst>
       <p:ext uri="{BB962C8B-B14F-4D97-AF65-F5344CB8AC3E}">
-        <p14:creationId xmlns:p14="http://schemas.microsoft.com/office/powerpoint/2010/main" val="463436756"/>
+        <p14:creationId xmlns:p14="http://schemas.microsoft.com/office/powerpoint/2010/main" val="1873340891"/>
       </p:ext>
     </p:extLst>
   </p:cSld>
@@ -4213,26 +8481,116 @@
       </p:grpSpPr>
       <p:sp>
         <p:nvSpPr>
-          <p:cNvPr id="13" name="stat-card-1">
-            <a:extLst xmlns:a="http://schemas.openxmlformats.org/drawingml/2006/main">
-              <a:ext uri="{FF2B5EF4-FFF2-40B4-BE49-F238E27FC236}">
-                <a16:creationId xmlns:a16="http://schemas.microsoft.com/office/drawing/2014/main" id="{E92BF88A-D985-4E89-9220-AED80DBBCF70}"/>
-              </a:ext>
-            </a:extLst>
-          </p:cNvPr>
-          <p:cNvSpPr>
-            <a:spLocks xmlns:a="http://schemas.openxmlformats.org/drawingml/2006/main" noGrp="1"/>
-          </p:cNvSpPr>
-          <p:nvPr/>
-        </p:nvSpPr>
-        <p:spPr>
-          <a:xfrm xmlns:a="http://schemas.openxmlformats.org/drawingml/2006/main">
-            <a:off x="393668" y="3022568"/>
-            <a:ext cx="3568732" cy="2971800"/>
+          <p:cNvPr id="11" name="footer">
+            <a:extLst xmlns:a="http://schemas.openxmlformats.org/drawingml/2006/main">
+              <a:ext uri="{FF2B5EF4-FFF2-40B4-BE49-F238E27FC236}">
+                <a16:creationId xmlns:a16="http://schemas.microsoft.com/office/drawing/2014/main" id="{9833E848-7434-4F2E-A17C-B17541CAE597}"/>
+              </a:ext>
+            </a:extLst>
+          </p:cNvPr>
+          <p:cNvSpPr>
+            <a:spLocks xmlns:a="http://schemas.openxmlformats.org/drawingml/2006/main" noGrp="1"/>
+          </p:cNvSpPr>
+          <p:nvPr/>
+        </p:nvSpPr>
+        <p:spPr>
+          <a:xfrm xmlns:a="http://schemas.openxmlformats.org/drawingml/2006/main">
+            <a:off x="11279315" y="6279261"/>
+            <a:ext cx="518922" cy="241268"/>
+          </a:xfrm>
+          <a:prstGeom xmlns:a="http://schemas.openxmlformats.org/drawingml/2006/main" prst="rect">
+            <a:avLst/>
+          </a:prstGeom>
+        </p:spPr>
+        <p:txBody>
+          <a:bodyPr xmlns:a="http://schemas.openxmlformats.org/drawingml/2006/main" lIns="0" tIns="0" rIns="0" bIns="0" anchor="b"/>
+          <a:lstStyle xmlns:a="http://schemas.openxmlformats.org/drawingml/2006/main"/>
+          <a:p xmlns:a="http://schemas.openxmlformats.org/drawingml/2006/main">
+            <a:pPr algn="r">
+              <a:buNone/>
+              <a:defRPr sz="1000">
+                <a:solidFill>
+                  <a:srgbClr val="000000"/>
+                </a:solidFill>
+                <a:latin typeface="Helvetica Neue"/>
+                <a:ea typeface="Helvetica Neue"/>
+                <a:cs typeface="Helvetica Neue"/>
+              </a:defRPr>
+            </a:pPr>
+            <a:r>
+              <a:t>8</a:t>
+            </a:r>
+          </a:p>
+        </p:txBody>
+      </p:sp>
+      <p:sp>
+        <p:nvSpPr>
+          <p:cNvPr id="2" name="title">
+            <a:extLst xmlns:a="http://schemas.openxmlformats.org/drawingml/2006/main">
+              <a:ext uri="{FF2B5EF4-FFF2-40B4-BE49-F238E27FC236}">
+                <a16:creationId xmlns:a16="http://schemas.microsoft.com/office/drawing/2014/main" id="{317B658F-9EDE-4B04-B790-BFC2AB1127A9}"/>
+              </a:ext>
+            </a:extLst>
+          </p:cNvPr>
+          <p:cNvSpPr>
+            <a:spLocks xmlns:a="http://schemas.openxmlformats.org/drawingml/2006/main" noGrp="1"/>
+          </p:cNvSpPr>
+          <p:nvPr/>
+        </p:nvSpPr>
+        <p:spPr>
+          <a:xfrm xmlns:a="http://schemas.openxmlformats.org/drawingml/2006/main">
+            <a:off x="393668" y="344043"/>
+            <a:ext cx="11404568" cy="1047464"/>
+          </a:xfrm>
+          <a:prstGeom xmlns:a="http://schemas.openxmlformats.org/drawingml/2006/main" prst="rect">
+            <a:avLst/>
+          </a:prstGeom>
+        </p:spPr>
+        <p:txBody>
+          <a:bodyPr xmlns:a="http://schemas.openxmlformats.org/drawingml/2006/main" lIns="0" tIns="0" rIns="0" bIns="0" anchor="t">
+            <a:normAutofit fontScale="100000"/>
+          </a:bodyPr>
+          <a:lstStyle xmlns:a="http://schemas.openxmlformats.org/drawingml/2006/main"/>
+          <a:p xmlns:a="http://schemas.openxmlformats.org/drawingml/2006/main">
+            <a:pPr algn="l">
+              <a:buNone/>
+              <a:defRPr sz="2900">
+                <a:solidFill>
+                  <a:srgbClr val="000000"/>
+                </a:solidFill>
+                <a:latin typeface="Helvetica Neue"/>
+                <a:ea typeface="Helvetica Neue"/>
+                <a:cs typeface="Helvetica Neue"/>
+              </a:defRPr>
+            </a:pPr>
+            <a:r>
+              <a:t>A stationary-looking spread was not a trading edge</a:t>
+            </a:r>
+          </a:p>
+        </p:txBody>
+      </p:sp>
+      <p:sp>
+        <p:nvSpPr>
+          <p:cNvPr id="3" name="left-stat-card">
+            <a:extLst xmlns:a="http://schemas.openxmlformats.org/drawingml/2006/main">
+              <a:ext uri="{FF2B5EF4-FFF2-40B4-BE49-F238E27FC236}">
+                <a16:creationId xmlns:a16="http://schemas.microsoft.com/office/drawing/2014/main" id="{CB5A1905-9B52-4859-9721-FAA37599F253}"/>
+              </a:ext>
+            </a:extLst>
+          </p:cNvPr>
+          <p:cNvSpPr>
+            <a:spLocks xmlns:a="http://schemas.openxmlformats.org/drawingml/2006/main" noGrp="1"/>
+          </p:cNvSpPr>
+          <p:nvPr/>
+        </p:nvSpPr>
+        <p:spPr>
+          <a:xfrm xmlns:a="http://schemas.openxmlformats.org/drawingml/2006/main">
+            <a:off x="6272022" y="3360039"/>
+            <a:ext cx="2581942" cy="2656523"/>
           </a:xfrm>
           <a:prstGeom xmlns:a="http://schemas.openxmlformats.org/drawingml/2006/main" prst="roundRect">
             <a:avLst>
-              <a:gd name="adj" fmla="val 2564"/>
+              <a:gd name="adj" fmla="val 2951"/>
             </a:avLst>
           </a:prstGeom>
           <a:solidFill xmlns:a="http://schemas.openxmlformats.org/drawingml/2006/main">
@@ -4242,26 +8600,26 @@
       </p:sp>
       <p:sp>
         <p:nvSpPr>
-          <p:cNvPr id="2" name="stat-card-2">
-            <a:extLst xmlns:a="http://schemas.openxmlformats.org/drawingml/2006/main">
-              <a:ext uri="{FF2B5EF4-FFF2-40B4-BE49-F238E27FC236}">
-                <a16:creationId xmlns:a16="http://schemas.microsoft.com/office/drawing/2014/main" id="{18F3FD71-2B01-497E-B7A5-AD72E3A3FA93}"/>
-              </a:ext>
-            </a:extLst>
-          </p:cNvPr>
-          <p:cNvSpPr>
-            <a:spLocks xmlns:a="http://schemas.openxmlformats.org/drawingml/2006/main" noGrp="1"/>
-          </p:cNvSpPr>
-          <p:nvPr/>
-        </p:nvSpPr>
-        <p:spPr>
-          <a:xfrm xmlns:a="http://schemas.openxmlformats.org/drawingml/2006/main">
-            <a:off x="4311682" y="3022568"/>
-            <a:ext cx="3568732" cy="2971800"/>
+          <p:cNvPr id="4" name="right-stat-card">
+            <a:extLst xmlns:a="http://schemas.openxmlformats.org/drawingml/2006/main">
+              <a:ext uri="{FF2B5EF4-FFF2-40B4-BE49-F238E27FC236}">
+                <a16:creationId xmlns:a16="http://schemas.microsoft.com/office/drawing/2014/main" id="{6D7A92E4-990F-443E-AA22-280485C87531}"/>
+              </a:ext>
+            </a:extLst>
+          </p:cNvPr>
+          <p:cNvSpPr>
+            <a:spLocks xmlns:a="http://schemas.openxmlformats.org/drawingml/2006/main" noGrp="1"/>
+          </p:cNvSpPr>
+          <p:nvPr/>
+        </p:nvSpPr>
+        <p:spPr>
+          <a:xfrm xmlns:a="http://schemas.openxmlformats.org/drawingml/2006/main">
+            <a:off x="9224201" y="3360039"/>
+            <a:ext cx="2581942" cy="2656523"/>
           </a:xfrm>
           <a:prstGeom xmlns:a="http://schemas.openxmlformats.org/drawingml/2006/main" prst="roundRect">
             <a:avLst>
-              <a:gd name="adj" fmla="val 2564"/>
+              <a:gd name="adj" fmla="val 2951"/>
             </a:avLst>
           </a:prstGeom>
           <a:solidFill xmlns:a="http://schemas.openxmlformats.org/drawingml/2006/main">
@@ -4271,94 +8629,22 @@
       </p:sp>
       <p:sp>
         <p:nvSpPr>
-          <p:cNvPr id="3" name="stat-card-3">
-            <a:extLst xmlns:a="http://schemas.openxmlformats.org/drawingml/2006/main">
-              <a:ext uri="{FF2B5EF4-FFF2-40B4-BE49-F238E27FC236}">
-                <a16:creationId xmlns:a16="http://schemas.microsoft.com/office/drawing/2014/main" id="{A256A665-F93B-46DB-A120-F2929BE31EAA}"/>
-              </a:ext>
-            </a:extLst>
-          </p:cNvPr>
-          <p:cNvSpPr>
-            <a:spLocks xmlns:a="http://schemas.openxmlformats.org/drawingml/2006/main" noGrp="1"/>
-          </p:cNvSpPr>
-          <p:nvPr/>
-        </p:nvSpPr>
-        <p:spPr>
-          <a:xfrm xmlns:a="http://schemas.openxmlformats.org/drawingml/2006/main">
-            <a:off x="8232267" y="3022568"/>
-            <a:ext cx="3568732" cy="2971800"/>
-          </a:xfrm>
-          <a:prstGeom xmlns:a="http://schemas.openxmlformats.org/drawingml/2006/main" prst="roundRect">
-            <a:avLst>
-              <a:gd name="adj" fmla="val 2564"/>
-            </a:avLst>
-          </a:prstGeom>
-          <a:solidFill xmlns:a="http://schemas.openxmlformats.org/drawingml/2006/main">
-            <a:srgbClr val="F2F2F2"/>
-          </a:solidFill>
-        </p:spPr>
-      </p:sp>
-      <p:sp>
-        <p:nvSpPr>
-          <p:cNvPr id="4" name="footer">
-            <a:extLst xmlns:a="http://schemas.openxmlformats.org/drawingml/2006/main">
-              <a:ext uri="{FF2B5EF4-FFF2-40B4-BE49-F238E27FC236}">
-                <a16:creationId xmlns:a16="http://schemas.microsoft.com/office/drawing/2014/main" id="{8B8FEAA9-7122-4602-AAFA-C856C71CAA69}"/>
-              </a:ext>
-            </a:extLst>
-          </p:cNvPr>
-          <p:cNvSpPr>
-            <a:spLocks xmlns:a="http://schemas.openxmlformats.org/drawingml/2006/main" noGrp="1"/>
-          </p:cNvSpPr>
-          <p:nvPr/>
-        </p:nvSpPr>
-        <p:spPr>
-          <a:xfrm xmlns:a="http://schemas.openxmlformats.org/drawingml/2006/main">
-            <a:off x="11279315" y="6279261"/>
-            <a:ext cx="518922" cy="241268"/>
-          </a:xfrm>
-          <a:prstGeom xmlns:a="http://schemas.openxmlformats.org/drawingml/2006/main" prst="rect">
-            <a:avLst/>
-          </a:prstGeom>
-        </p:spPr>
-        <p:txBody>
-          <a:bodyPr xmlns:a="http://schemas.openxmlformats.org/drawingml/2006/main" lIns="0" tIns="0" rIns="0" bIns="0" anchor="b"/>
-          <a:lstStyle xmlns:a="http://schemas.openxmlformats.org/drawingml/2006/main"/>
-          <a:p xmlns:a="http://schemas.openxmlformats.org/drawingml/2006/main">
-            <a:pPr algn="r">
-              <a:defRPr sz="1000">
-                <a:solidFill>
-                  <a:srgbClr val="000000"/>
-                </a:solidFill>
-                <a:latin typeface="Helvetica Neue"/>
-                <a:ea typeface="Helvetica Neue"/>
-                <a:cs typeface="Helvetica Neue"/>
-              </a:defRPr>
-            </a:pPr>
-            <a:r>
-              <a:t>8</a:t>
-            </a:r>
-          </a:p>
-        </p:txBody>
-      </p:sp>
-      <p:sp>
-        <p:nvSpPr>
-          <p:cNvPr id="5" name="title">
-            <a:extLst xmlns:a="http://schemas.openxmlformats.org/drawingml/2006/main">
-              <a:ext uri="{FF2B5EF4-FFF2-40B4-BE49-F238E27FC236}">
-                <a16:creationId xmlns:a16="http://schemas.microsoft.com/office/drawing/2014/main" id="{6B999DAA-321B-4DEF-AC22-1F41A5B8E8C7}"/>
-              </a:ext>
-            </a:extLst>
-          </p:cNvPr>
-          <p:cNvSpPr>
-            <a:spLocks xmlns:a="http://schemas.openxmlformats.org/drawingml/2006/main" noGrp="1"/>
-          </p:cNvSpPr>
-          <p:nvPr/>
-        </p:nvSpPr>
-        <p:spPr>
-          <a:xfrm xmlns:a="http://schemas.openxmlformats.org/drawingml/2006/main">
-            <a:off x="393668" y="344043"/>
-            <a:ext cx="11404568" cy="1047464"/>
+          <p:cNvPr id="5" name="summary">
+            <a:extLst xmlns:a="http://schemas.openxmlformats.org/drawingml/2006/main">
+              <a:ext uri="{FF2B5EF4-FFF2-40B4-BE49-F238E27FC236}">
+                <a16:creationId xmlns:a16="http://schemas.microsoft.com/office/drawing/2014/main" id="{56D2558C-A20F-4C70-893B-6EAB7EAAD1B2}"/>
+              </a:ext>
+            </a:extLst>
+          </p:cNvPr>
+          <p:cNvSpPr>
+            <a:spLocks xmlns:a="http://schemas.openxmlformats.org/drawingml/2006/main" noGrp="1"/>
+          </p:cNvSpPr>
+          <p:nvPr/>
+        </p:nvSpPr>
+        <p:spPr>
+          <a:xfrm xmlns:a="http://schemas.openxmlformats.org/drawingml/2006/main">
+            <a:off x="6261068" y="1714500"/>
+            <a:ext cx="5539835" cy="1381125"/>
           </a:xfrm>
           <a:prstGeom xmlns:a="http://schemas.openxmlformats.org/drawingml/2006/main" prst="rect">
             <a:avLst/>
@@ -4371,7 +8657,8 @@
           <a:lstStyle xmlns:a="http://schemas.openxmlformats.org/drawingml/2006/main"/>
           <a:p xmlns:a="http://schemas.openxmlformats.org/drawingml/2006/main">
             <a:pPr algn="l">
-              <a:defRPr sz="2900">
+              <a:buNone/>
+              <a:defRPr sz="1800">
                 <a:solidFill>
                   <a:srgbClr val="000000"/>
                 </a:solidFill>
@@ -4381,74 +8668,29 @@
               </a:defRPr>
             </a:pPr>
             <a:r>
-              <a:t>Six substantive failures force a structural STOP</a:t>
-            </a:r>
-          </a:p>
-        </p:txBody>
-      </p:sp>
-      <p:sp>
-        <p:nvSpPr>
-          <p:cNvPr id="6" name="intro">
-            <a:extLst xmlns:a="http://schemas.openxmlformats.org/drawingml/2006/main">
-              <a:ext uri="{FF2B5EF4-FFF2-40B4-BE49-F238E27FC236}">
-                <a16:creationId xmlns:a16="http://schemas.microsoft.com/office/drawing/2014/main" id="{B83D39E3-1D42-4CA4-A507-6C07CD200977}"/>
-              </a:ext>
-            </a:extLst>
-          </p:cNvPr>
-          <p:cNvSpPr>
-            <a:spLocks xmlns:a="http://schemas.openxmlformats.org/drawingml/2006/main" noGrp="1"/>
-          </p:cNvSpPr>
-          <p:nvPr/>
-        </p:nvSpPr>
-        <p:spPr>
-          <a:xfrm xmlns:a="http://schemas.openxmlformats.org/drawingml/2006/main">
-            <a:off x="393668" y="1219200"/>
-            <a:ext cx="11404568" cy="1428750"/>
-          </a:xfrm>
-          <a:prstGeom xmlns:a="http://schemas.openxmlformats.org/drawingml/2006/main" prst="rect">
-            <a:avLst/>
-          </a:prstGeom>
-        </p:spPr>
-        <p:txBody>
-          <a:bodyPr xmlns:a="http://schemas.openxmlformats.org/drawingml/2006/main" lIns="0" tIns="0" rIns="0" bIns="0" anchor="t">
-            <a:normAutofit fontScale="100000"/>
-          </a:bodyPr>
-          <a:lstStyle xmlns:a="http://schemas.openxmlformats.org/drawingml/2006/main"/>
-          <a:p xmlns:a="http://schemas.openxmlformats.org/drawingml/2006/main">
-            <a:pPr algn="l">
-              <a:defRPr sz="1650">
-                <a:solidFill>
-                  <a:srgbClr val="000000"/>
-                </a:solidFill>
-                <a:latin typeface="Helvetica Neue"/>
-                <a:ea typeface="Helvetica Neue"/>
-                <a:cs typeface="Helvetica Neue"/>
-              </a:defRPr>
-            </a:pPr>
-            <a:r>
-              <a:t>All 12 integrity checks passed and trade support was adequate. Positive-beta coverage, cost survival, hit rate, random-sign separation, yearly stability, and forward convergence all failed.</a:t>
-            </a:r>
-          </a:p>
-        </p:txBody>
-      </p:sp>
-      <p:sp>
-        <p:nvSpPr>
-          <p:cNvPr id="7" name="stat-1">
-            <a:extLst xmlns:a="http://schemas.openxmlformats.org/drawingml/2006/main">
-              <a:ext uri="{FF2B5EF4-FFF2-40B4-BE49-F238E27FC236}">
-                <a16:creationId xmlns:a16="http://schemas.microsoft.com/office/drawing/2014/main" id="{CE99FBCB-3F61-4E2C-9916-C8B37E005A45}"/>
-              </a:ext>
-            </a:extLst>
-          </p:cNvPr>
-          <p:cNvSpPr>
-            <a:spLocks xmlns:a="http://schemas.openxmlformats.org/drawingml/2006/main" noGrp="1"/>
-          </p:cNvSpPr>
-          <p:nvPr/>
-        </p:nvSpPr>
-        <p:spPr>
-          <a:xfrm xmlns:a="http://schemas.openxmlformats.org/drawingml/2006/main">
-            <a:off x="702374" y="3429000"/>
-            <a:ext cx="2940082" cy="1359313"/>
+              <a:t>The dynamic spread produced a strongly negative ADF-style statistic and a 16.7-session half-life. But variance ratios exceeded one, and high z-scores predicted higher—not lower—forward spread returns.</a:t>
+            </a:r>
+          </a:p>
+        </p:txBody>
+      </p:sp>
+      <p:sp>
+        <p:nvSpPr>
+          <p:cNvPr id="6" name="left-stat">
+            <a:extLst xmlns:a="http://schemas.openxmlformats.org/drawingml/2006/main">
+              <a:ext uri="{FF2B5EF4-FFF2-40B4-BE49-F238E27FC236}">
+                <a16:creationId xmlns:a16="http://schemas.microsoft.com/office/drawing/2014/main" id="{5C6C71CB-7475-4DF6-B7F0-0931DF047551}"/>
+              </a:ext>
+            </a:extLst>
+          </p:cNvPr>
+          <p:cNvSpPr>
+            <a:spLocks xmlns:a="http://schemas.openxmlformats.org/drawingml/2006/main" noGrp="1"/>
+          </p:cNvSpPr>
+          <p:nvPr/>
+        </p:nvSpPr>
+        <p:spPr>
+          <a:xfrm xmlns:a="http://schemas.openxmlformats.org/drawingml/2006/main">
+            <a:off x="6509385" y="3579971"/>
+            <a:ext cx="2133314" cy="1155859"/>
           </a:xfrm>
           <a:prstGeom xmlns:a="http://schemas.openxmlformats.org/drawingml/2006/main" prst="rect">
             <a:avLst/>
@@ -4461,52 +8703,54 @@
           <a:lstStyle xmlns:a="http://schemas.openxmlformats.org/drawingml/2006/main"/>
           <a:p xmlns:a="http://schemas.openxmlformats.org/drawingml/2006/main">
             <a:pPr algn="l">
-              <a:defRPr sz="3225">
-                <a:solidFill>
-                  <a:srgbClr val="64748B"/>
-                </a:solidFill>
-                <a:latin typeface="Helvetica Neue"/>
-                <a:ea typeface="Helvetica Neue"/>
-                <a:cs typeface="Helvetica Neue"/>
-              </a:defRPr>
-            </a:pPr>
-            <a:r>
-              <a:t>2 / 8</a:t>
-            </a:r>
-          </a:p>
-        </p:txBody>
-      </p:sp>
-      <p:sp>
-        <p:nvSpPr>
-          <p:cNvPr id="8" name="stat-label-1">
-            <a:extLst xmlns:a="http://schemas.openxmlformats.org/drawingml/2006/main">
-              <a:ext uri="{FF2B5EF4-FFF2-40B4-BE49-F238E27FC236}">
-                <a16:creationId xmlns:a16="http://schemas.microsoft.com/office/drawing/2014/main" id="{8D7A7BD1-1D20-421E-BAC5-DFF695BBE1AF}"/>
-              </a:ext>
-            </a:extLst>
-          </p:cNvPr>
-          <p:cNvSpPr>
-            <a:spLocks xmlns:a="http://schemas.openxmlformats.org/drawingml/2006/main" noGrp="1"/>
-          </p:cNvSpPr>
-          <p:nvPr/>
-        </p:nvSpPr>
-        <p:spPr>
-          <a:xfrm xmlns:a="http://schemas.openxmlformats.org/drawingml/2006/main">
-            <a:off x="702374" y="4900613"/>
-            <a:ext cx="2949607" cy="819150"/>
-          </a:xfrm>
-          <a:prstGeom xmlns:a="http://schemas.openxmlformats.org/drawingml/2006/main" prst="rect">
-            <a:avLst/>
-          </a:prstGeom>
-        </p:spPr>
-        <p:txBody>
-          <a:bodyPr xmlns:a="http://schemas.openxmlformats.org/drawingml/2006/main" lIns="0" tIns="45720" rIns="91440" bIns="45720" anchor="t">
+              <a:buNone/>
+              <a:defRPr sz="2700">
+                <a:solidFill>
+                  <a:srgbClr val="3D8DFF"/>
+                </a:solidFill>
+                <a:latin typeface="Helvetica Neue"/>
+                <a:ea typeface="Helvetica Neue"/>
+                <a:cs typeface="Helvetica Neue"/>
+              </a:defRPr>
+            </a:pPr>
+            <a:r>
+              <a:t>-8.43</a:t>
+            </a:r>
+          </a:p>
+        </p:txBody>
+      </p:sp>
+      <p:sp>
+        <p:nvSpPr>
+          <p:cNvPr id="7" name="left-stat-label">
+            <a:extLst xmlns:a="http://schemas.openxmlformats.org/drawingml/2006/main">
+              <a:ext uri="{FF2B5EF4-FFF2-40B4-BE49-F238E27FC236}">
+                <a16:creationId xmlns:a16="http://schemas.microsoft.com/office/drawing/2014/main" id="{471C1151-75AF-40A2-A5A1-4F7713D23356}"/>
+              </a:ext>
+            </a:extLst>
+          </p:cNvPr>
+          <p:cNvSpPr>
+            <a:spLocks xmlns:a="http://schemas.openxmlformats.org/drawingml/2006/main" noGrp="1"/>
+          </p:cNvSpPr>
+          <p:nvPr/>
+        </p:nvSpPr>
+        <p:spPr>
+          <a:xfrm xmlns:a="http://schemas.openxmlformats.org/drawingml/2006/main">
+            <a:off x="6575965" y="4953000"/>
+            <a:ext cx="2066735" cy="762000"/>
+          </a:xfrm>
+          <a:prstGeom xmlns:a="http://schemas.openxmlformats.org/drawingml/2006/main" prst="rect">
+            <a:avLst/>
+          </a:prstGeom>
+        </p:spPr>
+        <p:txBody>
+          <a:bodyPr xmlns:a="http://schemas.openxmlformats.org/drawingml/2006/main" lIns="0" tIns="0" rIns="0" bIns="0">
             <a:normAutofit fontScale="100000"/>
           </a:bodyPr>
           <a:lstStyle xmlns:a="http://schemas.openxmlformats.org/drawingml/2006/main"/>
           <a:p xmlns:a="http://schemas.openxmlformats.org/drawingml/2006/main">
             <a:pPr algn="l">
-              <a:defRPr sz="1575">
+              <a:buNone/>
+              <a:defRPr sz="1500">
                 <a:solidFill>
                   <a:srgbClr val="000000"/>
                 </a:solidFill>
@@ -4516,30 +8760,30 @@
               </a:defRPr>
             </a:pPr>
             <a:r>
-              <a:t>TRAIN gates passed
-Integrity and support</a:t>
-            </a:r>
-          </a:p>
-        </p:txBody>
-      </p:sp>
-      <p:sp>
-        <p:nvSpPr>
-          <p:cNvPr id="9" name="stat-2">
-            <a:extLst xmlns:a="http://schemas.openxmlformats.org/drawingml/2006/main">
-              <a:ext uri="{FF2B5EF4-FFF2-40B4-BE49-F238E27FC236}">
-                <a16:creationId xmlns:a16="http://schemas.microsoft.com/office/drawing/2014/main" id="{E572DBE1-8080-407B-A0FF-815818B837E6}"/>
-              </a:ext>
-            </a:extLst>
-          </p:cNvPr>
-          <p:cNvSpPr>
-            <a:spLocks xmlns:a="http://schemas.openxmlformats.org/drawingml/2006/main" noGrp="1"/>
-          </p:cNvSpPr>
-          <p:nvPr/>
-        </p:nvSpPr>
-        <p:spPr>
-          <a:xfrm xmlns:a="http://schemas.openxmlformats.org/drawingml/2006/main">
-            <a:off x="4612958" y="3429000"/>
-            <a:ext cx="2940082" cy="1359313"/>
+              <a:t>Dynamic-spread ADF t
+Descriptive, not a verdict</a:t>
+            </a:r>
+          </a:p>
+        </p:txBody>
+      </p:sp>
+      <p:sp>
+        <p:nvSpPr>
+          <p:cNvPr id="8" name="right-stat">
+            <a:extLst xmlns:a="http://schemas.openxmlformats.org/drawingml/2006/main">
+              <a:ext uri="{FF2B5EF4-FFF2-40B4-BE49-F238E27FC236}">
+                <a16:creationId xmlns:a16="http://schemas.microsoft.com/office/drawing/2014/main" id="{423A9D83-D670-4C26-B583-F1C469F9EC40}"/>
+              </a:ext>
+            </a:extLst>
+          </p:cNvPr>
+          <p:cNvSpPr>
+            <a:spLocks xmlns:a="http://schemas.openxmlformats.org/drawingml/2006/main" noGrp="1"/>
+          </p:cNvSpPr>
+          <p:nvPr/>
+        </p:nvSpPr>
+        <p:spPr>
+          <a:xfrm xmlns:a="http://schemas.openxmlformats.org/drawingml/2006/main">
+            <a:off x="9461564" y="3579971"/>
+            <a:ext cx="2133314" cy="1155859"/>
           </a:xfrm>
           <a:prstGeom xmlns:a="http://schemas.openxmlformats.org/drawingml/2006/main" prst="rect">
             <a:avLst/>
@@ -4552,7 +8796,8 @@
           <a:lstStyle xmlns:a="http://schemas.openxmlformats.org/drawingml/2006/main"/>
           <a:p xmlns:a="http://schemas.openxmlformats.org/drawingml/2006/main">
             <a:pPr algn="l">
-              <a:defRPr sz="3225">
+              <a:buNone/>
+              <a:defRPr sz="2700">
                 <a:solidFill>
                   <a:srgbClr val="B42318"/>
                 </a:solidFill>
@@ -4562,42 +8807,43 @@
               </a:defRPr>
             </a:pPr>
             <a:r>
-              <a:t>6 / 8</a:t>
-            </a:r>
-          </a:p>
-        </p:txBody>
-      </p:sp>
-      <p:sp>
-        <p:nvSpPr>
-          <p:cNvPr id="10" name="stat-label-2">
-            <a:extLst xmlns:a="http://schemas.openxmlformats.org/drawingml/2006/main">
-              <a:ext uri="{FF2B5EF4-FFF2-40B4-BE49-F238E27FC236}">
-                <a16:creationId xmlns:a16="http://schemas.microsoft.com/office/drawing/2014/main" id="{FD56EAD1-B269-48E0-9F23-33330F29DCE5}"/>
-              </a:ext>
-            </a:extLst>
-          </p:cNvPr>
-          <p:cNvSpPr>
-            <a:spLocks xmlns:a="http://schemas.openxmlformats.org/drawingml/2006/main" noGrp="1"/>
-          </p:cNvSpPr>
-          <p:nvPr/>
-        </p:nvSpPr>
-        <p:spPr>
-          <a:xfrm xmlns:a="http://schemas.openxmlformats.org/drawingml/2006/main">
-            <a:off x="4612958" y="4900613"/>
-            <a:ext cx="2949607" cy="819150"/>
-          </a:xfrm>
-          <a:prstGeom xmlns:a="http://schemas.openxmlformats.org/drawingml/2006/main" prst="rect">
-            <a:avLst/>
-          </a:prstGeom>
-        </p:spPr>
-        <p:txBody>
-          <a:bodyPr xmlns:a="http://schemas.openxmlformats.org/drawingml/2006/main" lIns="0" tIns="45720" rIns="91440" bIns="45720" anchor="t">
+              <a:t>+0.095</a:t>
+            </a:r>
+          </a:p>
+        </p:txBody>
+      </p:sp>
+      <p:sp>
+        <p:nvSpPr>
+          <p:cNvPr id="9" name="right-stat-label">
+            <a:extLst xmlns:a="http://schemas.openxmlformats.org/drawingml/2006/main">
+              <a:ext uri="{FF2B5EF4-FFF2-40B4-BE49-F238E27FC236}">
+                <a16:creationId xmlns:a16="http://schemas.microsoft.com/office/drawing/2014/main" id="{F039A1C2-F7F7-4D0E-BDC1-2BD29C9D7E4C}"/>
+              </a:ext>
+            </a:extLst>
+          </p:cNvPr>
+          <p:cNvSpPr>
+            <a:spLocks xmlns:a="http://schemas.openxmlformats.org/drawingml/2006/main" noGrp="1"/>
+          </p:cNvSpPr>
+          <p:nvPr/>
+        </p:nvSpPr>
+        <p:spPr>
+          <a:xfrm xmlns:a="http://schemas.openxmlformats.org/drawingml/2006/main">
+            <a:off x="9528143" y="4953000"/>
+            <a:ext cx="2066735" cy="762000"/>
+          </a:xfrm>
+          <a:prstGeom xmlns:a="http://schemas.openxmlformats.org/drawingml/2006/main" prst="rect">
+            <a:avLst/>
+          </a:prstGeom>
+        </p:spPr>
+        <p:txBody>
+          <a:bodyPr xmlns:a="http://schemas.openxmlformats.org/drawingml/2006/main" lIns="0" tIns="0" rIns="0" bIns="0">
             <a:normAutofit fontScale="100000"/>
           </a:bodyPr>
           <a:lstStyle xmlns:a="http://schemas.openxmlformats.org/drawingml/2006/main"/>
           <a:p xmlns:a="http://schemas.openxmlformats.org/drawingml/2006/main">
             <a:pPr algn="l">
-              <a:defRPr sz="1575">
+              <a:buNone/>
+              <a:defRPr sz="1500">
                 <a:solidFill>
                   <a:srgbClr val="000000"/>
                 </a:solidFill>
@@ -4607,107 +8853,38 @@
               </a:defRPr>
             </a:pPr>
             <a:r>
-              <a:t>TRAIN gates failed
-Mechanism not admitted</a:t>
-            </a:r>
-          </a:p>
-        </p:txBody>
-      </p:sp>
-      <p:sp>
-        <p:nvSpPr>
-          <p:cNvPr id="11" name="stat-3">
-            <a:extLst xmlns:a="http://schemas.openxmlformats.org/drawingml/2006/main">
-              <a:ext uri="{FF2B5EF4-FFF2-40B4-BE49-F238E27FC236}">
-                <a16:creationId xmlns:a16="http://schemas.microsoft.com/office/drawing/2014/main" id="{9C6C64B0-28CA-4923-800E-94342CB69146}"/>
-              </a:ext>
-            </a:extLst>
-          </p:cNvPr>
-          <p:cNvSpPr>
-            <a:spLocks xmlns:a="http://schemas.openxmlformats.org/drawingml/2006/main" noGrp="1"/>
-          </p:cNvSpPr>
-          <p:nvPr/>
-        </p:nvSpPr>
-        <p:spPr>
-          <a:xfrm xmlns:a="http://schemas.openxmlformats.org/drawingml/2006/main">
-            <a:off x="8562404" y="3429000"/>
-            <a:ext cx="2940082" cy="1359313"/>
-          </a:xfrm>
-          <a:prstGeom xmlns:a="http://schemas.openxmlformats.org/drawingml/2006/main" prst="rect">
-            <a:avLst/>
-          </a:prstGeom>
-        </p:spPr>
-        <p:txBody>
-          <a:bodyPr xmlns:a="http://schemas.openxmlformats.org/drawingml/2006/main" lIns="0" tIns="0" rIns="0" bIns="0" anchor="b">
-            <a:normAutofit fontScale="100000"/>
-          </a:bodyPr>
-          <a:lstStyle xmlns:a="http://schemas.openxmlformats.org/drawingml/2006/main"/>
-          <a:p xmlns:a="http://schemas.openxmlformats.org/drawingml/2006/main">
-            <a:pPr algn="l">
-              <a:defRPr sz="3225">
-                <a:solidFill>
-                  <a:srgbClr val="3D8DFF"/>
-                </a:solidFill>
-                <a:latin typeface="Helvetica Neue"/>
-                <a:ea typeface="Helvetica Neue"/>
-                <a:cs typeface="Helvetica Neue"/>
-              </a:defRPr>
-            </a:pPr>
-            <a:r>
-              <a:t>0</a:t>
-            </a:r>
-          </a:p>
-        </p:txBody>
-      </p:sp>
-      <p:sp>
-        <p:nvSpPr>
-          <p:cNvPr id="12" name="stat-label-3">
-            <a:extLst xmlns:a="http://schemas.openxmlformats.org/drawingml/2006/main">
-              <a:ext uri="{FF2B5EF4-FFF2-40B4-BE49-F238E27FC236}">
-                <a16:creationId xmlns:a16="http://schemas.microsoft.com/office/drawing/2014/main" id="{0ED31E12-360E-4FDB-B429-1A6368F41685}"/>
-              </a:ext>
-            </a:extLst>
-          </p:cNvPr>
-          <p:cNvSpPr>
-            <a:spLocks xmlns:a="http://schemas.openxmlformats.org/drawingml/2006/main" noGrp="1"/>
-          </p:cNvSpPr>
-          <p:nvPr/>
-        </p:nvSpPr>
-        <p:spPr>
-          <a:xfrm xmlns:a="http://schemas.openxmlformats.org/drawingml/2006/main">
-            <a:off x="8562404" y="4900613"/>
-            <a:ext cx="2949607" cy="819150"/>
-          </a:xfrm>
-          <a:prstGeom xmlns:a="http://schemas.openxmlformats.org/drawingml/2006/main" prst="rect">
-            <a:avLst/>
-          </a:prstGeom>
-        </p:spPr>
-        <p:txBody>
-          <a:bodyPr xmlns:a="http://schemas.openxmlformats.org/drawingml/2006/main" lIns="0" tIns="45720" rIns="91440" bIns="45720" anchor="t">
-            <a:normAutofit fontScale="100000"/>
-          </a:bodyPr>
-          <a:lstStyle xmlns:a="http://schemas.openxmlformats.org/drawingml/2006/main"/>
-          <a:p xmlns:a="http://schemas.openxmlformats.org/drawingml/2006/main">
-            <a:pPr algn="l">
-              <a:defRPr sz="1575">
-                <a:solidFill>
-                  <a:srgbClr val="000000"/>
-                </a:solidFill>
-                <a:latin typeface="Helvetica Neue"/>
-                <a:ea typeface="Helvetica Neue"/>
-                <a:cs typeface="Helvetica Neue"/>
-              </a:defRPr>
-            </a:pPr>
-            <a:r>
-              <a:t>Later partitions opened
-No later evidence exists</a:t>
-            </a:r>
-          </a:p>
-        </p:txBody>
-      </p:sp>
+              <a:t>z vs forward-five return
+Wrong sign for reversion</a:t>
+            </a:r>
+          </a:p>
+        </p:txBody>
+      </p:sp>
+      <p:pic>
+        <p:nvPicPr>
+          <p:cNvPr id="22" name=""/>
+          <p:cNvPicPr>
+            <a:picLocks xmlns:a="http://schemas.openxmlformats.org/drawingml/2006/main" noChangeAspect="1"/>
+          </p:cNvPicPr>
+          <p:nvPr/>
+        </p:nvPicPr>
+        <p:blipFill>
+          <a:blip xmlns:r="http://schemas.openxmlformats.org/officeDocument/2006/relationships" xmlns:a="http://schemas.openxmlformats.org/drawingml/2006/main" r:embed="R9369868b7c374e4d"/>
+          <a:stretch xmlns:a="http://schemas.openxmlformats.org/drawingml/2006/main"/>
+        </p:blipFill>
+        <p:spPr>
+          <a:xfrm xmlns:a="http://schemas.openxmlformats.org/drawingml/2006/main">
+            <a:off x="385858" y="2576472"/>
+            <a:ext cx="5534216" cy="2371807"/>
+          </a:xfrm>
+          <a:prstGeom xmlns:a="http://schemas.openxmlformats.org/drawingml/2006/main" prst="rect">
+            <a:avLst/>
+          </a:prstGeom>
+        </p:spPr>
+      </p:pic>
     </p:spTree>
     <p:extLst>
       <p:ext uri="{BB962C8B-B14F-4D97-AF65-F5344CB8AC3E}">
-        <p14:creationId xmlns:p14="http://schemas.microsoft.com/office/powerpoint/2010/main" val="1500261740"/>
+        <p14:creationId xmlns:p14="http://schemas.microsoft.com/office/powerpoint/2010/main" val="227946046"/>
       </p:ext>
     </p:extLst>
   </p:cSld>
@@ -4728,22 +8905,216 @@
       </p:grpSpPr>
       <p:sp>
         <p:nvSpPr>
-          <p:cNvPr id="4" name="cover-headline">
-            <a:extLst xmlns:a="http://schemas.openxmlformats.org/drawingml/2006/main">
-              <a:ext uri="{FF2B5EF4-FFF2-40B4-BE49-F238E27FC236}">
-                <a16:creationId xmlns:a16="http://schemas.microsoft.com/office/drawing/2014/main" id="{E9F43BB9-4202-4A42-9916-7A06678333BD}"/>
-              </a:ext>
-            </a:extLst>
-          </p:cNvPr>
-          <p:cNvSpPr>
-            <a:spLocks xmlns:a="http://schemas.openxmlformats.org/drawingml/2006/main" noGrp="1"/>
-          </p:cNvSpPr>
-          <p:nvPr/>
-        </p:nvSpPr>
-        <p:spPr>
-          <a:xfrm xmlns:a="http://schemas.openxmlformats.org/drawingml/2006/main">
-            <a:off x="393668" y="1738789"/>
-            <a:ext cx="10287000" cy="2491454"/>
+          <p:cNvPr id="11" name="footer">
+            <a:extLst xmlns:a="http://schemas.openxmlformats.org/drawingml/2006/main">
+              <a:ext uri="{FF2B5EF4-FFF2-40B4-BE49-F238E27FC236}">
+                <a16:creationId xmlns:a16="http://schemas.microsoft.com/office/drawing/2014/main" id="{231B1CDB-9946-498B-901E-0A0C9C772112}"/>
+              </a:ext>
+            </a:extLst>
+          </p:cNvPr>
+          <p:cNvSpPr>
+            <a:spLocks xmlns:a="http://schemas.openxmlformats.org/drawingml/2006/main" noGrp="1"/>
+          </p:cNvSpPr>
+          <p:nvPr/>
+        </p:nvSpPr>
+        <p:spPr>
+          <a:xfrm xmlns:a="http://schemas.openxmlformats.org/drawingml/2006/main">
+            <a:off x="11279315" y="6279261"/>
+            <a:ext cx="518922" cy="241268"/>
+          </a:xfrm>
+          <a:prstGeom xmlns:a="http://schemas.openxmlformats.org/drawingml/2006/main" prst="rect">
+            <a:avLst/>
+          </a:prstGeom>
+        </p:spPr>
+        <p:txBody>
+          <a:bodyPr xmlns:a="http://schemas.openxmlformats.org/drawingml/2006/main" lIns="0" tIns="0" rIns="0" bIns="0" anchor="b"/>
+          <a:lstStyle xmlns:a="http://schemas.openxmlformats.org/drawingml/2006/main"/>
+          <a:p xmlns:a="http://schemas.openxmlformats.org/drawingml/2006/main">
+            <a:pPr algn="r">
+              <a:buNone/>
+              <a:defRPr sz="1000">
+                <a:solidFill>
+                  <a:srgbClr val="000000"/>
+                </a:solidFill>
+                <a:latin typeface="Helvetica Neue"/>
+                <a:ea typeface="Helvetica Neue"/>
+                <a:cs typeface="Helvetica Neue"/>
+              </a:defRPr>
+            </a:pPr>
+            <a:r>
+              <a:t>9</a:t>
+            </a:r>
+          </a:p>
+        </p:txBody>
+      </p:sp>
+      <p:sp>
+        <p:nvSpPr>
+          <p:cNvPr id="2" name="title">
+            <a:extLst xmlns:a="http://schemas.openxmlformats.org/drawingml/2006/main">
+              <a:ext uri="{FF2B5EF4-FFF2-40B4-BE49-F238E27FC236}">
+                <a16:creationId xmlns:a16="http://schemas.microsoft.com/office/drawing/2014/main" id="{EE1FC061-EE2C-48CF-9799-D8537102BA12}"/>
+              </a:ext>
+            </a:extLst>
+          </p:cNvPr>
+          <p:cNvSpPr>
+            <a:spLocks xmlns:a="http://schemas.openxmlformats.org/drawingml/2006/main" noGrp="1"/>
+          </p:cNvSpPr>
+          <p:nvPr/>
+        </p:nvSpPr>
+        <p:spPr>
+          <a:xfrm xmlns:a="http://schemas.openxmlformats.org/drawingml/2006/main">
+            <a:off x="393668" y="344043"/>
+            <a:ext cx="11404568" cy="1047464"/>
+          </a:xfrm>
+          <a:prstGeom xmlns:a="http://schemas.openxmlformats.org/drawingml/2006/main" prst="rect">
+            <a:avLst/>
+          </a:prstGeom>
+        </p:spPr>
+        <p:txBody>
+          <a:bodyPr xmlns:a="http://schemas.openxmlformats.org/drawingml/2006/main" lIns="0" tIns="0" rIns="0" bIns="0" anchor="t">
+            <a:normAutofit fontScale="100000"/>
+          </a:bodyPr>
+          <a:lstStyle xmlns:a="http://schemas.openxmlformats.org/drawingml/2006/main"/>
+          <a:p xmlns:a="http://schemas.openxmlformats.org/drawingml/2006/main">
+            <a:pPr algn="l">
+              <a:buNone/>
+              <a:defRPr sz="2900">
+                <a:solidFill>
+                  <a:srgbClr val="000000"/>
+                </a:solidFill>
+                <a:latin typeface="Helvetica Neue"/>
+                <a:ea typeface="Helvetica Neue"/>
+                <a:cs typeface="Helvetica Neue"/>
+              </a:defRPr>
+            </a:pPr>
+            <a:r>
+              <a:t>Trade-level and bar-level evidence both failed</a:t>
+            </a:r>
+          </a:p>
+        </p:txBody>
+      </p:sp>
+      <p:sp>
+        <p:nvSpPr>
+          <p:cNvPr id="3" name="left-stat-card">
+            <a:extLst xmlns:a="http://schemas.openxmlformats.org/drawingml/2006/main">
+              <a:ext uri="{FF2B5EF4-FFF2-40B4-BE49-F238E27FC236}">
+                <a16:creationId xmlns:a16="http://schemas.microsoft.com/office/drawing/2014/main" id="{EF0AF18E-87A6-431F-8D4F-59EC894570D3}"/>
+              </a:ext>
+            </a:extLst>
+          </p:cNvPr>
+          <p:cNvSpPr>
+            <a:spLocks xmlns:a="http://schemas.openxmlformats.org/drawingml/2006/main" noGrp="1"/>
+          </p:cNvSpPr>
+          <p:nvPr/>
+        </p:nvSpPr>
+        <p:spPr>
+          <a:xfrm xmlns:a="http://schemas.openxmlformats.org/drawingml/2006/main">
+            <a:off x="6272022" y="3360039"/>
+            <a:ext cx="2581942" cy="2656523"/>
+          </a:xfrm>
+          <a:prstGeom xmlns:a="http://schemas.openxmlformats.org/drawingml/2006/main" prst="roundRect">
+            <a:avLst>
+              <a:gd name="adj" fmla="val 2951"/>
+            </a:avLst>
+          </a:prstGeom>
+          <a:solidFill xmlns:a="http://schemas.openxmlformats.org/drawingml/2006/main">
+            <a:srgbClr val="F2F2F2"/>
+          </a:solidFill>
+        </p:spPr>
+      </p:sp>
+      <p:sp>
+        <p:nvSpPr>
+          <p:cNvPr id="4" name="right-stat-card">
+            <a:extLst xmlns:a="http://schemas.openxmlformats.org/drawingml/2006/main">
+              <a:ext uri="{FF2B5EF4-FFF2-40B4-BE49-F238E27FC236}">
+                <a16:creationId xmlns:a16="http://schemas.microsoft.com/office/drawing/2014/main" id="{9C01B021-FDE1-4776-B2EE-ACB76D126DAD}"/>
+              </a:ext>
+            </a:extLst>
+          </p:cNvPr>
+          <p:cNvSpPr>
+            <a:spLocks xmlns:a="http://schemas.openxmlformats.org/drawingml/2006/main" noGrp="1"/>
+          </p:cNvSpPr>
+          <p:nvPr/>
+        </p:nvSpPr>
+        <p:spPr>
+          <a:xfrm xmlns:a="http://schemas.openxmlformats.org/drawingml/2006/main">
+            <a:off x="9224201" y="3360039"/>
+            <a:ext cx="2581942" cy="2656523"/>
+          </a:xfrm>
+          <a:prstGeom xmlns:a="http://schemas.openxmlformats.org/drawingml/2006/main" prst="roundRect">
+            <a:avLst>
+              <a:gd name="adj" fmla="val 2951"/>
+            </a:avLst>
+          </a:prstGeom>
+          <a:solidFill xmlns:a="http://schemas.openxmlformats.org/drawingml/2006/main">
+            <a:srgbClr val="F2F2F2"/>
+          </a:solidFill>
+        </p:spPr>
+      </p:sp>
+      <p:sp>
+        <p:nvSpPr>
+          <p:cNvPr id="5" name="summary">
+            <a:extLst xmlns:a="http://schemas.openxmlformats.org/drawingml/2006/main">
+              <a:ext uri="{FF2B5EF4-FFF2-40B4-BE49-F238E27FC236}">
+                <a16:creationId xmlns:a16="http://schemas.microsoft.com/office/drawing/2014/main" id="{A2F82FC1-3249-4254-ABAA-A2D0E0F95848}"/>
+              </a:ext>
+            </a:extLst>
+          </p:cNvPr>
+          <p:cNvSpPr>
+            <a:spLocks xmlns:a="http://schemas.openxmlformats.org/drawingml/2006/main" noGrp="1"/>
+          </p:cNvSpPr>
+          <p:nvPr/>
+        </p:nvSpPr>
+        <p:spPr>
+          <a:xfrm xmlns:a="http://schemas.openxmlformats.org/drawingml/2006/main">
+            <a:off x="6261068" y="1714500"/>
+            <a:ext cx="5539835" cy="1381125"/>
+          </a:xfrm>
+          <a:prstGeom xmlns:a="http://schemas.openxmlformats.org/drawingml/2006/main" prst="rect">
+            <a:avLst/>
+          </a:prstGeom>
+        </p:spPr>
+        <p:txBody>
+          <a:bodyPr xmlns:a="http://schemas.openxmlformats.org/drawingml/2006/main" lIns="0" tIns="0" rIns="0" bIns="0" anchor="t">
+            <a:normAutofit fontScale="100000"/>
+          </a:bodyPr>
+          <a:lstStyle xmlns:a="http://schemas.openxmlformats.org/drawingml/2006/main"/>
+          <a:p xmlns:a="http://schemas.openxmlformats.org/drawingml/2006/main">
+            <a:pPr algn="l">
+              <a:buNone/>
+              <a:defRPr sz="1800">
+                <a:solidFill>
+                  <a:srgbClr val="000000"/>
+                </a:solidFill>
+                <a:latin typeface="Helvetica Neue"/>
+                <a:ea typeface="Helvetica Neue"/>
+                <a:cs typeface="Helvetica Neue"/>
+              </a:defRPr>
+            </a:pPr>
+            <a:r>
+              <a:t>The rule generated enough trades in both directions, but the mean trade lost money, the hit rate was below 50%, and only two of five TRAIN years were positive.</a:t>
+            </a:r>
+          </a:p>
+        </p:txBody>
+      </p:sp>
+      <p:sp>
+        <p:nvSpPr>
+          <p:cNvPr id="6" name="left-stat">
+            <a:extLst xmlns:a="http://schemas.openxmlformats.org/drawingml/2006/main">
+              <a:ext uri="{FF2B5EF4-FFF2-40B4-BE49-F238E27FC236}">
+                <a16:creationId xmlns:a16="http://schemas.microsoft.com/office/drawing/2014/main" id="{06B274F5-6F7E-4432-B0F1-4874DA3CABBF}"/>
+              </a:ext>
+            </a:extLst>
+          </p:cNvPr>
+          <p:cNvSpPr>
+            <a:spLocks xmlns:a="http://schemas.openxmlformats.org/drawingml/2006/main" noGrp="1"/>
+          </p:cNvSpPr>
+          <p:nvPr/>
+        </p:nvSpPr>
+        <p:spPr>
+          <a:xfrm xmlns:a="http://schemas.openxmlformats.org/drawingml/2006/main">
+            <a:off x="6509385" y="3579971"/>
+            <a:ext cx="2133314" cy="1155859"/>
           </a:xfrm>
           <a:prstGeom xmlns:a="http://schemas.openxmlformats.org/drawingml/2006/main" prst="rect">
             <a:avLst/>
@@ -4756,40 +9127,40 @@
           <a:lstStyle xmlns:a="http://schemas.openxmlformats.org/drawingml/2006/main"/>
           <a:p xmlns:a="http://schemas.openxmlformats.org/drawingml/2006/main">
             <a:pPr algn="l">
-              <a:defRPr sz="5700">
-                <a:solidFill>
-                  <a:srgbClr val="000000"/>
-                </a:solidFill>
-                <a:latin typeface="Helvetica Neue"/>
-                <a:ea typeface="Helvetica Neue"/>
-                <a:cs typeface="Helvetica Neue"/>
-              </a:defRPr>
-            </a:pPr>
-            <a:r>
-              <a:t>Preserve the lesson.
-Do not rescue the rule.</a:t>
-            </a:r>
-          </a:p>
-        </p:txBody>
-      </p:sp>
-      <p:sp>
-        <p:nvSpPr>
-          <p:cNvPr id="2" name="cover-subtitle">
-            <a:extLst xmlns:a="http://schemas.openxmlformats.org/drawingml/2006/main">
-              <a:ext uri="{FF2B5EF4-FFF2-40B4-BE49-F238E27FC236}">
-                <a16:creationId xmlns:a16="http://schemas.microsoft.com/office/drawing/2014/main" id="{F6F90063-BA30-438B-9FD3-13AA22719785}"/>
-              </a:ext>
-            </a:extLst>
-          </p:cNvPr>
-          <p:cNvSpPr>
-            <a:spLocks xmlns:a="http://schemas.openxmlformats.org/drawingml/2006/main" noGrp="1"/>
-          </p:cNvSpPr>
-          <p:nvPr/>
-        </p:nvSpPr>
-        <p:spPr>
-          <a:xfrm xmlns:a="http://schemas.openxmlformats.org/drawingml/2006/main">
-            <a:off x="393668" y="4762500"/>
-            <a:ext cx="8001000" cy="1238250"/>
+              <a:buNone/>
+              <a:defRPr sz="2700">
+                <a:solidFill>
+                  <a:srgbClr val="B42318"/>
+                </a:solidFill>
+                <a:latin typeface="Helvetica Neue"/>
+                <a:ea typeface="Helvetica Neue"/>
+                <a:cs typeface="Helvetica Neue"/>
+              </a:defRPr>
+            </a:pPr>
+            <a:r>
+              <a:t>-17.68 bp</a:t>
+            </a:r>
+          </a:p>
+        </p:txBody>
+      </p:sp>
+      <p:sp>
+        <p:nvSpPr>
+          <p:cNvPr id="7" name="left-stat-label">
+            <a:extLst xmlns:a="http://schemas.openxmlformats.org/drawingml/2006/main">
+              <a:ext uri="{FF2B5EF4-FFF2-40B4-BE49-F238E27FC236}">
+                <a16:creationId xmlns:a16="http://schemas.microsoft.com/office/drawing/2014/main" id="{99D2BB32-1C11-4B29-AF23-ED9F32D0BCEB}"/>
+              </a:ext>
+            </a:extLst>
+          </p:cNvPr>
+          <p:cNvSpPr>
+            <a:spLocks xmlns:a="http://schemas.openxmlformats.org/drawingml/2006/main" noGrp="1"/>
+          </p:cNvSpPr>
+          <p:nvPr/>
+        </p:nvSpPr>
+        <p:spPr>
+          <a:xfrm xmlns:a="http://schemas.openxmlformats.org/drawingml/2006/main">
+            <a:off x="6575965" y="4953000"/>
+            <a:ext cx="2066735" cy="762000"/>
           </a:xfrm>
           <a:prstGeom xmlns:a="http://schemas.openxmlformats.org/drawingml/2006/main" prst="rect">
             <a:avLst/>
@@ -4802,7 +9173,8 @@
           <a:lstStyle xmlns:a="http://schemas.openxmlformats.org/drawingml/2006/main"/>
           <a:p xmlns:a="http://schemas.openxmlformats.org/drawingml/2006/main">
             <a:pPr algn="l">
-              <a:defRPr sz="2250">
+              <a:buNone/>
+              <a:defRPr sz="1500">
                 <a:solidFill>
                   <a:srgbClr val="000000"/>
                 </a:solidFill>
@@ -4812,29 +9184,76 @@
               </a:defRPr>
             </a:pPr>
             <a:r>
-              <a:t>A negative ADF-style statistic was not actionable evidence. Keep later data sealed and return to literature for LIT-MR-03.1 or a substantively justified new variant.</a:t>
-            </a:r>
-          </a:p>
-        </p:txBody>
-      </p:sp>
-      <p:sp>
-        <p:nvSpPr>
-          <p:cNvPr id="3" name="cover-eyebrow">
-            <a:extLst xmlns:a="http://schemas.openxmlformats.org/drawingml/2006/main">
-              <a:ext uri="{FF2B5EF4-FFF2-40B4-BE49-F238E27FC236}">
-                <a16:creationId xmlns:a16="http://schemas.microsoft.com/office/drawing/2014/main" id="{45129715-75DE-4D50-B44D-3AFE3EBA3F0E}"/>
-              </a:ext>
-            </a:extLst>
-          </p:cNvPr>
-          <p:cNvSpPr>
-            <a:spLocks xmlns:a="http://schemas.openxmlformats.org/drawingml/2006/main" noGrp="1"/>
-          </p:cNvSpPr>
-          <p:nvPr/>
-        </p:nvSpPr>
-        <p:spPr>
-          <a:xfrm xmlns:a="http://schemas.openxmlformats.org/drawingml/2006/main">
-            <a:off x="393668" y="392240"/>
-            <a:ext cx="7239000" cy="649129"/>
+              <a:t>Mean primary-cost
+net return per trade</a:t>
+            </a:r>
+          </a:p>
+        </p:txBody>
+      </p:sp>
+      <p:sp>
+        <p:nvSpPr>
+          <p:cNvPr id="8" name="right-stat">
+            <a:extLst xmlns:a="http://schemas.openxmlformats.org/drawingml/2006/main">
+              <a:ext uri="{FF2B5EF4-FFF2-40B4-BE49-F238E27FC236}">
+                <a16:creationId xmlns:a16="http://schemas.microsoft.com/office/drawing/2014/main" id="{2EAFD608-776D-46A1-95EA-79AF4E6F5599}"/>
+              </a:ext>
+            </a:extLst>
+          </p:cNvPr>
+          <p:cNvSpPr>
+            <a:spLocks xmlns:a="http://schemas.openxmlformats.org/drawingml/2006/main" noGrp="1"/>
+          </p:cNvSpPr>
+          <p:nvPr/>
+        </p:nvSpPr>
+        <p:spPr>
+          <a:xfrm xmlns:a="http://schemas.openxmlformats.org/drawingml/2006/main">
+            <a:off x="9461564" y="3579971"/>
+            <a:ext cx="2133314" cy="1155859"/>
+          </a:xfrm>
+          <a:prstGeom xmlns:a="http://schemas.openxmlformats.org/drawingml/2006/main" prst="rect">
+            <a:avLst/>
+          </a:prstGeom>
+        </p:spPr>
+        <p:txBody>
+          <a:bodyPr xmlns:a="http://schemas.openxmlformats.org/drawingml/2006/main" lIns="0" tIns="0" rIns="0" bIns="0" anchor="b">
+            <a:normAutofit fontScale="100000"/>
+          </a:bodyPr>
+          <a:lstStyle xmlns:a="http://schemas.openxmlformats.org/drawingml/2006/main"/>
+          <a:p xmlns:a="http://schemas.openxmlformats.org/drawingml/2006/main">
+            <a:pPr algn="l">
+              <a:buNone/>
+              <a:defRPr sz="2700">
+                <a:solidFill>
+                  <a:srgbClr val="B42318"/>
+                </a:solidFill>
+                <a:latin typeface="Helvetica Neue"/>
+                <a:ea typeface="Helvetica Neue"/>
+                <a:cs typeface="Helvetica Neue"/>
+              </a:defRPr>
+            </a:pPr>
+            <a:r>
+              <a:t>49.1%</a:t>
+            </a:r>
+          </a:p>
+        </p:txBody>
+      </p:sp>
+      <p:sp>
+        <p:nvSpPr>
+          <p:cNvPr id="9" name="right-stat-label">
+            <a:extLst xmlns:a="http://schemas.openxmlformats.org/drawingml/2006/main">
+              <a:ext uri="{FF2B5EF4-FFF2-40B4-BE49-F238E27FC236}">
+                <a16:creationId xmlns:a16="http://schemas.microsoft.com/office/drawing/2014/main" id="{691BF8AE-236E-4677-8EAF-3CF0D5A20DB6}"/>
+              </a:ext>
+            </a:extLst>
+          </p:cNvPr>
+          <p:cNvSpPr>
+            <a:spLocks xmlns:a="http://schemas.openxmlformats.org/drawingml/2006/main" noGrp="1"/>
+          </p:cNvSpPr>
+          <p:nvPr/>
+        </p:nvSpPr>
+        <p:spPr>
+          <a:xfrm xmlns:a="http://schemas.openxmlformats.org/drawingml/2006/main">
+            <a:off x="9528143" y="4953000"/>
+            <a:ext cx="2066735" cy="762000"/>
           </a:xfrm>
           <a:prstGeom xmlns:a="http://schemas.openxmlformats.org/drawingml/2006/main" prst="rect">
             <a:avLst/>
@@ -4847,7 +9266,8 @@
           <a:lstStyle xmlns:a="http://schemas.openxmlformats.org/drawingml/2006/main"/>
           <a:p xmlns:a="http://schemas.openxmlformats.org/drawingml/2006/main">
             <a:pPr algn="l">
-              <a:defRPr sz="2250">
+              <a:buNone/>
+              <a:defRPr sz="1500">
                 <a:solidFill>
                   <a:srgbClr val="000000"/>
                 </a:solidFill>
@@ -4857,15 +9277,38 @@
               </a:defRPr>
             </a:pPr>
             <a:r>
-              <a:t>DECISION</a:t>
-            </a:r>
-          </a:p>
-        </p:txBody>
-      </p:sp>
+              <a:t>Completed-trade
+hit rate</a:t>
+            </a:r>
+          </a:p>
+        </p:txBody>
+      </p:sp>
+      <p:pic>
+        <p:nvPicPr>
+          <p:cNvPr id="22" name=""/>
+          <p:cNvPicPr>
+            <a:picLocks xmlns:a="http://schemas.openxmlformats.org/drawingml/2006/main" noChangeAspect="1"/>
+          </p:cNvPicPr>
+          <p:nvPr/>
+        </p:nvPicPr>
+        <p:blipFill>
+          <a:blip xmlns:r="http://schemas.openxmlformats.org/officeDocument/2006/relationships" xmlns:a="http://schemas.openxmlformats.org/drawingml/2006/main" r:embed="R87f298a9f7c14140"/>
+          <a:stretch xmlns:a="http://schemas.openxmlformats.org/drawingml/2006/main"/>
+        </p:blipFill>
+        <p:spPr>
+          <a:xfrm xmlns:a="http://schemas.openxmlformats.org/drawingml/2006/main">
+            <a:off x="385858" y="2378821"/>
+            <a:ext cx="5534216" cy="2767108"/>
+          </a:xfrm>
+          <a:prstGeom xmlns:a="http://schemas.openxmlformats.org/drawingml/2006/main" prst="rect">
+            <a:avLst/>
+          </a:prstGeom>
+        </p:spPr>
+      </p:pic>
     </p:spTree>
     <p:extLst>
       <p:ext uri="{BB962C8B-B14F-4D97-AF65-F5344CB8AC3E}">
-        <p14:creationId xmlns:p14="http://schemas.microsoft.com/office/powerpoint/2010/main" val="1664240194"/>
+        <p14:creationId xmlns:p14="http://schemas.microsoft.com/office/powerpoint/2010/main" val="91287502"/>
       </p:ext>
     </p:extLst>
   </p:cSld>

--- a/presentations/gen5_lit_mr_02_1_bollinger_evidence.pptx
+++ b/presentations/gen5_lit_mr_02_1_bollinger_evidence.pptx
@@ -2,37 +2,45 @@
 <file path=ppt/presentation.xml><?xml version="1.0" encoding="utf-8"?>
 <p:presentation xmlns:p="http://schemas.openxmlformats.org/presentationml/2006/main">
   <p:sldMasterIdLst>
-    <p:sldMasterId xmlns:r="http://schemas.openxmlformats.org/officeDocument/2006/relationships" id="2147483648" r:id="Rb0fdfb37a6c74bf5"/>
+    <p:sldMasterId xmlns:r="http://schemas.openxmlformats.org/officeDocument/2006/relationships" id="2147483648" r:id="R0ff1918952ef4807"/>
   </p:sldMasterIdLst>
   <p:notesMasterIdLst>
-    <p:notesMasterId xmlns:r="http://schemas.openxmlformats.org/officeDocument/2006/relationships" r:id="Rba7251fa838a44d3"/>
+    <p:notesMasterId xmlns:r="http://schemas.openxmlformats.org/officeDocument/2006/relationships" r:id="Rdb7b1a1873cb411e"/>
   </p:notesMasterIdLst>
   <p:sldIdLst>
-    <p:sldId xmlns:r="http://schemas.openxmlformats.org/officeDocument/2006/relationships" id="256" r:id="R0130781af4254633"/>
-    <p:sldId xmlns:r="http://schemas.openxmlformats.org/officeDocument/2006/relationships" id="257" r:id="Rf2c46f0ce2f34dc1"/>
-    <p:sldId xmlns:r="http://schemas.openxmlformats.org/officeDocument/2006/relationships" id="258" r:id="R8630a5dcd0a94a13"/>
-    <p:sldId xmlns:r="http://schemas.openxmlformats.org/officeDocument/2006/relationships" id="259" r:id="R116dd3c193c24878"/>
-    <p:sldId xmlns:r="http://schemas.openxmlformats.org/officeDocument/2006/relationships" id="260" r:id="R6a9ea2d31d804382"/>
-    <p:sldId xmlns:r="http://schemas.openxmlformats.org/officeDocument/2006/relationships" id="261" r:id="R84f1f9c538e34184"/>
-    <p:sldId xmlns:r="http://schemas.openxmlformats.org/officeDocument/2006/relationships" id="262" r:id="R7899df83a8a941d3"/>
-    <p:sldId xmlns:r="http://schemas.openxmlformats.org/officeDocument/2006/relationships" id="263" r:id="R4f5474c282e740e8"/>
-    <p:sldId xmlns:r="http://schemas.openxmlformats.org/officeDocument/2006/relationships" id="264" r:id="Rcf66f14337e84ca6"/>
-    <p:sldId xmlns:r="http://schemas.openxmlformats.org/officeDocument/2006/relationships" id="265" r:id="Rb6beaf2aa30d402b"/>
-    <p:sldId xmlns:r="http://schemas.openxmlformats.org/officeDocument/2006/relationships" id="266" r:id="R05c5c90e09be4f06"/>
-    <p:sldId xmlns:r="http://schemas.openxmlformats.org/officeDocument/2006/relationships" id="267" r:id="R6033d8a4c620406a"/>
-    <p:sldId xmlns:r="http://schemas.openxmlformats.org/officeDocument/2006/relationships" id="268" r:id="R3e15764e58cf47c1"/>
-    <p:sldId xmlns:r="http://schemas.openxmlformats.org/officeDocument/2006/relationships" id="269" r:id="Rcec12b984c3a4b27"/>
-    <p:sldId xmlns:r="http://schemas.openxmlformats.org/officeDocument/2006/relationships" id="270" r:id="R37006ac44dfb4bf2"/>
-    <p:sldId xmlns:r="http://schemas.openxmlformats.org/officeDocument/2006/relationships" id="271" r:id="R408268d4b31849e3"/>
-    <p:sldId xmlns:r="http://schemas.openxmlformats.org/officeDocument/2006/relationships" id="272" r:id="R4b6524057d7048e2"/>
-    <p:sldId xmlns:r="http://schemas.openxmlformats.org/officeDocument/2006/relationships" id="273" r:id="R2072f0d46de64ba8"/>
-    <p:sldId xmlns:r="http://schemas.openxmlformats.org/officeDocument/2006/relationships" id="274" r:id="Rad4030a59b8648a6"/>
-    <p:sldId xmlns:r="http://schemas.openxmlformats.org/officeDocument/2006/relationships" id="275" r:id="R8a439ab810104168"/>
-    <p:sldId xmlns:r="http://schemas.openxmlformats.org/officeDocument/2006/relationships" id="276" r:id="R1d4ae6e6b0da4070"/>
-    <p:sldId xmlns:r="http://schemas.openxmlformats.org/officeDocument/2006/relationships" id="277" r:id="R6337b03cee7a4fa2"/>
-    <p:sldId xmlns:r="http://schemas.openxmlformats.org/officeDocument/2006/relationships" id="278" r:id="Rfd70d95e984641b4"/>
-    <p:sldId xmlns:r="http://schemas.openxmlformats.org/officeDocument/2006/relationships" id="279" r:id="Rd517b7513a834c02"/>
-    <p:sldId xmlns:r="http://schemas.openxmlformats.org/officeDocument/2006/relationships" id="280" r:id="R6230da88c2794665"/>
+    <p:sldId xmlns:r="http://schemas.openxmlformats.org/officeDocument/2006/relationships" id="256" r:id="Rba525469a78f4593"/>
+    <p:sldId xmlns:r="http://schemas.openxmlformats.org/officeDocument/2006/relationships" id="257" r:id="Rac7dc99e3c2945db"/>
+    <p:sldId xmlns:r="http://schemas.openxmlformats.org/officeDocument/2006/relationships" id="258" r:id="R0fc6a863c5d14b8a"/>
+    <p:sldId xmlns:r="http://schemas.openxmlformats.org/officeDocument/2006/relationships" id="259" r:id="R340af81d15b04cf0"/>
+    <p:sldId xmlns:r="http://schemas.openxmlformats.org/officeDocument/2006/relationships" id="260" r:id="R5f5e47bd1fde46aa"/>
+    <p:sldId xmlns:r="http://schemas.openxmlformats.org/officeDocument/2006/relationships" id="261" r:id="R4a8b179aa0684b01"/>
+    <p:sldId xmlns:r="http://schemas.openxmlformats.org/officeDocument/2006/relationships" id="262" r:id="R482f6db5378e4390"/>
+    <p:sldId xmlns:r="http://schemas.openxmlformats.org/officeDocument/2006/relationships" id="263" r:id="Rf4dc6912db4e43f6"/>
+    <p:sldId xmlns:r="http://schemas.openxmlformats.org/officeDocument/2006/relationships" id="264" r:id="Rbef6d66ce822439f"/>
+    <p:sldId xmlns:r="http://schemas.openxmlformats.org/officeDocument/2006/relationships" id="265" r:id="R140d588a27ac466f"/>
+    <p:sldId xmlns:r="http://schemas.openxmlformats.org/officeDocument/2006/relationships" id="266" r:id="Raf7eae2e1fc14c03"/>
+    <p:sldId xmlns:r="http://schemas.openxmlformats.org/officeDocument/2006/relationships" id="267" r:id="R3f8e65828b034c0c"/>
+    <p:sldId xmlns:r="http://schemas.openxmlformats.org/officeDocument/2006/relationships" id="268" r:id="Ra0b50b82f28b48ce"/>
+    <p:sldId xmlns:r="http://schemas.openxmlformats.org/officeDocument/2006/relationships" id="269" r:id="R54116230a2fb48f1"/>
+    <p:sldId xmlns:r="http://schemas.openxmlformats.org/officeDocument/2006/relationships" id="270" r:id="Rb11bb6e2ec254291"/>
+    <p:sldId xmlns:r="http://schemas.openxmlformats.org/officeDocument/2006/relationships" id="271" r:id="R559966ba248648c4"/>
+    <p:sldId xmlns:r="http://schemas.openxmlformats.org/officeDocument/2006/relationships" id="272" r:id="R36e1f00029774c5d"/>
+    <p:sldId xmlns:r="http://schemas.openxmlformats.org/officeDocument/2006/relationships" id="273" r:id="R501d17a74ffa4e95"/>
+    <p:sldId xmlns:r="http://schemas.openxmlformats.org/officeDocument/2006/relationships" id="274" r:id="R80e31e3ec9524f43"/>
+    <p:sldId xmlns:r="http://schemas.openxmlformats.org/officeDocument/2006/relationships" id="275" r:id="R6e9ce5f4b3184b05"/>
+    <p:sldId xmlns:r="http://schemas.openxmlformats.org/officeDocument/2006/relationships" id="276" r:id="R2e74613cd04f40fa"/>
+    <p:sldId xmlns:r="http://schemas.openxmlformats.org/officeDocument/2006/relationships" id="277" r:id="R98de95311e4c4ef7"/>
+    <p:sldId xmlns:r="http://schemas.openxmlformats.org/officeDocument/2006/relationships" id="278" r:id="Rba2b5cdbef0e4f64"/>
+    <p:sldId xmlns:r="http://schemas.openxmlformats.org/officeDocument/2006/relationships" id="279" r:id="Rec86ed4710c74328"/>
+    <p:sldId xmlns:r="http://schemas.openxmlformats.org/officeDocument/2006/relationships" id="280" r:id="R8035548227094914"/>
+    <p:sldId xmlns:r="http://schemas.openxmlformats.org/officeDocument/2006/relationships" id="281" r:id="R5f6bf38ac69d48c2"/>
+    <p:sldId xmlns:r="http://schemas.openxmlformats.org/officeDocument/2006/relationships" id="282" r:id="R2a80033bf24f49a6"/>
+    <p:sldId xmlns:r="http://schemas.openxmlformats.org/officeDocument/2006/relationships" id="283" r:id="R6c933ae295984898"/>
+    <p:sldId xmlns:r="http://schemas.openxmlformats.org/officeDocument/2006/relationships" id="284" r:id="Rbead07570f5a4ab1"/>
+    <p:sldId xmlns:r="http://schemas.openxmlformats.org/officeDocument/2006/relationships" id="285" r:id="R8148dca2dbbb4578"/>
+    <p:sldId xmlns:r="http://schemas.openxmlformats.org/officeDocument/2006/relationships" id="286" r:id="Rf945799aa9ba4d34"/>
+    <p:sldId xmlns:r="http://schemas.openxmlformats.org/officeDocument/2006/relationships" id="287" r:id="R997b1c070c794914"/>
+    <p:sldId xmlns:r="http://schemas.openxmlformats.org/officeDocument/2006/relationships" id="288" r:id="Rf5b013401a334102"/>
   </p:sldIdLst>
   <p:sldSz cx="12192000" cy="6858000"/>
   <p:notesSz cx="6858000" cy="9144000"/>
@@ -2086,7 +2094,7 @@
           <a:lstStyle xmlns:a="http://schemas.openxmlformats.org/drawingml/2006/main"/>
           <a:p xmlns:a="http://schemas.openxmlformats.org/drawingml/2006/main">
             <a:r>
-              <a:t>The result is actionable as research governance: the exact source-inspired template is broadly stopped in TRAIN. A future variant must begin from a new mechanism-level hypothesis, not from rescuing a pair or threshold after observing these outcomes.</a:t>
+              <a:t>2018 is documented as a positive-control regime for the unchanged LIT-MR-02.1 mechanism. It is descriptive evidence found after the primary five-year TRAIN decision and therefore cannot reverse that STOP.</a:t>
             </a:r>
           </a:p>
           <a:p xmlns:a="http://schemas.openxmlformats.org/drawingml/2006/main">
@@ -2101,22 +2109,397 @@
           </a:p>
           <a:p xmlns:a="http://schemas.openxmlformats.org/drawingml/2006/main">
             <a:r>
-              <a:t>- C:/Users/Franc/OneDrive/Documents/Francis/Peltata Project/Time-Series-Modeling-Gen5/docs/GEN5_LIT_MR_02_1_PANEL_A_CONTRACT.md</a:t>
-            </a:r>
-          </a:p>
-          <a:p xmlns:a="http://schemas.openxmlformats.org/drawingml/2006/main">
-            <a:r>
-              <a:t>- C:/Users/Franc/OneDrive/Documents/Francis/Peltata Project/Time-Series-Modeling-Gen5/docs/GEN5_LIT_MR_02_1_PANEL_B_CONTRACT.md</a:t>
-            </a:r>
-          </a:p>
-          <a:p xmlns:a="http://schemas.openxmlformats.org/drawingml/2006/main">
-            <a:r>
-              <a:t>- C:/Users/Franc/OneDrive/Documents/Francis/Peltata Project/Time-Series-Modeling-Gen5/runs/research_workbench/literature_grounded/lit_mr_02_1_panel_b_20260728/mr02_panel_report.md</a:t>
-            </a:r>
-          </a:p>
-          <a:p xmlns:a="http://schemas.openxmlformats.org/drawingml/2006/main">
-            <a:r>
-              <a:t>- C:/Users/Franc/OneDrive/Documents/Francis/Peltata Project/Time-Series-Modeling-Gen5/docs/GEN5_LITERATURE_GROUNDED_STRATEGY_RESEARCH_NOMENCLATURE.md</a:t>
+              <a:t>- C:/Users/Franc/OneDrive/Documents/Francis/Peltata Project/Time-Series-Modeling-Gen5/docs/GEN5_LIT_MR_02_1_CASE_STUDIES.md</a:t>
+            </a:r>
+          </a:p>
+          <a:p xmlns:a="http://schemas.openxmlformats.org/drawingml/2006/main">
+            <a:r>
+              <a:t>- C:/Users/Franc/OneDrive/Documents/Francis/Peltata Project/Time-Series-Modeling-Gen5/runs/research_workbench/literature_grounded/lit_mr_02_1_case_studies_20260729/mr02_case_2018_summary.csv</a:t>
+            </a:r>
+          </a:p>
+          <a:p xmlns:a="http://schemas.openxmlformats.org/drawingml/2006/main">
+            <a:r>
+              <a:t>- C:/Users/Franc/OneDrive/Documents/Francis/Peltata Project/Time-Series-Modeling-Gen5/runs/research_workbench/literature_grounded/lit_mr_02_1_case_studies_20260729/mr02_case_studies_report.md</a:t>
+            </a:r>
+          </a:p>
+        </p:txBody>
+      </p:sp>
+      <p:sp>
+        <p:nvSpPr>
+          <p:cNvPr id="4" name="Slide Number Placeholder 3"/>
+          <p:cNvSpPr>
+            <a:spLocks xmlns:a="http://schemas.openxmlformats.org/drawingml/2006/main" noGrp="1"/>
+          </p:cNvSpPr>
+          <p:nvPr>
+            <p:ph type="sldNum" idx="5"/>
+          </p:nvPr>
+        </p:nvSpPr>
+        <p:spPr/>
+        <p:txBody>
+          <a:bodyPr xmlns:a="http://schemas.openxmlformats.org/drawingml/2006/main"/>
+          <a:lstStyle xmlns:a="http://schemas.openxmlformats.org/drawingml/2006/main"/>
+          <a:p xmlns:a="http://schemas.openxmlformats.org/drawingml/2006/main"/>
+        </p:txBody>
+      </p:sp>
+    </p:spTree>
+  </p:cSld>
+  <p:clrMapOvr>
+    <a:masterClrMapping xmlns:a="http://schemas.openxmlformats.org/drawingml/2006/main"/>
+  </p:clrMapOvr>
+</p:notes>
+</file>
+
+<file path=ppt/notesSlides/notesSlide26.xml><?xml version="1.0" encoding="utf-8"?>
+<p:notes xmlns:p="http://schemas.openxmlformats.org/presentationml/2006/main">
+  <p:cSld>
+    <p:spTree>
+      <p:nvGrpSpPr>
+        <p:cNvPr id="1" name=""/>
+        <p:cNvGrpSpPr/>
+        <p:nvPr/>
+      </p:nvGrpSpPr>
+      <p:grpSpPr>
+        <a:xfrm xmlns:a="http://schemas.openxmlformats.org/drawingml/2006/main"/>
+      </p:grpSpPr>
+      <p:sp>
+        <p:nvSpPr>
+          <p:cNvPr id="2" name="Slide Image Placeholder 1"/>
+          <p:cNvSpPr>
+            <a:spLocks xmlns:a="http://schemas.openxmlformats.org/drawingml/2006/main" noGrp="1"/>
+          </p:cNvSpPr>
+          <p:nvPr>
+            <p:ph type="sldImg" idx="0"/>
+          </p:nvPr>
+        </p:nvSpPr>
+        <p:spPr/>
+      </p:sp>
+      <p:sp>
+        <p:nvSpPr>
+          <p:cNvPr id="3" name="Notes Placeholder 2"/>
+          <p:cNvSpPr>
+            <a:spLocks xmlns:a="http://schemas.openxmlformats.org/drawingml/2006/main" noGrp="1"/>
+          </p:cNvSpPr>
+          <p:nvPr>
+            <p:ph type="body" idx="1"/>
+          </p:nvPr>
+        </p:nvSpPr>
+        <p:spPr/>
+        <p:txBody>
+          <a:bodyPr xmlns:a="http://schemas.openxmlformats.org/drawingml/2006/main"/>
+          <a:lstStyle xmlns:a="http://schemas.openxmlformats.org/drawingml/2006/main"/>
+          <a:p xmlns:a="http://schemas.openxmlformats.org/drawingml/2006/main">
+            <a:r>
+              <a:t>The exact frozen primary-cost replay returned 4.82% in calendar 2018, with a 0.736 naive annualized Sharpe, a 7.64% maximum drawdown, and nine winners among 13 completed trades. The five-year context remains mixed and ultimately negative.</a:t>
+            </a:r>
+          </a:p>
+          <a:p xmlns:a="http://schemas.openxmlformats.org/drawingml/2006/main">
+            <a:r>
+              <a:t/>
+            </a:r>
+          </a:p>
+          <a:p xmlns:a="http://schemas.openxmlformats.org/drawingml/2006/main">
+            <a:r>
+              <a:t>[Sources]</a:t>
+            </a:r>
+          </a:p>
+          <a:p xmlns:a="http://schemas.openxmlformats.org/drawingml/2006/main">
+            <a:r>
+              <a:t>- C:/Users/Franc/OneDrive/Documents/Francis/Peltata Project/Time-Series-Modeling-Gen5/docs/GEN5_LIT_MR_02_1_CASE_STUDIES.md</a:t>
+            </a:r>
+          </a:p>
+          <a:p xmlns:a="http://schemas.openxmlformats.org/drawingml/2006/main">
+            <a:r>
+              <a:t>- C:/Users/Franc/OneDrive/Documents/Francis/Peltata Project/Time-Series-Modeling-Gen5/runs/research_workbench/literature_grounded/lit_mr_02_1_case_studies_20260729/mr02_case_2018_summary.csv</a:t>
+            </a:r>
+          </a:p>
+          <a:p xmlns:a="http://schemas.openxmlformats.org/drawingml/2006/main">
+            <a:r>
+              <a:t>- C:/Users/Franc/OneDrive/Documents/Francis/Peltata Project/Time-Series-Modeling-Gen5/runs/research_workbench/literature_grounded/lit_mr_02_1_case_studies_20260729/visuals/mr02_case_2018_five_year_context.png</a:t>
+            </a:r>
+          </a:p>
+        </p:txBody>
+      </p:sp>
+      <p:sp>
+        <p:nvSpPr>
+          <p:cNvPr id="4" name="Slide Number Placeholder 3"/>
+          <p:cNvSpPr>
+            <a:spLocks xmlns:a="http://schemas.openxmlformats.org/drawingml/2006/main" noGrp="1"/>
+          </p:cNvSpPr>
+          <p:nvPr>
+            <p:ph type="sldNum" idx="5"/>
+          </p:nvPr>
+        </p:nvSpPr>
+        <p:spPr/>
+        <p:txBody>
+          <a:bodyPr xmlns:a="http://schemas.openxmlformats.org/drawingml/2006/main"/>
+          <a:lstStyle xmlns:a="http://schemas.openxmlformats.org/drawingml/2006/main"/>
+          <a:p xmlns:a="http://schemas.openxmlformats.org/drawingml/2006/main"/>
+        </p:txBody>
+      </p:sp>
+    </p:spTree>
+  </p:cSld>
+  <p:clrMapOvr>
+    <a:masterClrMapping xmlns:a="http://schemas.openxmlformats.org/drawingml/2006/main"/>
+  </p:clrMapOvr>
+</p:notes>
+</file>
+
+<file path=ppt/notesSlides/notesSlide27.xml><?xml version="1.0" encoding="utf-8"?>
+<p:notes xmlns:p="http://schemas.openxmlformats.org/presentationml/2006/main">
+  <p:cSld>
+    <p:spTree>
+      <p:nvGrpSpPr>
+        <p:cNvPr id="1" name=""/>
+        <p:cNvGrpSpPr/>
+        <p:nvPr/>
+      </p:nvGrpSpPr>
+      <p:grpSpPr>
+        <a:xfrm xmlns:a="http://schemas.openxmlformats.org/drawingml/2006/main"/>
+      </p:grpSpPr>
+      <p:sp>
+        <p:nvSpPr>
+          <p:cNvPr id="2" name="Slide Image Placeholder 1"/>
+          <p:cNvSpPr>
+            <a:spLocks xmlns:a="http://schemas.openxmlformats.org/drawingml/2006/main" noGrp="1"/>
+          </p:cNvSpPr>
+          <p:nvPr>
+            <p:ph type="sldImg" idx="0"/>
+          </p:nvPr>
+        </p:nvSpPr>
+        <p:spPr/>
+      </p:sp>
+      <p:sp>
+        <p:nvSpPr>
+          <p:cNvPr id="3" name="Notes Placeholder 2"/>
+          <p:cNvSpPr>
+            <a:spLocks xmlns:a="http://schemas.openxmlformats.org/drawingml/2006/main" noGrp="1"/>
+          </p:cNvSpPr>
+          <p:nvPr>
+            <p:ph type="body" idx="1"/>
+          </p:nvPr>
+        </p:nvSpPr>
+        <p:spPr/>
+        <p:txBody>
+          <a:bodyPr xmlns:a="http://schemas.openxmlformats.org/drawingml/2006/main"/>
+          <a:lstStyle xmlns:a="http://schemas.openxmlformats.org/drawingml/2006/main"/>
+          <a:p xmlns:a="http://schemas.openxmlformats.org/drawingml/2006/main">
+            <a:r>
+              <a:t>The top panel shows the adaptive raw-price spread and rolling mean plus or minus one standard deviation. The middle panel shows the corresponding z-score state and long/short entries. The bottom panel ties those states to the next-open, cost-aware equity and drawdown path.</a:t>
+            </a:r>
+          </a:p>
+          <a:p xmlns:a="http://schemas.openxmlformats.org/drawingml/2006/main">
+            <a:r>
+              <a:t/>
+            </a:r>
+          </a:p>
+          <a:p xmlns:a="http://schemas.openxmlformats.org/drawingml/2006/main">
+            <a:r>
+              <a:t>[Sources]</a:t>
+            </a:r>
+          </a:p>
+          <a:p xmlns:a="http://schemas.openxmlformats.org/drawingml/2006/main">
+            <a:r>
+              <a:t>- C:/Users/Franc/OneDrive/Documents/Francis/Peltata Project/Time-Series-Modeling-Gen5/docs/GEN5_LIT_MR_02_1_CASE_STUDIES.md</a:t>
+            </a:r>
+          </a:p>
+          <a:p xmlns:a="http://schemas.openxmlformats.org/drawingml/2006/main">
+            <a:r>
+              <a:t>- C:/Users/Franc/OneDrive/Documents/Francis/Peltata Project/Time-Series-Modeling-Gen5/runs/research_workbench/literature_grounded/lit_mr_02_1_case_studies_20260729/mr02_case_2018_summary.csv</a:t>
+            </a:r>
+          </a:p>
+          <a:p xmlns:a="http://schemas.openxmlformats.org/drawingml/2006/main">
+            <a:r>
+              <a:t>- C:/Users/Franc/OneDrive/Documents/Francis/Peltata Project/Time-Series-Modeling-Gen5/runs/research_workbench/literature_grounded/lit_mr_02_1_case_studies_20260729/visuals/mr02_case_2018_strategy_anatomy.png</a:t>
+            </a:r>
+          </a:p>
+        </p:txBody>
+      </p:sp>
+      <p:sp>
+        <p:nvSpPr>
+          <p:cNvPr id="4" name="Slide Number Placeholder 3"/>
+          <p:cNvSpPr>
+            <a:spLocks xmlns:a="http://schemas.openxmlformats.org/drawingml/2006/main" noGrp="1"/>
+          </p:cNvSpPr>
+          <p:nvPr>
+            <p:ph type="sldNum" idx="5"/>
+          </p:nvPr>
+        </p:nvSpPr>
+        <p:spPr/>
+        <p:txBody>
+          <a:bodyPr xmlns:a="http://schemas.openxmlformats.org/drawingml/2006/main"/>
+          <a:lstStyle xmlns:a="http://schemas.openxmlformats.org/drawingml/2006/main"/>
+          <a:p xmlns:a="http://schemas.openxmlformats.org/drawingml/2006/main"/>
+        </p:txBody>
+      </p:sp>
+    </p:spTree>
+  </p:cSld>
+  <p:clrMapOvr>
+    <a:masterClrMapping xmlns:a="http://schemas.openxmlformats.org/drawingml/2006/main"/>
+  </p:clrMapOvr>
+</p:notes>
+</file>
+
+<file path=ppt/notesSlides/notesSlide28.xml><?xml version="1.0" encoding="utf-8"?>
+<p:notes xmlns:p="http://schemas.openxmlformats.org/presentationml/2006/main">
+  <p:cSld>
+    <p:spTree>
+      <p:nvGrpSpPr>
+        <p:cNvPr id="1" name=""/>
+        <p:cNvGrpSpPr/>
+        <p:nvPr/>
+      </p:nvGrpSpPr>
+      <p:grpSpPr>
+        <a:xfrm xmlns:a="http://schemas.openxmlformats.org/drawingml/2006/main"/>
+      </p:grpSpPr>
+      <p:sp>
+        <p:nvSpPr>
+          <p:cNvPr id="2" name="Slide Image Placeholder 1"/>
+          <p:cNvSpPr>
+            <a:spLocks xmlns:a="http://schemas.openxmlformats.org/drawingml/2006/main" noGrp="1"/>
+          </p:cNvSpPr>
+          <p:nvPr>
+            <p:ph type="sldImg" idx="0"/>
+          </p:nvPr>
+        </p:nvSpPr>
+        <p:spPr/>
+      </p:sp>
+      <p:sp>
+        <p:nvSpPr>
+          <p:cNvPr id="3" name="Notes Placeholder 2"/>
+          <p:cNvSpPr>
+            <a:spLocks xmlns:a="http://schemas.openxmlformats.org/drawingml/2006/main" noGrp="1"/>
+          </p:cNvSpPr>
+          <p:nvPr>
+            <p:ph type="body" idx="1"/>
+          </p:nvPr>
+        </p:nvSpPr>
+        <p:spPr/>
+        <p:txBody>
+          <a:bodyPr xmlns:a="http://schemas.openxmlformats.org/drawingml/2006/main"/>
+          <a:lstStyle xmlns:a="http://schemas.openxmlformats.org/drawingml/2006/main"/>
+          <a:p xmlns:a="http://schemas.openxmlformats.org/drawingml/2006/main">
+            <a:r>
+              <a:t>The representative tape is the full 2018 trade set: nine long-spread trades and four short-spread trades. It makes the timing, participation, holding periods, and concentration of gains and losses auditable.</a:t>
+            </a:r>
+          </a:p>
+          <a:p xmlns:a="http://schemas.openxmlformats.org/drawingml/2006/main">
+            <a:r>
+              <a:t/>
+            </a:r>
+          </a:p>
+          <a:p xmlns:a="http://schemas.openxmlformats.org/drawingml/2006/main">
+            <a:r>
+              <a:t>[Sources]</a:t>
+            </a:r>
+          </a:p>
+          <a:p xmlns:a="http://schemas.openxmlformats.org/drawingml/2006/main">
+            <a:r>
+              <a:t>- C:/Users/Franc/OneDrive/Documents/Francis/Peltata Project/Time-Series-Modeling-Gen5/docs/GEN5_LIT_MR_02_1_CASE_STUDIES.md</a:t>
+            </a:r>
+          </a:p>
+          <a:p xmlns:a="http://schemas.openxmlformats.org/drawingml/2006/main">
+            <a:r>
+              <a:t>- C:/Users/Franc/OneDrive/Documents/Francis/Peltata Project/Time-Series-Modeling-Gen5/runs/research_workbench/literature_grounded/lit_mr_02_1_case_studies_20260729/mr02_case_2018_trades.csv</a:t>
+            </a:r>
+          </a:p>
+          <a:p xmlns:a="http://schemas.openxmlformats.org/drawingml/2006/main">
+            <a:r>
+              <a:t>- C:/Users/Franc/OneDrive/Documents/Francis/Peltata Project/Time-Series-Modeling-Gen5/runs/research_workbench/literature_grounded/lit_mr_02_1_case_studies_20260729/visuals/mr02_case_2018_trade_timeline.png</a:t>
+            </a:r>
+          </a:p>
+        </p:txBody>
+      </p:sp>
+      <p:sp>
+        <p:nvSpPr>
+          <p:cNvPr id="4" name="Slide Number Placeholder 3"/>
+          <p:cNvSpPr>
+            <a:spLocks xmlns:a="http://schemas.openxmlformats.org/drawingml/2006/main" noGrp="1"/>
+          </p:cNvSpPr>
+          <p:nvPr>
+            <p:ph type="sldNum" idx="5"/>
+          </p:nvPr>
+        </p:nvSpPr>
+        <p:spPr/>
+        <p:txBody>
+          <a:bodyPr xmlns:a="http://schemas.openxmlformats.org/drawingml/2006/main"/>
+          <a:lstStyle xmlns:a="http://schemas.openxmlformats.org/drawingml/2006/main"/>
+          <a:p xmlns:a="http://schemas.openxmlformats.org/drawingml/2006/main"/>
+        </p:txBody>
+      </p:sp>
+    </p:spTree>
+  </p:cSld>
+  <p:clrMapOvr>
+    <a:masterClrMapping xmlns:a="http://schemas.openxmlformats.org/drawingml/2006/main"/>
+  </p:clrMapOvr>
+</p:notes>
+</file>
+
+<file path=ppt/notesSlides/notesSlide29.xml><?xml version="1.0" encoding="utf-8"?>
+<p:notes xmlns:p="http://schemas.openxmlformats.org/presentationml/2006/main">
+  <p:cSld>
+    <p:spTree>
+      <p:nvGrpSpPr>
+        <p:cNvPr id="1" name=""/>
+        <p:cNvGrpSpPr/>
+        <p:nvPr/>
+      </p:nvGrpSpPr>
+      <p:grpSpPr>
+        <a:xfrm xmlns:a="http://schemas.openxmlformats.org/drawingml/2006/main"/>
+      </p:grpSpPr>
+      <p:sp>
+        <p:nvSpPr>
+          <p:cNvPr id="2" name="Slide Image Placeholder 1"/>
+          <p:cNvSpPr>
+            <a:spLocks xmlns:a="http://schemas.openxmlformats.org/drawingml/2006/main" noGrp="1"/>
+          </p:cNvSpPr>
+          <p:nvPr>
+            <p:ph type="sldImg" idx="0"/>
+          </p:nvPr>
+        </p:nvSpPr>
+        <p:spPr/>
+      </p:sp>
+      <p:sp>
+        <p:nvSpPr>
+          <p:cNvPr id="3" name="Notes Placeholder 2"/>
+          <p:cNvSpPr>
+            <a:spLocks xmlns:a="http://schemas.openxmlformats.org/drawingml/2006/main" noGrp="1"/>
+          </p:cNvSpPr>
+          <p:nvPr>
+            <p:ph type="body" idx="1"/>
+          </p:nvPr>
+        </p:nvSpPr>
+        <p:spPr/>
+        <p:txBody>
+          <a:bodyPr xmlns:a="http://schemas.openxmlformats.org/drawingml/2006/main"/>
+          <a:lstStyle xmlns:a="http://schemas.openxmlformats.org/drawingml/2006/main"/>
+          <a:p xmlns:a="http://schemas.openxmlformats.org/drawingml/2006/main">
+            <a:r>
+              <a:t>The left panel shows cost drag for each completed trade. The right panel separates long- and short-spread outcomes by holding period. Costs reduced every trade, while winners remained present in both directions.</a:t>
+            </a:r>
+          </a:p>
+          <a:p xmlns:a="http://schemas.openxmlformats.org/drawingml/2006/main">
+            <a:r>
+              <a:t/>
+            </a:r>
+          </a:p>
+          <a:p xmlns:a="http://schemas.openxmlformats.org/drawingml/2006/main">
+            <a:r>
+              <a:t>[Sources]</a:t>
+            </a:r>
+          </a:p>
+          <a:p xmlns:a="http://schemas.openxmlformats.org/drawingml/2006/main">
+            <a:r>
+              <a:t>- C:/Users/Franc/OneDrive/Documents/Francis/Peltata Project/Time-Series-Modeling-Gen5/docs/GEN5_LIT_MR_02_1_CASE_STUDIES.md</a:t>
+            </a:r>
+          </a:p>
+          <a:p xmlns:a="http://schemas.openxmlformats.org/drawingml/2006/main">
+            <a:r>
+              <a:t>- C:/Users/Franc/OneDrive/Documents/Francis/Peltata Project/Time-Series-Modeling-Gen5/runs/research_workbench/literature_grounded/lit_mr_02_1_case_studies_20260729/mr02_case_2018_trades.csv</a:t>
+            </a:r>
+          </a:p>
+          <a:p xmlns:a="http://schemas.openxmlformats.org/drawingml/2006/main">
+            <a:r>
+              <a:t>- C:/Users/Franc/OneDrive/Documents/Francis/Peltata Project/Time-Series-Modeling-Gen5/runs/research_workbench/literature_grounded/lit_mr_02_1_case_studies_20260729/visuals/mr02_case_2018_trade_economics.png</a:t>
             </a:r>
           </a:p>
         </p:txBody>
@@ -2207,6 +2590,421 @@
           <a:p xmlns:a="http://schemas.openxmlformats.org/drawingml/2006/main">
             <a:r>
               <a:t>- C:/Users/Franc/OneDrive/Documents/Francis/Peltata Project/Time-Series-Modeling-Gen5/docs/GEN5_LIT_MR_02_1_PANEL_A_CONTRACT.md</a:t>
+            </a:r>
+          </a:p>
+        </p:txBody>
+      </p:sp>
+      <p:sp>
+        <p:nvSpPr>
+          <p:cNvPr id="4" name="Slide Number Placeholder 3"/>
+          <p:cNvSpPr>
+            <a:spLocks xmlns:a="http://schemas.openxmlformats.org/drawingml/2006/main" noGrp="1"/>
+          </p:cNvSpPr>
+          <p:nvPr>
+            <p:ph type="sldNum" idx="5"/>
+          </p:nvPr>
+        </p:nvSpPr>
+        <p:spPr/>
+        <p:txBody>
+          <a:bodyPr xmlns:a="http://schemas.openxmlformats.org/drawingml/2006/main"/>
+          <a:lstStyle xmlns:a="http://schemas.openxmlformats.org/drawingml/2006/main"/>
+          <a:p xmlns:a="http://schemas.openxmlformats.org/drawingml/2006/main"/>
+        </p:txBody>
+      </p:sp>
+    </p:spTree>
+  </p:cSld>
+  <p:clrMapOvr>
+    <a:masterClrMapping xmlns:a="http://schemas.openxmlformats.org/drawingml/2006/main"/>
+  </p:clrMapOvr>
+</p:notes>
+</file>
+
+<file path=ppt/notesSlides/notesSlide30.xml><?xml version="1.0" encoding="utf-8"?>
+<p:notes xmlns:p="http://schemas.openxmlformats.org/presentationml/2006/main">
+  <p:cSld>
+    <p:spTree>
+      <p:nvGrpSpPr>
+        <p:cNvPr id="1" name=""/>
+        <p:cNvGrpSpPr/>
+        <p:nvPr/>
+      </p:nvGrpSpPr>
+      <p:grpSpPr>
+        <a:xfrm xmlns:a="http://schemas.openxmlformats.org/drawingml/2006/main"/>
+      </p:grpSpPr>
+      <p:sp>
+        <p:nvSpPr>
+          <p:cNvPr id="2" name="Slide Image Placeholder 1"/>
+          <p:cNvSpPr>
+            <a:spLocks xmlns:a="http://schemas.openxmlformats.org/drawingml/2006/main" noGrp="1"/>
+          </p:cNvSpPr>
+          <p:nvPr>
+            <p:ph type="sldImg" idx="0"/>
+          </p:nvPr>
+        </p:nvSpPr>
+        <p:spPr/>
+      </p:sp>
+      <p:sp>
+        <p:nvSpPr>
+          <p:cNvPr id="3" name="Notes Placeholder 2"/>
+          <p:cNvSpPr>
+            <a:spLocks xmlns:a="http://schemas.openxmlformats.org/drawingml/2006/main" noGrp="1"/>
+          </p:cNvSpPr>
+          <p:nvPr>
+            <p:ph type="body" idx="1"/>
+          </p:nvPr>
+        </p:nvSpPr>
+        <p:spPr/>
+        <p:txBody>
+          <a:bodyPr xmlns:a="http://schemas.openxmlformats.org/drawingml/2006/main"/>
+          <a:lstStyle xmlns:a="http://schemas.openxmlformats.org/drawingml/2006/main"/>
+          <a:p xmlns:a="http://schemas.openxmlformats.org/drawingml/2006/main">
+            <a:r>
+              <a:t>This section reproduces the exact interval printed in Chan's Example 3.2 using quarantined Yahoo adjusted daily bars. The bars are reference evidence only and do not alter the canonical Alpaca-only Gen5 provider contract.</a:t>
+            </a:r>
+          </a:p>
+          <a:p xmlns:a="http://schemas.openxmlformats.org/drawingml/2006/main">
+            <a:r>
+              <a:t/>
+            </a:r>
+          </a:p>
+          <a:p xmlns:a="http://schemas.openxmlformats.org/drawingml/2006/main">
+            <a:r>
+              <a:t>[Sources]</a:t>
+            </a:r>
+          </a:p>
+          <a:p xmlns:a="http://schemas.openxmlformats.org/drawingml/2006/main">
+            <a:r>
+              <a:t>- C:/Users/Franc/OneDrive/Documents/Francis/Trading Literature/Algorithmic Trading - Winning Strategies and Their Rationale 2013.pdf — printed pages 71–72; PDF pages 89–90</a:t>
+            </a:r>
+          </a:p>
+          <a:p xmlns:a="http://schemas.openxmlformats.org/drawingml/2006/main">
+            <a:r>
+              <a:t>- C:/Users/Franc/OneDrive/Documents/Francis/Peltata Project/Time-Series-Modeling-Gen5/docs/GEN5_LITERATURE_SOURCE_LEDGER.md</a:t>
+            </a:r>
+          </a:p>
+          <a:p xmlns:a="http://schemas.openxmlformats.org/drawingml/2006/main">
+            <a:r>
+              <a:t>- C:/Users/Franc/OneDrive/Documents/Francis/Peltata Project/Time-Series-Modeling-Gen5/runs/research_workbench/literature_grounded/lit_mr_02_1_case_studies_20260729/mr02_source_reference_audit.csv</a:t>
+            </a:r>
+          </a:p>
+          <a:p xmlns:a="http://schemas.openxmlformats.org/drawingml/2006/main">
+            <a:r>
+              <a:t>- C:/Users/Franc/OneDrive/Documents/Francis/Peltata Project/Time-Series-Modeling-Gen5/runs/research_workbench/literature_grounded/lit_mr_02_1_case_studies_20260729/mr02_source_reference_urls.csv</a:t>
+            </a:r>
+          </a:p>
+        </p:txBody>
+      </p:sp>
+      <p:sp>
+        <p:nvSpPr>
+          <p:cNvPr id="4" name="Slide Number Placeholder 3"/>
+          <p:cNvSpPr>
+            <a:spLocks xmlns:a="http://schemas.openxmlformats.org/drawingml/2006/main" noGrp="1"/>
+          </p:cNvSpPr>
+          <p:nvPr>
+            <p:ph type="sldNum" idx="5"/>
+          </p:nvPr>
+        </p:nvSpPr>
+        <p:spPr/>
+        <p:txBody>
+          <a:bodyPr xmlns:a="http://schemas.openxmlformats.org/drawingml/2006/main"/>
+          <a:lstStyle xmlns:a="http://schemas.openxmlformats.org/drawingml/2006/main"/>
+          <a:p xmlns:a="http://schemas.openxmlformats.org/drawingml/2006/main"/>
+        </p:txBody>
+      </p:sp>
+    </p:spTree>
+  </p:cSld>
+  <p:clrMapOvr>
+    <a:masterClrMapping xmlns:a="http://schemas.openxmlformats.org/drawingml/2006/main"/>
+  </p:clrMapOvr>
+</p:notes>
+</file>
+
+<file path=ppt/notesSlides/notesSlide31.xml><?xml version="1.0" encoding="utf-8"?>
+<p:notes xmlns:p="http://schemas.openxmlformats.org/presentationml/2006/main">
+  <p:cSld>
+    <p:spTree>
+      <p:nvGrpSpPr>
+        <p:cNvPr id="1" name=""/>
+        <p:cNvGrpSpPr/>
+        <p:nvPr/>
+      </p:nvGrpSpPr>
+      <p:grpSpPr>
+        <a:xfrm xmlns:a="http://schemas.openxmlformats.org/drawingml/2006/main"/>
+      </p:grpSpPr>
+      <p:sp>
+        <p:nvSpPr>
+          <p:cNvPr id="2" name="Slide Image Placeholder 1"/>
+          <p:cNvSpPr>
+            <a:spLocks xmlns:a="http://schemas.openxmlformats.org/drawingml/2006/main" noGrp="1"/>
+          </p:cNvSpPr>
+          <p:nvPr>
+            <p:ph type="sldImg" idx="0"/>
+          </p:nvPr>
+        </p:nvSpPr>
+        <p:spPr/>
+      </p:sp>
+      <p:sp>
+        <p:nvSpPr>
+          <p:cNvPr id="3" name="Notes Placeholder 2"/>
+          <p:cNvSpPr>
+            <a:spLocks xmlns:a="http://schemas.openxmlformats.org/drawingml/2006/main" noGrp="1"/>
+          </p:cNvSpPr>
+          <p:nvPr>
+            <p:ph type="body" idx="1"/>
+          </p:nvPr>
+        </p:nvSpPr>
+        <p:spPr/>
+        <p:txBody>
+          <a:bodyPr xmlns:a="http://schemas.openxmlformats.org/drawingml/2006/main"/>
+          <a:lstStyle xmlns:a="http://schemas.openxmlformats.org/drawingml/2006/main"/>
+          <a:p xmlns:a="http://schemas.openxmlformats.org/drawingml/2006/main">
+            <a:r>
+              <a:t>The blue line approximates the book's lagged-position, close-to-close, no-cost accounting. The red line applies the same signal mechanism with Gen5 next-open timing and five basis points per one-way weight change. Both accounts remain positive, though their paths and drawdowns differ.</a:t>
+            </a:r>
+          </a:p>
+          <a:p xmlns:a="http://schemas.openxmlformats.org/drawingml/2006/main">
+            <a:r>
+              <a:t/>
+            </a:r>
+          </a:p>
+          <a:p xmlns:a="http://schemas.openxmlformats.org/drawingml/2006/main">
+            <a:r>
+              <a:t>[Sources]</a:t>
+            </a:r>
+          </a:p>
+          <a:p xmlns:a="http://schemas.openxmlformats.org/drawingml/2006/main">
+            <a:r>
+              <a:t>- C:/Users/Franc/OneDrive/Documents/Francis/Trading Literature/Algorithmic Trading - Winning Strategies and Their Rationale 2013.pdf — printed pages 68 and 71–72; PDF pages 86 and 89–90</a:t>
+            </a:r>
+          </a:p>
+          <a:p xmlns:a="http://schemas.openxmlformats.org/drawingml/2006/main">
+            <a:r>
+              <a:t>- C:/Users/Franc/OneDrive/Documents/Francis/Peltata Project/Time-Series-Modeling-Gen5/docs/GEN5_LIT_MR_02_1_CASE_STUDIES.md</a:t>
+            </a:r>
+          </a:p>
+          <a:p xmlns:a="http://schemas.openxmlformats.org/drawingml/2006/main">
+            <a:r>
+              <a:t>- C:/Users/Franc/OneDrive/Documents/Francis/Peltata Project/Time-Series-Modeling-Gen5/runs/research_workbench/literature_grounded/lit_mr_02_1_case_studies_20260729/mr02_source_period_book_style_replay.csv</a:t>
+            </a:r>
+          </a:p>
+          <a:p xmlns:a="http://schemas.openxmlformats.org/drawingml/2006/main">
+            <a:r>
+              <a:t>- C:/Users/Franc/OneDrive/Documents/Francis/Peltata Project/Time-Series-Modeling-Gen5/runs/research_workbench/literature_grounded/lit_mr_02_1_case_studies_20260729/mr02_source_period_gen5_replay.csv</a:t>
+            </a:r>
+          </a:p>
+          <a:p xmlns:a="http://schemas.openxmlformats.org/drawingml/2006/main">
+            <a:r>
+              <a:t>- C:/Users/Franc/OneDrive/Documents/Francis/Peltata Project/Time-Series-Modeling-Gen5/runs/research_workbench/literature_grounded/lit_mr_02_1_case_studies_20260729/visuals/mr02_source_period_reproduction.png</a:t>
+            </a:r>
+          </a:p>
+        </p:txBody>
+      </p:sp>
+      <p:sp>
+        <p:nvSpPr>
+          <p:cNvPr id="4" name="Slide Number Placeholder 3"/>
+          <p:cNvSpPr>
+            <a:spLocks xmlns:a="http://schemas.openxmlformats.org/drawingml/2006/main" noGrp="1"/>
+          </p:cNvSpPr>
+          <p:nvPr>
+            <p:ph type="sldNum" idx="5"/>
+          </p:nvPr>
+        </p:nvSpPr>
+        <p:spPr/>
+        <p:txBody>
+          <a:bodyPr xmlns:a="http://schemas.openxmlformats.org/drawingml/2006/main"/>
+          <a:lstStyle xmlns:a="http://schemas.openxmlformats.org/drawingml/2006/main"/>
+          <a:p xmlns:a="http://schemas.openxmlformats.org/drawingml/2006/main"/>
+        </p:txBody>
+      </p:sp>
+    </p:spTree>
+  </p:cSld>
+  <p:clrMapOvr>
+    <a:masterClrMapping xmlns:a="http://schemas.openxmlformats.org/drawingml/2006/main"/>
+  </p:clrMapOvr>
+</p:notes>
+</file>
+
+<file path=ppt/notesSlides/notesSlide32.xml><?xml version="1.0" encoding="utf-8"?>
+<p:notes xmlns:p="http://schemas.openxmlformats.org/presentationml/2006/main">
+  <p:cSld>
+    <p:spTree>
+      <p:nvGrpSpPr>
+        <p:cNvPr id="1" name=""/>
+        <p:cNvGrpSpPr/>
+        <p:nvPr/>
+      </p:nvGrpSpPr>
+      <p:grpSpPr>
+        <a:xfrm xmlns:a="http://schemas.openxmlformats.org/drawingml/2006/main"/>
+      </p:grpSpPr>
+      <p:sp>
+        <p:nvSpPr>
+          <p:cNvPr id="2" name="Slide Image Placeholder 1"/>
+          <p:cNvSpPr>
+            <a:spLocks xmlns:a="http://schemas.openxmlformats.org/drawingml/2006/main" noGrp="1"/>
+          </p:cNvSpPr>
+          <p:nvPr>
+            <p:ph type="sldImg" idx="0"/>
+          </p:nvPr>
+        </p:nvSpPr>
+        <p:spPr/>
+      </p:sp>
+      <p:sp>
+        <p:nvSpPr>
+          <p:cNvPr id="3" name="Notes Placeholder 2"/>
+          <p:cNvSpPr>
+            <a:spLocks xmlns:a="http://schemas.openxmlformats.org/drawingml/2006/main" noGrp="1"/>
+          </p:cNvSpPr>
+          <p:nvPr>
+            <p:ph type="body" idx="1"/>
+          </p:nvPr>
+        </p:nvSpPr>
+        <p:spPr/>
+        <p:txBody>
+          <a:bodyPr xmlns:a="http://schemas.openxmlformats.org/drawingml/2006/main"/>
+          <a:lstStyle xmlns:a="http://schemas.openxmlformats.org/drawingml/2006/main"/>
+          <a:p xmlns:a="http://schemas.openxmlformats.org/drawingml/2006/main">
+            <a:r>
+              <a:t>Chan reports 17.8% APR and 0.96 Sharpe. Using current Yahoo-adjusted bars, the book-style account reaches 15.07% APR and 0.845 Sharpe; the Gen5 translation reaches 12.93% APR and 0.933 Sharpe. We retain the discrepancy because the original data vintage and preprocessing are not available.</a:t>
+            </a:r>
+          </a:p>
+          <a:p xmlns:a="http://schemas.openxmlformats.org/drawingml/2006/main">
+            <a:r>
+              <a:t/>
+            </a:r>
+          </a:p>
+          <a:p xmlns:a="http://schemas.openxmlformats.org/drawingml/2006/main">
+            <a:r>
+              <a:t>[Sources]</a:t>
+            </a:r>
+          </a:p>
+          <a:p xmlns:a="http://schemas.openxmlformats.org/drawingml/2006/main">
+            <a:r>
+              <a:t>- C:/Users/Franc/OneDrive/Documents/Francis/Trading Literature/Algorithmic Trading - Winning Strategies and Their Rationale 2013.pdf — printed pages 71–72; PDF pages 89–90</a:t>
+            </a:r>
+          </a:p>
+          <a:p xmlns:a="http://schemas.openxmlformats.org/drawingml/2006/main">
+            <a:r>
+              <a:t>- C:/Users/Franc/OneDrive/Documents/Francis/Peltata Project/Time-Series-Modeling-Gen5/docs/GEN5_LIT_MR_02_1_CASE_STUDIES.md</a:t>
+            </a:r>
+          </a:p>
+          <a:p xmlns:a="http://schemas.openxmlformats.org/drawingml/2006/main">
+            <a:r>
+              <a:t>- C:/Users/Franc/OneDrive/Documents/Francis/Peltata Project/Time-Series-Modeling-Gen5/runs/research_workbench/literature_grounded/lit_mr_02_1_case_studies_20260729/mr02_source_period_comparison.csv</a:t>
+            </a:r>
+          </a:p>
+          <a:p xmlns:a="http://schemas.openxmlformats.org/drawingml/2006/main">
+            <a:r>
+              <a:t>- C:/Users/Franc/OneDrive/Documents/Francis/Peltata Project/Time-Series-Modeling-Gen5/runs/research_workbench/literature_grounded/lit_mr_02_1_case_studies_20260729/mr02_source_reference_audit.csv</a:t>
+            </a:r>
+          </a:p>
+          <a:p xmlns:a="http://schemas.openxmlformats.org/drawingml/2006/main">
+            <a:r>
+              <a:t>- C:/Users/Franc/OneDrive/Documents/Francis/Peltata Project/Time-Series-Modeling-Gen5/runs/research_workbench/literature_grounded/lit_mr_02_1_case_studies_20260729/visuals/mr02_source_period_signal_tape.png</a:t>
+            </a:r>
+          </a:p>
+        </p:txBody>
+      </p:sp>
+      <p:sp>
+        <p:nvSpPr>
+          <p:cNvPr id="4" name="Slide Number Placeholder 3"/>
+          <p:cNvSpPr>
+            <a:spLocks xmlns:a="http://schemas.openxmlformats.org/drawingml/2006/main" noGrp="1"/>
+          </p:cNvSpPr>
+          <p:nvPr>
+            <p:ph type="sldNum" idx="5"/>
+          </p:nvPr>
+        </p:nvSpPr>
+        <p:spPr/>
+        <p:txBody>
+          <a:bodyPr xmlns:a="http://schemas.openxmlformats.org/drawingml/2006/main"/>
+          <a:lstStyle xmlns:a="http://schemas.openxmlformats.org/drawingml/2006/main"/>
+          <a:p xmlns:a="http://schemas.openxmlformats.org/drawingml/2006/main"/>
+        </p:txBody>
+      </p:sp>
+    </p:spTree>
+  </p:cSld>
+  <p:clrMapOvr>
+    <a:masterClrMapping xmlns:a="http://schemas.openxmlformats.org/drawingml/2006/main"/>
+  </p:clrMapOvr>
+</p:notes>
+</file>
+
+<file path=ppt/notesSlides/notesSlide33.xml><?xml version="1.0" encoding="utf-8"?>
+<p:notes xmlns:p="http://schemas.openxmlformats.org/presentationml/2006/main">
+  <p:cSld>
+    <p:spTree>
+      <p:nvGrpSpPr>
+        <p:cNvPr id="1" name=""/>
+        <p:cNvGrpSpPr/>
+        <p:nvPr/>
+      </p:nvGrpSpPr>
+      <p:grpSpPr>
+        <a:xfrm xmlns:a="http://schemas.openxmlformats.org/drawingml/2006/main"/>
+      </p:grpSpPr>
+      <p:sp>
+        <p:nvSpPr>
+          <p:cNvPr id="2" name="Slide Image Placeholder 1"/>
+          <p:cNvSpPr>
+            <a:spLocks xmlns:a="http://schemas.openxmlformats.org/drawingml/2006/main" noGrp="1"/>
+          </p:cNvSpPr>
+          <p:nvPr>
+            <p:ph type="sldImg" idx="0"/>
+          </p:nvPr>
+        </p:nvSpPr>
+        <p:spPr/>
+      </p:sp>
+      <p:sp>
+        <p:nvSpPr>
+          <p:cNvPr id="3" name="Notes Placeholder 2"/>
+          <p:cNvSpPr>
+            <a:spLocks xmlns:a="http://schemas.openxmlformats.org/drawingml/2006/main" noGrp="1"/>
+          </p:cNvSpPr>
+          <p:nvPr>
+            <p:ph type="body" idx="1"/>
+          </p:nvPr>
+        </p:nvSpPr>
+        <p:spPr/>
+        <p:txBody>
+          <a:bodyPr xmlns:a="http://schemas.openxmlformats.org/drawingml/2006/main"/>
+          <a:lstStyle xmlns:a="http://schemas.openxmlformats.org/drawingml/2006/main"/>
+          <a:p xmlns:a="http://schemas.openxmlformats.org/drawingml/2006/main">
+            <a:r>
+              <a:t>The source-period reproduction and the 2018 case study establish that the formula can produce a coherent trading result in real historical regimes. They do not create a prospective selection rule, do not clear the predeclared eight-gate modern TRAIN contract, and do not authorize retuning.</a:t>
+            </a:r>
+          </a:p>
+          <a:p xmlns:a="http://schemas.openxmlformats.org/drawingml/2006/main">
+            <a:r>
+              <a:t/>
+            </a:r>
+          </a:p>
+          <a:p xmlns:a="http://schemas.openxmlformats.org/drawingml/2006/main">
+            <a:r>
+              <a:t>[Sources]</a:t>
+            </a:r>
+          </a:p>
+          <a:p xmlns:a="http://schemas.openxmlformats.org/drawingml/2006/main">
+            <a:r>
+              <a:t>- C:/Users/Franc/OneDrive/Documents/Francis/Peltata Project/Time-Series-Modeling-Gen5/docs/GEN5_LIT_MR_02_1_CASE_STUDIES.md</a:t>
+            </a:r>
+          </a:p>
+          <a:p xmlns:a="http://schemas.openxmlformats.org/drawingml/2006/main">
+            <a:r>
+              <a:t>- C:/Users/Franc/OneDrive/Documents/Francis/Peltata Project/Time-Series-Modeling-Gen5/runs/research_workbench/literature_grounded/lit_mr_02_1_case_studies_20260729/mr02_case_studies_report.md</a:t>
+            </a:r>
+          </a:p>
+          <a:p xmlns:a="http://schemas.openxmlformats.org/drawingml/2006/main">
+            <a:r>
+              <a:t>- C:/Users/Franc/OneDrive/Documents/Francis/Peltata Project/Time-Series-Modeling-Gen5/runs/research_workbench/literature_grounded/lit_mr_02_1_case_studies_20260729/mr02_case_2018_summary.csv</a:t>
+            </a:r>
+          </a:p>
+          <a:p xmlns:a="http://schemas.openxmlformats.org/drawingml/2006/main">
+            <a:r>
+              <a:t>- C:/Users/Franc/OneDrive/Documents/Francis/Peltata Project/Time-Series-Modeling-Gen5/runs/research_workbench/literature_grounded/lit_mr_02_1_case_studies_20260729/mr02_source_period_comparison.csv</a:t>
+            </a:r>
+          </a:p>
+          <a:p xmlns:a="http://schemas.openxmlformats.org/drawingml/2006/main">
+            <a:r>
+              <a:t>- C:/Users/Franc/OneDrive/Documents/Francis/Peltata Project/Time-Series-Modeling-Gen5/docs/GEN5_LIT_MR_02_1_ADAPTIVE_SPREAD_BOLLINGER_POC_CONTRACT.md</a:t>
             </a:r>
           </a:p>
         </p:txBody>
@@ -2829,7 +3627,7 @@
   </p:cSld>
   <p:clrMap bg1="lt1" tx1="dk1" bg2="lt2" tx2="dk2" accent1="accent1" accent2="accent2" accent3="accent3" accent4="accent4" accent5="accent5" accent6="accent6" hlink="hlink" folHlink="folHlink"/>
   <p:sldLayoutIdLst>
-    <p:sldLayoutId xmlns:r="http://schemas.openxmlformats.org/officeDocument/2006/relationships" id="2147483649" r:id="R28a5830d6cdd4a2e"/>
+    <p:sldLayoutId xmlns:r="http://schemas.openxmlformats.org/officeDocument/2006/relationships" id="2147483649" r:id="Ra1a0374a32c04fa0"/>
   </p:sldLayoutIdLst>
   <p:txStyles>
     <p:titleStyle>
@@ -4241,7 +5039,7 @@
           <p:nvPr/>
         </p:nvPicPr>
         <p:blipFill>
-          <a:blip xmlns:r="http://schemas.openxmlformats.org/officeDocument/2006/relationships" xmlns:a="http://schemas.openxmlformats.org/drawingml/2006/main" r:embed="R1ad7c4cfa58b49e3"/>
+          <a:blip xmlns:r="http://schemas.openxmlformats.org/officeDocument/2006/relationships" xmlns:a="http://schemas.openxmlformats.org/drawingml/2006/main" r:embed="R71dcec5ac9874291"/>
           <a:stretch xmlns:a="http://schemas.openxmlformats.org/drawingml/2006/main"/>
         </p:blipFill>
         <p:spPr>
@@ -4665,7 +5463,7 @@
           <p:nvPr/>
         </p:nvPicPr>
         <p:blipFill>
-          <a:blip xmlns:r="http://schemas.openxmlformats.org/officeDocument/2006/relationships" xmlns:a="http://schemas.openxmlformats.org/drawingml/2006/main" r:embed="Rbd98b92e54b64f9f"/>
+          <a:blip xmlns:r="http://schemas.openxmlformats.org/officeDocument/2006/relationships" xmlns:a="http://schemas.openxmlformats.org/drawingml/2006/main" r:embed="R13899be0952b4bf4"/>
           <a:stretch xmlns:a="http://schemas.openxmlformats.org/drawingml/2006/main"/>
         </p:blipFill>
         <p:spPr>
@@ -5089,7 +5887,7 @@
           <p:nvPr/>
         </p:nvPicPr>
         <p:blipFill>
-          <a:blip xmlns:r="http://schemas.openxmlformats.org/officeDocument/2006/relationships" xmlns:a="http://schemas.openxmlformats.org/drawingml/2006/main" r:embed="Rf6b1d87a221f4302"/>
+          <a:blip xmlns:r="http://schemas.openxmlformats.org/officeDocument/2006/relationships" xmlns:a="http://schemas.openxmlformats.org/drawingml/2006/main" r:embed="R9c4e1140669747a5"/>
           <a:stretch xmlns:a="http://schemas.openxmlformats.org/drawingml/2006/main"/>
         </p:blipFill>
         <p:spPr>
@@ -5513,7 +6311,7 @@
           <p:nvPr/>
         </p:nvPicPr>
         <p:blipFill>
-          <a:blip xmlns:r="http://schemas.openxmlformats.org/officeDocument/2006/relationships" xmlns:a="http://schemas.openxmlformats.org/drawingml/2006/main" r:embed="R53b7e79685264104"/>
+          <a:blip xmlns:r="http://schemas.openxmlformats.org/officeDocument/2006/relationships" xmlns:a="http://schemas.openxmlformats.org/drawingml/2006/main" r:embed="R45bfa71339624c40"/>
           <a:stretch xmlns:a="http://schemas.openxmlformats.org/drawingml/2006/main"/>
         </p:blipFill>
         <p:spPr>
@@ -5731,7 +6529,7 @@
           <p:nvPr/>
         </p:nvPicPr>
         <p:blipFill>
-          <a:blip xmlns:r="http://schemas.openxmlformats.org/officeDocument/2006/relationships" xmlns:a="http://schemas.openxmlformats.org/drawingml/2006/main" r:embed="R2edcd91e42f14b3b"/>
+          <a:blip xmlns:r="http://schemas.openxmlformats.org/officeDocument/2006/relationships" xmlns:a="http://schemas.openxmlformats.org/drawingml/2006/main" r:embed="R45e6611d26dc46bf"/>
           <a:stretch xmlns:a="http://schemas.openxmlformats.org/drawingml/2006/main"/>
         </p:blipFill>
         <p:spPr>
@@ -7203,7 +8001,7 @@
           <p:nvPr/>
         </p:nvPicPr>
         <p:blipFill>
-          <a:blip xmlns:r="http://schemas.openxmlformats.org/officeDocument/2006/relationships" xmlns:a="http://schemas.openxmlformats.org/drawingml/2006/main" r:embed="R28383a6e6797451f"/>
+          <a:blip xmlns:r="http://schemas.openxmlformats.org/officeDocument/2006/relationships" xmlns:a="http://schemas.openxmlformats.org/drawingml/2006/main" r:embed="R5c81fbcb86254369"/>
           <a:stretch xmlns:a="http://schemas.openxmlformats.org/drawingml/2006/main"/>
         </p:blipFill>
         <p:spPr>
@@ -7258,7 +8056,7 @@
           <p:nvPr/>
         </p:nvPicPr>
         <p:blipFill>
-          <a:blip xmlns:r="http://schemas.openxmlformats.org/officeDocument/2006/relationships" xmlns:a="http://schemas.openxmlformats.org/drawingml/2006/main" r:embed="R04a79aa9b18e4fe6"/>
+          <a:blip xmlns:r="http://schemas.openxmlformats.org/officeDocument/2006/relationships" xmlns:a="http://schemas.openxmlformats.org/drawingml/2006/main" r:embed="R3d69b906cf634785"/>
           <a:stretch xmlns:a="http://schemas.openxmlformats.org/drawingml/2006/main"/>
         </p:blipFill>
         <p:spPr>
@@ -7475,7 +8273,7 @@
           <p:nvPr/>
         </p:nvPicPr>
         <p:blipFill>
-          <a:blip xmlns:r="http://schemas.openxmlformats.org/officeDocument/2006/relationships" xmlns:a="http://schemas.openxmlformats.org/drawingml/2006/main" r:embed="R9cca271d023748ae"/>
+          <a:blip xmlns:r="http://schemas.openxmlformats.org/officeDocument/2006/relationships" xmlns:a="http://schemas.openxmlformats.org/drawingml/2006/main" r:embed="Ra5af1645de194588"/>
           <a:stretch xmlns:a="http://schemas.openxmlformats.org/drawingml/2006/main"/>
         </p:blipFill>
         <p:spPr>
@@ -7530,7 +8328,7 @@
           <p:nvPr/>
         </p:nvPicPr>
         <p:blipFill>
-          <a:blip xmlns:r="http://schemas.openxmlformats.org/officeDocument/2006/relationships" xmlns:a="http://schemas.openxmlformats.org/drawingml/2006/main" r:embed="R9bee013a90d94eca"/>
+          <a:blip xmlns:r="http://schemas.openxmlformats.org/officeDocument/2006/relationships" xmlns:a="http://schemas.openxmlformats.org/drawingml/2006/main" r:embed="Rcc6a4591a7ca41b5"/>
           <a:stretch xmlns:a="http://schemas.openxmlformats.org/drawingml/2006/main"/>
         </p:blipFill>
         <p:spPr>
@@ -9519,14 +10317,14 @@
       </p:sp>
       <p:pic>
         <p:nvPicPr>
-          <p:cNvPr id="27" name=""/>
+          <p:cNvPr id="29" name=""/>
           <p:cNvPicPr>
             <a:picLocks xmlns:a="http://schemas.openxmlformats.org/drawingml/2006/main" noChangeAspect="1"/>
           </p:cNvPicPr>
           <p:nvPr/>
         </p:nvPicPr>
         <p:blipFill>
-          <a:blip xmlns:r="http://schemas.openxmlformats.org/officeDocument/2006/relationships" xmlns:a="http://schemas.openxmlformats.org/drawingml/2006/main" r:embed="R0802a2ace50e47cd"/>
+          <a:blip xmlns:r="http://schemas.openxmlformats.org/officeDocument/2006/relationships" xmlns:a="http://schemas.openxmlformats.org/drawingml/2006/main" r:embed="R8df3f82992d745ee"/>
           <a:stretch xmlns:a="http://schemas.openxmlformats.org/drawingml/2006/main"/>
         </p:blipFill>
         <p:spPr>
@@ -9574,14 +10372,14 @@
       </p:sp>
       <p:pic>
         <p:nvPicPr>
-          <p:cNvPr id="29" name=""/>
+          <p:cNvPr id="31" name=""/>
           <p:cNvPicPr>
             <a:picLocks xmlns:a="http://schemas.openxmlformats.org/drawingml/2006/main" noChangeAspect="1"/>
           </p:cNvPicPr>
           <p:nvPr/>
         </p:nvPicPr>
         <p:blipFill>
-          <a:blip xmlns:r="http://schemas.openxmlformats.org/officeDocument/2006/relationships" xmlns:a="http://schemas.openxmlformats.org/drawingml/2006/main" r:embed="Ra121087fd00e459a"/>
+          <a:blip xmlns:r="http://schemas.openxmlformats.org/officeDocument/2006/relationships" xmlns:a="http://schemas.openxmlformats.org/drawingml/2006/main" r:embed="Rac8e83e25b114709"/>
           <a:stretch xmlns:a="http://schemas.openxmlformats.org/drawingml/2006/main"/>
         </p:blipFill>
         <p:spPr>
@@ -9629,14 +10427,14 @@
       </p:sp>
       <p:pic>
         <p:nvPicPr>
-          <p:cNvPr id="31" name=""/>
+          <p:cNvPr id="33" name=""/>
           <p:cNvPicPr>
             <a:picLocks xmlns:a="http://schemas.openxmlformats.org/drawingml/2006/main" noChangeAspect="1"/>
           </p:cNvPicPr>
           <p:nvPr/>
         </p:nvPicPr>
         <p:blipFill>
-          <a:blip xmlns:r="http://schemas.openxmlformats.org/officeDocument/2006/relationships" xmlns:a="http://schemas.openxmlformats.org/drawingml/2006/main" r:embed="R027c94fab89a4285"/>
+          <a:blip xmlns:r="http://schemas.openxmlformats.org/officeDocument/2006/relationships" xmlns:a="http://schemas.openxmlformats.org/drawingml/2006/main" r:embed="R05f294c1ea664919"/>
           <a:stretch xmlns:a="http://schemas.openxmlformats.org/drawingml/2006/main"/>
         </p:blipFill>
         <p:spPr>
@@ -9846,14 +10644,14 @@
       </p:sp>
       <p:pic>
         <p:nvPicPr>
-          <p:cNvPr id="17" name=""/>
+          <p:cNvPr id="19" name=""/>
           <p:cNvPicPr>
             <a:picLocks xmlns:a="http://schemas.openxmlformats.org/drawingml/2006/main" noChangeAspect="1"/>
           </p:cNvPicPr>
           <p:nvPr/>
         </p:nvPicPr>
         <p:blipFill>
-          <a:blip xmlns:r="http://schemas.openxmlformats.org/officeDocument/2006/relationships" xmlns:a="http://schemas.openxmlformats.org/drawingml/2006/main" r:embed="Rf36add23a4e54eba"/>
+          <a:blip xmlns:r="http://schemas.openxmlformats.org/officeDocument/2006/relationships" xmlns:a="http://schemas.openxmlformats.org/drawingml/2006/main" r:embed="Raef4fd53fe314a8b"/>
           <a:stretch xmlns:a="http://schemas.openxmlformats.org/drawingml/2006/main"/>
         </p:blipFill>
         <p:spPr>
@@ -9901,14 +10699,14 @@
       </p:sp>
       <p:pic>
         <p:nvPicPr>
-          <p:cNvPr id="19" name=""/>
+          <p:cNvPr id="21" name=""/>
           <p:cNvPicPr>
             <a:picLocks xmlns:a="http://schemas.openxmlformats.org/drawingml/2006/main" noChangeAspect="1"/>
           </p:cNvPicPr>
           <p:nvPr/>
         </p:nvPicPr>
         <p:blipFill>
-          <a:blip xmlns:r="http://schemas.openxmlformats.org/officeDocument/2006/relationships" xmlns:a="http://schemas.openxmlformats.org/drawingml/2006/main" r:embed="R26ab10a9a5d04009"/>
+          <a:blip xmlns:r="http://schemas.openxmlformats.org/officeDocument/2006/relationships" xmlns:a="http://schemas.openxmlformats.org/drawingml/2006/main" r:embed="R97365f103a734819"/>
           <a:stretch xmlns:a="http://schemas.openxmlformats.org/drawingml/2006/main"/>
         </p:blipFill>
         <p:spPr>
@@ -9956,14 +10754,14 @@
       </p:sp>
       <p:pic>
         <p:nvPicPr>
-          <p:cNvPr id="21" name=""/>
+          <p:cNvPr id="23" name=""/>
           <p:cNvPicPr>
             <a:picLocks xmlns:a="http://schemas.openxmlformats.org/drawingml/2006/main" noChangeAspect="1"/>
           </p:cNvPicPr>
           <p:nvPr/>
         </p:nvPicPr>
         <p:blipFill>
-          <a:blip xmlns:r="http://schemas.openxmlformats.org/officeDocument/2006/relationships" xmlns:a="http://schemas.openxmlformats.org/drawingml/2006/main" r:embed="R937bd660620541d7"/>
+          <a:blip xmlns:r="http://schemas.openxmlformats.org/officeDocument/2006/relationships" xmlns:a="http://schemas.openxmlformats.org/drawingml/2006/main" r:embed="Reaf46b9b65a8475e"/>
           <a:stretch xmlns:a="http://schemas.openxmlformats.org/drawingml/2006/main"/>
         </p:blipFill>
         <p:spPr>
@@ -10527,7 +11325,7 @@
           <p:cNvPr id="4" name="cover-headline">
             <a:extLst xmlns:a="http://schemas.openxmlformats.org/drawingml/2006/main">
               <a:ext uri="{FF2B5EF4-FFF2-40B4-BE49-F238E27FC236}">
-                <a16:creationId xmlns:a16="http://schemas.microsoft.com/office/drawing/2014/main" id="{E9F43BB9-4202-4A42-9916-7A06678333BD}"/>
+                <a16:creationId xmlns:a16="http://schemas.microsoft.com/office/drawing/2014/main" id="{DA6318FA-2F99-4DF9-A744-06350F910925}"/>
               </a:ext>
             </a:extLst>
           </p:cNvPr>
@@ -10563,8 +11361,23 @@
               </a:defRPr>
             </a:pPr>
             <a:r>
-              <a:t>Breadth strengthened the STOP.
-Do not rescue the rule.</a:t>
+              <a:t>2018:</a:t>
+            </a:r>
+          </a:p>
+          <a:p xmlns:a="http://schemas.openxmlformats.org/drawingml/2006/main">
+            <a:pPr algn="l">
+              <a:buNone/>
+              <a:defRPr sz="5700">
+                <a:solidFill>
+                  <a:srgbClr val="000000"/>
+                </a:solidFill>
+                <a:latin typeface="Helvetica Neue"/>
+                <a:ea typeface="Helvetica Neue"/>
+                <a:cs typeface="Helvetica Neue"/>
+              </a:defRPr>
+            </a:pPr>
+            <a:r>
+              <a:t>the mechanism works</a:t>
             </a:r>
           </a:p>
         </p:txBody>
@@ -10574,7 +11387,7 @@
           <p:cNvPr id="2" name="cover-subtitle">
             <a:extLst xmlns:a="http://schemas.openxmlformats.org/drawingml/2006/main">
               <a:ext uri="{FF2B5EF4-FFF2-40B4-BE49-F238E27FC236}">
-                <a16:creationId xmlns:a16="http://schemas.microsoft.com/office/drawing/2014/main" id="{F6F90063-BA30-438B-9FD3-13AA22719785}"/>
+                <a16:creationId xmlns:a16="http://schemas.microsoft.com/office/drawing/2014/main" id="{E169DF7F-9A3A-4AE2-8055-4ED350724D47}"/>
               </a:ext>
             </a:extLst>
           </p:cNvPr>
@@ -10610,7 +11423,7 @@
               </a:defRPr>
             </a:pPr>
             <a:r>
-              <a:t>Keep LIT-MR-02.1 as a reusable hypothesis-testing template and falsification result. Any new window, transform, hedge model, or exit rule must be frozen as a substantive new variant.</a:t>
+              <a:t>The exact frozen USO-GLD rule produced a positive, cost-aware year. This is a retrospective case study—not a reversal of the five-year STOP.</a:t>
             </a:r>
           </a:p>
         </p:txBody>
@@ -10620,7 +11433,7 @@
           <p:cNvPr id="3" name="cover-eyebrow">
             <a:extLst xmlns:a="http://schemas.openxmlformats.org/drawingml/2006/main">
               <a:ext uri="{FF2B5EF4-FFF2-40B4-BE49-F238E27FC236}">
-                <a16:creationId xmlns:a16="http://schemas.microsoft.com/office/drawing/2014/main" id="{45129715-75DE-4D50-B44D-3AFE3EBA3F0E}"/>
+                <a16:creationId xmlns:a16="http://schemas.microsoft.com/office/drawing/2014/main" id="{D2399950-CA2D-41D2-BB2E-E681018A573E}"/>
               </a:ext>
             </a:extLst>
           </p:cNvPr>
@@ -10656,7 +11469,7 @@
               </a:defRPr>
             </a:pPr>
             <a:r>
-              <a:t>DECISION</a:t>
+              <a:t>POSITIVE CONTROL | 2018 WORKING REGIME</a:t>
             </a:r>
           </a:p>
         </p:txBody>
@@ -10664,7 +11477,863 @@
     </p:spTree>
     <p:extLst>
       <p:ext uri="{BB962C8B-B14F-4D97-AF65-F5344CB8AC3E}">
-        <p14:creationId xmlns:p14="http://schemas.microsoft.com/office/powerpoint/2010/main" val="1664240194"/>
+        <p14:creationId xmlns:p14="http://schemas.microsoft.com/office/powerpoint/2010/main" val="2092893396"/>
+      </p:ext>
+    </p:extLst>
+  </p:cSld>
+</p:sld>
+</file>
+
+<file path=ppt/slides/slide26.xml><?xml version="1.0" encoding="utf-8"?>
+<p:sld xmlns:p="http://schemas.openxmlformats.org/presentationml/2006/main">
+  <p:cSld>
+    <p:spTree>
+      <p:nvGrpSpPr>
+        <p:cNvPr id="1" name=""/>
+        <p:cNvGrpSpPr/>
+        <p:nvPr/>
+      </p:nvGrpSpPr>
+      <p:grpSpPr>
+        <a:xfrm xmlns:a="http://schemas.openxmlformats.org/drawingml/2006/main"/>
+      </p:grpSpPr>
+      <p:sp>
+        <p:nvSpPr>
+          <p:cNvPr id="11" name="footer">
+            <a:extLst xmlns:a="http://schemas.openxmlformats.org/drawingml/2006/main">
+              <a:ext uri="{FF2B5EF4-FFF2-40B4-BE49-F238E27FC236}">
+                <a16:creationId xmlns:a16="http://schemas.microsoft.com/office/drawing/2014/main" id="{231B1CDB-9946-498B-901E-0A0C9C772112}"/>
+              </a:ext>
+            </a:extLst>
+          </p:cNvPr>
+          <p:cNvSpPr>
+            <a:spLocks xmlns:a="http://schemas.openxmlformats.org/drawingml/2006/main" noGrp="1"/>
+          </p:cNvSpPr>
+          <p:nvPr/>
+        </p:nvSpPr>
+        <p:spPr>
+          <a:xfrm xmlns:a="http://schemas.openxmlformats.org/drawingml/2006/main">
+            <a:off x="11279315" y="6279261"/>
+            <a:ext cx="518922" cy="241268"/>
+          </a:xfrm>
+          <a:prstGeom xmlns:a="http://schemas.openxmlformats.org/drawingml/2006/main" prst="rect">
+            <a:avLst/>
+          </a:prstGeom>
+        </p:spPr>
+        <p:txBody>
+          <a:bodyPr xmlns:a="http://schemas.openxmlformats.org/drawingml/2006/main" lIns="0" tIns="0" rIns="0" bIns="0" anchor="b"/>
+          <a:lstStyle xmlns:a="http://schemas.openxmlformats.org/drawingml/2006/main"/>
+          <a:p xmlns:a="http://schemas.openxmlformats.org/drawingml/2006/main">
+            <a:pPr algn="r">
+              <a:buNone/>
+              <a:defRPr sz="1000">
+                <a:solidFill>
+                  <a:srgbClr val="000000"/>
+                </a:solidFill>
+                <a:latin typeface="Helvetica Neue"/>
+                <a:ea typeface="Helvetica Neue"/>
+                <a:cs typeface="Helvetica Neue"/>
+              </a:defRPr>
+            </a:pPr>
+            <a:r>
+              <a:t>26</a:t>
+            </a:r>
+          </a:p>
+        </p:txBody>
+      </p:sp>
+      <p:sp>
+        <p:nvSpPr>
+          <p:cNvPr id="2" name="title">
+            <a:extLst xmlns:a="http://schemas.openxmlformats.org/drawingml/2006/main">
+              <a:ext uri="{FF2B5EF4-FFF2-40B4-BE49-F238E27FC236}">
+                <a16:creationId xmlns:a16="http://schemas.microsoft.com/office/drawing/2014/main" id="{EE1FC061-EE2C-48CF-9799-D8537102BA12}"/>
+              </a:ext>
+            </a:extLst>
+          </p:cNvPr>
+          <p:cNvSpPr>
+            <a:spLocks xmlns:a="http://schemas.openxmlformats.org/drawingml/2006/main" noGrp="1"/>
+          </p:cNvSpPr>
+          <p:nvPr/>
+        </p:nvSpPr>
+        <p:spPr>
+          <a:xfrm xmlns:a="http://schemas.openxmlformats.org/drawingml/2006/main">
+            <a:off x="393668" y="344043"/>
+            <a:ext cx="11404568" cy="1047464"/>
+          </a:xfrm>
+          <a:prstGeom xmlns:a="http://schemas.openxmlformats.org/drawingml/2006/main" prst="rect">
+            <a:avLst/>
+          </a:prstGeom>
+        </p:spPr>
+        <p:txBody>
+          <a:bodyPr xmlns:a="http://schemas.openxmlformats.org/drawingml/2006/main" lIns="0" tIns="0" rIns="0" bIns="0" anchor="t">
+            <a:normAutofit fontScale="100000"/>
+          </a:bodyPr>
+          <a:lstStyle xmlns:a="http://schemas.openxmlformats.org/drawingml/2006/main"/>
+          <a:p xmlns:a="http://schemas.openxmlformats.org/drawingml/2006/main">
+            <a:pPr algn="l">
+              <a:buNone/>
+              <a:defRPr sz="2900">
+                <a:solidFill>
+                  <a:srgbClr val="000000"/>
+                </a:solidFill>
+                <a:latin typeface="Helvetica Neue"/>
+                <a:ea typeface="Helvetica Neue"/>
+                <a:cs typeface="Helvetica Neue"/>
+              </a:defRPr>
+            </a:pPr>
+            <a:r>
+              <a:t>2018 produced a coherent, two-sided working example</a:t>
+            </a:r>
+          </a:p>
+        </p:txBody>
+      </p:sp>
+      <p:sp>
+        <p:nvSpPr>
+          <p:cNvPr id="3" name="left-stat-card">
+            <a:extLst xmlns:a="http://schemas.openxmlformats.org/drawingml/2006/main">
+              <a:ext uri="{FF2B5EF4-FFF2-40B4-BE49-F238E27FC236}">
+                <a16:creationId xmlns:a16="http://schemas.microsoft.com/office/drawing/2014/main" id="{EF0AF18E-87A6-431F-8D4F-59EC894570D3}"/>
+              </a:ext>
+            </a:extLst>
+          </p:cNvPr>
+          <p:cNvSpPr>
+            <a:spLocks xmlns:a="http://schemas.openxmlformats.org/drawingml/2006/main" noGrp="1"/>
+          </p:cNvSpPr>
+          <p:nvPr/>
+        </p:nvSpPr>
+        <p:spPr>
+          <a:xfrm xmlns:a="http://schemas.openxmlformats.org/drawingml/2006/main">
+            <a:off x="6272022" y="3360039"/>
+            <a:ext cx="2581942" cy="2656523"/>
+          </a:xfrm>
+          <a:prstGeom xmlns:a="http://schemas.openxmlformats.org/drawingml/2006/main" prst="roundRect">
+            <a:avLst>
+              <a:gd name="adj" fmla="val 2951"/>
+            </a:avLst>
+          </a:prstGeom>
+          <a:solidFill xmlns:a="http://schemas.openxmlformats.org/drawingml/2006/main">
+            <a:srgbClr val="F2F2F2"/>
+          </a:solidFill>
+        </p:spPr>
+      </p:sp>
+      <p:sp>
+        <p:nvSpPr>
+          <p:cNvPr id="4" name="right-stat-card">
+            <a:extLst xmlns:a="http://schemas.openxmlformats.org/drawingml/2006/main">
+              <a:ext uri="{FF2B5EF4-FFF2-40B4-BE49-F238E27FC236}">
+                <a16:creationId xmlns:a16="http://schemas.microsoft.com/office/drawing/2014/main" id="{9C01B021-FDE1-4776-B2EE-ACB76D126DAD}"/>
+              </a:ext>
+            </a:extLst>
+          </p:cNvPr>
+          <p:cNvSpPr>
+            <a:spLocks xmlns:a="http://schemas.openxmlformats.org/drawingml/2006/main" noGrp="1"/>
+          </p:cNvSpPr>
+          <p:nvPr/>
+        </p:nvSpPr>
+        <p:spPr>
+          <a:xfrm xmlns:a="http://schemas.openxmlformats.org/drawingml/2006/main">
+            <a:off x="9224201" y="3360039"/>
+            <a:ext cx="2581942" cy="2656523"/>
+          </a:xfrm>
+          <a:prstGeom xmlns:a="http://schemas.openxmlformats.org/drawingml/2006/main" prst="roundRect">
+            <a:avLst>
+              <a:gd name="adj" fmla="val 2951"/>
+            </a:avLst>
+          </a:prstGeom>
+          <a:solidFill xmlns:a="http://schemas.openxmlformats.org/drawingml/2006/main">
+            <a:srgbClr val="F2F2F2"/>
+          </a:solidFill>
+        </p:spPr>
+      </p:sp>
+      <p:sp>
+        <p:nvSpPr>
+          <p:cNvPr id="5" name="summary">
+            <a:extLst xmlns:a="http://schemas.openxmlformats.org/drawingml/2006/main">
+              <a:ext uri="{FF2B5EF4-FFF2-40B4-BE49-F238E27FC236}">
+                <a16:creationId xmlns:a16="http://schemas.microsoft.com/office/drawing/2014/main" id="{A2F82FC1-3249-4254-ABAA-A2D0E0F95848}"/>
+              </a:ext>
+            </a:extLst>
+          </p:cNvPr>
+          <p:cNvSpPr>
+            <a:spLocks xmlns:a="http://schemas.openxmlformats.org/drawingml/2006/main" noGrp="1"/>
+          </p:cNvSpPr>
+          <p:nvPr/>
+        </p:nvSpPr>
+        <p:spPr>
+          <a:xfrm xmlns:a="http://schemas.openxmlformats.org/drawingml/2006/main">
+            <a:off x="6261068" y="1714500"/>
+            <a:ext cx="5539835" cy="1381125"/>
+          </a:xfrm>
+          <a:prstGeom xmlns:a="http://schemas.openxmlformats.org/drawingml/2006/main" prst="rect">
+            <a:avLst/>
+          </a:prstGeom>
+        </p:spPr>
+        <p:txBody>
+          <a:bodyPr xmlns:a="http://schemas.openxmlformats.org/drawingml/2006/main" lIns="0" tIns="0" rIns="0" bIns="0" anchor="t">
+            <a:normAutofit fontScale="100000"/>
+          </a:bodyPr>
+          <a:lstStyle xmlns:a="http://schemas.openxmlformats.org/drawingml/2006/main"/>
+          <a:p xmlns:a="http://schemas.openxmlformats.org/drawingml/2006/main">
+            <a:pPr algn="l">
+              <a:buNone/>
+              <a:defRPr sz="1800">
+                <a:solidFill>
+                  <a:srgbClr val="000000"/>
+                </a:solidFill>
+                <a:latin typeface="Helvetica Neue"/>
+                <a:ea typeface="Helvetica Neue"/>
+                <a:cs typeface="Helvetica Neue"/>
+              </a:defRPr>
+            </a:pPr>
+            <a:r>
+              <a:t>The year finished positive after next-open execution and adaptive-hedge turnover costs. Both long- and short-spread trades contributed.</a:t>
+            </a:r>
+          </a:p>
+        </p:txBody>
+      </p:sp>
+      <p:sp>
+        <p:nvSpPr>
+          <p:cNvPr id="6" name="left-stat">
+            <a:extLst xmlns:a="http://schemas.openxmlformats.org/drawingml/2006/main">
+              <a:ext uri="{FF2B5EF4-FFF2-40B4-BE49-F238E27FC236}">
+                <a16:creationId xmlns:a16="http://schemas.microsoft.com/office/drawing/2014/main" id="{06B274F5-6F7E-4432-B0F1-4874DA3CABBF}"/>
+              </a:ext>
+            </a:extLst>
+          </p:cNvPr>
+          <p:cNvSpPr>
+            <a:spLocks xmlns:a="http://schemas.openxmlformats.org/drawingml/2006/main" noGrp="1"/>
+          </p:cNvSpPr>
+          <p:nvPr/>
+        </p:nvSpPr>
+        <p:spPr>
+          <a:xfrm xmlns:a="http://schemas.openxmlformats.org/drawingml/2006/main">
+            <a:off x="6509385" y="3579971"/>
+            <a:ext cx="2133314" cy="1155859"/>
+          </a:xfrm>
+          <a:prstGeom xmlns:a="http://schemas.openxmlformats.org/drawingml/2006/main" prst="rect">
+            <a:avLst/>
+          </a:prstGeom>
+        </p:spPr>
+        <p:txBody>
+          <a:bodyPr xmlns:a="http://schemas.openxmlformats.org/drawingml/2006/main" lIns="0" tIns="0" rIns="0" bIns="0" anchor="b">
+            <a:normAutofit fontScale="100000"/>
+          </a:bodyPr>
+          <a:lstStyle xmlns:a="http://schemas.openxmlformats.org/drawingml/2006/main"/>
+          <a:p xmlns:a="http://schemas.openxmlformats.org/drawingml/2006/main">
+            <a:pPr algn="l">
+              <a:buNone/>
+              <a:defRPr sz="2700">
+                <a:solidFill>
+                  <a:srgbClr val="B42318"/>
+                </a:solidFill>
+                <a:latin typeface="Helvetica Neue"/>
+                <a:ea typeface="Helvetica Neue"/>
+                <a:cs typeface="Helvetica Neue"/>
+              </a:defRPr>
+            </a:pPr>
+            <a:r>
+              <a:t>+4.82%</a:t>
+            </a:r>
+          </a:p>
+        </p:txBody>
+      </p:sp>
+      <p:sp>
+        <p:nvSpPr>
+          <p:cNvPr id="7" name="left-stat-label">
+            <a:extLst xmlns:a="http://schemas.openxmlformats.org/drawingml/2006/main">
+              <a:ext uri="{FF2B5EF4-FFF2-40B4-BE49-F238E27FC236}">
+                <a16:creationId xmlns:a16="http://schemas.microsoft.com/office/drawing/2014/main" id="{99D2BB32-1C11-4B29-AF23-ED9F32D0BCEB}"/>
+              </a:ext>
+            </a:extLst>
+          </p:cNvPr>
+          <p:cNvSpPr>
+            <a:spLocks xmlns:a="http://schemas.openxmlformats.org/drawingml/2006/main" noGrp="1"/>
+          </p:cNvSpPr>
+          <p:nvPr/>
+        </p:nvSpPr>
+        <p:spPr>
+          <a:xfrm xmlns:a="http://schemas.openxmlformats.org/drawingml/2006/main">
+            <a:off x="6575965" y="4953000"/>
+            <a:ext cx="2066735" cy="762000"/>
+          </a:xfrm>
+          <a:prstGeom xmlns:a="http://schemas.openxmlformats.org/drawingml/2006/main" prst="rect">
+            <a:avLst/>
+          </a:prstGeom>
+        </p:spPr>
+        <p:txBody>
+          <a:bodyPr xmlns:a="http://schemas.openxmlformats.org/drawingml/2006/main" lIns="0" tIns="0" rIns="0" bIns="0">
+            <a:normAutofit fontScale="100000"/>
+          </a:bodyPr>
+          <a:lstStyle xmlns:a="http://schemas.openxmlformats.org/drawingml/2006/main"/>
+          <a:p xmlns:a="http://schemas.openxmlformats.org/drawingml/2006/main">
+            <a:pPr algn="l">
+              <a:buNone/>
+              <a:defRPr sz="1500">
+                <a:solidFill>
+                  <a:srgbClr val="000000"/>
+                </a:solidFill>
+                <a:latin typeface="Helvetica Neue"/>
+                <a:ea typeface="Helvetica Neue"/>
+                <a:cs typeface="Helvetica Neue"/>
+              </a:defRPr>
+            </a:pPr>
+            <a:r>
+              <a:t>Primary-cost</a:t>
+            </a:r>
+          </a:p>
+          <a:p xmlns:a="http://schemas.openxmlformats.org/drawingml/2006/main">
+            <a:pPr algn="l">
+              <a:buNone/>
+              <a:defRPr sz="1500">
+                <a:solidFill>
+                  <a:srgbClr val="000000"/>
+                </a:solidFill>
+                <a:latin typeface="Helvetica Neue"/>
+                <a:ea typeface="Helvetica Neue"/>
+                <a:cs typeface="Helvetica Neue"/>
+              </a:defRPr>
+            </a:pPr>
+            <a:r>
+              <a:t>calendar return</a:t>
+            </a:r>
+          </a:p>
+        </p:txBody>
+      </p:sp>
+      <p:sp>
+        <p:nvSpPr>
+          <p:cNvPr id="8" name="right-stat">
+            <a:extLst xmlns:a="http://schemas.openxmlformats.org/drawingml/2006/main">
+              <a:ext uri="{FF2B5EF4-FFF2-40B4-BE49-F238E27FC236}">
+                <a16:creationId xmlns:a16="http://schemas.microsoft.com/office/drawing/2014/main" id="{2EAFD608-776D-46A1-95EA-79AF4E6F5599}"/>
+              </a:ext>
+            </a:extLst>
+          </p:cNvPr>
+          <p:cNvSpPr>
+            <a:spLocks xmlns:a="http://schemas.openxmlformats.org/drawingml/2006/main" noGrp="1"/>
+          </p:cNvSpPr>
+          <p:nvPr/>
+        </p:nvSpPr>
+        <p:spPr>
+          <a:xfrm xmlns:a="http://schemas.openxmlformats.org/drawingml/2006/main">
+            <a:off x="9461564" y="3579971"/>
+            <a:ext cx="2133314" cy="1155859"/>
+          </a:xfrm>
+          <a:prstGeom xmlns:a="http://schemas.openxmlformats.org/drawingml/2006/main" prst="rect">
+            <a:avLst/>
+          </a:prstGeom>
+        </p:spPr>
+        <p:txBody>
+          <a:bodyPr xmlns:a="http://schemas.openxmlformats.org/drawingml/2006/main" lIns="0" tIns="0" rIns="0" bIns="0" anchor="b">
+            <a:normAutofit fontScale="100000"/>
+          </a:bodyPr>
+          <a:lstStyle xmlns:a="http://schemas.openxmlformats.org/drawingml/2006/main"/>
+          <a:p xmlns:a="http://schemas.openxmlformats.org/drawingml/2006/main">
+            <a:pPr algn="l">
+              <a:buNone/>
+              <a:defRPr sz="2700">
+                <a:solidFill>
+                  <a:srgbClr val="B42318"/>
+                </a:solidFill>
+                <a:latin typeface="Helvetica Neue"/>
+                <a:ea typeface="Helvetica Neue"/>
+                <a:cs typeface="Helvetica Neue"/>
+              </a:defRPr>
+            </a:pPr>
+            <a:r>
+              <a:t>69.2%</a:t>
+            </a:r>
+          </a:p>
+        </p:txBody>
+      </p:sp>
+      <p:sp>
+        <p:nvSpPr>
+          <p:cNvPr id="9" name="right-stat-label">
+            <a:extLst xmlns:a="http://schemas.openxmlformats.org/drawingml/2006/main">
+              <a:ext uri="{FF2B5EF4-FFF2-40B4-BE49-F238E27FC236}">
+                <a16:creationId xmlns:a16="http://schemas.microsoft.com/office/drawing/2014/main" id="{691BF8AE-236E-4677-8EAF-3CF0D5A20DB6}"/>
+              </a:ext>
+            </a:extLst>
+          </p:cNvPr>
+          <p:cNvSpPr>
+            <a:spLocks xmlns:a="http://schemas.openxmlformats.org/drawingml/2006/main" noGrp="1"/>
+          </p:cNvSpPr>
+          <p:nvPr/>
+        </p:nvSpPr>
+        <p:spPr>
+          <a:xfrm xmlns:a="http://schemas.openxmlformats.org/drawingml/2006/main">
+            <a:off x="9528143" y="4953000"/>
+            <a:ext cx="2066735" cy="762000"/>
+          </a:xfrm>
+          <a:prstGeom xmlns:a="http://schemas.openxmlformats.org/drawingml/2006/main" prst="rect">
+            <a:avLst/>
+          </a:prstGeom>
+        </p:spPr>
+        <p:txBody>
+          <a:bodyPr xmlns:a="http://schemas.openxmlformats.org/drawingml/2006/main" lIns="0" tIns="0" rIns="0" bIns="0">
+            <a:normAutofit fontScale="100000"/>
+          </a:bodyPr>
+          <a:lstStyle xmlns:a="http://schemas.openxmlformats.org/drawingml/2006/main"/>
+          <a:p xmlns:a="http://schemas.openxmlformats.org/drawingml/2006/main">
+            <a:pPr algn="l">
+              <a:buNone/>
+              <a:defRPr sz="1500">
+                <a:solidFill>
+                  <a:srgbClr val="000000"/>
+                </a:solidFill>
+                <a:latin typeface="Helvetica Neue"/>
+                <a:ea typeface="Helvetica Neue"/>
+                <a:cs typeface="Helvetica Neue"/>
+              </a:defRPr>
+            </a:pPr>
+            <a:r>
+              <a:t>Trade hit rate</a:t>
+            </a:r>
+          </a:p>
+          <a:p xmlns:a="http://schemas.openxmlformats.org/drawingml/2006/main">
+            <a:pPr algn="l">
+              <a:buNone/>
+              <a:defRPr sz="1500">
+                <a:solidFill>
+                  <a:srgbClr val="000000"/>
+                </a:solidFill>
+                <a:latin typeface="Helvetica Neue"/>
+                <a:ea typeface="Helvetica Neue"/>
+                <a:cs typeface="Helvetica Neue"/>
+              </a:defRPr>
+            </a:pPr>
+            <a:r>
+              <a:t>9 wins / 13 trades</a:t>
+            </a:r>
+          </a:p>
+        </p:txBody>
+      </p:sp>
+      <p:pic>
+        <p:nvPicPr>
+          <p:cNvPr id="22" name=""/>
+          <p:cNvPicPr>
+            <a:picLocks xmlns:a="http://schemas.openxmlformats.org/drawingml/2006/main" noChangeAspect="1"/>
+          </p:cNvPicPr>
+          <p:nvPr/>
+        </p:nvPicPr>
+        <p:blipFill>
+          <a:blip xmlns:r="http://schemas.openxmlformats.org/officeDocument/2006/relationships" xmlns:a="http://schemas.openxmlformats.org/drawingml/2006/main" r:embed="Rc81b5756c1a44421"/>
+          <a:stretch xmlns:a="http://schemas.openxmlformats.org/drawingml/2006/main"/>
+        </p:blipFill>
+        <p:spPr>
+          <a:xfrm xmlns:a="http://schemas.openxmlformats.org/drawingml/2006/main">
+            <a:off x="781159" y="2378774"/>
+            <a:ext cx="4743613" cy="2767108"/>
+          </a:xfrm>
+          <a:prstGeom xmlns:a="http://schemas.openxmlformats.org/drawingml/2006/main" prst="rect">
+            <a:avLst/>
+          </a:prstGeom>
+        </p:spPr>
+      </p:pic>
+    </p:spTree>
+    <p:extLst>
+      <p:ext uri="{BB962C8B-B14F-4D97-AF65-F5344CB8AC3E}">
+        <p14:creationId xmlns:p14="http://schemas.microsoft.com/office/powerpoint/2010/main" val="91287502"/>
+      </p:ext>
+    </p:extLst>
+  </p:cSld>
+</p:sld>
+</file>
+
+<file path=ppt/slides/slide27.xml><?xml version="1.0" encoding="utf-8"?>
+<p:sld xmlns:p="http://schemas.openxmlformats.org/presentationml/2006/main">
+  <p:cSld>
+    <p:spTree>
+      <p:nvGrpSpPr>
+        <p:cNvPr id="1" name=""/>
+        <p:cNvGrpSpPr/>
+        <p:nvPr/>
+      </p:nvGrpSpPr>
+      <p:grpSpPr>
+        <a:xfrm xmlns:a="http://schemas.openxmlformats.org/drawingml/2006/main"/>
+      </p:grpSpPr>
+      <p:sp>
+        <p:nvSpPr>
+          <p:cNvPr id="6" name="footer">
+            <a:extLst xmlns:a="http://schemas.openxmlformats.org/drawingml/2006/main">
+              <a:ext uri="{FF2B5EF4-FFF2-40B4-BE49-F238E27FC236}">
+                <a16:creationId xmlns:a16="http://schemas.microsoft.com/office/drawing/2014/main" id="{5D1F4916-B18D-4F3F-8812-75A699D9A639}"/>
+              </a:ext>
+            </a:extLst>
+          </p:cNvPr>
+          <p:cNvSpPr>
+            <a:spLocks xmlns:a="http://schemas.openxmlformats.org/drawingml/2006/main" noGrp="1"/>
+          </p:cNvSpPr>
+          <p:nvPr/>
+        </p:nvSpPr>
+        <p:spPr>
+          <a:xfrm xmlns:a="http://schemas.openxmlformats.org/drawingml/2006/main">
+            <a:off x="11279315" y="6279261"/>
+            <a:ext cx="518922" cy="241268"/>
+          </a:xfrm>
+          <a:prstGeom xmlns:a="http://schemas.openxmlformats.org/drawingml/2006/main" prst="rect">
+            <a:avLst/>
+          </a:prstGeom>
+        </p:spPr>
+        <p:txBody>
+          <a:bodyPr xmlns:a="http://schemas.openxmlformats.org/drawingml/2006/main" lIns="0" tIns="0" rIns="0" bIns="0" anchor="b"/>
+          <a:lstStyle xmlns:a="http://schemas.openxmlformats.org/drawingml/2006/main"/>
+          <a:p xmlns:a="http://schemas.openxmlformats.org/drawingml/2006/main">
+            <a:pPr algn="r">
+              <a:buNone/>
+              <a:defRPr sz="1000">
+                <a:solidFill>
+                  <a:srgbClr val="000000"/>
+                </a:solidFill>
+                <a:latin typeface="Helvetica Neue"/>
+                <a:ea typeface="Helvetica Neue"/>
+                <a:cs typeface="Helvetica Neue"/>
+              </a:defRPr>
+            </a:pPr>
+            <a:r>
+              <a:t>27</a:t>
+            </a:r>
+          </a:p>
+        </p:txBody>
+      </p:sp>
+      <p:sp>
+        <p:nvSpPr>
+          <p:cNvPr id="2" name="title">
+            <a:extLst xmlns:a="http://schemas.openxmlformats.org/drawingml/2006/main">
+              <a:ext uri="{FF2B5EF4-FFF2-40B4-BE49-F238E27FC236}">
+                <a16:creationId xmlns:a16="http://schemas.microsoft.com/office/drawing/2014/main" id="{ECB77D9D-0CB0-4878-9A4A-2687A311CD30}"/>
+              </a:ext>
+            </a:extLst>
+          </p:cNvPr>
+          <p:cNvSpPr>
+            <a:spLocks xmlns:a="http://schemas.openxmlformats.org/drawingml/2006/main" noGrp="1"/>
+          </p:cNvSpPr>
+          <p:nvPr/>
+        </p:nvSpPr>
+        <p:spPr>
+          <a:xfrm xmlns:a="http://schemas.openxmlformats.org/drawingml/2006/main">
+            <a:off x="393668" y="295275"/>
+            <a:ext cx="11404568" cy="876300"/>
+          </a:xfrm>
+          <a:prstGeom xmlns:a="http://schemas.openxmlformats.org/drawingml/2006/main" prst="rect">
+            <a:avLst/>
+          </a:prstGeom>
+        </p:spPr>
+        <p:txBody>
+          <a:bodyPr xmlns:a="http://schemas.openxmlformats.org/drawingml/2006/main" lIns="0" tIns="0" rIns="0" bIns="0" anchor="t">
+            <a:normAutofit fontScale="100000"/>
+          </a:bodyPr>
+          <a:lstStyle xmlns:a="http://schemas.openxmlformats.org/drawingml/2006/main"/>
+          <a:p xmlns:a="http://schemas.openxmlformats.org/drawingml/2006/main">
+            <a:pPr algn="l">
+              <a:buNone/>
+              <a:defRPr sz="2900">
+                <a:solidFill>
+                  <a:srgbClr val="000000"/>
+                </a:solidFill>
+                <a:latin typeface="Helvetica Neue"/>
+                <a:ea typeface="Helvetica Neue"/>
+                <a:cs typeface="Helvetica Neue"/>
+              </a:defRPr>
+            </a:pPr>
+            <a:r>
+              <a:t>The signal, spread, and equity path line up in one view</a:t>
+            </a:r>
+          </a:p>
+        </p:txBody>
+      </p:sp>
+      <p:pic>
+        <p:nvPicPr>
+          <p:cNvPr id="10" name=""/>
+          <p:cNvPicPr>
+            <a:picLocks xmlns:a="http://schemas.openxmlformats.org/drawingml/2006/main" noChangeAspect="1"/>
+          </p:cNvPicPr>
+          <p:nvPr/>
+        </p:nvPicPr>
+        <p:blipFill>
+          <a:blip xmlns:r="http://schemas.openxmlformats.org/officeDocument/2006/relationships" xmlns:a="http://schemas.openxmlformats.org/drawingml/2006/main" r:embed="Re7e1fa4247bc46c4"/>
+          <a:stretch xmlns:a="http://schemas.openxmlformats.org/drawingml/2006/main"/>
+        </p:blipFill>
+        <p:spPr>
+          <a:xfrm xmlns:a="http://schemas.openxmlformats.org/drawingml/2006/main">
+            <a:off x="1891393" y="1162050"/>
+            <a:ext cx="8409214" cy="4905375"/>
+          </a:xfrm>
+          <a:prstGeom xmlns:a="http://schemas.openxmlformats.org/drawingml/2006/main" prst="rect">
+            <a:avLst/>
+          </a:prstGeom>
+        </p:spPr>
+      </p:pic>
+    </p:spTree>
+    <p:extLst>
+      <p:ext uri="{BB962C8B-B14F-4D97-AF65-F5344CB8AC3E}">
+        <p14:creationId xmlns:p14="http://schemas.microsoft.com/office/powerpoint/2010/main" val="463436756"/>
+      </p:ext>
+    </p:extLst>
+  </p:cSld>
+</p:sld>
+</file>
+
+<file path=ppt/slides/slide28.xml><?xml version="1.0" encoding="utf-8"?>
+<p:sld xmlns:p="http://schemas.openxmlformats.org/presentationml/2006/main">
+  <p:cSld>
+    <p:spTree>
+      <p:nvGrpSpPr>
+        <p:cNvPr id="1" name=""/>
+        <p:cNvGrpSpPr/>
+        <p:nvPr/>
+      </p:nvGrpSpPr>
+      <p:grpSpPr>
+        <a:xfrm xmlns:a="http://schemas.openxmlformats.org/drawingml/2006/main"/>
+      </p:grpSpPr>
+      <p:sp>
+        <p:nvSpPr>
+          <p:cNvPr id="6" name="footer">
+            <a:extLst xmlns:a="http://schemas.openxmlformats.org/drawingml/2006/main">
+              <a:ext uri="{FF2B5EF4-FFF2-40B4-BE49-F238E27FC236}">
+                <a16:creationId xmlns:a16="http://schemas.microsoft.com/office/drawing/2014/main" id="{5D1F4916-B18D-4F3F-8812-75A699D9A639}"/>
+              </a:ext>
+            </a:extLst>
+          </p:cNvPr>
+          <p:cNvSpPr>
+            <a:spLocks xmlns:a="http://schemas.openxmlformats.org/drawingml/2006/main" noGrp="1"/>
+          </p:cNvSpPr>
+          <p:nvPr/>
+        </p:nvSpPr>
+        <p:spPr>
+          <a:xfrm xmlns:a="http://schemas.openxmlformats.org/drawingml/2006/main">
+            <a:off x="11279315" y="6279261"/>
+            <a:ext cx="518922" cy="241268"/>
+          </a:xfrm>
+          <a:prstGeom xmlns:a="http://schemas.openxmlformats.org/drawingml/2006/main" prst="rect">
+            <a:avLst/>
+          </a:prstGeom>
+        </p:spPr>
+        <p:txBody>
+          <a:bodyPr xmlns:a="http://schemas.openxmlformats.org/drawingml/2006/main" lIns="0" tIns="0" rIns="0" bIns="0" anchor="b"/>
+          <a:lstStyle xmlns:a="http://schemas.openxmlformats.org/drawingml/2006/main"/>
+          <a:p xmlns:a="http://schemas.openxmlformats.org/drawingml/2006/main">
+            <a:pPr algn="r">
+              <a:buNone/>
+              <a:defRPr sz="1000">
+                <a:solidFill>
+                  <a:srgbClr val="000000"/>
+                </a:solidFill>
+                <a:latin typeface="Helvetica Neue"/>
+                <a:ea typeface="Helvetica Neue"/>
+                <a:cs typeface="Helvetica Neue"/>
+              </a:defRPr>
+            </a:pPr>
+            <a:r>
+              <a:t>28</a:t>
+            </a:r>
+          </a:p>
+        </p:txBody>
+      </p:sp>
+      <p:sp>
+        <p:nvSpPr>
+          <p:cNvPr id="2" name="title">
+            <a:extLst xmlns:a="http://schemas.openxmlformats.org/drawingml/2006/main">
+              <a:ext uri="{FF2B5EF4-FFF2-40B4-BE49-F238E27FC236}">
+                <a16:creationId xmlns:a16="http://schemas.microsoft.com/office/drawing/2014/main" id="{ECB77D9D-0CB0-4878-9A4A-2687A311CD30}"/>
+              </a:ext>
+            </a:extLst>
+          </p:cNvPr>
+          <p:cNvSpPr>
+            <a:spLocks xmlns:a="http://schemas.openxmlformats.org/drawingml/2006/main" noGrp="1"/>
+          </p:cNvSpPr>
+          <p:nvPr/>
+        </p:nvSpPr>
+        <p:spPr>
+          <a:xfrm xmlns:a="http://schemas.openxmlformats.org/drawingml/2006/main">
+            <a:off x="393668" y="295275"/>
+            <a:ext cx="11404568" cy="876300"/>
+          </a:xfrm>
+          <a:prstGeom xmlns:a="http://schemas.openxmlformats.org/drawingml/2006/main" prst="rect">
+            <a:avLst/>
+          </a:prstGeom>
+        </p:spPr>
+        <p:txBody>
+          <a:bodyPr xmlns:a="http://schemas.openxmlformats.org/drawingml/2006/main" lIns="0" tIns="0" rIns="0" bIns="0" anchor="t">
+            <a:normAutofit fontScale="100000"/>
+          </a:bodyPr>
+          <a:lstStyle xmlns:a="http://schemas.openxmlformats.org/drawingml/2006/main"/>
+          <a:p xmlns:a="http://schemas.openxmlformats.org/drawingml/2006/main">
+            <a:pPr algn="l">
+              <a:buNone/>
+              <a:defRPr sz="2900">
+                <a:solidFill>
+                  <a:srgbClr val="000000"/>
+                </a:solidFill>
+                <a:latin typeface="Helvetica Neue"/>
+                <a:ea typeface="Helvetica Neue"/>
+                <a:cs typeface="Helvetica Neue"/>
+              </a:defRPr>
+            </a:pPr>
+            <a:r>
+              <a:t>Every 2018 trade is visible—wins, losses, direction, and duration</a:t>
+            </a:r>
+          </a:p>
+        </p:txBody>
+      </p:sp>
+      <p:pic>
+        <p:nvPicPr>
+          <p:cNvPr id="10" name=""/>
+          <p:cNvPicPr>
+            <a:picLocks xmlns:a="http://schemas.openxmlformats.org/drawingml/2006/main" noChangeAspect="1"/>
+          </p:cNvPicPr>
+          <p:nvPr/>
+        </p:nvPicPr>
+        <p:blipFill>
+          <a:blip xmlns:r="http://schemas.openxmlformats.org/officeDocument/2006/relationships" xmlns:a="http://schemas.openxmlformats.org/drawingml/2006/main" r:embed="R760b192826804a0a"/>
+          <a:stretch xmlns:a="http://schemas.openxmlformats.org/drawingml/2006/main"/>
+        </p:blipFill>
+        <p:spPr>
+          <a:xfrm xmlns:a="http://schemas.openxmlformats.org/drawingml/2006/main">
+            <a:off x="1891393" y="1162050"/>
+            <a:ext cx="8409214" cy="4905375"/>
+          </a:xfrm>
+          <a:prstGeom xmlns:a="http://schemas.openxmlformats.org/drawingml/2006/main" prst="rect">
+            <a:avLst/>
+          </a:prstGeom>
+        </p:spPr>
+      </p:pic>
+    </p:spTree>
+    <p:extLst>
+      <p:ext uri="{BB962C8B-B14F-4D97-AF65-F5344CB8AC3E}">
+        <p14:creationId xmlns:p14="http://schemas.microsoft.com/office/powerpoint/2010/main" val="463436756"/>
+      </p:ext>
+    </p:extLst>
+  </p:cSld>
+</p:sld>
+</file>
+
+<file path=ppt/slides/slide29.xml><?xml version="1.0" encoding="utf-8"?>
+<p:sld xmlns:p="http://schemas.openxmlformats.org/presentationml/2006/main">
+  <p:cSld>
+    <p:spTree>
+      <p:nvGrpSpPr>
+        <p:cNvPr id="1" name=""/>
+        <p:cNvGrpSpPr/>
+        <p:nvPr/>
+      </p:nvGrpSpPr>
+      <p:grpSpPr>
+        <a:xfrm xmlns:a="http://schemas.openxmlformats.org/drawingml/2006/main"/>
+      </p:grpSpPr>
+      <p:sp>
+        <p:nvSpPr>
+          <p:cNvPr id="6" name="footer">
+            <a:extLst xmlns:a="http://schemas.openxmlformats.org/drawingml/2006/main">
+              <a:ext uri="{FF2B5EF4-FFF2-40B4-BE49-F238E27FC236}">
+                <a16:creationId xmlns:a16="http://schemas.microsoft.com/office/drawing/2014/main" id="{5D1F4916-B18D-4F3F-8812-75A699D9A639}"/>
+              </a:ext>
+            </a:extLst>
+          </p:cNvPr>
+          <p:cNvSpPr>
+            <a:spLocks xmlns:a="http://schemas.openxmlformats.org/drawingml/2006/main" noGrp="1"/>
+          </p:cNvSpPr>
+          <p:nvPr/>
+        </p:nvSpPr>
+        <p:spPr>
+          <a:xfrm xmlns:a="http://schemas.openxmlformats.org/drawingml/2006/main">
+            <a:off x="11279315" y="6279261"/>
+            <a:ext cx="518922" cy="241268"/>
+          </a:xfrm>
+          <a:prstGeom xmlns:a="http://schemas.openxmlformats.org/drawingml/2006/main" prst="rect">
+            <a:avLst/>
+          </a:prstGeom>
+        </p:spPr>
+        <p:txBody>
+          <a:bodyPr xmlns:a="http://schemas.openxmlformats.org/drawingml/2006/main" lIns="0" tIns="0" rIns="0" bIns="0" anchor="b"/>
+          <a:lstStyle xmlns:a="http://schemas.openxmlformats.org/drawingml/2006/main"/>
+          <a:p xmlns:a="http://schemas.openxmlformats.org/drawingml/2006/main">
+            <a:pPr algn="r">
+              <a:buNone/>
+              <a:defRPr sz="1000">
+                <a:solidFill>
+                  <a:srgbClr val="000000"/>
+                </a:solidFill>
+                <a:latin typeface="Helvetica Neue"/>
+                <a:ea typeface="Helvetica Neue"/>
+                <a:cs typeface="Helvetica Neue"/>
+              </a:defRPr>
+            </a:pPr>
+            <a:r>
+              <a:t>29</a:t>
+            </a:r>
+          </a:p>
+        </p:txBody>
+      </p:sp>
+      <p:sp>
+        <p:nvSpPr>
+          <p:cNvPr id="2" name="title">
+            <a:extLst xmlns:a="http://schemas.openxmlformats.org/drawingml/2006/main">
+              <a:ext uri="{FF2B5EF4-FFF2-40B4-BE49-F238E27FC236}">
+                <a16:creationId xmlns:a16="http://schemas.microsoft.com/office/drawing/2014/main" id="{ECB77D9D-0CB0-4878-9A4A-2687A311CD30}"/>
+              </a:ext>
+            </a:extLst>
+          </p:cNvPr>
+          <p:cNvSpPr>
+            <a:spLocks xmlns:a="http://schemas.openxmlformats.org/drawingml/2006/main" noGrp="1"/>
+          </p:cNvSpPr>
+          <p:nvPr/>
+        </p:nvSpPr>
+        <p:spPr>
+          <a:xfrm xmlns:a="http://schemas.openxmlformats.org/drawingml/2006/main">
+            <a:off x="393668" y="295275"/>
+            <a:ext cx="11404568" cy="876300"/>
+          </a:xfrm>
+          <a:prstGeom xmlns:a="http://schemas.openxmlformats.org/drawingml/2006/main" prst="rect">
+            <a:avLst/>
+          </a:prstGeom>
+        </p:spPr>
+        <p:txBody>
+          <a:bodyPr xmlns:a="http://schemas.openxmlformats.org/drawingml/2006/main" lIns="0" tIns="0" rIns="0" bIns="0" anchor="t">
+            <a:normAutofit fontScale="100000"/>
+          </a:bodyPr>
+          <a:lstStyle xmlns:a="http://schemas.openxmlformats.org/drawingml/2006/main"/>
+          <a:p xmlns:a="http://schemas.openxmlformats.org/drawingml/2006/main">
+            <a:pPr algn="l">
+              <a:buNone/>
+              <a:defRPr sz="2900">
+                <a:solidFill>
+                  <a:srgbClr val="000000"/>
+                </a:solidFill>
+                <a:latin typeface="Helvetica Neue"/>
+                <a:ea typeface="Helvetica Neue"/>
+                <a:cs typeface="Helvetica Neue"/>
+              </a:defRPr>
+            </a:pPr>
+            <a:r>
+              <a:t>Costs mattered, yet both directions still produced winners</a:t>
+            </a:r>
+          </a:p>
+        </p:txBody>
+      </p:sp>
+      <p:pic>
+        <p:nvPicPr>
+          <p:cNvPr id="10" name=""/>
+          <p:cNvPicPr>
+            <a:picLocks xmlns:a="http://schemas.openxmlformats.org/drawingml/2006/main" noChangeAspect="1"/>
+          </p:cNvPicPr>
+          <p:nvPr/>
+        </p:nvPicPr>
+        <p:blipFill>
+          <a:blip xmlns:r="http://schemas.openxmlformats.org/officeDocument/2006/relationships" xmlns:a="http://schemas.openxmlformats.org/drawingml/2006/main" r:embed="Recf193e704df4636"/>
+          <a:stretch xmlns:a="http://schemas.openxmlformats.org/drawingml/2006/main"/>
+        </p:blipFill>
+        <p:spPr>
+          <a:xfrm xmlns:a="http://schemas.openxmlformats.org/drawingml/2006/main">
+            <a:off x="1891393" y="1162050"/>
+            <a:ext cx="8409214" cy="4905375"/>
+          </a:xfrm>
+          <a:prstGeom xmlns:a="http://schemas.openxmlformats.org/drawingml/2006/main" prst="rect">
+            <a:avLst/>
+          </a:prstGeom>
+        </p:spPr>
+      </p:pic>
+    </p:spTree>
+    <p:extLst>
+      <p:ext uri="{BB962C8B-B14F-4D97-AF65-F5344CB8AC3E}">
+        <p14:creationId xmlns:p14="http://schemas.microsoft.com/office/powerpoint/2010/main" val="463436756"/>
       </p:ext>
     </p:extLst>
   </p:cSld>
@@ -11189,6 +12858,946 @@
     <p:extLst>
       <p:ext uri="{BB962C8B-B14F-4D97-AF65-F5344CB8AC3E}">
         <p14:creationId xmlns:p14="http://schemas.microsoft.com/office/powerpoint/2010/main" val="2098249639"/>
+      </p:ext>
+    </p:extLst>
+  </p:cSld>
+</p:sld>
+</file>
+
+<file path=ppt/slides/slide30.xml><?xml version="1.0" encoding="utf-8"?>
+<p:sld xmlns:p="http://schemas.openxmlformats.org/presentationml/2006/main">
+  <p:cSld>
+    <p:spTree>
+      <p:nvGrpSpPr>
+        <p:cNvPr id="1" name=""/>
+        <p:cNvGrpSpPr/>
+        <p:nvPr/>
+      </p:nvGrpSpPr>
+      <p:grpSpPr>
+        <a:xfrm xmlns:a="http://schemas.openxmlformats.org/drawingml/2006/main"/>
+      </p:grpSpPr>
+      <p:sp>
+        <p:nvSpPr>
+          <p:cNvPr id="4" name="cover-headline">
+            <a:extLst xmlns:a="http://schemas.openxmlformats.org/drawingml/2006/main">
+              <a:ext uri="{FF2B5EF4-FFF2-40B4-BE49-F238E27FC236}">
+                <a16:creationId xmlns:a16="http://schemas.microsoft.com/office/drawing/2014/main" id="{DA6318FA-2F99-4DF9-A744-06350F910925}"/>
+              </a:ext>
+            </a:extLst>
+          </p:cNvPr>
+          <p:cNvSpPr>
+            <a:spLocks xmlns:a="http://schemas.openxmlformats.org/drawingml/2006/main" noGrp="1"/>
+          </p:cNvSpPr>
+          <p:nvPr/>
+        </p:nvSpPr>
+        <p:spPr>
+          <a:xfrm xmlns:a="http://schemas.openxmlformats.org/drawingml/2006/main">
+            <a:off x="393668" y="1738789"/>
+            <a:ext cx="10287000" cy="2491454"/>
+          </a:xfrm>
+          <a:prstGeom xmlns:a="http://schemas.openxmlformats.org/drawingml/2006/main" prst="rect">
+            <a:avLst/>
+          </a:prstGeom>
+        </p:spPr>
+        <p:txBody>
+          <a:bodyPr xmlns:a="http://schemas.openxmlformats.org/drawingml/2006/main" lIns="0" tIns="0" rIns="0" bIns="0" anchor="b">
+            <a:normAutofit fontScale="100000"/>
+          </a:bodyPr>
+          <a:lstStyle xmlns:a="http://schemas.openxmlformats.org/drawingml/2006/main"/>
+          <a:p xmlns:a="http://schemas.openxmlformats.org/drawingml/2006/main">
+            <a:pPr algn="l">
+              <a:buNone/>
+              <a:defRPr sz="5700">
+                <a:solidFill>
+                  <a:srgbClr val="000000"/>
+                </a:solidFill>
+                <a:latin typeface="Helvetica Neue"/>
+                <a:ea typeface="Helvetica Neue"/>
+                <a:cs typeface="Helvetica Neue"/>
+              </a:defRPr>
+            </a:pPr>
+            <a:r>
+              <a:t>2006–2012:</a:t>
+            </a:r>
+          </a:p>
+          <a:p xmlns:a="http://schemas.openxmlformats.org/drawingml/2006/main">
+            <a:pPr algn="l">
+              <a:buNone/>
+              <a:defRPr sz="5700">
+                <a:solidFill>
+                  <a:srgbClr val="000000"/>
+                </a:solidFill>
+                <a:latin typeface="Helvetica Neue"/>
+                <a:ea typeface="Helvetica Neue"/>
+                <a:cs typeface="Helvetica Neue"/>
+              </a:defRPr>
+            </a:pPr>
+            <a:r>
+              <a:t>the published regime</a:t>
+            </a:r>
+          </a:p>
+        </p:txBody>
+      </p:sp>
+      <p:sp>
+        <p:nvSpPr>
+          <p:cNvPr id="2" name="cover-subtitle">
+            <a:extLst xmlns:a="http://schemas.openxmlformats.org/drawingml/2006/main">
+              <a:ext uri="{FF2B5EF4-FFF2-40B4-BE49-F238E27FC236}">
+                <a16:creationId xmlns:a16="http://schemas.microsoft.com/office/drawing/2014/main" id="{E169DF7F-9A3A-4AE2-8055-4ED350724D47}"/>
+              </a:ext>
+            </a:extLst>
+          </p:cNvPr>
+          <p:cNvSpPr>
+            <a:spLocks xmlns:a="http://schemas.openxmlformats.org/drawingml/2006/main" noGrp="1"/>
+          </p:cNvSpPr>
+          <p:nvPr/>
+        </p:nvSpPr>
+        <p:spPr>
+          <a:xfrm xmlns:a="http://schemas.openxmlformats.org/drawingml/2006/main">
+            <a:off x="393668" y="4762500"/>
+            <a:ext cx="8001000" cy="1238250"/>
+          </a:xfrm>
+          <a:prstGeom xmlns:a="http://schemas.openxmlformats.org/drawingml/2006/main" prst="rect">
+            <a:avLst/>
+          </a:prstGeom>
+        </p:spPr>
+        <p:txBody>
+          <a:bodyPr xmlns:a="http://schemas.openxmlformats.org/drawingml/2006/main" lIns="0" tIns="0" rIns="0" bIns="0">
+            <a:normAutofit fontScale="100000"/>
+          </a:bodyPr>
+          <a:lstStyle xmlns:a="http://schemas.openxmlformats.org/drawingml/2006/main"/>
+          <a:p xmlns:a="http://schemas.openxmlformats.org/drawingml/2006/main">
+            <a:pPr algn="l">
+              <a:buNone/>
+              <a:defRPr sz="2250">
+                <a:solidFill>
+                  <a:srgbClr val="000000"/>
+                </a:solidFill>
+                <a:latin typeface="Helvetica Neue"/>
+                <a:ea typeface="Helvetica Neue"/>
+                <a:cs typeface="Helvetica Neue"/>
+              </a:defRPr>
+            </a:pPr>
+            <a:r>
+              <a:t>Yahoo adjusted daily reference bars reproduce the source-era behavior. We show the book-style account and the stricter Gen5 translation separately.</a:t>
+            </a:r>
+          </a:p>
+        </p:txBody>
+      </p:sp>
+      <p:sp>
+        <p:nvSpPr>
+          <p:cNvPr id="3" name="cover-eyebrow">
+            <a:extLst xmlns:a="http://schemas.openxmlformats.org/drawingml/2006/main">
+              <a:ext uri="{FF2B5EF4-FFF2-40B4-BE49-F238E27FC236}">
+                <a16:creationId xmlns:a16="http://schemas.microsoft.com/office/drawing/2014/main" id="{D2399950-CA2D-41D2-BB2E-E681018A573E}"/>
+              </a:ext>
+            </a:extLst>
+          </p:cNvPr>
+          <p:cNvSpPr>
+            <a:spLocks xmlns:a="http://schemas.openxmlformats.org/drawingml/2006/main" noGrp="1"/>
+          </p:cNvSpPr>
+          <p:nvPr/>
+        </p:nvSpPr>
+        <p:spPr>
+          <a:xfrm xmlns:a="http://schemas.openxmlformats.org/drawingml/2006/main">
+            <a:off x="393668" y="392240"/>
+            <a:ext cx="7239000" cy="649129"/>
+          </a:xfrm>
+          <a:prstGeom xmlns:a="http://schemas.openxmlformats.org/drawingml/2006/main" prst="rect">
+            <a:avLst/>
+          </a:prstGeom>
+        </p:spPr>
+        <p:txBody>
+          <a:bodyPr xmlns:a="http://schemas.openxmlformats.org/drawingml/2006/main" lIns="0" tIns="0" rIns="0" bIns="0">
+            <a:normAutofit fontScale="100000"/>
+          </a:bodyPr>
+          <a:lstStyle xmlns:a="http://schemas.openxmlformats.org/drawingml/2006/main"/>
+          <a:p xmlns:a="http://schemas.openxmlformats.org/drawingml/2006/main">
+            <a:pPr algn="l">
+              <a:buNone/>
+              <a:defRPr sz="2250">
+                <a:solidFill>
+                  <a:srgbClr val="000000"/>
+                </a:solidFill>
+                <a:latin typeface="Helvetica Neue"/>
+                <a:ea typeface="Helvetica Neue"/>
+                <a:cs typeface="Helvetica Neue"/>
+              </a:defRPr>
+            </a:pPr>
+            <a:r>
+              <a:t>SOURCE REPRODUCTION | CHAN EXAMPLE 3.2</a:t>
+            </a:r>
+          </a:p>
+        </p:txBody>
+      </p:sp>
+    </p:spTree>
+    <p:extLst>
+      <p:ext uri="{BB962C8B-B14F-4D97-AF65-F5344CB8AC3E}">
+        <p14:creationId xmlns:p14="http://schemas.microsoft.com/office/powerpoint/2010/main" val="2092893396"/>
+      </p:ext>
+    </p:extLst>
+  </p:cSld>
+</p:sld>
+</file>
+
+<file path=ppt/slides/slide31.xml><?xml version="1.0" encoding="utf-8"?>
+<p:sld xmlns:p="http://schemas.openxmlformats.org/presentationml/2006/main">
+  <p:cSld>
+    <p:spTree>
+      <p:nvGrpSpPr>
+        <p:cNvPr id="1" name=""/>
+        <p:cNvGrpSpPr/>
+        <p:nvPr/>
+      </p:nvGrpSpPr>
+      <p:grpSpPr>
+        <a:xfrm xmlns:a="http://schemas.openxmlformats.org/drawingml/2006/main"/>
+      </p:grpSpPr>
+      <p:sp>
+        <p:nvSpPr>
+          <p:cNvPr id="6" name="footer">
+            <a:extLst xmlns:a="http://schemas.openxmlformats.org/drawingml/2006/main">
+              <a:ext uri="{FF2B5EF4-FFF2-40B4-BE49-F238E27FC236}">
+                <a16:creationId xmlns:a16="http://schemas.microsoft.com/office/drawing/2014/main" id="{5D1F4916-B18D-4F3F-8812-75A699D9A639}"/>
+              </a:ext>
+            </a:extLst>
+          </p:cNvPr>
+          <p:cNvSpPr>
+            <a:spLocks xmlns:a="http://schemas.openxmlformats.org/drawingml/2006/main" noGrp="1"/>
+          </p:cNvSpPr>
+          <p:nvPr/>
+        </p:nvSpPr>
+        <p:spPr>
+          <a:xfrm xmlns:a="http://schemas.openxmlformats.org/drawingml/2006/main">
+            <a:off x="11279315" y="6279261"/>
+            <a:ext cx="518922" cy="241268"/>
+          </a:xfrm>
+          <a:prstGeom xmlns:a="http://schemas.openxmlformats.org/drawingml/2006/main" prst="rect">
+            <a:avLst/>
+          </a:prstGeom>
+        </p:spPr>
+        <p:txBody>
+          <a:bodyPr xmlns:a="http://schemas.openxmlformats.org/drawingml/2006/main" lIns="0" tIns="0" rIns="0" bIns="0" anchor="b"/>
+          <a:lstStyle xmlns:a="http://schemas.openxmlformats.org/drawingml/2006/main"/>
+          <a:p xmlns:a="http://schemas.openxmlformats.org/drawingml/2006/main">
+            <a:pPr algn="r">
+              <a:buNone/>
+              <a:defRPr sz="1000">
+                <a:solidFill>
+                  <a:srgbClr val="000000"/>
+                </a:solidFill>
+                <a:latin typeface="Helvetica Neue"/>
+                <a:ea typeface="Helvetica Neue"/>
+                <a:cs typeface="Helvetica Neue"/>
+              </a:defRPr>
+            </a:pPr>
+            <a:r>
+              <a:t>31</a:t>
+            </a:r>
+          </a:p>
+        </p:txBody>
+      </p:sp>
+      <p:sp>
+        <p:nvSpPr>
+          <p:cNvPr id="2" name="title">
+            <a:extLst xmlns:a="http://schemas.openxmlformats.org/drawingml/2006/main">
+              <a:ext uri="{FF2B5EF4-FFF2-40B4-BE49-F238E27FC236}">
+                <a16:creationId xmlns:a16="http://schemas.microsoft.com/office/drawing/2014/main" id="{ECB77D9D-0CB0-4878-9A4A-2687A311CD30}"/>
+              </a:ext>
+            </a:extLst>
+          </p:cNvPr>
+          <p:cNvSpPr>
+            <a:spLocks xmlns:a="http://schemas.openxmlformats.org/drawingml/2006/main" noGrp="1"/>
+          </p:cNvSpPr>
+          <p:nvPr/>
+        </p:nvSpPr>
+        <p:spPr>
+          <a:xfrm xmlns:a="http://schemas.openxmlformats.org/drawingml/2006/main">
+            <a:off x="393668" y="295275"/>
+            <a:ext cx="11404568" cy="876300"/>
+          </a:xfrm>
+          <a:prstGeom xmlns:a="http://schemas.openxmlformats.org/drawingml/2006/main" prst="rect">
+            <a:avLst/>
+          </a:prstGeom>
+        </p:spPr>
+        <p:txBody>
+          <a:bodyPr xmlns:a="http://schemas.openxmlformats.org/drawingml/2006/main" lIns="0" tIns="0" rIns="0" bIns="0" anchor="t">
+            <a:normAutofit fontScale="100000"/>
+          </a:bodyPr>
+          <a:lstStyle xmlns:a="http://schemas.openxmlformats.org/drawingml/2006/main"/>
+          <a:p xmlns:a="http://schemas.openxmlformats.org/drawingml/2006/main">
+            <a:pPr algn="l">
+              <a:buNone/>
+              <a:defRPr sz="2900">
+                <a:solidFill>
+                  <a:srgbClr val="000000"/>
+                </a:solidFill>
+                <a:latin typeface="Helvetica Neue"/>
+                <a:ea typeface="Helvetica Neue"/>
+                <a:cs typeface="Helvetica Neue"/>
+              </a:defRPr>
+            </a:pPr>
+            <a:r>
+              <a:t>The source-period edge survives Gen5 timing and costs</a:t>
+            </a:r>
+          </a:p>
+        </p:txBody>
+      </p:sp>
+      <p:pic>
+        <p:nvPicPr>
+          <p:cNvPr id="10" name=""/>
+          <p:cNvPicPr>
+            <a:picLocks xmlns:a="http://schemas.openxmlformats.org/drawingml/2006/main" noChangeAspect="1"/>
+          </p:cNvPicPr>
+          <p:nvPr/>
+        </p:nvPicPr>
+        <p:blipFill>
+          <a:blip xmlns:r="http://schemas.openxmlformats.org/officeDocument/2006/relationships" xmlns:a="http://schemas.openxmlformats.org/drawingml/2006/main" r:embed="R5b90afa89cdb4fc6"/>
+          <a:stretch xmlns:a="http://schemas.openxmlformats.org/drawingml/2006/main"/>
+        </p:blipFill>
+        <p:spPr>
+          <a:xfrm xmlns:a="http://schemas.openxmlformats.org/drawingml/2006/main">
+            <a:off x="1891393" y="1162050"/>
+            <a:ext cx="8409214" cy="4905375"/>
+          </a:xfrm>
+          <a:prstGeom xmlns:a="http://schemas.openxmlformats.org/drawingml/2006/main" prst="rect">
+            <a:avLst/>
+          </a:prstGeom>
+        </p:spPr>
+      </p:pic>
+    </p:spTree>
+    <p:extLst>
+      <p:ext uri="{BB962C8B-B14F-4D97-AF65-F5344CB8AC3E}">
+        <p14:creationId xmlns:p14="http://schemas.microsoft.com/office/powerpoint/2010/main" val="463436756"/>
+      </p:ext>
+    </p:extLst>
+  </p:cSld>
+</p:sld>
+</file>
+
+<file path=ppt/slides/slide32.xml><?xml version="1.0" encoding="utf-8"?>
+<p:sld xmlns:p="http://schemas.openxmlformats.org/presentationml/2006/main">
+  <p:cSld>
+    <p:spTree>
+      <p:nvGrpSpPr>
+        <p:cNvPr id="1" name=""/>
+        <p:cNvGrpSpPr/>
+        <p:nvPr/>
+      </p:nvGrpSpPr>
+      <p:grpSpPr>
+        <a:xfrm xmlns:a="http://schemas.openxmlformats.org/drawingml/2006/main"/>
+      </p:grpSpPr>
+      <p:sp>
+        <p:nvSpPr>
+          <p:cNvPr id="11" name="footer">
+            <a:extLst xmlns:a="http://schemas.openxmlformats.org/drawingml/2006/main">
+              <a:ext uri="{FF2B5EF4-FFF2-40B4-BE49-F238E27FC236}">
+                <a16:creationId xmlns:a16="http://schemas.microsoft.com/office/drawing/2014/main" id="{231B1CDB-9946-498B-901E-0A0C9C772112}"/>
+              </a:ext>
+            </a:extLst>
+          </p:cNvPr>
+          <p:cNvSpPr>
+            <a:spLocks xmlns:a="http://schemas.openxmlformats.org/drawingml/2006/main" noGrp="1"/>
+          </p:cNvSpPr>
+          <p:nvPr/>
+        </p:nvSpPr>
+        <p:spPr>
+          <a:xfrm xmlns:a="http://schemas.openxmlformats.org/drawingml/2006/main">
+            <a:off x="11279315" y="6279261"/>
+            <a:ext cx="518922" cy="241268"/>
+          </a:xfrm>
+          <a:prstGeom xmlns:a="http://schemas.openxmlformats.org/drawingml/2006/main" prst="rect">
+            <a:avLst/>
+          </a:prstGeom>
+        </p:spPr>
+        <p:txBody>
+          <a:bodyPr xmlns:a="http://schemas.openxmlformats.org/drawingml/2006/main" lIns="0" tIns="0" rIns="0" bIns="0" anchor="b"/>
+          <a:lstStyle xmlns:a="http://schemas.openxmlformats.org/drawingml/2006/main"/>
+          <a:p xmlns:a="http://schemas.openxmlformats.org/drawingml/2006/main">
+            <a:pPr algn="r">
+              <a:buNone/>
+              <a:defRPr sz="1000">
+                <a:solidFill>
+                  <a:srgbClr val="000000"/>
+                </a:solidFill>
+                <a:latin typeface="Helvetica Neue"/>
+                <a:ea typeface="Helvetica Neue"/>
+                <a:cs typeface="Helvetica Neue"/>
+              </a:defRPr>
+            </a:pPr>
+            <a:r>
+              <a:t>32</a:t>
+            </a:r>
+          </a:p>
+        </p:txBody>
+      </p:sp>
+      <p:sp>
+        <p:nvSpPr>
+          <p:cNvPr id="2" name="title">
+            <a:extLst xmlns:a="http://schemas.openxmlformats.org/drawingml/2006/main">
+              <a:ext uri="{FF2B5EF4-FFF2-40B4-BE49-F238E27FC236}">
+                <a16:creationId xmlns:a16="http://schemas.microsoft.com/office/drawing/2014/main" id="{EE1FC061-EE2C-48CF-9799-D8537102BA12}"/>
+              </a:ext>
+            </a:extLst>
+          </p:cNvPr>
+          <p:cNvSpPr>
+            <a:spLocks xmlns:a="http://schemas.openxmlformats.org/drawingml/2006/main" noGrp="1"/>
+          </p:cNvSpPr>
+          <p:nvPr/>
+        </p:nvSpPr>
+        <p:spPr>
+          <a:xfrm xmlns:a="http://schemas.openxmlformats.org/drawingml/2006/main">
+            <a:off x="393668" y="344043"/>
+            <a:ext cx="11404568" cy="1047464"/>
+          </a:xfrm>
+          <a:prstGeom xmlns:a="http://schemas.openxmlformats.org/drawingml/2006/main" prst="rect">
+            <a:avLst/>
+          </a:prstGeom>
+        </p:spPr>
+        <p:txBody>
+          <a:bodyPr xmlns:a="http://schemas.openxmlformats.org/drawingml/2006/main" lIns="0" tIns="0" rIns="0" bIns="0" anchor="t">
+            <a:normAutofit fontScale="100000"/>
+          </a:bodyPr>
+          <a:lstStyle xmlns:a="http://schemas.openxmlformats.org/drawingml/2006/main"/>
+          <a:p xmlns:a="http://schemas.openxmlformats.org/drawingml/2006/main">
+            <a:pPr algn="l">
+              <a:buNone/>
+              <a:defRPr sz="2900">
+                <a:solidFill>
+                  <a:srgbClr val="000000"/>
+                </a:solidFill>
+                <a:latin typeface="Helvetica Neue"/>
+                <a:ea typeface="Helvetica Neue"/>
+                <a:cs typeface="Helvetica Neue"/>
+              </a:defRPr>
+            </a:pPr>
+            <a:r>
+              <a:t>The reproduction lands near Chan’s published headline</a:t>
+            </a:r>
+          </a:p>
+        </p:txBody>
+      </p:sp>
+      <p:sp>
+        <p:nvSpPr>
+          <p:cNvPr id="3" name="left-stat-card">
+            <a:extLst xmlns:a="http://schemas.openxmlformats.org/drawingml/2006/main">
+              <a:ext uri="{FF2B5EF4-FFF2-40B4-BE49-F238E27FC236}">
+                <a16:creationId xmlns:a16="http://schemas.microsoft.com/office/drawing/2014/main" id="{EF0AF18E-87A6-431F-8D4F-59EC894570D3}"/>
+              </a:ext>
+            </a:extLst>
+          </p:cNvPr>
+          <p:cNvSpPr>
+            <a:spLocks xmlns:a="http://schemas.openxmlformats.org/drawingml/2006/main" noGrp="1"/>
+          </p:cNvSpPr>
+          <p:nvPr/>
+        </p:nvSpPr>
+        <p:spPr>
+          <a:xfrm xmlns:a="http://schemas.openxmlformats.org/drawingml/2006/main">
+            <a:off x="6272022" y="3360039"/>
+            <a:ext cx="2581942" cy="2656523"/>
+          </a:xfrm>
+          <a:prstGeom xmlns:a="http://schemas.openxmlformats.org/drawingml/2006/main" prst="roundRect">
+            <a:avLst>
+              <a:gd name="adj" fmla="val 2951"/>
+            </a:avLst>
+          </a:prstGeom>
+          <a:solidFill xmlns:a="http://schemas.openxmlformats.org/drawingml/2006/main">
+            <a:srgbClr val="F2F2F2"/>
+          </a:solidFill>
+        </p:spPr>
+      </p:sp>
+      <p:sp>
+        <p:nvSpPr>
+          <p:cNvPr id="4" name="right-stat-card">
+            <a:extLst xmlns:a="http://schemas.openxmlformats.org/drawingml/2006/main">
+              <a:ext uri="{FF2B5EF4-FFF2-40B4-BE49-F238E27FC236}">
+                <a16:creationId xmlns:a16="http://schemas.microsoft.com/office/drawing/2014/main" id="{9C01B021-FDE1-4776-B2EE-ACB76D126DAD}"/>
+              </a:ext>
+            </a:extLst>
+          </p:cNvPr>
+          <p:cNvSpPr>
+            <a:spLocks xmlns:a="http://schemas.openxmlformats.org/drawingml/2006/main" noGrp="1"/>
+          </p:cNvSpPr>
+          <p:nvPr/>
+        </p:nvSpPr>
+        <p:spPr>
+          <a:xfrm xmlns:a="http://schemas.openxmlformats.org/drawingml/2006/main">
+            <a:off x="9224201" y="3360039"/>
+            <a:ext cx="2581942" cy="2656523"/>
+          </a:xfrm>
+          <a:prstGeom xmlns:a="http://schemas.openxmlformats.org/drawingml/2006/main" prst="roundRect">
+            <a:avLst>
+              <a:gd name="adj" fmla="val 2951"/>
+            </a:avLst>
+          </a:prstGeom>
+          <a:solidFill xmlns:a="http://schemas.openxmlformats.org/drawingml/2006/main">
+            <a:srgbClr val="F2F2F2"/>
+          </a:solidFill>
+        </p:spPr>
+      </p:sp>
+      <p:sp>
+        <p:nvSpPr>
+          <p:cNvPr id="5" name="summary">
+            <a:extLst xmlns:a="http://schemas.openxmlformats.org/drawingml/2006/main">
+              <a:ext uri="{FF2B5EF4-FFF2-40B4-BE49-F238E27FC236}">
+                <a16:creationId xmlns:a16="http://schemas.microsoft.com/office/drawing/2014/main" id="{A2F82FC1-3249-4254-ABAA-A2D0E0F95848}"/>
+              </a:ext>
+            </a:extLst>
+          </p:cNvPr>
+          <p:cNvSpPr>
+            <a:spLocks xmlns:a="http://schemas.openxmlformats.org/drawingml/2006/main" noGrp="1"/>
+          </p:cNvSpPr>
+          <p:nvPr/>
+        </p:nvSpPr>
+        <p:spPr>
+          <a:xfrm xmlns:a="http://schemas.openxmlformats.org/drawingml/2006/main">
+            <a:off x="6261068" y="1714500"/>
+            <a:ext cx="5539835" cy="1381125"/>
+          </a:xfrm>
+          <a:prstGeom xmlns:a="http://schemas.openxmlformats.org/drawingml/2006/main" prst="rect">
+            <a:avLst/>
+          </a:prstGeom>
+        </p:spPr>
+        <p:txBody>
+          <a:bodyPr xmlns:a="http://schemas.openxmlformats.org/drawingml/2006/main" lIns="0" tIns="0" rIns="0" bIns="0" anchor="t">
+            <a:normAutofit fontScale="100000"/>
+          </a:bodyPr>
+          <a:lstStyle xmlns:a="http://schemas.openxmlformats.org/drawingml/2006/main"/>
+          <a:p xmlns:a="http://schemas.openxmlformats.org/drawingml/2006/main">
+            <a:pPr algn="l">
+              <a:buNone/>
+              <a:defRPr sz="1800">
+                <a:solidFill>
+                  <a:srgbClr val="000000"/>
+                </a:solidFill>
+                <a:latin typeface="Helvetica Neue"/>
+                <a:ea typeface="Helvetica Neue"/>
+                <a:cs typeface="Helvetica Neue"/>
+              </a:defRPr>
+            </a:pPr>
+            <a:r>
+              <a:t>Current Yahoo-adjusted data does not match the original data vintage exactly. The difference is retained—not tuned away.</a:t>
+            </a:r>
+          </a:p>
+        </p:txBody>
+      </p:sp>
+      <p:sp>
+        <p:nvSpPr>
+          <p:cNvPr id="6" name="left-stat">
+            <a:extLst xmlns:a="http://schemas.openxmlformats.org/drawingml/2006/main">
+              <a:ext uri="{FF2B5EF4-FFF2-40B4-BE49-F238E27FC236}">
+                <a16:creationId xmlns:a16="http://schemas.microsoft.com/office/drawing/2014/main" id="{06B274F5-6F7E-4432-B0F1-4874DA3CABBF}"/>
+              </a:ext>
+            </a:extLst>
+          </p:cNvPr>
+          <p:cNvSpPr>
+            <a:spLocks xmlns:a="http://schemas.openxmlformats.org/drawingml/2006/main" noGrp="1"/>
+          </p:cNvSpPr>
+          <p:nvPr/>
+        </p:nvSpPr>
+        <p:spPr>
+          <a:xfrm xmlns:a="http://schemas.openxmlformats.org/drawingml/2006/main">
+            <a:off x="6509385" y="3579971"/>
+            <a:ext cx="2133314" cy="1155859"/>
+          </a:xfrm>
+          <a:prstGeom xmlns:a="http://schemas.openxmlformats.org/drawingml/2006/main" prst="rect">
+            <a:avLst/>
+          </a:prstGeom>
+        </p:spPr>
+        <p:txBody>
+          <a:bodyPr xmlns:a="http://schemas.openxmlformats.org/drawingml/2006/main" lIns="0" tIns="0" rIns="0" bIns="0" anchor="b">
+            <a:normAutofit fontScale="100000"/>
+          </a:bodyPr>
+          <a:lstStyle xmlns:a="http://schemas.openxmlformats.org/drawingml/2006/main"/>
+          <a:p xmlns:a="http://schemas.openxmlformats.org/drawingml/2006/main">
+            <a:pPr algn="l">
+              <a:buNone/>
+              <a:defRPr sz="2700">
+                <a:solidFill>
+                  <a:srgbClr val="B42318"/>
+                </a:solidFill>
+                <a:latin typeface="Helvetica Neue"/>
+                <a:ea typeface="Helvetica Neue"/>
+                <a:cs typeface="Helvetica Neue"/>
+              </a:defRPr>
+            </a:pPr>
+            <a:r>
+              <a:t>15.07%</a:t>
+            </a:r>
+          </a:p>
+        </p:txBody>
+      </p:sp>
+      <p:sp>
+        <p:nvSpPr>
+          <p:cNvPr id="7" name="left-stat-label">
+            <a:extLst xmlns:a="http://schemas.openxmlformats.org/drawingml/2006/main">
+              <a:ext uri="{FF2B5EF4-FFF2-40B4-BE49-F238E27FC236}">
+                <a16:creationId xmlns:a16="http://schemas.microsoft.com/office/drawing/2014/main" id="{99D2BB32-1C11-4B29-AF23-ED9F32D0BCEB}"/>
+              </a:ext>
+            </a:extLst>
+          </p:cNvPr>
+          <p:cNvSpPr>
+            <a:spLocks xmlns:a="http://schemas.openxmlformats.org/drawingml/2006/main" noGrp="1"/>
+          </p:cNvSpPr>
+          <p:nvPr/>
+        </p:nvSpPr>
+        <p:spPr>
+          <a:xfrm xmlns:a="http://schemas.openxmlformats.org/drawingml/2006/main">
+            <a:off x="6575965" y="4953000"/>
+            <a:ext cx="2066735" cy="762000"/>
+          </a:xfrm>
+          <a:prstGeom xmlns:a="http://schemas.openxmlformats.org/drawingml/2006/main" prst="rect">
+            <a:avLst/>
+          </a:prstGeom>
+        </p:spPr>
+        <p:txBody>
+          <a:bodyPr xmlns:a="http://schemas.openxmlformats.org/drawingml/2006/main" lIns="0" tIns="0" rIns="0" bIns="0">
+            <a:normAutofit fontScale="100000"/>
+          </a:bodyPr>
+          <a:lstStyle xmlns:a="http://schemas.openxmlformats.org/drawingml/2006/main"/>
+          <a:p xmlns:a="http://schemas.openxmlformats.org/drawingml/2006/main">
+            <a:pPr algn="l">
+              <a:buNone/>
+              <a:defRPr sz="1500">
+                <a:solidFill>
+                  <a:srgbClr val="000000"/>
+                </a:solidFill>
+                <a:latin typeface="Helvetica Neue"/>
+                <a:ea typeface="Helvetica Neue"/>
+                <a:cs typeface="Helvetica Neue"/>
+              </a:defRPr>
+            </a:pPr>
+            <a:r>
+              <a:t>Book-style APR</a:t>
+            </a:r>
+          </a:p>
+          <a:p xmlns:a="http://schemas.openxmlformats.org/drawingml/2006/main">
+            <a:pPr algn="l">
+              <a:buNone/>
+              <a:defRPr sz="1500">
+                <a:solidFill>
+                  <a:srgbClr val="000000"/>
+                </a:solidFill>
+                <a:latin typeface="Helvetica Neue"/>
+                <a:ea typeface="Helvetica Neue"/>
+                <a:cs typeface="Helvetica Neue"/>
+              </a:defRPr>
+            </a:pPr>
+            <a:r>
+              <a:t>Sharpe 0.845</a:t>
+            </a:r>
+          </a:p>
+        </p:txBody>
+      </p:sp>
+      <p:sp>
+        <p:nvSpPr>
+          <p:cNvPr id="8" name="right-stat">
+            <a:extLst xmlns:a="http://schemas.openxmlformats.org/drawingml/2006/main">
+              <a:ext uri="{FF2B5EF4-FFF2-40B4-BE49-F238E27FC236}">
+                <a16:creationId xmlns:a16="http://schemas.microsoft.com/office/drawing/2014/main" id="{2EAFD608-776D-46A1-95EA-79AF4E6F5599}"/>
+              </a:ext>
+            </a:extLst>
+          </p:cNvPr>
+          <p:cNvSpPr>
+            <a:spLocks xmlns:a="http://schemas.openxmlformats.org/drawingml/2006/main" noGrp="1"/>
+          </p:cNvSpPr>
+          <p:nvPr/>
+        </p:nvSpPr>
+        <p:spPr>
+          <a:xfrm xmlns:a="http://schemas.openxmlformats.org/drawingml/2006/main">
+            <a:off x="9461564" y="3579971"/>
+            <a:ext cx="2133314" cy="1155859"/>
+          </a:xfrm>
+          <a:prstGeom xmlns:a="http://schemas.openxmlformats.org/drawingml/2006/main" prst="rect">
+            <a:avLst/>
+          </a:prstGeom>
+        </p:spPr>
+        <p:txBody>
+          <a:bodyPr xmlns:a="http://schemas.openxmlformats.org/drawingml/2006/main" lIns="0" tIns="0" rIns="0" bIns="0" anchor="b">
+            <a:normAutofit fontScale="100000"/>
+          </a:bodyPr>
+          <a:lstStyle xmlns:a="http://schemas.openxmlformats.org/drawingml/2006/main"/>
+          <a:p xmlns:a="http://schemas.openxmlformats.org/drawingml/2006/main">
+            <a:pPr algn="l">
+              <a:buNone/>
+              <a:defRPr sz="2700">
+                <a:solidFill>
+                  <a:srgbClr val="B42318"/>
+                </a:solidFill>
+                <a:latin typeface="Helvetica Neue"/>
+                <a:ea typeface="Helvetica Neue"/>
+                <a:cs typeface="Helvetica Neue"/>
+              </a:defRPr>
+            </a:pPr>
+            <a:r>
+              <a:t>12.93%</a:t>
+            </a:r>
+          </a:p>
+        </p:txBody>
+      </p:sp>
+      <p:sp>
+        <p:nvSpPr>
+          <p:cNvPr id="9" name="right-stat-label">
+            <a:extLst xmlns:a="http://schemas.openxmlformats.org/drawingml/2006/main">
+              <a:ext uri="{FF2B5EF4-FFF2-40B4-BE49-F238E27FC236}">
+                <a16:creationId xmlns:a16="http://schemas.microsoft.com/office/drawing/2014/main" id="{691BF8AE-236E-4677-8EAF-3CF0D5A20DB6}"/>
+              </a:ext>
+            </a:extLst>
+          </p:cNvPr>
+          <p:cNvSpPr>
+            <a:spLocks xmlns:a="http://schemas.openxmlformats.org/drawingml/2006/main" noGrp="1"/>
+          </p:cNvSpPr>
+          <p:nvPr/>
+        </p:nvSpPr>
+        <p:spPr>
+          <a:xfrm xmlns:a="http://schemas.openxmlformats.org/drawingml/2006/main">
+            <a:off x="9528143" y="4953000"/>
+            <a:ext cx="2066735" cy="762000"/>
+          </a:xfrm>
+          <a:prstGeom xmlns:a="http://schemas.openxmlformats.org/drawingml/2006/main" prst="rect">
+            <a:avLst/>
+          </a:prstGeom>
+        </p:spPr>
+        <p:txBody>
+          <a:bodyPr xmlns:a="http://schemas.openxmlformats.org/drawingml/2006/main" lIns="0" tIns="0" rIns="0" bIns="0">
+            <a:normAutofit fontScale="100000"/>
+          </a:bodyPr>
+          <a:lstStyle xmlns:a="http://schemas.openxmlformats.org/drawingml/2006/main"/>
+          <a:p xmlns:a="http://schemas.openxmlformats.org/drawingml/2006/main">
+            <a:pPr algn="l">
+              <a:buNone/>
+              <a:defRPr sz="1500">
+                <a:solidFill>
+                  <a:srgbClr val="000000"/>
+                </a:solidFill>
+                <a:latin typeface="Helvetica Neue"/>
+                <a:ea typeface="Helvetica Neue"/>
+                <a:cs typeface="Helvetica Neue"/>
+              </a:defRPr>
+            </a:pPr>
+            <a:r>
+              <a:t>Gen5 APR</a:t>
+            </a:r>
+          </a:p>
+          <a:p xmlns:a="http://schemas.openxmlformats.org/drawingml/2006/main">
+            <a:pPr algn="l">
+              <a:buNone/>
+              <a:defRPr sz="1500">
+                <a:solidFill>
+                  <a:srgbClr val="000000"/>
+                </a:solidFill>
+                <a:latin typeface="Helvetica Neue"/>
+                <a:ea typeface="Helvetica Neue"/>
+                <a:cs typeface="Helvetica Neue"/>
+              </a:defRPr>
+            </a:pPr>
+            <a:r>
+              <a:t>Sharpe 0.933</a:t>
+            </a:r>
+          </a:p>
+        </p:txBody>
+      </p:sp>
+      <p:pic>
+        <p:nvPicPr>
+          <p:cNvPr id="22" name=""/>
+          <p:cNvPicPr>
+            <a:picLocks xmlns:a="http://schemas.openxmlformats.org/drawingml/2006/main" noChangeAspect="1"/>
+          </p:cNvPicPr>
+          <p:nvPr/>
+        </p:nvPicPr>
+        <p:blipFill>
+          <a:blip xmlns:r="http://schemas.openxmlformats.org/officeDocument/2006/relationships" xmlns:a="http://schemas.openxmlformats.org/drawingml/2006/main" r:embed="Redc828645bd54289"/>
+          <a:stretch xmlns:a="http://schemas.openxmlformats.org/drawingml/2006/main"/>
+        </p:blipFill>
+        <p:spPr>
+          <a:xfrm xmlns:a="http://schemas.openxmlformats.org/drawingml/2006/main">
+            <a:off x="781159" y="2378774"/>
+            <a:ext cx="4743613" cy="2767108"/>
+          </a:xfrm>
+          <a:prstGeom xmlns:a="http://schemas.openxmlformats.org/drawingml/2006/main" prst="rect">
+            <a:avLst/>
+          </a:prstGeom>
+        </p:spPr>
+      </p:pic>
+    </p:spTree>
+    <p:extLst>
+      <p:ext uri="{BB962C8B-B14F-4D97-AF65-F5344CB8AC3E}">
+        <p14:creationId xmlns:p14="http://schemas.microsoft.com/office/powerpoint/2010/main" val="91287502"/>
+      </p:ext>
+    </p:extLst>
+  </p:cSld>
+</p:sld>
+</file>
+
+<file path=ppt/slides/slide33.xml><?xml version="1.0" encoding="utf-8"?>
+<p:sld xmlns:p="http://schemas.openxmlformats.org/presentationml/2006/main">
+  <p:cSld>
+    <p:spTree>
+      <p:nvGrpSpPr>
+        <p:cNvPr id="1" name=""/>
+        <p:cNvGrpSpPr/>
+        <p:nvPr/>
+      </p:nvGrpSpPr>
+      <p:grpSpPr>
+        <a:xfrm xmlns:a="http://schemas.openxmlformats.org/drawingml/2006/main"/>
+      </p:grpSpPr>
+      <p:sp>
+        <p:nvSpPr>
+          <p:cNvPr id="4" name="cover-headline">
+            <a:extLst xmlns:a="http://schemas.openxmlformats.org/drawingml/2006/main">
+              <a:ext uri="{FF2B5EF4-FFF2-40B4-BE49-F238E27FC236}">
+                <a16:creationId xmlns:a16="http://schemas.microsoft.com/office/drawing/2014/main" id="{E9F43BB9-4202-4A42-9916-7A06678333BD}"/>
+              </a:ext>
+            </a:extLst>
+          </p:cNvPr>
+          <p:cNvSpPr>
+            <a:spLocks xmlns:a="http://schemas.openxmlformats.org/drawingml/2006/main" noGrp="1"/>
+          </p:cNvSpPr>
+          <p:nvPr/>
+        </p:nvSpPr>
+        <p:spPr>
+          <a:xfrm xmlns:a="http://schemas.openxmlformats.org/drawingml/2006/main">
+            <a:off x="393668" y="1738789"/>
+            <a:ext cx="10287000" cy="2491454"/>
+          </a:xfrm>
+          <a:prstGeom xmlns:a="http://schemas.openxmlformats.org/drawingml/2006/main" prst="rect">
+            <a:avLst/>
+          </a:prstGeom>
+        </p:spPr>
+        <p:txBody>
+          <a:bodyPr xmlns:a="http://schemas.openxmlformats.org/drawingml/2006/main" lIns="0" tIns="0" rIns="0" bIns="0" anchor="b">
+            <a:normAutofit fontScale="100000"/>
+          </a:bodyPr>
+          <a:lstStyle xmlns:a="http://schemas.openxmlformats.org/drawingml/2006/main"/>
+          <a:p xmlns:a="http://schemas.openxmlformats.org/drawingml/2006/main">
+            <a:pPr algn="l">
+              <a:buNone/>
+              <a:defRPr sz="5700">
+                <a:solidFill>
+                  <a:srgbClr val="000000"/>
+                </a:solidFill>
+                <a:latin typeface="Helvetica Neue"/>
+                <a:ea typeface="Helvetica Neue"/>
+                <a:cs typeface="Helvetica Neue"/>
+              </a:defRPr>
+            </a:pPr>
+            <a:r>
+              <a:t>The mechanism can work.</a:t>
+            </a:r>
+          </a:p>
+          <a:p xmlns:a="http://schemas.openxmlformats.org/drawingml/2006/main">
+            <a:pPr algn="l">
+              <a:buNone/>
+              <a:defRPr sz="5700">
+                <a:solidFill>
+                  <a:srgbClr val="000000"/>
+                </a:solidFill>
+                <a:latin typeface="Helvetica Neue"/>
+                <a:ea typeface="Helvetica Neue"/>
+                <a:cs typeface="Helvetica Neue"/>
+              </a:defRPr>
+            </a:pPr>
+            <a:r>
+              <a:t>It did not persist broadly.</a:t>
+            </a:r>
+          </a:p>
+        </p:txBody>
+      </p:sp>
+      <p:sp>
+        <p:nvSpPr>
+          <p:cNvPr id="2" name="cover-subtitle">
+            <a:extLst xmlns:a="http://schemas.openxmlformats.org/drawingml/2006/main">
+              <a:ext uri="{FF2B5EF4-FFF2-40B4-BE49-F238E27FC236}">
+                <a16:creationId xmlns:a16="http://schemas.microsoft.com/office/drawing/2014/main" id="{F6F90063-BA30-438B-9FD3-13AA22719785}"/>
+              </a:ext>
+            </a:extLst>
+          </p:cNvPr>
+          <p:cNvSpPr>
+            <a:spLocks xmlns:a="http://schemas.openxmlformats.org/drawingml/2006/main" noGrp="1"/>
+          </p:cNvSpPr>
+          <p:nvPr/>
+        </p:nvSpPr>
+        <p:spPr>
+          <a:xfrm xmlns:a="http://schemas.openxmlformats.org/drawingml/2006/main">
+            <a:off x="393668" y="4762500"/>
+            <a:ext cx="8001000" cy="1238250"/>
+          </a:xfrm>
+          <a:prstGeom xmlns:a="http://schemas.openxmlformats.org/drawingml/2006/main" prst="rect">
+            <a:avLst/>
+          </a:prstGeom>
+        </p:spPr>
+        <p:txBody>
+          <a:bodyPr xmlns:a="http://schemas.openxmlformats.org/drawingml/2006/main" lIns="0" tIns="0" rIns="0" bIns="0">
+            <a:normAutofit fontScale="100000"/>
+          </a:bodyPr>
+          <a:lstStyle xmlns:a="http://schemas.openxmlformats.org/drawingml/2006/main"/>
+          <a:p xmlns:a="http://schemas.openxmlformats.org/drawingml/2006/main">
+            <a:pPr algn="l">
+              <a:buNone/>
+              <a:defRPr sz="2250">
+                <a:solidFill>
+                  <a:srgbClr val="000000"/>
+                </a:solidFill>
+                <a:latin typeface="Helvetica Neue"/>
+                <a:ea typeface="Helvetica Neue"/>
+                <a:cs typeface="Helvetica Neue"/>
+              </a:defRPr>
+            </a:pPr>
+            <a:r>
+              <a:t>Keep the 2018 and 2006–2012 results as positive controls. Keep the five-year and 27-pair STOPs intact, and move on without rescuing or retuning LIT-MR-02.1.</a:t>
+            </a:r>
+          </a:p>
+        </p:txBody>
+      </p:sp>
+      <p:sp>
+        <p:nvSpPr>
+          <p:cNvPr id="3" name="cover-eyebrow">
+            <a:extLst xmlns:a="http://schemas.openxmlformats.org/drawingml/2006/main">
+              <a:ext uri="{FF2B5EF4-FFF2-40B4-BE49-F238E27FC236}">
+                <a16:creationId xmlns:a16="http://schemas.microsoft.com/office/drawing/2014/main" id="{45129715-75DE-4D50-B44D-3AFE3EBA3F0E}"/>
+              </a:ext>
+            </a:extLst>
+          </p:cNvPr>
+          <p:cNvSpPr>
+            <a:spLocks xmlns:a="http://schemas.openxmlformats.org/drawingml/2006/main" noGrp="1"/>
+          </p:cNvSpPr>
+          <p:nvPr/>
+        </p:nvSpPr>
+        <p:spPr>
+          <a:xfrm xmlns:a="http://schemas.openxmlformats.org/drawingml/2006/main">
+            <a:off x="393668" y="392240"/>
+            <a:ext cx="7239000" cy="649129"/>
+          </a:xfrm>
+          <a:prstGeom xmlns:a="http://schemas.openxmlformats.org/drawingml/2006/main" prst="rect">
+            <a:avLst/>
+          </a:prstGeom>
+        </p:spPr>
+        <p:txBody>
+          <a:bodyPr xmlns:a="http://schemas.openxmlformats.org/drawingml/2006/main" lIns="0" tIns="0" rIns="0" bIns="0">
+            <a:normAutofit fontScale="100000"/>
+          </a:bodyPr>
+          <a:lstStyle xmlns:a="http://schemas.openxmlformats.org/drawingml/2006/main"/>
+          <a:p xmlns:a="http://schemas.openxmlformats.org/drawingml/2006/main">
+            <a:pPr algn="l">
+              <a:buNone/>
+              <a:defRPr sz="2250">
+                <a:solidFill>
+                  <a:srgbClr val="000000"/>
+                </a:solidFill>
+                <a:latin typeface="Helvetica Neue"/>
+                <a:ea typeface="Helvetica Neue"/>
+                <a:cs typeface="Helvetica Neue"/>
+              </a:defRPr>
+            </a:pPr>
+            <a:r>
+              <a:t>DECISION</a:t>
+            </a:r>
+          </a:p>
+        </p:txBody>
+      </p:sp>
+    </p:spTree>
+    <p:extLst>
+      <p:ext uri="{BB962C8B-B14F-4D97-AF65-F5344CB8AC3E}">
+        <p14:creationId xmlns:p14="http://schemas.microsoft.com/office/powerpoint/2010/main" val="1664240194"/>
       </p:ext>
     </p:extLst>
   </p:cSld>
@@ -11919,7 +14528,7 @@
           <p:nvPr/>
         </p:nvPicPr>
         <p:blipFill>
-          <a:blip xmlns:r="http://schemas.openxmlformats.org/officeDocument/2006/relationships" xmlns:a="http://schemas.openxmlformats.org/drawingml/2006/main" r:embed="R57944cef7cf54554"/>
+          <a:blip xmlns:r="http://schemas.openxmlformats.org/officeDocument/2006/relationships" xmlns:a="http://schemas.openxmlformats.org/drawingml/2006/main" r:embed="Rf426af2b6bc94e07"/>
           <a:stretch xmlns:a="http://schemas.openxmlformats.org/drawingml/2006/main"/>
         </p:blipFill>
         <p:spPr>
@@ -11974,7 +14583,7 @@
           <p:nvPr/>
         </p:nvPicPr>
         <p:blipFill>
-          <a:blip xmlns:r="http://schemas.openxmlformats.org/officeDocument/2006/relationships" xmlns:a="http://schemas.openxmlformats.org/drawingml/2006/main" r:embed="Ra9ed94faefcd414b"/>
+          <a:blip xmlns:r="http://schemas.openxmlformats.org/officeDocument/2006/relationships" xmlns:a="http://schemas.openxmlformats.org/drawingml/2006/main" r:embed="R26ea4091070d4101"/>
           <a:stretch xmlns:a="http://schemas.openxmlformats.org/drawingml/2006/main"/>
         </p:blipFill>
         <p:spPr>

--- a/presentations/gen5_lit_mr_02_1_bollinger_evidence.pptx
+++ b/presentations/gen5_lit_mr_02_1_bollinger_evidence.pptx
@@ -2,45 +2,51 @@
 <file path=ppt/presentation.xml><?xml version="1.0" encoding="utf-8"?>
 <p:presentation xmlns:p="http://schemas.openxmlformats.org/presentationml/2006/main">
   <p:sldMasterIdLst>
-    <p:sldMasterId xmlns:r="http://schemas.openxmlformats.org/officeDocument/2006/relationships" id="2147483648" r:id="R0ff1918952ef4807"/>
+    <p:sldMasterId xmlns:r="http://schemas.openxmlformats.org/officeDocument/2006/relationships" id="2147483648" r:id="Recff753aecec4cee"/>
   </p:sldMasterIdLst>
   <p:notesMasterIdLst>
-    <p:notesMasterId xmlns:r="http://schemas.openxmlformats.org/officeDocument/2006/relationships" r:id="Rdb7b1a1873cb411e"/>
+    <p:notesMasterId xmlns:r="http://schemas.openxmlformats.org/officeDocument/2006/relationships" r:id="R2ef1eeee6f3843a1"/>
   </p:notesMasterIdLst>
   <p:sldIdLst>
-    <p:sldId xmlns:r="http://schemas.openxmlformats.org/officeDocument/2006/relationships" id="256" r:id="Rba525469a78f4593"/>
-    <p:sldId xmlns:r="http://schemas.openxmlformats.org/officeDocument/2006/relationships" id="257" r:id="Rac7dc99e3c2945db"/>
-    <p:sldId xmlns:r="http://schemas.openxmlformats.org/officeDocument/2006/relationships" id="258" r:id="R0fc6a863c5d14b8a"/>
-    <p:sldId xmlns:r="http://schemas.openxmlformats.org/officeDocument/2006/relationships" id="259" r:id="R340af81d15b04cf0"/>
-    <p:sldId xmlns:r="http://schemas.openxmlformats.org/officeDocument/2006/relationships" id="260" r:id="R5f5e47bd1fde46aa"/>
-    <p:sldId xmlns:r="http://schemas.openxmlformats.org/officeDocument/2006/relationships" id="261" r:id="R4a8b179aa0684b01"/>
-    <p:sldId xmlns:r="http://schemas.openxmlformats.org/officeDocument/2006/relationships" id="262" r:id="R482f6db5378e4390"/>
-    <p:sldId xmlns:r="http://schemas.openxmlformats.org/officeDocument/2006/relationships" id="263" r:id="Rf4dc6912db4e43f6"/>
-    <p:sldId xmlns:r="http://schemas.openxmlformats.org/officeDocument/2006/relationships" id="264" r:id="Rbef6d66ce822439f"/>
-    <p:sldId xmlns:r="http://schemas.openxmlformats.org/officeDocument/2006/relationships" id="265" r:id="R140d588a27ac466f"/>
-    <p:sldId xmlns:r="http://schemas.openxmlformats.org/officeDocument/2006/relationships" id="266" r:id="Raf7eae2e1fc14c03"/>
-    <p:sldId xmlns:r="http://schemas.openxmlformats.org/officeDocument/2006/relationships" id="267" r:id="R3f8e65828b034c0c"/>
-    <p:sldId xmlns:r="http://schemas.openxmlformats.org/officeDocument/2006/relationships" id="268" r:id="Ra0b50b82f28b48ce"/>
-    <p:sldId xmlns:r="http://schemas.openxmlformats.org/officeDocument/2006/relationships" id="269" r:id="R54116230a2fb48f1"/>
-    <p:sldId xmlns:r="http://schemas.openxmlformats.org/officeDocument/2006/relationships" id="270" r:id="Rb11bb6e2ec254291"/>
-    <p:sldId xmlns:r="http://schemas.openxmlformats.org/officeDocument/2006/relationships" id="271" r:id="R559966ba248648c4"/>
-    <p:sldId xmlns:r="http://schemas.openxmlformats.org/officeDocument/2006/relationships" id="272" r:id="R36e1f00029774c5d"/>
-    <p:sldId xmlns:r="http://schemas.openxmlformats.org/officeDocument/2006/relationships" id="273" r:id="R501d17a74ffa4e95"/>
-    <p:sldId xmlns:r="http://schemas.openxmlformats.org/officeDocument/2006/relationships" id="274" r:id="R80e31e3ec9524f43"/>
-    <p:sldId xmlns:r="http://schemas.openxmlformats.org/officeDocument/2006/relationships" id="275" r:id="R6e9ce5f4b3184b05"/>
-    <p:sldId xmlns:r="http://schemas.openxmlformats.org/officeDocument/2006/relationships" id="276" r:id="R2e74613cd04f40fa"/>
-    <p:sldId xmlns:r="http://schemas.openxmlformats.org/officeDocument/2006/relationships" id="277" r:id="R98de95311e4c4ef7"/>
-    <p:sldId xmlns:r="http://schemas.openxmlformats.org/officeDocument/2006/relationships" id="278" r:id="Rba2b5cdbef0e4f64"/>
-    <p:sldId xmlns:r="http://schemas.openxmlformats.org/officeDocument/2006/relationships" id="279" r:id="Rec86ed4710c74328"/>
-    <p:sldId xmlns:r="http://schemas.openxmlformats.org/officeDocument/2006/relationships" id="280" r:id="R8035548227094914"/>
-    <p:sldId xmlns:r="http://schemas.openxmlformats.org/officeDocument/2006/relationships" id="281" r:id="R5f6bf38ac69d48c2"/>
-    <p:sldId xmlns:r="http://schemas.openxmlformats.org/officeDocument/2006/relationships" id="282" r:id="R2a80033bf24f49a6"/>
-    <p:sldId xmlns:r="http://schemas.openxmlformats.org/officeDocument/2006/relationships" id="283" r:id="R6c933ae295984898"/>
-    <p:sldId xmlns:r="http://schemas.openxmlformats.org/officeDocument/2006/relationships" id="284" r:id="Rbead07570f5a4ab1"/>
-    <p:sldId xmlns:r="http://schemas.openxmlformats.org/officeDocument/2006/relationships" id="285" r:id="R8148dca2dbbb4578"/>
-    <p:sldId xmlns:r="http://schemas.openxmlformats.org/officeDocument/2006/relationships" id="286" r:id="Rf945799aa9ba4d34"/>
-    <p:sldId xmlns:r="http://schemas.openxmlformats.org/officeDocument/2006/relationships" id="287" r:id="R997b1c070c794914"/>
-    <p:sldId xmlns:r="http://schemas.openxmlformats.org/officeDocument/2006/relationships" id="288" r:id="Rf5b013401a334102"/>
+    <p:sldId xmlns:r="http://schemas.openxmlformats.org/officeDocument/2006/relationships" id="256" r:id="Ra61263b49e094a32"/>
+    <p:sldId xmlns:r="http://schemas.openxmlformats.org/officeDocument/2006/relationships" id="257" r:id="R40840131fa164931"/>
+    <p:sldId xmlns:r="http://schemas.openxmlformats.org/officeDocument/2006/relationships" id="258" r:id="R2f588c39f1fb45e1"/>
+    <p:sldId xmlns:r="http://schemas.openxmlformats.org/officeDocument/2006/relationships" id="259" r:id="R7b022bc4d61d4a90"/>
+    <p:sldId xmlns:r="http://schemas.openxmlformats.org/officeDocument/2006/relationships" id="260" r:id="Rdf476f790bab420b"/>
+    <p:sldId xmlns:r="http://schemas.openxmlformats.org/officeDocument/2006/relationships" id="261" r:id="Rd23997abb0164d11"/>
+    <p:sldId xmlns:r="http://schemas.openxmlformats.org/officeDocument/2006/relationships" id="262" r:id="R0ac23751d4bd4a80"/>
+    <p:sldId xmlns:r="http://schemas.openxmlformats.org/officeDocument/2006/relationships" id="263" r:id="R9eda095615234dce"/>
+    <p:sldId xmlns:r="http://schemas.openxmlformats.org/officeDocument/2006/relationships" id="264" r:id="R4270662c9a8b4ed5"/>
+    <p:sldId xmlns:r="http://schemas.openxmlformats.org/officeDocument/2006/relationships" id="265" r:id="R23ac30411cf8461c"/>
+    <p:sldId xmlns:r="http://schemas.openxmlformats.org/officeDocument/2006/relationships" id="266" r:id="R4478d82e932b441c"/>
+    <p:sldId xmlns:r="http://schemas.openxmlformats.org/officeDocument/2006/relationships" id="267" r:id="R54035be7dcac48c4"/>
+    <p:sldId xmlns:r="http://schemas.openxmlformats.org/officeDocument/2006/relationships" id="268" r:id="Rc4986935cde24ff3"/>
+    <p:sldId xmlns:r="http://schemas.openxmlformats.org/officeDocument/2006/relationships" id="269" r:id="Rf6f964c24dae449f"/>
+    <p:sldId xmlns:r="http://schemas.openxmlformats.org/officeDocument/2006/relationships" id="270" r:id="R8f4274737dd14f29"/>
+    <p:sldId xmlns:r="http://schemas.openxmlformats.org/officeDocument/2006/relationships" id="271" r:id="R4d9d18eeb1fc4bad"/>
+    <p:sldId xmlns:r="http://schemas.openxmlformats.org/officeDocument/2006/relationships" id="272" r:id="R0a9a0e039c664c55"/>
+    <p:sldId xmlns:r="http://schemas.openxmlformats.org/officeDocument/2006/relationships" id="273" r:id="R71061c3856054dd8"/>
+    <p:sldId xmlns:r="http://schemas.openxmlformats.org/officeDocument/2006/relationships" id="274" r:id="Rcddf92a154d34c34"/>
+    <p:sldId xmlns:r="http://schemas.openxmlformats.org/officeDocument/2006/relationships" id="275" r:id="Rf39be58a8a834629"/>
+    <p:sldId xmlns:r="http://schemas.openxmlformats.org/officeDocument/2006/relationships" id="276" r:id="R4b0ce1daf0f746c0"/>
+    <p:sldId xmlns:r="http://schemas.openxmlformats.org/officeDocument/2006/relationships" id="277" r:id="R278386d82f2142fa"/>
+    <p:sldId xmlns:r="http://schemas.openxmlformats.org/officeDocument/2006/relationships" id="278" r:id="Ra79224eaa71447af"/>
+    <p:sldId xmlns:r="http://schemas.openxmlformats.org/officeDocument/2006/relationships" id="279" r:id="Rc6dbf72810b1421f"/>
+    <p:sldId xmlns:r="http://schemas.openxmlformats.org/officeDocument/2006/relationships" id="280" r:id="R270294d737644d2a"/>
+    <p:sldId xmlns:r="http://schemas.openxmlformats.org/officeDocument/2006/relationships" id="281" r:id="R177f0d036b974123"/>
+    <p:sldId xmlns:r="http://schemas.openxmlformats.org/officeDocument/2006/relationships" id="282" r:id="R310f18afe272401c"/>
+    <p:sldId xmlns:r="http://schemas.openxmlformats.org/officeDocument/2006/relationships" id="283" r:id="Rf5f51eac483f4d77"/>
+    <p:sldId xmlns:r="http://schemas.openxmlformats.org/officeDocument/2006/relationships" id="284" r:id="Rb0afc1daf1fb4793"/>
+    <p:sldId xmlns:r="http://schemas.openxmlformats.org/officeDocument/2006/relationships" id="285" r:id="Rc682c14c2cb148da"/>
+    <p:sldId xmlns:r="http://schemas.openxmlformats.org/officeDocument/2006/relationships" id="286" r:id="Rd19b543396a34276"/>
+    <p:sldId xmlns:r="http://schemas.openxmlformats.org/officeDocument/2006/relationships" id="287" r:id="R0d592c7a58674688"/>
+    <p:sldId xmlns:r="http://schemas.openxmlformats.org/officeDocument/2006/relationships" id="288" r:id="R6d6723ba404f4fd2"/>
+    <p:sldId xmlns:r="http://schemas.openxmlformats.org/officeDocument/2006/relationships" id="289" r:id="R4e4cc931083e4e98"/>
+    <p:sldId xmlns:r="http://schemas.openxmlformats.org/officeDocument/2006/relationships" id="290" r:id="R322d7d0ed59e42ae"/>
+    <p:sldId xmlns:r="http://schemas.openxmlformats.org/officeDocument/2006/relationships" id="291" r:id="R535eb97c3bd44199"/>
+    <p:sldId xmlns:r="http://schemas.openxmlformats.org/officeDocument/2006/relationships" id="292" r:id="Rd01389a7ddc348b3"/>
+    <p:sldId xmlns:r="http://schemas.openxmlformats.org/officeDocument/2006/relationships" id="293" r:id="R0364766d4cab4777"/>
+    <p:sldId xmlns:r="http://schemas.openxmlformats.org/officeDocument/2006/relationships" id="294" r:id="Rf35d415ef6884874"/>
   </p:sldIdLst>
   <p:sldSz cx="12192000" cy="6858000"/>
   <p:notesSz cx="6858000" cy="9144000"/>
@@ -474,7 +480,7 @@
           <a:lstStyle xmlns:a="http://schemas.openxmlformats.org/drawingml/2006/main"/>
           <a:p xmlns:a="http://schemas.openxmlformats.org/drawingml/2006/main">
             <a:r>
-              <a:t>This revision preserves the canonical example and Panel A, explains the exact gate logic, and adds the predeclared 15-pair diversified Panel B.</a:t>
+              <a:t>The deck now preserves the original example, Panels A and B, the 2018 and source-period positive controls, and Relationship Atlas 01 as a separate frozen instance batch.</a:t>
             </a:r>
           </a:p>
           <a:p xmlns:a="http://schemas.openxmlformats.org/drawingml/2006/main">
@@ -494,12 +500,12 @@
           </a:p>
           <a:p xmlns:a="http://schemas.openxmlformats.org/drawingml/2006/main">
             <a:r>
-              <a:t>- C:/Users/Franc/OneDrive/Documents/Francis/Peltata Project/Time-Series-Modeling-Gen5/docs/GEN5_LIT_MR_02_1_PANEL_A_CONTRACT.md</a:t>
-            </a:r>
-          </a:p>
-          <a:p xmlns:a="http://schemas.openxmlformats.org/drawingml/2006/main">
-            <a:r>
-              <a:t>- C:/Users/Franc/OneDrive/Documents/Francis/Peltata Project/Time-Series-Modeling-Gen5/docs/GEN5_LIT_MR_02_1_PANEL_B_CONTRACT.md</a:t>
+              <a:t>- C:/Users/Franc/OneDrive/Documents/Francis/Peltata Project/Time-Series-Modeling-Gen5/docs/GEN5_LIT_MR_02_1_RELATIONSHIP_ATLAS_01_CONTRACT.md</a:t>
+            </a:r>
+          </a:p>
+          <a:p xmlns:a="http://schemas.openxmlformats.org/drawingml/2006/main">
+            <a:r>
+              <a:t>- C:/Users/Franc/OneDrive/Documents/Francis/Peltata Project/Time-Series-Modeling-Gen5/docs/GEN5_4_DECISION_DIALOGUE_INDEX.md — D73 and D75</a:t>
             </a:r>
           </a:p>
         </p:txBody>
@@ -3005,6 +3011,581 @@
           <a:p xmlns:a="http://schemas.openxmlformats.org/drawingml/2006/main">
             <a:r>
               <a:t>- C:/Users/Franc/OneDrive/Documents/Francis/Peltata Project/Time-Series-Modeling-Gen5/docs/GEN5_LIT_MR_02_1_ADAPTIVE_SPREAD_BOLLINGER_POC_CONTRACT.md</a:t>
+            </a:r>
+          </a:p>
+        </p:txBody>
+      </p:sp>
+      <p:sp>
+        <p:nvSpPr>
+          <p:cNvPr id="4" name="Slide Number Placeholder 3"/>
+          <p:cNvSpPr>
+            <a:spLocks xmlns:a="http://schemas.openxmlformats.org/drawingml/2006/main" noGrp="1"/>
+          </p:cNvSpPr>
+          <p:nvPr>
+            <p:ph type="sldNum" idx="5"/>
+          </p:nvPr>
+        </p:nvSpPr>
+        <p:spPr/>
+        <p:txBody>
+          <a:bodyPr xmlns:a="http://schemas.openxmlformats.org/drawingml/2006/main"/>
+          <a:lstStyle xmlns:a="http://schemas.openxmlformats.org/drawingml/2006/main"/>
+          <a:p xmlns:a="http://schemas.openxmlformats.org/drawingml/2006/main"/>
+        </p:txBody>
+      </p:sp>
+    </p:spTree>
+  </p:cSld>
+  <p:clrMapOvr>
+    <a:masterClrMapping xmlns:a="http://schemas.openxmlformats.org/drawingml/2006/main"/>
+  </p:clrMapOvr>
+</p:notes>
+</file>
+
+<file path=ppt/notesSlides/notesSlide34.xml><?xml version="1.0" encoding="utf-8"?>
+<p:notes xmlns:p="http://schemas.openxmlformats.org/presentationml/2006/main">
+  <p:cSld>
+    <p:spTree>
+      <p:nvGrpSpPr>
+        <p:cNvPr id="1" name=""/>
+        <p:cNvGrpSpPr/>
+        <p:nvPr/>
+      </p:nvGrpSpPr>
+      <p:grpSpPr>
+        <a:xfrm xmlns:a="http://schemas.openxmlformats.org/drawingml/2006/main"/>
+      </p:grpSpPr>
+      <p:sp>
+        <p:nvSpPr>
+          <p:cNvPr id="2" name="Slide Image Placeholder 1"/>
+          <p:cNvSpPr>
+            <a:spLocks xmlns:a="http://schemas.openxmlformats.org/drawingml/2006/main" noGrp="1"/>
+          </p:cNvSpPr>
+          <p:nvPr>
+            <p:ph type="sldImg" idx="0"/>
+          </p:nvPr>
+        </p:nvSpPr>
+        <p:spPr/>
+      </p:sp>
+      <p:sp>
+        <p:nvSpPr>
+          <p:cNvPr id="3" name="Notes Placeholder 2"/>
+          <p:cNvSpPr>
+            <a:spLocks xmlns:a="http://schemas.openxmlformats.org/drawingml/2006/main" noGrp="1"/>
+          </p:cNvSpPr>
+          <p:nvPr>
+            <p:ph type="body" idx="1"/>
+          </p:nvPr>
+        </p:nvSpPr>
+        <p:spPr/>
+        <p:txBody>
+          <a:bodyPr xmlns:a="http://schemas.openxmlformats.org/drawingml/2006/main"/>
+          <a:lstStyle xmlns:a="http://schemas.openxmlformats.org/drawingml/2006/main"/>
+          <a:p xmlns:a="http://schemas.openxmlformats.org/drawingml/2006/main">
+            <a:r>
+              <a:t>This section is a high-throughput demonstration of disciplined hypothesis generation. It does not change the pair mechanics or mine outcomes.</a:t>
+            </a:r>
+          </a:p>
+          <a:p xmlns:a="http://schemas.openxmlformats.org/drawingml/2006/main">
+            <a:r>
+              <a:t/>
+            </a:r>
+          </a:p>
+          <a:p xmlns:a="http://schemas.openxmlformats.org/drawingml/2006/main">
+            <a:r>
+              <a:t>[Sources]</a:t>
+            </a:r>
+          </a:p>
+          <a:p xmlns:a="http://schemas.openxmlformats.org/drawingml/2006/main">
+            <a:r>
+              <a:t>- C:/Users/Franc/OneDrive/Documents/Francis/Peltata Project/Time-Series-Modeling-Gen5/docs/GEN5_LIT_MR_02_1_RELATIONSHIP_ATLAS_01_CONTRACT.md</a:t>
+            </a:r>
+          </a:p>
+          <a:p xmlns:a="http://schemas.openxmlformats.org/drawingml/2006/main">
+            <a:r>
+              <a:t>- C:/Users/Franc/OneDrive/Documents/Francis/Peltata Project/Time-Series-Modeling-Gen5/runs/research_workbench/literature_grounded/lit_mr_02_1_relationship_atlas_01_20260729/mr02_panel_pair_registry.csv</a:t>
+            </a:r>
+          </a:p>
+          <a:p xmlns:a="http://schemas.openxmlformats.org/drawingml/2006/main">
+            <a:r>
+              <a:t>- C:/Users/Franc/OneDrive/Documents/Francis/Peltata Project/Time-Series-Modeling-Gen5/docs/GEN5_4_DECISION_DIALOGUE_INDEX.md — D73</a:t>
+            </a:r>
+          </a:p>
+        </p:txBody>
+      </p:sp>
+      <p:sp>
+        <p:nvSpPr>
+          <p:cNvPr id="4" name="Slide Number Placeholder 3"/>
+          <p:cNvSpPr>
+            <a:spLocks xmlns:a="http://schemas.openxmlformats.org/drawingml/2006/main" noGrp="1"/>
+          </p:cNvSpPr>
+          <p:nvPr>
+            <p:ph type="sldNum" idx="5"/>
+          </p:nvPr>
+        </p:nvSpPr>
+        <p:spPr/>
+        <p:txBody>
+          <a:bodyPr xmlns:a="http://schemas.openxmlformats.org/drawingml/2006/main"/>
+          <a:lstStyle xmlns:a="http://schemas.openxmlformats.org/drawingml/2006/main"/>
+          <a:p xmlns:a="http://schemas.openxmlformats.org/drawingml/2006/main"/>
+        </p:txBody>
+      </p:sp>
+    </p:spTree>
+  </p:cSld>
+  <p:clrMapOvr>
+    <a:masterClrMapping xmlns:a="http://schemas.openxmlformats.org/drawingml/2006/main"/>
+  </p:clrMapOvr>
+</p:notes>
+</file>
+
+<file path=ppt/notesSlides/notesSlide35.xml><?xml version="1.0" encoding="utf-8"?>
+<p:notes xmlns:p="http://schemas.openxmlformats.org/presentationml/2006/main">
+  <p:cSld>
+    <p:spTree>
+      <p:nvGrpSpPr>
+        <p:cNvPr id="1" name=""/>
+        <p:cNvGrpSpPr/>
+        <p:nvPr/>
+      </p:nvGrpSpPr>
+      <p:grpSpPr>
+        <a:xfrm xmlns:a="http://schemas.openxmlformats.org/drawingml/2006/main"/>
+      </p:grpSpPr>
+      <p:sp>
+        <p:nvSpPr>
+          <p:cNvPr id="2" name="Slide Image Placeholder 1"/>
+          <p:cNvSpPr>
+            <a:spLocks xmlns:a="http://schemas.openxmlformats.org/drawingml/2006/main" noGrp="1"/>
+          </p:cNvSpPr>
+          <p:nvPr>
+            <p:ph type="sldImg" idx="0"/>
+          </p:nvPr>
+        </p:nvSpPr>
+        <p:spPr/>
+      </p:sp>
+      <p:sp>
+        <p:nvSpPr>
+          <p:cNvPr id="3" name="Notes Placeholder 2"/>
+          <p:cNvSpPr>
+            <a:spLocks xmlns:a="http://schemas.openxmlformats.org/drawingml/2006/main" noGrp="1"/>
+          </p:cNvSpPr>
+          <p:nvPr>
+            <p:ph type="body" idx="1"/>
+          </p:nvPr>
+        </p:nvSpPr>
+        <p:spPr/>
+        <p:txBody>
+          <a:bodyPr xmlns:a="http://schemas.openxmlformats.org/drawingml/2006/main"/>
+          <a:lstStyle xmlns:a="http://schemas.openxmlformats.org/drawingml/2006/main"/>
+          <a:p xmlns:a="http://schemas.openxmlformats.org/drawingml/2006/main">
+            <a:r>
+              <a:t>The generator is categorical and economic, not performance-ranked. ETF–component and producer/asset-proxy relationships are explicitly distinguished from ETF–ETF and stock–stock hypotheses.</a:t>
+            </a:r>
+          </a:p>
+          <a:p xmlns:a="http://schemas.openxmlformats.org/drawingml/2006/main">
+            <a:r>
+              <a:t/>
+            </a:r>
+          </a:p>
+          <a:p xmlns:a="http://schemas.openxmlformats.org/drawingml/2006/main">
+            <a:r>
+              <a:t>[Sources]</a:t>
+            </a:r>
+          </a:p>
+          <a:p xmlns:a="http://schemas.openxmlformats.org/drawingml/2006/main">
+            <a:r>
+              <a:t>- C:/Users/Franc/OneDrive/Documents/Francis/Peltata Project/Time-Series-Modeling-Gen5/docs/GEN5_LIT_MR_02_1_RELATIONSHIP_ATLAS_01_CONTRACT.md</a:t>
+            </a:r>
+          </a:p>
+          <a:p xmlns:a="http://schemas.openxmlformats.org/drawingml/2006/main">
+            <a:r>
+              <a:t>- C:/Users/Franc/OneDrive/Documents/Francis/Peltata Project/Time-Series-Modeling-Gen5/runs/research_workbench/literature_grounded/lit_mr_02_1_relationship_atlas_01_20260729/mr02_panel_pair_registry.csv</a:t>
+            </a:r>
+          </a:p>
+          <a:p xmlns:a="http://schemas.openxmlformats.org/drawingml/2006/main">
+            <a:r>
+              <a:t>- C:/Users/Franc/OneDrive/Documents/Francis/Peltata Project/Time-Series-Modeling-Gen5/docs/GEN5_4_DECISION_DIALOGUE_INDEX.md — D73</a:t>
+            </a:r>
+          </a:p>
+        </p:txBody>
+      </p:sp>
+      <p:sp>
+        <p:nvSpPr>
+          <p:cNvPr id="4" name="Slide Number Placeholder 3"/>
+          <p:cNvSpPr>
+            <a:spLocks xmlns:a="http://schemas.openxmlformats.org/drawingml/2006/main" noGrp="1"/>
+          </p:cNvSpPr>
+          <p:nvPr>
+            <p:ph type="sldNum" idx="5"/>
+          </p:nvPr>
+        </p:nvSpPr>
+        <p:spPr/>
+        <p:txBody>
+          <a:bodyPr xmlns:a="http://schemas.openxmlformats.org/drawingml/2006/main"/>
+          <a:lstStyle xmlns:a="http://schemas.openxmlformats.org/drawingml/2006/main"/>
+          <a:p xmlns:a="http://schemas.openxmlformats.org/drawingml/2006/main"/>
+        </p:txBody>
+      </p:sp>
+    </p:spTree>
+  </p:cSld>
+  <p:clrMapOvr>
+    <a:masterClrMapping xmlns:a="http://schemas.openxmlformats.org/drawingml/2006/main"/>
+  </p:clrMapOvr>
+</p:notes>
+</file>
+
+<file path=ppt/notesSlides/notesSlide36.xml><?xml version="1.0" encoding="utf-8"?>
+<p:notes xmlns:p="http://schemas.openxmlformats.org/presentationml/2006/main">
+  <p:cSld>
+    <p:spTree>
+      <p:nvGrpSpPr>
+        <p:cNvPr id="1" name=""/>
+        <p:cNvGrpSpPr/>
+        <p:nvPr/>
+      </p:nvGrpSpPr>
+      <p:grpSpPr>
+        <a:xfrm xmlns:a="http://schemas.openxmlformats.org/drawingml/2006/main"/>
+      </p:grpSpPr>
+      <p:sp>
+        <p:nvSpPr>
+          <p:cNvPr id="2" name="Slide Image Placeholder 1"/>
+          <p:cNvSpPr>
+            <a:spLocks xmlns:a="http://schemas.openxmlformats.org/drawingml/2006/main" noGrp="1"/>
+          </p:cNvSpPr>
+          <p:nvPr>
+            <p:ph type="sldImg" idx="0"/>
+          </p:nvPr>
+        </p:nvSpPr>
+        <p:spPr/>
+      </p:sp>
+      <p:sp>
+        <p:nvSpPr>
+          <p:cNvPr id="3" name="Notes Placeholder 2"/>
+          <p:cNvSpPr>
+            <a:spLocks xmlns:a="http://schemas.openxmlformats.org/drawingml/2006/main" noGrp="1"/>
+          </p:cNvSpPr>
+          <p:nvPr>
+            <p:ph type="body" idx="1"/>
+          </p:nvPr>
+        </p:nvSpPr>
+        <p:spPr/>
+        <p:txBody>
+          <a:bodyPr xmlns:a="http://schemas.openxmlformats.org/drawingml/2006/main"/>
+          <a:lstStyle xmlns:a="http://schemas.openxmlformats.org/drawingml/2006/main"/>
+          <a:p xmlns:a="http://schemas.openxmlformats.org/drawingml/2006/main">
+            <a:r>
+              <a:t>Only the producer/asset-proxy cell contained a positive mean-net pair. No category produced a full eight-gate pass. The chart is descriptive; the atlas did not select a winning cell.</a:t>
+            </a:r>
+          </a:p>
+          <a:p xmlns:a="http://schemas.openxmlformats.org/drawingml/2006/main">
+            <a:r>
+              <a:t/>
+            </a:r>
+          </a:p>
+          <a:p xmlns:a="http://schemas.openxmlformats.org/drawingml/2006/main">
+            <a:r>
+              <a:t>[Sources]</a:t>
+            </a:r>
+          </a:p>
+          <a:p xmlns:a="http://schemas.openxmlformats.org/drawingml/2006/main">
+            <a:r>
+              <a:t>- C:/Users/Franc/OneDrive/Documents/Francis/Peltata Project/Time-Series-Modeling-Gen5/runs/research_workbench/literature_grounded/lit_mr_02_1_relationship_atlas_01_20260729/mr02_panel_category_summary.csv</a:t>
+            </a:r>
+          </a:p>
+          <a:p xmlns:a="http://schemas.openxmlformats.org/drawingml/2006/main">
+            <a:r>
+              <a:t>- C:/Users/Franc/OneDrive/Documents/Francis/Peltata Project/Time-Series-Modeling-Gen5/runs/research_workbench/literature_grounded/lit_mr_02_1_relationship_atlas_01_20260729/visuals/mr02_panel_category_summary.png</a:t>
+            </a:r>
+          </a:p>
+          <a:p xmlns:a="http://schemas.openxmlformats.org/drawingml/2006/main">
+            <a:r>
+              <a:t>- C:/Users/Franc/OneDrive/Documents/Francis/Peltata Project/Time-Series-Modeling-Gen5/docs/GEN5_LIT_MR_02_1_RELATIONSHIP_ATLAS_01_CONTRACT.md</a:t>
+            </a:r>
+          </a:p>
+        </p:txBody>
+      </p:sp>
+      <p:sp>
+        <p:nvSpPr>
+          <p:cNvPr id="4" name="Slide Number Placeholder 3"/>
+          <p:cNvSpPr>
+            <a:spLocks xmlns:a="http://schemas.openxmlformats.org/drawingml/2006/main" noGrp="1"/>
+          </p:cNvSpPr>
+          <p:nvPr>
+            <p:ph type="sldNum" idx="5"/>
+          </p:nvPr>
+        </p:nvSpPr>
+        <p:spPr/>
+        <p:txBody>
+          <a:bodyPr xmlns:a="http://schemas.openxmlformats.org/drawingml/2006/main"/>
+          <a:lstStyle xmlns:a="http://schemas.openxmlformats.org/drawingml/2006/main"/>
+          <a:p xmlns:a="http://schemas.openxmlformats.org/drawingml/2006/main"/>
+        </p:txBody>
+      </p:sp>
+    </p:spTree>
+  </p:cSld>
+  <p:clrMapOvr>
+    <a:masterClrMapping xmlns:a="http://schemas.openxmlformats.org/drawingml/2006/main"/>
+  </p:clrMapOvr>
+</p:notes>
+</file>
+
+<file path=ppt/notesSlides/notesSlide37.xml><?xml version="1.0" encoding="utf-8"?>
+<p:notes xmlns:p="http://schemas.openxmlformats.org/presentationml/2006/main">
+  <p:cSld>
+    <p:spTree>
+      <p:nvGrpSpPr>
+        <p:cNvPr id="1" name=""/>
+        <p:cNvGrpSpPr/>
+        <p:nvPr/>
+      </p:nvGrpSpPr>
+      <p:grpSpPr>
+        <a:xfrm xmlns:a="http://schemas.openxmlformats.org/drawingml/2006/main"/>
+      </p:grpSpPr>
+      <p:sp>
+        <p:nvSpPr>
+          <p:cNvPr id="2" name="Slide Image Placeholder 1"/>
+          <p:cNvSpPr>
+            <a:spLocks xmlns:a="http://schemas.openxmlformats.org/drawingml/2006/main" noGrp="1"/>
+          </p:cNvSpPr>
+          <p:nvPr>
+            <p:ph type="sldImg" idx="0"/>
+          </p:nvPr>
+        </p:nvSpPr>
+        <p:spPr/>
+      </p:sp>
+      <p:sp>
+        <p:nvSpPr>
+          <p:cNvPr id="3" name="Notes Placeholder 2"/>
+          <p:cNvSpPr>
+            <a:spLocks xmlns:a="http://schemas.openxmlformats.org/drawingml/2006/main" noGrp="1"/>
+          </p:cNvSpPr>
+          <p:nvPr>
+            <p:ph type="body" idx="1"/>
+          </p:nvPr>
+        </p:nvSpPr>
+        <p:spPr/>
+        <p:txBody>
+          <a:bodyPr xmlns:a="http://schemas.openxmlformats.org/drawingml/2006/main"/>
+          <a:lstStyle xmlns:a="http://schemas.openxmlformats.org/drawingml/2006/main"/>
+          <a:p xmlns:a="http://schemas.openxmlformats.org/drawingml/2006/main">
+            <a:r>
+              <a:t>SIL–SLV averaged +56.8 bp per completed trade, but its 95% interval was approximately -19.3 to +143.3 bp. It passed six of eight gates and was not selected because the contract requires all eight.</a:t>
+            </a:r>
+          </a:p>
+          <a:p xmlns:a="http://schemas.openxmlformats.org/drawingml/2006/main">
+            <a:r>
+              <a:t/>
+            </a:r>
+          </a:p>
+          <a:p xmlns:a="http://schemas.openxmlformats.org/drawingml/2006/main">
+            <a:r>
+              <a:t>[Sources]</a:t>
+            </a:r>
+          </a:p>
+          <a:p xmlns:a="http://schemas.openxmlformats.org/drawingml/2006/main">
+            <a:r>
+              <a:t>- C:/Users/Franc/OneDrive/Documents/Francis/Peltata Project/Time-Series-Modeling-Gen5/runs/research_workbench/literature_grounded/lit_mr_02_1_relationship_atlas_01_20260729/mr02_panel_pair_summary.csv</a:t>
+            </a:r>
+          </a:p>
+          <a:p xmlns:a="http://schemas.openxmlformats.org/drawingml/2006/main">
+            <a:r>
+              <a:t>- C:/Users/Franc/OneDrive/Documents/Francis/Peltata Project/Time-Series-Modeling-Gen5/runs/research_workbench/literature_grounded/lit_mr_02_1_relationship_atlas_01_20260729/visuals/mr02_panel_pair_net_return_ci.png</a:t>
+            </a:r>
+          </a:p>
+          <a:p xmlns:a="http://schemas.openxmlformats.org/drawingml/2006/main">
+            <a:r>
+              <a:t>- C:/Users/Franc/OneDrive/Documents/Francis/Peltata Project/Time-Series-Modeling-Gen5/docs/GEN5_4_DECISION_DIALOGUE_INDEX.md — D75</a:t>
+            </a:r>
+          </a:p>
+        </p:txBody>
+      </p:sp>
+      <p:sp>
+        <p:nvSpPr>
+          <p:cNvPr id="4" name="Slide Number Placeholder 3"/>
+          <p:cNvSpPr>
+            <a:spLocks xmlns:a="http://schemas.openxmlformats.org/drawingml/2006/main" noGrp="1"/>
+          </p:cNvSpPr>
+          <p:nvPr>
+            <p:ph type="sldNum" idx="5"/>
+          </p:nvPr>
+        </p:nvSpPr>
+        <p:spPr/>
+        <p:txBody>
+          <a:bodyPr xmlns:a="http://schemas.openxmlformats.org/drawingml/2006/main"/>
+          <a:lstStyle xmlns:a="http://schemas.openxmlformats.org/drawingml/2006/main"/>
+          <a:p xmlns:a="http://schemas.openxmlformats.org/drawingml/2006/main"/>
+        </p:txBody>
+      </p:sp>
+    </p:spTree>
+  </p:cSld>
+  <p:clrMapOvr>
+    <a:masterClrMapping xmlns:a="http://schemas.openxmlformats.org/drawingml/2006/main"/>
+  </p:clrMapOvr>
+</p:notes>
+</file>
+
+<file path=ppt/notesSlides/notesSlide38.xml><?xml version="1.0" encoding="utf-8"?>
+<p:notes xmlns:p="http://schemas.openxmlformats.org/presentationml/2006/main">
+  <p:cSld>
+    <p:spTree>
+      <p:nvGrpSpPr>
+        <p:cNvPr id="1" name=""/>
+        <p:cNvGrpSpPr/>
+        <p:nvPr/>
+      </p:nvGrpSpPr>
+      <p:grpSpPr>
+        <a:xfrm xmlns:a="http://schemas.openxmlformats.org/drawingml/2006/main"/>
+      </p:grpSpPr>
+      <p:sp>
+        <p:nvSpPr>
+          <p:cNvPr id="2" name="Slide Image Placeholder 1"/>
+          <p:cNvSpPr>
+            <a:spLocks xmlns:a="http://schemas.openxmlformats.org/drawingml/2006/main" noGrp="1"/>
+          </p:cNvSpPr>
+          <p:nvPr>
+            <p:ph type="sldImg" idx="0"/>
+          </p:nvPr>
+        </p:nvSpPr>
+        <p:spPr/>
+      </p:sp>
+      <p:sp>
+        <p:nvSpPr>
+          <p:cNvPr id="3" name="Notes Placeholder 2"/>
+          <p:cNvSpPr>
+            <a:spLocks xmlns:a="http://schemas.openxmlformats.org/drawingml/2006/main" noGrp="1"/>
+          </p:cNvSpPr>
+          <p:nvPr>
+            <p:ph type="body" idx="1"/>
+          </p:nvPr>
+        </p:nvSpPr>
+        <p:spPr/>
+        <p:txBody>
+          <a:bodyPr xmlns:a="http://schemas.openxmlformats.org/drawingml/2006/main"/>
+          <a:lstStyle xmlns:a="http://schemas.openxmlformats.org/drawingml/2006/main"/>
+          <a:p xmlns:a="http://schemas.openxmlformats.org/drawingml/2006/main">
+            <a:r>
+              <a:t>The cold/partial-cache WARNs record the pre-refresh state. The runner refreshed all affected 2016–2020 ranges, each pair passed requested coverage, and the analysis health used by the gates was PASS.</a:t>
+            </a:r>
+          </a:p>
+          <a:p xmlns:a="http://schemas.openxmlformats.org/drawingml/2006/main">
+            <a:r>
+              <a:t/>
+            </a:r>
+          </a:p>
+          <a:p xmlns:a="http://schemas.openxmlformats.org/drawingml/2006/main">
+            <a:r>
+              <a:t>[Sources]</a:t>
+            </a:r>
+          </a:p>
+          <a:p xmlns:a="http://schemas.openxmlformats.org/drawingml/2006/main">
+            <a:r>
+              <a:t>- C:/Users/Franc/OneDrive/Documents/Francis/Peltata Project/Time-Series-Modeling-Gen5/runs/research_workbench/literature_grounded/lit_mr_02_1_relationship_atlas_01_20260729/mr02_panel_gate_detail.csv</a:t>
+            </a:r>
+          </a:p>
+          <a:p xmlns:a="http://schemas.openxmlformats.org/drawingml/2006/main">
+            <a:r>
+              <a:t>- C:/Users/Franc/OneDrive/Documents/Francis/Peltata Project/Time-Series-Modeling-Gen5/runs/research_workbench/literature_grounded/lit_mr_02_1_relationship_atlas_01_20260729/mr02_panel_pair_coverage.csv</a:t>
+            </a:r>
+          </a:p>
+          <a:p xmlns:a="http://schemas.openxmlformats.org/drawingml/2006/main">
+            <a:r>
+              <a:t>- C:/Users/Franc/OneDrive/Documents/Francis/Peltata Project/Time-Series-Modeling-Gen5/runs/research_workbench/literature_grounded/lit_mr_02_1_relationship_atlas_01_20260729/mr02_panel_workbench_query_health.csv</a:t>
+            </a:r>
+          </a:p>
+          <a:p xmlns:a="http://schemas.openxmlformats.org/drawingml/2006/main">
+            <a:r>
+              <a:t>- C:/Users/Franc/OneDrive/Documents/Francis/Peltata Project/Time-Series-Modeling-Gen5/docs/GEN5_4_DECISION_DIALOGUE_INDEX.md — D75</a:t>
+            </a:r>
+          </a:p>
+        </p:txBody>
+      </p:sp>
+      <p:sp>
+        <p:nvSpPr>
+          <p:cNvPr id="4" name="Slide Number Placeholder 3"/>
+          <p:cNvSpPr>
+            <a:spLocks xmlns:a="http://schemas.openxmlformats.org/drawingml/2006/main" noGrp="1"/>
+          </p:cNvSpPr>
+          <p:nvPr>
+            <p:ph type="sldNum" idx="5"/>
+          </p:nvPr>
+        </p:nvSpPr>
+        <p:spPr/>
+        <p:txBody>
+          <a:bodyPr xmlns:a="http://schemas.openxmlformats.org/drawingml/2006/main"/>
+          <a:lstStyle xmlns:a="http://schemas.openxmlformats.org/drawingml/2006/main"/>
+          <a:p xmlns:a="http://schemas.openxmlformats.org/drawingml/2006/main"/>
+        </p:txBody>
+      </p:sp>
+    </p:spTree>
+  </p:cSld>
+  <p:clrMapOvr>
+    <a:masterClrMapping xmlns:a="http://schemas.openxmlformats.org/drawingml/2006/main"/>
+  </p:clrMapOvr>
+</p:notes>
+</file>
+
+<file path=ppt/notesSlides/notesSlide39.xml><?xml version="1.0" encoding="utf-8"?>
+<p:notes xmlns:p="http://schemas.openxmlformats.org/presentationml/2006/main">
+  <p:cSld>
+    <p:spTree>
+      <p:nvGrpSpPr>
+        <p:cNvPr id="1" name=""/>
+        <p:cNvGrpSpPr/>
+        <p:nvPr/>
+      </p:nvGrpSpPr>
+      <p:grpSpPr>
+        <a:xfrm xmlns:a="http://schemas.openxmlformats.org/drawingml/2006/main"/>
+      </p:grpSpPr>
+      <p:sp>
+        <p:nvSpPr>
+          <p:cNvPr id="2" name="Slide Image Placeholder 1"/>
+          <p:cNvSpPr>
+            <a:spLocks xmlns:a="http://schemas.openxmlformats.org/drawingml/2006/main" noGrp="1"/>
+          </p:cNvSpPr>
+          <p:nvPr>
+            <p:ph type="sldImg" idx="0"/>
+          </p:nvPr>
+        </p:nvSpPr>
+        <p:spPr/>
+      </p:sp>
+      <p:sp>
+        <p:nvSpPr>
+          <p:cNvPr id="3" name="Notes Placeholder 2"/>
+          <p:cNvSpPr>
+            <a:spLocks xmlns:a="http://schemas.openxmlformats.org/drawingml/2006/main" noGrp="1"/>
+          </p:cNvSpPr>
+          <p:nvPr>
+            <p:ph type="body" idx="1"/>
+          </p:nvPr>
+        </p:nvSpPr>
+        <p:spPr/>
+        <p:txBody>
+          <a:bodyPr xmlns:a="http://schemas.openxmlformats.org/drawingml/2006/main"/>
+          <a:lstStyle xmlns:a="http://schemas.openxmlformats.org/drawingml/2006/main"/>
+          <a:p xmlns:a="http://schemas.openxmlformats.org/drawingml/2006/main">
+            <a:r>
+              <a:t>The research mechanism succeeded operationally: hypotheses were generated, labeled, frozen, and fully reported. The trading mechanism did not earn OOS evaluation.</a:t>
+            </a:r>
+          </a:p>
+          <a:p xmlns:a="http://schemas.openxmlformats.org/drawingml/2006/main">
+            <a:r>
+              <a:t/>
+            </a:r>
+          </a:p>
+          <a:p xmlns:a="http://schemas.openxmlformats.org/drawingml/2006/main">
+            <a:r>
+              <a:t>[Sources]</a:t>
+            </a:r>
+          </a:p>
+          <a:p xmlns:a="http://schemas.openxmlformats.org/drawingml/2006/main">
+            <a:r>
+              <a:t>- C:/Users/Franc/OneDrive/Documents/Francis/Peltata Project/Time-Series-Modeling-Gen5/runs/research_workbench/literature_grounded/lit_mr_02_1_relationship_atlas_01_20260729/mr02_panel_report.md</a:t>
+            </a:r>
+          </a:p>
+          <a:p xmlns:a="http://schemas.openxmlformats.org/drawingml/2006/main">
+            <a:r>
+              <a:t>- C:/Users/Franc/OneDrive/Documents/Francis/Peltata Project/Time-Series-Modeling-Gen5/docs/GEN5_LIT_MR_02_1_RELATIONSHIP_ATLAS_01_CONTRACT.md</a:t>
+            </a:r>
+          </a:p>
+          <a:p xmlns:a="http://schemas.openxmlformats.org/drawingml/2006/main">
+            <a:r>
+              <a:t>- C:/Users/Franc/OneDrive/Documents/Francis/Peltata Project/Time-Series-Modeling-Gen5/docs/GEN5_4_DECISION_DIALOGUE_INDEX.md — D75</a:t>
             </a:r>
           </a:p>
         </p:txBody>
@@ -3627,7 +4208,7 @@
   </p:cSld>
   <p:clrMap bg1="lt1" tx1="dk1" bg2="lt2" tx2="dk2" accent1="accent1" accent2="accent2" accent3="accent3" accent4="accent4" accent5="accent5" accent6="accent6" hlink="hlink" folHlink="folHlink"/>
   <p:sldLayoutIdLst>
-    <p:sldLayoutId xmlns:r="http://schemas.openxmlformats.org/officeDocument/2006/relationships" id="2147483649" r:id="Ra1a0374a32c04fa0"/>
+    <p:sldLayoutId xmlns:r="http://schemas.openxmlformats.org/officeDocument/2006/relationships" id="2147483649" r:id="R5cc82d5a655c4aa4"/>
   </p:sldLayoutIdLst>
   <p:txStyles>
     <p:titleStyle>
@@ -4254,7 +4835,7 @@
               </a:defRPr>
             </a:pPr>
             <a:r>
-              <a:t>USO-GLD remains the canonical literature example. Two predeclared panels test the same 20-session template across 27 primary ETF relationships.</a:t>
+              <a:t>USO-GLD remains the canonical literature example. Two panels, two positive controls, and a 25-pair relationship atlas now test what the exact 20-session template can and cannot do.</a:t>
             </a:r>
           </a:p>
         </p:txBody>
@@ -5039,7 +5620,7 @@
           <p:nvPr/>
         </p:nvPicPr>
         <p:blipFill>
-          <a:blip xmlns:r="http://schemas.openxmlformats.org/officeDocument/2006/relationships" xmlns:a="http://schemas.openxmlformats.org/drawingml/2006/main" r:embed="R71dcec5ac9874291"/>
+          <a:blip xmlns:r="http://schemas.openxmlformats.org/officeDocument/2006/relationships" xmlns:a="http://schemas.openxmlformats.org/drawingml/2006/main" r:embed="Re31f76706eef43ed"/>
           <a:stretch xmlns:a="http://schemas.openxmlformats.org/drawingml/2006/main"/>
         </p:blipFill>
         <p:spPr>
@@ -5463,7 +6044,7 @@
           <p:nvPr/>
         </p:nvPicPr>
         <p:blipFill>
-          <a:blip xmlns:r="http://schemas.openxmlformats.org/officeDocument/2006/relationships" xmlns:a="http://schemas.openxmlformats.org/drawingml/2006/main" r:embed="R13899be0952b4bf4"/>
+          <a:blip xmlns:r="http://schemas.openxmlformats.org/officeDocument/2006/relationships" xmlns:a="http://schemas.openxmlformats.org/drawingml/2006/main" r:embed="R02cc9caa30884832"/>
           <a:stretch xmlns:a="http://schemas.openxmlformats.org/drawingml/2006/main"/>
         </p:blipFill>
         <p:spPr>
@@ -5887,7 +6468,7 @@
           <p:nvPr/>
         </p:nvPicPr>
         <p:blipFill>
-          <a:blip xmlns:r="http://schemas.openxmlformats.org/officeDocument/2006/relationships" xmlns:a="http://schemas.openxmlformats.org/drawingml/2006/main" r:embed="R9c4e1140669747a5"/>
+          <a:blip xmlns:r="http://schemas.openxmlformats.org/officeDocument/2006/relationships" xmlns:a="http://schemas.openxmlformats.org/drawingml/2006/main" r:embed="R62bd80f18e0545c5"/>
           <a:stretch xmlns:a="http://schemas.openxmlformats.org/drawingml/2006/main"/>
         </p:blipFill>
         <p:spPr>
@@ -6311,7 +6892,7 @@
           <p:nvPr/>
         </p:nvPicPr>
         <p:blipFill>
-          <a:blip xmlns:r="http://schemas.openxmlformats.org/officeDocument/2006/relationships" xmlns:a="http://schemas.openxmlformats.org/drawingml/2006/main" r:embed="R45bfa71339624c40"/>
+          <a:blip xmlns:r="http://schemas.openxmlformats.org/officeDocument/2006/relationships" xmlns:a="http://schemas.openxmlformats.org/drawingml/2006/main" r:embed="Racb7175d045a4f3a"/>
           <a:stretch xmlns:a="http://schemas.openxmlformats.org/drawingml/2006/main"/>
         </p:blipFill>
         <p:spPr>
@@ -6529,7 +7110,7 @@
           <p:nvPr/>
         </p:nvPicPr>
         <p:blipFill>
-          <a:blip xmlns:r="http://schemas.openxmlformats.org/officeDocument/2006/relationships" xmlns:a="http://schemas.openxmlformats.org/drawingml/2006/main" r:embed="R45e6611d26dc46bf"/>
+          <a:blip xmlns:r="http://schemas.openxmlformats.org/officeDocument/2006/relationships" xmlns:a="http://schemas.openxmlformats.org/drawingml/2006/main" r:embed="Raba8d41ff27945bf"/>
           <a:stretch xmlns:a="http://schemas.openxmlformats.org/drawingml/2006/main"/>
         </p:blipFill>
         <p:spPr>
@@ -8001,7 +8582,7 @@
           <p:nvPr/>
         </p:nvPicPr>
         <p:blipFill>
-          <a:blip xmlns:r="http://schemas.openxmlformats.org/officeDocument/2006/relationships" xmlns:a="http://schemas.openxmlformats.org/drawingml/2006/main" r:embed="R5c81fbcb86254369"/>
+          <a:blip xmlns:r="http://schemas.openxmlformats.org/officeDocument/2006/relationships" xmlns:a="http://schemas.openxmlformats.org/drawingml/2006/main" r:embed="Ra39a3de3ed27442d"/>
           <a:stretch xmlns:a="http://schemas.openxmlformats.org/drawingml/2006/main"/>
         </p:blipFill>
         <p:spPr>
@@ -8056,7 +8637,7 @@
           <p:nvPr/>
         </p:nvPicPr>
         <p:blipFill>
-          <a:blip xmlns:r="http://schemas.openxmlformats.org/officeDocument/2006/relationships" xmlns:a="http://schemas.openxmlformats.org/drawingml/2006/main" r:embed="R3d69b906cf634785"/>
+          <a:blip xmlns:r="http://schemas.openxmlformats.org/officeDocument/2006/relationships" xmlns:a="http://schemas.openxmlformats.org/drawingml/2006/main" r:embed="R66936a1f1ce64ded"/>
           <a:stretch xmlns:a="http://schemas.openxmlformats.org/drawingml/2006/main"/>
         </p:blipFill>
         <p:spPr>
@@ -8273,7 +8854,7 @@
           <p:nvPr/>
         </p:nvPicPr>
         <p:blipFill>
-          <a:blip xmlns:r="http://schemas.openxmlformats.org/officeDocument/2006/relationships" xmlns:a="http://schemas.openxmlformats.org/drawingml/2006/main" r:embed="Ra5af1645de194588"/>
+          <a:blip xmlns:r="http://schemas.openxmlformats.org/officeDocument/2006/relationships" xmlns:a="http://schemas.openxmlformats.org/drawingml/2006/main" r:embed="Rbd2aed99ddc043b1"/>
           <a:stretch xmlns:a="http://schemas.openxmlformats.org/drawingml/2006/main"/>
         </p:blipFill>
         <p:spPr>
@@ -8328,7 +8909,7 @@
           <p:nvPr/>
         </p:nvPicPr>
         <p:blipFill>
-          <a:blip xmlns:r="http://schemas.openxmlformats.org/officeDocument/2006/relationships" xmlns:a="http://schemas.openxmlformats.org/drawingml/2006/main" r:embed="Rcc6a4591a7ca41b5"/>
+          <a:blip xmlns:r="http://schemas.openxmlformats.org/officeDocument/2006/relationships" xmlns:a="http://schemas.openxmlformats.org/drawingml/2006/main" r:embed="Rd04e5a0ac68d41bd"/>
           <a:stretch xmlns:a="http://schemas.openxmlformats.org/drawingml/2006/main"/>
         </p:blipFill>
         <p:spPr>
@@ -10324,7 +10905,7 @@
           <p:nvPr/>
         </p:nvPicPr>
         <p:blipFill>
-          <a:blip xmlns:r="http://schemas.openxmlformats.org/officeDocument/2006/relationships" xmlns:a="http://schemas.openxmlformats.org/drawingml/2006/main" r:embed="R8df3f82992d745ee"/>
+          <a:blip xmlns:r="http://schemas.openxmlformats.org/officeDocument/2006/relationships" xmlns:a="http://schemas.openxmlformats.org/drawingml/2006/main" r:embed="Rc197fb6debf94337"/>
           <a:stretch xmlns:a="http://schemas.openxmlformats.org/drawingml/2006/main"/>
         </p:blipFill>
         <p:spPr>
@@ -10379,7 +10960,7 @@
           <p:nvPr/>
         </p:nvPicPr>
         <p:blipFill>
-          <a:blip xmlns:r="http://schemas.openxmlformats.org/officeDocument/2006/relationships" xmlns:a="http://schemas.openxmlformats.org/drawingml/2006/main" r:embed="Rac8e83e25b114709"/>
+          <a:blip xmlns:r="http://schemas.openxmlformats.org/officeDocument/2006/relationships" xmlns:a="http://schemas.openxmlformats.org/drawingml/2006/main" r:embed="R9e526d70f7d14a3c"/>
           <a:stretch xmlns:a="http://schemas.openxmlformats.org/drawingml/2006/main"/>
         </p:blipFill>
         <p:spPr>
@@ -10434,7 +11015,7 @@
           <p:nvPr/>
         </p:nvPicPr>
         <p:blipFill>
-          <a:blip xmlns:r="http://schemas.openxmlformats.org/officeDocument/2006/relationships" xmlns:a="http://schemas.openxmlformats.org/drawingml/2006/main" r:embed="R05f294c1ea664919"/>
+          <a:blip xmlns:r="http://schemas.openxmlformats.org/officeDocument/2006/relationships" xmlns:a="http://schemas.openxmlformats.org/drawingml/2006/main" r:embed="R49bdd644c4354c8f"/>
           <a:stretch xmlns:a="http://schemas.openxmlformats.org/drawingml/2006/main"/>
         </p:blipFill>
         <p:spPr>
@@ -10651,7 +11232,7 @@
           <p:nvPr/>
         </p:nvPicPr>
         <p:blipFill>
-          <a:blip xmlns:r="http://schemas.openxmlformats.org/officeDocument/2006/relationships" xmlns:a="http://schemas.openxmlformats.org/drawingml/2006/main" r:embed="Raef4fd53fe314a8b"/>
+          <a:blip xmlns:r="http://schemas.openxmlformats.org/officeDocument/2006/relationships" xmlns:a="http://schemas.openxmlformats.org/drawingml/2006/main" r:embed="R2a9ded3584474426"/>
           <a:stretch xmlns:a="http://schemas.openxmlformats.org/drawingml/2006/main"/>
         </p:blipFill>
         <p:spPr>
@@ -10706,7 +11287,7 @@
           <p:nvPr/>
         </p:nvPicPr>
         <p:blipFill>
-          <a:blip xmlns:r="http://schemas.openxmlformats.org/officeDocument/2006/relationships" xmlns:a="http://schemas.openxmlformats.org/drawingml/2006/main" r:embed="R97365f103a734819"/>
+          <a:blip xmlns:r="http://schemas.openxmlformats.org/officeDocument/2006/relationships" xmlns:a="http://schemas.openxmlformats.org/drawingml/2006/main" r:embed="R5500d513365844d1"/>
           <a:stretch xmlns:a="http://schemas.openxmlformats.org/drawingml/2006/main"/>
         </p:blipFill>
         <p:spPr>
@@ -10761,7 +11342,7 @@
           <p:nvPr/>
         </p:nvPicPr>
         <p:blipFill>
-          <a:blip xmlns:r="http://schemas.openxmlformats.org/officeDocument/2006/relationships" xmlns:a="http://schemas.openxmlformats.org/drawingml/2006/main" r:embed="Reaf46b9b65a8475e"/>
+          <a:blip xmlns:r="http://schemas.openxmlformats.org/officeDocument/2006/relationships" xmlns:a="http://schemas.openxmlformats.org/drawingml/2006/main" r:embed="R4e5e34c597044fa6"/>
           <a:stretch xmlns:a="http://schemas.openxmlformats.org/drawingml/2006/main"/>
         </p:blipFill>
         <p:spPr>
@@ -11915,7 +12496,7 @@
           <p:nvPr/>
         </p:nvPicPr>
         <p:blipFill>
-          <a:blip xmlns:r="http://schemas.openxmlformats.org/officeDocument/2006/relationships" xmlns:a="http://schemas.openxmlformats.org/drawingml/2006/main" r:embed="Rc81b5756c1a44421"/>
+          <a:blip xmlns:r="http://schemas.openxmlformats.org/officeDocument/2006/relationships" xmlns:a="http://schemas.openxmlformats.org/drawingml/2006/main" r:embed="R95c51f777206421c"/>
           <a:stretch xmlns:a="http://schemas.openxmlformats.org/drawingml/2006/main"/>
         </p:blipFill>
         <p:spPr>
@@ -12049,7 +12630,7 @@
           <p:nvPr/>
         </p:nvPicPr>
         <p:blipFill>
-          <a:blip xmlns:r="http://schemas.openxmlformats.org/officeDocument/2006/relationships" xmlns:a="http://schemas.openxmlformats.org/drawingml/2006/main" r:embed="Re7e1fa4247bc46c4"/>
+          <a:blip xmlns:r="http://schemas.openxmlformats.org/officeDocument/2006/relationships" xmlns:a="http://schemas.openxmlformats.org/drawingml/2006/main" r:embed="Ra44f53a5f694413a"/>
           <a:stretch xmlns:a="http://schemas.openxmlformats.org/drawingml/2006/main"/>
         </p:blipFill>
         <p:spPr>
@@ -12183,7 +12764,7 @@
           <p:nvPr/>
         </p:nvPicPr>
         <p:blipFill>
-          <a:blip xmlns:r="http://schemas.openxmlformats.org/officeDocument/2006/relationships" xmlns:a="http://schemas.openxmlformats.org/drawingml/2006/main" r:embed="R760b192826804a0a"/>
+          <a:blip xmlns:r="http://schemas.openxmlformats.org/officeDocument/2006/relationships" xmlns:a="http://schemas.openxmlformats.org/drawingml/2006/main" r:embed="R186e7b107bec4fae"/>
           <a:stretch xmlns:a="http://schemas.openxmlformats.org/drawingml/2006/main"/>
         </p:blipFill>
         <p:spPr>
@@ -12317,7 +12898,7 @@
           <p:nvPr/>
         </p:nvPicPr>
         <p:blipFill>
-          <a:blip xmlns:r="http://schemas.openxmlformats.org/officeDocument/2006/relationships" xmlns:a="http://schemas.openxmlformats.org/drawingml/2006/main" r:embed="Recf193e704df4636"/>
+          <a:blip xmlns:r="http://schemas.openxmlformats.org/officeDocument/2006/relationships" xmlns:a="http://schemas.openxmlformats.org/drawingml/2006/main" r:embed="Rd2ed605e315f4efc"/>
           <a:stretch xmlns:a="http://schemas.openxmlformats.org/drawingml/2006/main"/>
         </p:blipFill>
         <p:spPr>
@@ -13151,7 +13732,7 @@
           <p:nvPr/>
         </p:nvPicPr>
         <p:blipFill>
-          <a:blip xmlns:r="http://schemas.openxmlformats.org/officeDocument/2006/relationships" xmlns:a="http://schemas.openxmlformats.org/drawingml/2006/main" r:embed="R5b90afa89cdb4fc6"/>
+          <a:blip xmlns:r="http://schemas.openxmlformats.org/officeDocument/2006/relationships" xmlns:a="http://schemas.openxmlformats.org/drawingml/2006/main" r:embed="R65358a4d80c1491c"/>
           <a:stretch xmlns:a="http://schemas.openxmlformats.org/drawingml/2006/main"/>
         </p:blipFill>
         <p:spPr>
@@ -13605,7 +14186,7 @@
           <p:nvPr/>
         </p:nvPicPr>
         <p:blipFill>
-          <a:blip xmlns:r="http://schemas.openxmlformats.org/officeDocument/2006/relationships" xmlns:a="http://schemas.openxmlformats.org/drawingml/2006/main" r:embed="Redc828645bd54289"/>
+          <a:blip xmlns:r="http://schemas.openxmlformats.org/officeDocument/2006/relationships" xmlns:a="http://schemas.openxmlformats.org/drawingml/2006/main" r:embed="Rd8c2b16c2766497c"/>
           <a:stretch xmlns:a="http://schemas.openxmlformats.org/drawingml/2006/main"/>
         </p:blipFill>
         <p:spPr>
@@ -13804,6 +14385,2179 @@
 </p:sld>
 </file>
 
+<file path=ppt/slides/slide34.xml><?xml version="1.0" encoding="utf-8"?>
+<p:sld xmlns:p="http://schemas.openxmlformats.org/presentationml/2006/main">
+  <p:cSld>
+    <p:spTree>
+      <p:nvGrpSpPr>
+        <p:cNvPr id="1" name=""/>
+        <p:cNvGrpSpPr/>
+        <p:nvPr/>
+      </p:nvGrpSpPr>
+      <p:grpSpPr>
+        <a:xfrm xmlns:a="http://schemas.openxmlformats.org/drawingml/2006/main"/>
+      </p:grpSpPr>
+      <p:sp>
+        <p:nvSpPr>
+          <p:cNvPr id="4" name="cover-headline">
+            <a:extLst xmlns:a="http://schemas.openxmlformats.org/drawingml/2006/main">
+              <a:ext uri="{FF2B5EF4-FFF2-40B4-BE49-F238E27FC236}">
+                <a16:creationId xmlns:a16="http://schemas.microsoft.com/office/drawing/2014/main" id="{DA6318FA-2F99-4DF9-A744-06350F910925}"/>
+              </a:ext>
+            </a:extLst>
+          </p:cNvPr>
+          <p:cNvSpPr>
+            <a:spLocks xmlns:a="http://schemas.openxmlformats.org/drawingml/2006/main" noGrp="1"/>
+          </p:cNvSpPr>
+          <p:nvPr/>
+        </p:nvSpPr>
+        <p:spPr>
+          <a:xfrm xmlns:a="http://schemas.openxmlformats.org/drawingml/2006/main">
+            <a:off x="393668" y="1738789"/>
+            <a:ext cx="10287000" cy="2491454"/>
+          </a:xfrm>
+          <a:prstGeom xmlns:a="http://schemas.openxmlformats.org/drawingml/2006/main" prst="rect">
+            <a:avLst/>
+          </a:prstGeom>
+        </p:spPr>
+        <p:txBody>
+          <a:bodyPr xmlns:a="http://schemas.openxmlformats.org/drawingml/2006/main" lIns="0" tIns="0" rIns="0" bIns="0" anchor="b">
+            <a:normAutofit fontScale="100000"/>
+          </a:bodyPr>
+          <a:lstStyle xmlns:a="http://schemas.openxmlformats.org/drawingml/2006/main"/>
+          <a:p xmlns:a="http://schemas.openxmlformats.org/drawingml/2006/main">
+            <a:pPr algn="l">
+              <a:buNone/>
+              <a:defRPr sz="5700">
+                <a:solidFill>
+                  <a:srgbClr val="000000"/>
+                </a:solidFill>
+                <a:latin typeface="Helvetica Neue"/>
+                <a:ea typeface="Helvetica Neue"/>
+                <a:cs typeface="Helvetica Neue"/>
+              </a:defRPr>
+            </a:pPr>
+            <a:r>
+              <a:t>Relationship Atlas 01:</a:t>
+            </a:r>
+          </a:p>
+          <a:p xmlns:a="http://schemas.openxmlformats.org/drawingml/2006/main">
+            <a:pPr algn="l">
+              <a:buNone/>
+              <a:defRPr sz="5700">
+                <a:solidFill>
+                  <a:srgbClr val="000000"/>
+                </a:solidFill>
+                <a:latin typeface="Helvetica Neue"/>
+                <a:ea typeface="Helvetica Neue"/>
+                <a:cs typeface="Helvetica Neue"/>
+              </a:defRPr>
+            </a:pPr>
+            <a:r>
+              <a:t>hypotheses, not fishing</a:t>
+            </a:r>
+          </a:p>
+        </p:txBody>
+      </p:sp>
+      <p:sp>
+        <p:nvSpPr>
+          <p:cNvPr id="2" name="cover-subtitle">
+            <a:extLst xmlns:a="http://schemas.openxmlformats.org/drawingml/2006/main">
+              <a:ext uri="{FF2B5EF4-FFF2-40B4-BE49-F238E27FC236}">
+                <a16:creationId xmlns:a16="http://schemas.microsoft.com/office/drawing/2014/main" id="{E169DF7F-9A3A-4AE2-8055-4ED350724D47}"/>
+              </a:ext>
+            </a:extLst>
+          </p:cNvPr>
+          <p:cNvSpPr>
+            <a:spLocks xmlns:a="http://schemas.openxmlformats.org/drawingml/2006/main" noGrp="1"/>
+          </p:cNvSpPr>
+          <p:nvPr/>
+        </p:nvSpPr>
+        <p:spPr>
+          <a:xfrm xmlns:a="http://schemas.openxmlformats.org/drawingml/2006/main">
+            <a:off x="393668" y="4762500"/>
+            <a:ext cx="8001000" cy="1238250"/>
+          </a:xfrm>
+          <a:prstGeom xmlns:a="http://schemas.openxmlformats.org/drawingml/2006/main" prst="rect">
+            <a:avLst/>
+          </a:prstGeom>
+        </p:spPr>
+        <p:txBody>
+          <a:bodyPr xmlns:a="http://schemas.openxmlformats.org/drawingml/2006/main" lIns="0" tIns="0" rIns="0" bIns="0">
+            <a:normAutofit fontScale="100000"/>
+          </a:bodyPr>
+          <a:lstStyle xmlns:a="http://schemas.openxmlformats.org/drawingml/2006/main"/>
+          <a:p xmlns:a="http://schemas.openxmlformats.org/drawingml/2006/main">
+            <a:pPr algn="l">
+              <a:buNone/>
+              <a:defRPr sz="2250">
+                <a:solidFill>
+                  <a:srgbClr val="000000"/>
+                </a:solidFill>
+                <a:latin typeface="Helvetica Neue"/>
+                <a:ea typeface="Helvetica Neue"/>
+                <a:cs typeface="Helvetica Neue"/>
+              </a:defRPr>
+            </a:pPr>
+            <a:r>
+              <a:t>A finite generator crosses instrument topology with economic mechanism, then reports every 2016–2020 TRAIN result in frozen order.</a:t>
+            </a:r>
+          </a:p>
+        </p:txBody>
+      </p:sp>
+      <p:sp>
+        <p:nvSpPr>
+          <p:cNvPr id="3" name="cover-eyebrow">
+            <a:extLst xmlns:a="http://schemas.openxmlformats.org/drawingml/2006/main">
+              <a:ext uri="{FF2B5EF4-FFF2-40B4-BE49-F238E27FC236}">
+                <a16:creationId xmlns:a16="http://schemas.microsoft.com/office/drawing/2014/main" id="{D2399950-CA2D-41D2-BB2E-E681018A573E}"/>
+              </a:ext>
+            </a:extLst>
+          </p:cNvPr>
+          <p:cNvSpPr>
+            <a:spLocks xmlns:a="http://schemas.openxmlformats.org/drawingml/2006/main" noGrp="1"/>
+          </p:cNvSpPr>
+          <p:nvPr/>
+        </p:nvSpPr>
+        <p:spPr>
+          <a:xfrm xmlns:a="http://schemas.openxmlformats.org/drawingml/2006/main">
+            <a:off x="393668" y="392240"/>
+            <a:ext cx="7239000" cy="649129"/>
+          </a:xfrm>
+          <a:prstGeom xmlns:a="http://schemas.openxmlformats.org/drawingml/2006/main" prst="rect">
+            <a:avLst/>
+          </a:prstGeom>
+        </p:spPr>
+        <p:txBody>
+          <a:bodyPr xmlns:a="http://schemas.openxmlformats.org/drawingml/2006/main" lIns="0" tIns="0" rIns="0" bIns="0">
+            <a:normAutofit fontScale="100000"/>
+          </a:bodyPr>
+          <a:lstStyle xmlns:a="http://schemas.openxmlformats.org/drawingml/2006/main"/>
+          <a:p xmlns:a="http://schemas.openxmlformats.org/drawingml/2006/main">
+            <a:pPr algn="l">
+              <a:buNone/>
+              <a:defRPr sz="2250">
+                <a:solidFill>
+                  <a:srgbClr val="000000"/>
+                </a:solidFill>
+                <a:latin typeface="Helvetica Neue"/>
+                <a:ea typeface="Helvetica Neue"/>
+                <a:cs typeface="Helvetica Neue"/>
+              </a:defRPr>
+            </a:pPr>
+            <a:r>
+              <a:t>LIT-MR-02.1 INSTANCE BATCH | 29 JUL 2026</a:t>
+            </a:r>
+          </a:p>
+        </p:txBody>
+      </p:sp>
+    </p:spTree>
+    <p:extLst>
+      <p:ext uri="{BB962C8B-B14F-4D97-AF65-F5344CB8AC3E}">
+        <p14:creationId xmlns:p14="http://schemas.microsoft.com/office/powerpoint/2010/main" val="2092893396"/>
+      </p:ext>
+    </p:extLst>
+  </p:cSld>
+</p:sld>
+</file>
+
+<file path=ppt/slides/slide35.xml><?xml version="1.0" encoding="utf-8"?>
+<p:sld xmlns:p="http://schemas.openxmlformats.org/presentationml/2006/main">
+  <p:cSld>
+    <p:spTree>
+      <p:nvGrpSpPr>
+        <p:cNvPr id="1" name=""/>
+        <p:cNvGrpSpPr/>
+        <p:nvPr/>
+      </p:nvGrpSpPr>
+      <p:grpSpPr>
+        <a:xfrm xmlns:a="http://schemas.openxmlformats.org/drawingml/2006/main"/>
+      </p:grpSpPr>
+      <p:sp>
+        <p:nvSpPr>
+          <p:cNvPr id="13" name="stat-card-1">
+            <a:extLst xmlns:a="http://schemas.openxmlformats.org/drawingml/2006/main">
+              <a:ext uri="{FF2B5EF4-FFF2-40B4-BE49-F238E27FC236}">
+                <a16:creationId xmlns:a16="http://schemas.microsoft.com/office/drawing/2014/main" id="{8D249104-692F-481F-82EC-326C84E9007D}"/>
+              </a:ext>
+            </a:extLst>
+          </p:cNvPr>
+          <p:cNvSpPr>
+            <a:spLocks xmlns:a="http://schemas.openxmlformats.org/drawingml/2006/main" noGrp="1"/>
+          </p:cNvSpPr>
+          <p:nvPr/>
+        </p:nvSpPr>
+        <p:spPr>
+          <a:xfrm xmlns:a="http://schemas.openxmlformats.org/drawingml/2006/main">
+            <a:off x="393668" y="3022568"/>
+            <a:ext cx="3568732" cy="2971800"/>
+          </a:xfrm>
+          <a:prstGeom xmlns:a="http://schemas.openxmlformats.org/drawingml/2006/main" prst="roundRect">
+            <a:avLst>
+              <a:gd name="adj" fmla="val 2564"/>
+            </a:avLst>
+          </a:prstGeom>
+          <a:solidFill xmlns:a="http://schemas.openxmlformats.org/drawingml/2006/main">
+            <a:srgbClr val="F2F2F2"/>
+          </a:solidFill>
+        </p:spPr>
+      </p:sp>
+      <p:sp>
+        <p:nvSpPr>
+          <p:cNvPr id="2" name="stat-card-2">
+            <a:extLst xmlns:a="http://schemas.openxmlformats.org/drawingml/2006/main">
+              <a:ext uri="{FF2B5EF4-FFF2-40B4-BE49-F238E27FC236}">
+                <a16:creationId xmlns:a16="http://schemas.microsoft.com/office/drawing/2014/main" id="{02412AD9-1F13-493C-BF6C-FD8BDE750CD9}"/>
+              </a:ext>
+            </a:extLst>
+          </p:cNvPr>
+          <p:cNvSpPr>
+            <a:spLocks xmlns:a="http://schemas.openxmlformats.org/drawingml/2006/main" noGrp="1"/>
+          </p:cNvSpPr>
+          <p:nvPr/>
+        </p:nvSpPr>
+        <p:spPr>
+          <a:xfrm xmlns:a="http://schemas.openxmlformats.org/drawingml/2006/main">
+            <a:off x="4311682" y="3022568"/>
+            <a:ext cx="3568732" cy="2971800"/>
+          </a:xfrm>
+          <a:prstGeom xmlns:a="http://schemas.openxmlformats.org/drawingml/2006/main" prst="roundRect">
+            <a:avLst>
+              <a:gd name="adj" fmla="val 2564"/>
+            </a:avLst>
+          </a:prstGeom>
+          <a:solidFill xmlns:a="http://schemas.openxmlformats.org/drawingml/2006/main">
+            <a:srgbClr val="F2F2F2"/>
+          </a:solidFill>
+        </p:spPr>
+      </p:sp>
+      <p:sp>
+        <p:nvSpPr>
+          <p:cNvPr id="3" name="stat-card-3">
+            <a:extLst xmlns:a="http://schemas.openxmlformats.org/drawingml/2006/main">
+              <a:ext uri="{FF2B5EF4-FFF2-40B4-BE49-F238E27FC236}">
+                <a16:creationId xmlns:a16="http://schemas.microsoft.com/office/drawing/2014/main" id="{63597CCF-F233-4A0C-BCFA-192F852FDBEA}"/>
+              </a:ext>
+            </a:extLst>
+          </p:cNvPr>
+          <p:cNvSpPr>
+            <a:spLocks xmlns:a="http://schemas.openxmlformats.org/drawingml/2006/main" noGrp="1"/>
+          </p:cNvSpPr>
+          <p:nvPr/>
+        </p:nvSpPr>
+        <p:spPr>
+          <a:xfrm xmlns:a="http://schemas.openxmlformats.org/drawingml/2006/main">
+            <a:off x="8232267" y="3022568"/>
+            <a:ext cx="3568732" cy="2971800"/>
+          </a:xfrm>
+          <a:prstGeom xmlns:a="http://schemas.openxmlformats.org/drawingml/2006/main" prst="roundRect">
+            <a:avLst>
+              <a:gd name="adj" fmla="val 2564"/>
+            </a:avLst>
+          </a:prstGeom>
+          <a:solidFill xmlns:a="http://schemas.openxmlformats.org/drawingml/2006/main">
+            <a:srgbClr val="F2F2F2"/>
+          </a:solidFill>
+        </p:spPr>
+      </p:sp>
+      <p:sp>
+        <p:nvSpPr>
+          <p:cNvPr id="4" name="footer">
+            <a:extLst xmlns:a="http://schemas.openxmlformats.org/drawingml/2006/main">
+              <a:ext uri="{FF2B5EF4-FFF2-40B4-BE49-F238E27FC236}">
+                <a16:creationId xmlns:a16="http://schemas.microsoft.com/office/drawing/2014/main" id="{11E272E4-82E7-4287-91C5-21E6B629F553}"/>
+              </a:ext>
+            </a:extLst>
+          </p:cNvPr>
+          <p:cNvSpPr>
+            <a:spLocks xmlns:a="http://schemas.openxmlformats.org/drawingml/2006/main" noGrp="1"/>
+          </p:cNvSpPr>
+          <p:nvPr/>
+        </p:nvSpPr>
+        <p:spPr>
+          <a:xfrm xmlns:a="http://schemas.openxmlformats.org/drawingml/2006/main">
+            <a:off x="11279315" y="6279261"/>
+            <a:ext cx="518922" cy="241268"/>
+          </a:xfrm>
+          <a:prstGeom xmlns:a="http://schemas.openxmlformats.org/drawingml/2006/main" prst="rect">
+            <a:avLst/>
+          </a:prstGeom>
+        </p:spPr>
+        <p:txBody>
+          <a:bodyPr xmlns:a="http://schemas.openxmlformats.org/drawingml/2006/main" lIns="0" tIns="0" rIns="0" bIns="0" anchor="b"/>
+          <a:lstStyle xmlns:a="http://schemas.openxmlformats.org/drawingml/2006/main"/>
+          <a:p xmlns:a="http://schemas.openxmlformats.org/drawingml/2006/main">
+            <a:pPr algn="r">
+              <a:buNone/>
+              <a:defRPr sz="1000">
+                <a:solidFill>
+                  <a:srgbClr val="000000"/>
+                </a:solidFill>
+                <a:latin typeface="Helvetica Neue"/>
+                <a:ea typeface="Helvetica Neue"/>
+                <a:cs typeface="Helvetica Neue"/>
+              </a:defRPr>
+            </a:pPr>
+            <a:r>
+              <a:t>35</a:t>
+            </a:r>
+          </a:p>
+        </p:txBody>
+      </p:sp>
+      <p:sp>
+        <p:nvSpPr>
+          <p:cNvPr id="5" name="title">
+            <a:extLst xmlns:a="http://schemas.openxmlformats.org/drawingml/2006/main">
+              <a:ext uri="{FF2B5EF4-FFF2-40B4-BE49-F238E27FC236}">
+                <a16:creationId xmlns:a16="http://schemas.microsoft.com/office/drawing/2014/main" id="{A0ED332F-4F42-421E-99CF-097B6CBB5C19}"/>
+              </a:ext>
+            </a:extLst>
+          </p:cNvPr>
+          <p:cNvSpPr>
+            <a:spLocks xmlns:a="http://schemas.openxmlformats.org/drawingml/2006/main" noGrp="1"/>
+          </p:cNvSpPr>
+          <p:nvPr/>
+        </p:nvSpPr>
+        <p:spPr>
+          <a:xfrm xmlns:a="http://schemas.openxmlformats.org/drawingml/2006/main">
+            <a:off x="393668" y="344043"/>
+            <a:ext cx="11404568" cy="1047464"/>
+          </a:xfrm>
+          <a:prstGeom xmlns:a="http://schemas.openxmlformats.org/drawingml/2006/main" prst="rect">
+            <a:avLst/>
+          </a:prstGeom>
+        </p:spPr>
+        <p:txBody>
+          <a:bodyPr xmlns:a="http://schemas.openxmlformats.org/drawingml/2006/main" lIns="0" tIns="0" rIns="0" bIns="0" anchor="t">
+            <a:normAutofit fontScale="100000"/>
+          </a:bodyPr>
+          <a:lstStyle xmlns:a="http://schemas.openxmlformats.org/drawingml/2006/main"/>
+          <a:p xmlns:a="http://schemas.openxmlformats.org/drawingml/2006/main">
+            <a:pPr algn="l">
+              <a:buNone/>
+              <a:defRPr sz="2900">
+                <a:solidFill>
+                  <a:srgbClr val="000000"/>
+                </a:solidFill>
+                <a:latin typeface="Helvetica Neue"/>
+                <a:ea typeface="Helvetica Neue"/>
+                <a:cs typeface="Helvetica Neue"/>
+              </a:defRPr>
+            </a:pPr>
+            <a:r>
+              <a:t>The atlas generates relationships before it sees returns</a:t>
+            </a:r>
+          </a:p>
+        </p:txBody>
+      </p:sp>
+      <p:sp>
+        <p:nvSpPr>
+          <p:cNvPr id="6" name="intro">
+            <a:extLst xmlns:a="http://schemas.openxmlformats.org/drawingml/2006/main">
+              <a:ext uri="{FF2B5EF4-FFF2-40B4-BE49-F238E27FC236}">
+                <a16:creationId xmlns:a16="http://schemas.microsoft.com/office/drawing/2014/main" id="{E3D1AF2D-950D-495D-BB07-182C768AD88F}"/>
+              </a:ext>
+            </a:extLst>
+          </p:cNvPr>
+          <p:cNvSpPr>
+            <a:spLocks xmlns:a="http://schemas.openxmlformats.org/drawingml/2006/main" noGrp="1"/>
+          </p:cNvSpPr>
+          <p:nvPr/>
+        </p:nvSpPr>
+        <p:spPr>
+          <a:xfrm xmlns:a="http://schemas.openxmlformats.org/drawingml/2006/main">
+            <a:off x="393668" y="1219200"/>
+            <a:ext cx="11404568" cy="1428750"/>
+          </a:xfrm>
+          <a:prstGeom xmlns:a="http://schemas.openxmlformats.org/drawingml/2006/main" prst="rect">
+            <a:avLst/>
+          </a:prstGeom>
+        </p:spPr>
+        <p:txBody>
+          <a:bodyPr xmlns:a="http://schemas.openxmlformats.org/drawingml/2006/main" lIns="0" tIns="0" rIns="0" bIns="0" anchor="t">
+            <a:normAutofit fontScale="100000"/>
+          </a:bodyPr>
+          <a:lstStyle xmlns:a="http://schemas.openxmlformats.org/drawingml/2006/main"/>
+          <a:p xmlns:a="http://schemas.openxmlformats.org/drawingml/2006/main">
+            <a:pPr algn="l">
+              <a:buNone/>
+              <a:defRPr sz="1650">
+                <a:solidFill>
+                  <a:srgbClr val="000000"/>
+                </a:solidFill>
+                <a:latin typeface="Helvetica Neue"/>
+                <a:ea typeface="Helvetica Neue"/>
+                <a:cs typeface="Helvetica Neue"/>
+              </a:defRPr>
+            </a:pPr>
+            <a:r>
+              <a:t>Each hypothesis receives an instrument topology, an economic mechanism, an orientation, and a rationale. Five candidates are frozen in each cell; repeated anchors remain visible rather than silently pooled.</a:t>
+            </a:r>
+          </a:p>
+        </p:txBody>
+      </p:sp>
+      <p:sp>
+        <p:nvSpPr>
+          <p:cNvPr id="7" name="stat-1">
+            <a:extLst xmlns:a="http://schemas.openxmlformats.org/drawingml/2006/main">
+              <a:ext uri="{FF2B5EF4-FFF2-40B4-BE49-F238E27FC236}">
+                <a16:creationId xmlns:a16="http://schemas.microsoft.com/office/drawing/2014/main" id="{447A29C0-2600-4241-BF6B-6797417FC507}"/>
+              </a:ext>
+            </a:extLst>
+          </p:cNvPr>
+          <p:cNvSpPr>
+            <a:spLocks xmlns:a="http://schemas.openxmlformats.org/drawingml/2006/main" noGrp="1"/>
+          </p:cNvSpPr>
+          <p:nvPr/>
+        </p:nvSpPr>
+        <p:spPr>
+          <a:xfrm xmlns:a="http://schemas.openxmlformats.org/drawingml/2006/main">
+            <a:off x="702374" y="3429000"/>
+            <a:ext cx="2940082" cy="1359313"/>
+          </a:xfrm>
+          <a:prstGeom xmlns:a="http://schemas.openxmlformats.org/drawingml/2006/main" prst="rect">
+            <a:avLst/>
+          </a:prstGeom>
+        </p:spPr>
+        <p:txBody>
+          <a:bodyPr xmlns:a="http://schemas.openxmlformats.org/drawingml/2006/main" lIns="0" tIns="0" rIns="0" bIns="0" anchor="b">
+            <a:normAutofit fontScale="100000"/>
+          </a:bodyPr>
+          <a:lstStyle xmlns:a="http://schemas.openxmlformats.org/drawingml/2006/main"/>
+          <a:p xmlns:a="http://schemas.openxmlformats.org/drawingml/2006/main">
+            <a:pPr algn="l">
+              <a:buNone/>
+              <a:defRPr sz="3225">
+                <a:solidFill>
+                  <a:srgbClr val="3D8DFF"/>
+                </a:solidFill>
+                <a:latin typeface="Helvetica Neue"/>
+                <a:ea typeface="Helvetica Neue"/>
+                <a:cs typeface="Helvetica Neue"/>
+              </a:defRPr>
+            </a:pPr>
+            <a:r>
+              <a:t>5 cells</a:t>
+            </a:r>
+          </a:p>
+        </p:txBody>
+      </p:sp>
+      <p:sp>
+        <p:nvSpPr>
+          <p:cNvPr id="8" name="stat-label-1">
+            <a:extLst xmlns:a="http://schemas.openxmlformats.org/drawingml/2006/main">
+              <a:ext uri="{FF2B5EF4-FFF2-40B4-BE49-F238E27FC236}">
+                <a16:creationId xmlns:a16="http://schemas.microsoft.com/office/drawing/2014/main" id="{1D2A853D-A304-477D-B8B8-F77F0101AC08}"/>
+              </a:ext>
+            </a:extLst>
+          </p:cNvPr>
+          <p:cNvSpPr>
+            <a:spLocks xmlns:a="http://schemas.openxmlformats.org/drawingml/2006/main" noGrp="1"/>
+          </p:cNvSpPr>
+          <p:nvPr/>
+        </p:nvSpPr>
+        <p:spPr>
+          <a:xfrm xmlns:a="http://schemas.openxmlformats.org/drawingml/2006/main">
+            <a:off x="702374" y="4900613"/>
+            <a:ext cx="2949607" cy="819150"/>
+          </a:xfrm>
+          <a:prstGeom xmlns:a="http://schemas.openxmlformats.org/drawingml/2006/main" prst="rect">
+            <a:avLst/>
+          </a:prstGeom>
+        </p:spPr>
+        <p:txBody>
+          <a:bodyPr xmlns:a="http://schemas.openxmlformats.org/drawingml/2006/main" lIns="0" tIns="45720" rIns="91440" bIns="45720" anchor="t">
+            <a:normAutofit fontScale="100000"/>
+          </a:bodyPr>
+          <a:lstStyle xmlns:a="http://schemas.openxmlformats.org/drawingml/2006/main"/>
+          <a:p xmlns:a="http://schemas.openxmlformats.org/drawingml/2006/main">
+            <a:pPr algn="l">
+              <a:buNone/>
+              <a:defRPr sz="1575">
+                <a:solidFill>
+                  <a:srgbClr val="000000"/>
+                </a:solidFill>
+                <a:latin typeface="Helvetica Neue"/>
+                <a:ea typeface="Helvetica Neue"/>
+                <a:cs typeface="Helvetica Neue"/>
+              </a:defRPr>
+            </a:pPr>
+            <a:r>
+              <a:t>ETF substitutes · related ETFs</a:t>
+            </a:r>
+          </a:p>
+          <a:p xmlns:a="http://schemas.openxmlformats.org/drawingml/2006/main">
+            <a:pPr algn="l">
+              <a:buNone/>
+              <a:defRPr sz="1575">
+                <a:solidFill>
+                  <a:srgbClr val="000000"/>
+                </a:solidFill>
+                <a:latin typeface="Helvetica Neue"/>
+                <a:ea typeface="Helvetica Neue"/>
+                <a:cs typeface="Helvetica Neue"/>
+              </a:defRPr>
+            </a:pPr>
+            <a:r>
+              <a:t>ETF–component · peers · asset proxies</a:t>
+            </a:r>
+          </a:p>
+        </p:txBody>
+      </p:sp>
+      <p:sp>
+        <p:nvSpPr>
+          <p:cNvPr id="9" name="stat-2">
+            <a:extLst xmlns:a="http://schemas.openxmlformats.org/drawingml/2006/main">
+              <a:ext uri="{FF2B5EF4-FFF2-40B4-BE49-F238E27FC236}">
+                <a16:creationId xmlns:a16="http://schemas.microsoft.com/office/drawing/2014/main" id="{342C60B8-5C35-4607-932D-DFD8E206B634}"/>
+              </a:ext>
+            </a:extLst>
+          </p:cNvPr>
+          <p:cNvSpPr>
+            <a:spLocks xmlns:a="http://schemas.openxmlformats.org/drawingml/2006/main" noGrp="1"/>
+          </p:cNvSpPr>
+          <p:nvPr/>
+        </p:nvSpPr>
+        <p:spPr>
+          <a:xfrm xmlns:a="http://schemas.openxmlformats.org/drawingml/2006/main">
+            <a:off x="4612958" y="3429000"/>
+            <a:ext cx="2940082" cy="1359313"/>
+          </a:xfrm>
+          <a:prstGeom xmlns:a="http://schemas.openxmlformats.org/drawingml/2006/main" prst="rect">
+            <a:avLst/>
+          </a:prstGeom>
+        </p:spPr>
+        <p:txBody>
+          <a:bodyPr xmlns:a="http://schemas.openxmlformats.org/drawingml/2006/main" lIns="0" tIns="0" rIns="0" bIns="0" anchor="b">
+            <a:normAutofit fontScale="100000"/>
+          </a:bodyPr>
+          <a:lstStyle xmlns:a="http://schemas.openxmlformats.org/drawingml/2006/main"/>
+          <a:p xmlns:a="http://schemas.openxmlformats.org/drawingml/2006/main">
+            <a:pPr algn="l">
+              <a:buNone/>
+              <a:defRPr sz="3225">
+                <a:solidFill>
+                  <a:srgbClr val="000000"/>
+                </a:solidFill>
+                <a:latin typeface="Helvetica Neue"/>
+                <a:ea typeface="Helvetica Neue"/>
+                <a:cs typeface="Helvetica Neue"/>
+              </a:defRPr>
+            </a:pPr>
+            <a:r>
+              <a:t>25 pairs</a:t>
+            </a:r>
+          </a:p>
+        </p:txBody>
+      </p:sp>
+      <p:sp>
+        <p:nvSpPr>
+          <p:cNvPr id="10" name="stat-label-2">
+            <a:extLst xmlns:a="http://schemas.openxmlformats.org/drawingml/2006/main">
+              <a:ext uri="{FF2B5EF4-FFF2-40B4-BE49-F238E27FC236}">
+                <a16:creationId xmlns:a16="http://schemas.microsoft.com/office/drawing/2014/main" id="{3123331A-6BB6-4FC3-B18C-EE98C6A8FF13}"/>
+              </a:ext>
+            </a:extLst>
+          </p:cNvPr>
+          <p:cNvSpPr>
+            <a:spLocks xmlns:a="http://schemas.openxmlformats.org/drawingml/2006/main" noGrp="1"/>
+          </p:cNvSpPr>
+          <p:nvPr/>
+        </p:nvSpPr>
+        <p:spPr>
+          <a:xfrm xmlns:a="http://schemas.openxmlformats.org/drawingml/2006/main">
+            <a:off x="4612958" y="4900613"/>
+            <a:ext cx="2949607" cy="819150"/>
+          </a:xfrm>
+          <a:prstGeom xmlns:a="http://schemas.openxmlformats.org/drawingml/2006/main" prst="rect">
+            <a:avLst/>
+          </a:prstGeom>
+        </p:spPr>
+        <p:txBody>
+          <a:bodyPr xmlns:a="http://schemas.openxmlformats.org/drawingml/2006/main" lIns="0" tIns="45720" rIns="91440" bIns="45720" anchor="t">
+            <a:normAutofit fontScale="100000"/>
+          </a:bodyPr>
+          <a:lstStyle xmlns:a="http://schemas.openxmlformats.org/drawingml/2006/main"/>
+          <a:p xmlns:a="http://schemas.openxmlformats.org/drawingml/2006/main">
+            <a:pPr algn="l">
+              <a:buNone/>
+              <a:defRPr sz="1575">
+                <a:solidFill>
+                  <a:srgbClr val="000000"/>
+                </a:solidFill>
+                <a:latin typeface="Helvetica Neue"/>
+                <a:ea typeface="Helvetica Neue"/>
+                <a:cs typeface="Helvetica Neue"/>
+              </a:defRPr>
+            </a:pPr>
+            <a:r>
+              <a:t>Five predeclared candidates per cell</a:t>
+            </a:r>
+          </a:p>
+          <a:p xmlns:a="http://schemas.openxmlformats.org/drawingml/2006/main">
+            <a:pPr algn="l">
+              <a:buNone/>
+              <a:defRPr sz="1575">
+                <a:solidFill>
+                  <a:srgbClr val="000000"/>
+                </a:solidFill>
+                <a:latin typeface="Helvetica Neue"/>
+                <a:ea typeface="Helvetica Neue"/>
+                <a:cs typeface="Helvetica Neue"/>
+              </a:defRPr>
+            </a:pPr>
+            <a:r>
+              <a:t>All outcomes retained</a:t>
+            </a:r>
+          </a:p>
+        </p:txBody>
+      </p:sp>
+      <p:sp>
+        <p:nvSpPr>
+          <p:cNvPr id="11" name="stat-3">
+            <a:extLst xmlns:a="http://schemas.openxmlformats.org/drawingml/2006/main">
+              <a:ext uri="{FF2B5EF4-FFF2-40B4-BE49-F238E27FC236}">
+                <a16:creationId xmlns:a16="http://schemas.microsoft.com/office/drawing/2014/main" id="{A0AD0C21-BC31-4957-B0CB-525311D4386F}"/>
+              </a:ext>
+            </a:extLst>
+          </p:cNvPr>
+          <p:cNvSpPr>
+            <a:spLocks xmlns:a="http://schemas.openxmlformats.org/drawingml/2006/main" noGrp="1"/>
+          </p:cNvSpPr>
+          <p:nvPr/>
+        </p:nvSpPr>
+        <p:spPr>
+          <a:xfrm xmlns:a="http://schemas.openxmlformats.org/drawingml/2006/main">
+            <a:off x="8562404" y="3429000"/>
+            <a:ext cx="2940082" cy="1359313"/>
+          </a:xfrm>
+          <a:prstGeom xmlns:a="http://schemas.openxmlformats.org/drawingml/2006/main" prst="rect">
+            <a:avLst/>
+          </a:prstGeom>
+        </p:spPr>
+        <p:txBody>
+          <a:bodyPr xmlns:a="http://schemas.openxmlformats.org/drawingml/2006/main" lIns="0" tIns="0" rIns="0" bIns="0" anchor="b">
+            <a:normAutofit fontScale="100000"/>
+          </a:bodyPr>
+          <a:lstStyle xmlns:a="http://schemas.openxmlformats.org/drawingml/2006/main"/>
+          <a:p xmlns:a="http://schemas.openxmlformats.org/drawingml/2006/main">
+            <a:pPr algn="l">
+              <a:buNone/>
+              <a:defRPr sz="3225">
+                <a:solidFill>
+                  <a:srgbClr val="000000"/>
+                </a:solidFill>
+                <a:latin typeface="Helvetica Neue"/>
+                <a:ea typeface="Helvetica Neue"/>
+                <a:cs typeface="Helvetica Neue"/>
+              </a:defRPr>
+            </a:pPr>
+            <a:r>
+              <a:t>1 rule</a:t>
+            </a:r>
+          </a:p>
+        </p:txBody>
+      </p:sp>
+      <p:sp>
+        <p:nvSpPr>
+          <p:cNvPr id="12" name="stat-label-3">
+            <a:extLst xmlns:a="http://schemas.openxmlformats.org/drawingml/2006/main">
+              <a:ext uri="{FF2B5EF4-FFF2-40B4-BE49-F238E27FC236}">
+                <a16:creationId xmlns:a16="http://schemas.microsoft.com/office/drawing/2014/main" id="{86C9D445-5711-4319-B967-D72E959CA06D}"/>
+              </a:ext>
+            </a:extLst>
+          </p:cNvPr>
+          <p:cNvSpPr>
+            <a:spLocks xmlns:a="http://schemas.openxmlformats.org/drawingml/2006/main" noGrp="1"/>
+          </p:cNvSpPr>
+          <p:nvPr/>
+        </p:nvSpPr>
+        <p:spPr>
+          <a:xfrm xmlns:a="http://schemas.openxmlformats.org/drawingml/2006/main">
+            <a:off x="8562404" y="4900613"/>
+            <a:ext cx="2949607" cy="819150"/>
+          </a:xfrm>
+          <a:prstGeom xmlns:a="http://schemas.openxmlformats.org/drawingml/2006/main" prst="rect">
+            <a:avLst/>
+          </a:prstGeom>
+        </p:spPr>
+        <p:txBody>
+          <a:bodyPr xmlns:a="http://schemas.openxmlformats.org/drawingml/2006/main" lIns="0" tIns="45720" rIns="91440" bIns="45720" anchor="t">
+            <a:normAutofit fontScale="100000"/>
+          </a:bodyPr>
+          <a:lstStyle xmlns:a="http://schemas.openxmlformats.org/drawingml/2006/main"/>
+          <a:p xmlns:a="http://schemas.openxmlformats.org/drawingml/2006/main">
+            <a:pPr algn="l">
+              <a:buNone/>
+              <a:defRPr sz="1575">
+                <a:solidFill>
+                  <a:srgbClr val="000000"/>
+                </a:solidFill>
+                <a:latin typeface="Helvetica Neue"/>
+                <a:ea typeface="Helvetica Neue"/>
+                <a:cs typeface="Helvetica Neue"/>
+              </a:defRPr>
+            </a:pPr>
+            <a:r>
+              <a:t>Unchanged 20-session adaptive spread</a:t>
+            </a:r>
+          </a:p>
+          <a:p xmlns:a="http://schemas.openxmlformats.org/drawingml/2006/main">
+            <a:pPr algn="l">
+              <a:buNone/>
+              <a:defRPr sz="1575">
+                <a:solidFill>
+                  <a:srgbClr val="000000"/>
+                </a:solidFill>
+                <a:latin typeface="Helvetica Neue"/>
+                <a:ea typeface="Helvetica Neue"/>
+                <a:cs typeface="Helvetica Neue"/>
+              </a:defRPr>
+            </a:pPr>
+            <a:r>
+              <a:t>Same costs and eight TRAIN gates</a:t>
+            </a:r>
+          </a:p>
+        </p:txBody>
+      </p:sp>
+    </p:spTree>
+    <p:extLst>
+      <p:ext uri="{BB962C8B-B14F-4D97-AF65-F5344CB8AC3E}">
+        <p14:creationId xmlns:p14="http://schemas.microsoft.com/office/powerpoint/2010/main" val="2098249639"/>
+      </p:ext>
+    </p:extLst>
+  </p:cSld>
+</p:sld>
+</file>
+
+<file path=ppt/slides/slide36.xml><?xml version="1.0" encoding="utf-8"?>
+<p:sld xmlns:p="http://schemas.openxmlformats.org/presentationml/2006/main">
+  <p:cSld>
+    <p:spTree>
+      <p:nvGrpSpPr>
+        <p:cNvPr id="1" name=""/>
+        <p:cNvGrpSpPr/>
+        <p:nvPr/>
+      </p:nvGrpSpPr>
+      <p:grpSpPr>
+        <a:xfrm xmlns:a="http://schemas.openxmlformats.org/drawingml/2006/main"/>
+      </p:grpSpPr>
+      <p:sp>
+        <p:nvSpPr>
+          <p:cNvPr id="6" name="footer">
+            <a:extLst xmlns:a="http://schemas.openxmlformats.org/drawingml/2006/main">
+              <a:ext uri="{FF2B5EF4-FFF2-40B4-BE49-F238E27FC236}">
+                <a16:creationId xmlns:a16="http://schemas.microsoft.com/office/drawing/2014/main" id="{5D1F4916-B18D-4F3F-8812-75A699D9A639}"/>
+              </a:ext>
+            </a:extLst>
+          </p:cNvPr>
+          <p:cNvSpPr>
+            <a:spLocks xmlns:a="http://schemas.openxmlformats.org/drawingml/2006/main" noGrp="1"/>
+          </p:cNvSpPr>
+          <p:nvPr/>
+        </p:nvSpPr>
+        <p:spPr>
+          <a:xfrm xmlns:a="http://schemas.openxmlformats.org/drawingml/2006/main">
+            <a:off x="11279315" y="6279261"/>
+            <a:ext cx="518922" cy="241268"/>
+          </a:xfrm>
+          <a:prstGeom xmlns:a="http://schemas.openxmlformats.org/drawingml/2006/main" prst="rect">
+            <a:avLst/>
+          </a:prstGeom>
+        </p:spPr>
+        <p:txBody>
+          <a:bodyPr xmlns:a="http://schemas.openxmlformats.org/drawingml/2006/main" lIns="0" tIns="0" rIns="0" bIns="0" anchor="b"/>
+          <a:lstStyle xmlns:a="http://schemas.openxmlformats.org/drawingml/2006/main"/>
+          <a:p xmlns:a="http://schemas.openxmlformats.org/drawingml/2006/main">
+            <a:pPr algn="r">
+              <a:buNone/>
+              <a:defRPr sz="1000">
+                <a:solidFill>
+                  <a:srgbClr val="000000"/>
+                </a:solidFill>
+                <a:latin typeface="Helvetica Neue"/>
+                <a:ea typeface="Helvetica Neue"/>
+                <a:cs typeface="Helvetica Neue"/>
+              </a:defRPr>
+            </a:pPr>
+            <a:r>
+              <a:t>36</a:t>
+            </a:r>
+          </a:p>
+        </p:txBody>
+      </p:sp>
+      <p:sp>
+        <p:nvSpPr>
+          <p:cNvPr id="2" name="title">
+            <a:extLst xmlns:a="http://schemas.openxmlformats.org/drawingml/2006/main">
+              <a:ext uri="{FF2B5EF4-FFF2-40B4-BE49-F238E27FC236}">
+                <a16:creationId xmlns:a16="http://schemas.microsoft.com/office/drawing/2014/main" id="{ECB77D9D-0CB0-4878-9A4A-2687A311CD30}"/>
+              </a:ext>
+            </a:extLst>
+          </p:cNvPr>
+          <p:cNvSpPr>
+            <a:spLocks xmlns:a="http://schemas.openxmlformats.org/drawingml/2006/main" noGrp="1"/>
+          </p:cNvSpPr>
+          <p:nvPr/>
+        </p:nvSpPr>
+        <p:spPr>
+          <a:xfrm xmlns:a="http://schemas.openxmlformats.org/drawingml/2006/main">
+            <a:off x="393668" y="295275"/>
+            <a:ext cx="11404568" cy="876300"/>
+          </a:xfrm>
+          <a:prstGeom xmlns:a="http://schemas.openxmlformats.org/drawingml/2006/main" prst="rect">
+            <a:avLst/>
+          </a:prstGeom>
+        </p:spPr>
+        <p:txBody>
+          <a:bodyPr xmlns:a="http://schemas.openxmlformats.org/drawingml/2006/main" lIns="0" tIns="0" rIns="0" bIns="0" anchor="t">
+            <a:normAutofit fontScale="100000"/>
+          </a:bodyPr>
+          <a:lstStyle xmlns:a="http://schemas.openxmlformats.org/drawingml/2006/main"/>
+          <a:p xmlns:a="http://schemas.openxmlformats.org/drawingml/2006/main">
+            <a:pPr algn="l">
+              <a:buNone/>
+              <a:defRPr sz="2900">
+                <a:solidFill>
+                  <a:srgbClr val="000000"/>
+                </a:solidFill>
+                <a:latin typeface="Helvetica Neue"/>
+                <a:ea typeface="Helvetica Neue"/>
+                <a:cs typeface="Helvetica Neue"/>
+              </a:defRPr>
+            </a:pPr>
+            <a:r>
+              <a:t>The categories reveal breadth, not a winner</a:t>
+            </a:r>
+          </a:p>
+        </p:txBody>
+      </p:sp>
+      <p:pic>
+        <p:nvPicPr>
+          <p:cNvPr id="12" name=""/>
+          <p:cNvPicPr>
+            <a:picLocks xmlns:a="http://schemas.openxmlformats.org/drawingml/2006/main" noChangeAspect="1"/>
+          </p:cNvPicPr>
+          <p:nvPr/>
+        </p:nvPicPr>
+        <p:blipFill>
+          <a:blip xmlns:r="http://schemas.openxmlformats.org/officeDocument/2006/relationships" xmlns:a="http://schemas.openxmlformats.org/drawingml/2006/main" r:embed="R99ef0d7b425c4d1e"/>
+          <a:stretch xmlns:a="http://schemas.openxmlformats.org/drawingml/2006/main"/>
+        </p:blipFill>
+        <p:spPr>
+          <a:xfrm xmlns:a="http://schemas.openxmlformats.org/drawingml/2006/main">
+            <a:off x="1891393" y="1162050"/>
+            <a:ext cx="8409214" cy="4905375"/>
+          </a:xfrm>
+          <a:prstGeom xmlns:a="http://schemas.openxmlformats.org/drawingml/2006/main" prst="rect">
+            <a:avLst/>
+          </a:prstGeom>
+        </p:spPr>
+      </p:pic>
+      <p:sp>
+        <p:nvSpPr>
+          <p:cNvPr id="8" name="">
+            <a:extLst xmlns:a="http://schemas.openxmlformats.org/drawingml/2006/main">
+              <a:ext uri="{FF2B5EF4-FFF2-40B4-BE49-F238E27FC236}">
+                <a16:creationId xmlns:a16="http://schemas.microsoft.com/office/drawing/2014/main" id="{F8EA68C6-EEAB-495D-AF3B-AF582E9F8557}"/>
+              </a:ext>
+            </a:extLst>
+          </p:cNvPr>
+          <p:cNvSpPr>
+            <a:spLocks xmlns:a="http://schemas.openxmlformats.org/drawingml/2006/main" noGrp="1"/>
+          </p:cNvSpPr>
+          <p:nvPr/>
+        </p:nvSpPr>
+        <p:spPr>
+          <a:xfrm xmlns:a="http://schemas.openxmlformats.org/drawingml/2006/main">
+            <a:off x="1891393" y="1162050"/>
+            <a:ext cx="8409214" cy="4905375"/>
+          </a:xfrm>
+          <a:prstGeom xmlns:a="http://schemas.openxmlformats.org/drawingml/2006/main" prst="rect">
+            <a:avLst/>
+          </a:prstGeom>
+          <a:solidFill xmlns:a="http://schemas.openxmlformats.org/drawingml/2006/main">
+            <a:srgbClr val="FFFFFF"/>
+          </a:solidFill>
+          <a:ln xmlns:a="http://schemas.openxmlformats.org/drawingml/2006/main" w="0">
+            <a:solidFill>
+              <a:srgbClr val="FFFFFF"/>
+            </a:solidFill>
+            <a:prstDash val="solid"/>
+          </a:ln>
+        </p:spPr>
+      </p:sp>
+      <p:pic>
+        <p:nvPicPr>
+          <p:cNvPr id="14" name=""/>
+          <p:cNvPicPr>
+            <a:picLocks xmlns:a="http://schemas.openxmlformats.org/drawingml/2006/main" noChangeAspect="1"/>
+          </p:cNvPicPr>
+          <p:nvPr/>
+        </p:nvPicPr>
+        <p:blipFill>
+          <a:blip xmlns:r="http://schemas.openxmlformats.org/officeDocument/2006/relationships" xmlns:a="http://schemas.openxmlformats.org/drawingml/2006/main" r:embed="R3da21b97373b4ac7"/>
+          <a:stretch xmlns:a="http://schemas.openxmlformats.org/drawingml/2006/main"/>
+        </p:blipFill>
+        <p:spPr>
+          <a:xfrm xmlns:a="http://schemas.openxmlformats.org/drawingml/2006/main">
+            <a:off x="1891393" y="1278845"/>
+            <a:ext cx="8409214" cy="4671786"/>
+          </a:xfrm>
+          <a:prstGeom xmlns:a="http://schemas.openxmlformats.org/drawingml/2006/main" prst="rect">
+            <a:avLst/>
+          </a:prstGeom>
+        </p:spPr>
+      </p:pic>
+    </p:spTree>
+    <p:extLst>
+      <p:ext uri="{BB962C8B-B14F-4D97-AF65-F5344CB8AC3E}">
+        <p14:creationId xmlns:p14="http://schemas.microsoft.com/office/powerpoint/2010/main" val="463436756"/>
+      </p:ext>
+    </p:extLst>
+  </p:cSld>
+</p:sld>
+</file>
+
+<file path=ppt/slides/slide37.xml><?xml version="1.0" encoding="utf-8"?>
+<p:sld xmlns:p="http://schemas.openxmlformats.org/presentationml/2006/main">
+  <p:cSld>
+    <p:spTree>
+      <p:nvGrpSpPr>
+        <p:cNvPr id="1" name=""/>
+        <p:cNvGrpSpPr/>
+        <p:nvPr/>
+      </p:nvGrpSpPr>
+      <p:grpSpPr>
+        <a:xfrm xmlns:a="http://schemas.openxmlformats.org/drawingml/2006/main"/>
+      </p:grpSpPr>
+      <p:sp>
+        <p:nvSpPr>
+          <p:cNvPr id="11" name="footer">
+            <a:extLst xmlns:a="http://schemas.openxmlformats.org/drawingml/2006/main">
+              <a:ext uri="{FF2B5EF4-FFF2-40B4-BE49-F238E27FC236}">
+                <a16:creationId xmlns:a16="http://schemas.microsoft.com/office/drawing/2014/main" id="{9833E848-7434-4F2E-A17C-B17541CAE597}"/>
+              </a:ext>
+            </a:extLst>
+          </p:cNvPr>
+          <p:cNvSpPr>
+            <a:spLocks xmlns:a="http://schemas.openxmlformats.org/drawingml/2006/main" noGrp="1"/>
+          </p:cNvSpPr>
+          <p:nvPr/>
+        </p:nvSpPr>
+        <p:spPr>
+          <a:xfrm xmlns:a="http://schemas.openxmlformats.org/drawingml/2006/main">
+            <a:off x="11279315" y="6279261"/>
+            <a:ext cx="518922" cy="241268"/>
+          </a:xfrm>
+          <a:prstGeom xmlns:a="http://schemas.openxmlformats.org/drawingml/2006/main" prst="rect">
+            <a:avLst/>
+          </a:prstGeom>
+        </p:spPr>
+        <p:txBody>
+          <a:bodyPr xmlns:a="http://schemas.openxmlformats.org/drawingml/2006/main" lIns="0" tIns="0" rIns="0" bIns="0" anchor="b"/>
+          <a:lstStyle xmlns:a="http://schemas.openxmlformats.org/drawingml/2006/main"/>
+          <a:p xmlns:a="http://schemas.openxmlformats.org/drawingml/2006/main">
+            <a:pPr algn="r">
+              <a:buNone/>
+              <a:defRPr sz="1000">
+                <a:solidFill>
+                  <a:srgbClr val="000000"/>
+                </a:solidFill>
+                <a:latin typeface="Helvetica Neue"/>
+                <a:ea typeface="Helvetica Neue"/>
+                <a:cs typeface="Helvetica Neue"/>
+              </a:defRPr>
+            </a:pPr>
+            <a:r>
+              <a:t>37</a:t>
+            </a:r>
+          </a:p>
+        </p:txBody>
+      </p:sp>
+      <p:sp>
+        <p:nvSpPr>
+          <p:cNvPr id="2" name="title">
+            <a:extLst xmlns:a="http://schemas.openxmlformats.org/drawingml/2006/main">
+              <a:ext uri="{FF2B5EF4-FFF2-40B4-BE49-F238E27FC236}">
+                <a16:creationId xmlns:a16="http://schemas.microsoft.com/office/drawing/2014/main" id="{317B658F-9EDE-4B04-B790-BFC2AB1127A9}"/>
+              </a:ext>
+            </a:extLst>
+          </p:cNvPr>
+          <p:cNvSpPr>
+            <a:spLocks xmlns:a="http://schemas.openxmlformats.org/drawingml/2006/main" noGrp="1"/>
+          </p:cNvSpPr>
+          <p:nvPr/>
+        </p:nvSpPr>
+        <p:spPr>
+          <a:xfrm xmlns:a="http://schemas.openxmlformats.org/drawingml/2006/main">
+            <a:off x="393668" y="344043"/>
+            <a:ext cx="11404568" cy="1047464"/>
+          </a:xfrm>
+          <a:prstGeom xmlns:a="http://schemas.openxmlformats.org/drawingml/2006/main" prst="rect">
+            <a:avLst/>
+          </a:prstGeom>
+        </p:spPr>
+        <p:txBody>
+          <a:bodyPr xmlns:a="http://schemas.openxmlformats.org/drawingml/2006/main" lIns="0" tIns="0" rIns="0" bIns="0" anchor="t">
+            <a:normAutofit fontScale="100000"/>
+          </a:bodyPr>
+          <a:lstStyle xmlns:a="http://schemas.openxmlformats.org/drawingml/2006/main"/>
+          <a:p xmlns:a="http://schemas.openxmlformats.org/drawingml/2006/main">
+            <a:pPr algn="l">
+              <a:buNone/>
+              <a:defRPr sz="2900">
+                <a:solidFill>
+                  <a:srgbClr val="000000"/>
+                </a:solidFill>
+                <a:latin typeface="Helvetica Neue"/>
+                <a:ea typeface="Helvetica Neue"/>
+                <a:cs typeface="Helvetica Neue"/>
+              </a:defRPr>
+            </a:pPr>
+            <a:r>
+              <a:t>One positive mean did not become a selected pair</a:t>
+            </a:r>
+          </a:p>
+        </p:txBody>
+      </p:sp>
+      <p:sp>
+        <p:nvSpPr>
+          <p:cNvPr id="3" name="left-stat-card">
+            <a:extLst xmlns:a="http://schemas.openxmlformats.org/drawingml/2006/main">
+              <a:ext uri="{FF2B5EF4-FFF2-40B4-BE49-F238E27FC236}">
+                <a16:creationId xmlns:a16="http://schemas.microsoft.com/office/drawing/2014/main" id="{CB5A1905-9B52-4859-9721-FAA37599F253}"/>
+              </a:ext>
+            </a:extLst>
+          </p:cNvPr>
+          <p:cNvSpPr>
+            <a:spLocks xmlns:a="http://schemas.openxmlformats.org/drawingml/2006/main" noGrp="1"/>
+          </p:cNvSpPr>
+          <p:nvPr/>
+        </p:nvSpPr>
+        <p:spPr>
+          <a:xfrm xmlns:a="http://schemas.openxmlformats.org/drawingml/2006/main">
+            <a:off x="6272022" y="3360039"/>
+            <a:ext cx="2581942" cy="2656523"/>
+          </a:xfrm>
+          <a:prstGeom xmlns:a="http://schemas.openxmlformats.org/drawingml/2006/main" prst="roundRect">
+            <a:avLst>
+              <a:gd name="adj" fmla="val 2951"/>
+            </a:avLst>
+          </a:prstGeom>
+          <a:solidFill xmlns:a="http://schemas.openxmlformats.org/drawingml/2006/main">
+            <a:srgbClr val="F2F2F2"/>
+          </a:solidFill>
+        </p:spPr>
+      </p:sp>
+      <p:sp>
+        <p:nvSpPr>
+          <p:cNvPr id="4" name="right-stat-card">
+            <a:extLst xmlns:a="http://schemas.openxmlformats.org/drawingml/2006/main">
+              <a:ext uri="{FF2B5EF4-FFF2-40B4-BE49-F238E27FC236}">
+                <a16:creationId xmlns:a16="http://schemas.microsoft.com/office/drawing/2014/main" id="{6D7A92E4-990F-443E-AA22-280485C87531}"/>
+              </a:ext>
+            </a:extLst>
+          </p:cNvPr>
+          <p:cNvSpPr>
+            <a:spLocks xmlns:a="http://schemas.openxmlformats.org/drawingml/2006/main" noGrp="1"/>
+          </p:cNvSpPr>
+          <p:nvPr/>
+        </p:nvSpPr>
+        <p:spPr>
+          <a:xfrm xmlns:a="http://schemas.openxmlformats.org/drawingml/2006/main">
+            <a:off x="9224201" y="3360039"/>
+            <a:ext cx="2581942" cy="2656523"/>
+          </a:xfrm>
+          <a:prstGeom xmlns:a="http://schemas.openxmlformats.org/drawingml/2006/main" prst="roundRect">
+            <a:avLst>
+              <a:gd name="adj" fmla="val 2951"/>
+            </a:avLst>
+          </a:prstGeom>
+          <a:solidFill xmlns:a="http://schemas.openxmlformats.org/drawingml/2006/main">
+            <a:srgbClr val="F2F2F2"/>
+          </a:solidFill>
+        </p:spPr>
+      </p:sp>
+      <p:sp>
+        <p:nvSpPr>
+          <p:cNvPr id="5" name="summary">
+            <a:extLst xmlns:a="http://schemas.openxmlformats.org/drawingml/2006/main">
+              <a:ext uri="{FF2B5EF4-FFF2-40B4-BE49-F238E27FC236}">
+                <a16:creationId xmlns:a16="http://schemas.microsoft.com/office/drawing/2014/main" id="{56D2558C-A20F-4C70-893B-6EAB7EAAD1B2}"/>
+              </a:ext>
+            </a:extLst>
+          </p:cNvPr>
+          <p:cNvSpPr>
+            <a:spLocks xmlns:a="http://schemas.openxmlformats.org/drawingml/2006/main" noGrp="1"/>
+          </p:cNvSpPr>
+          <p:nvPr/>
+        </p:nvSpPr>
+        <p:spPr>
+          <a:xfrm xmlns:a="http://schemas.openxmlformats.org/drawingml/2006/main">
+            <a:off x="6261068" y="1714500"/>
+            <a:ext cx="5539835" cy="1381125"/>
+          </a:xfrm>
+          <a:prstGeom xmlns:a="http://schemas.openxmlformats.org/drawingml/2006/main" prst="rect">
+            <a:avLst/>
+          </a:prstGeom>
+        </p:spPr>
+        <p:txBody>
+          <a:bodyPr xmlns:a="http://schemas.openxmlformats.org/drawingml/2006/main" lIns="0" tIns="0" rIns="0" bIns="0" anchor="t">
+            <a:normAutofit fontScale="100000"/>
+          </a:bodyPr>
+          <a:lstStyle xmlns:a="http://schemas.openxmlformats.org/drawingml/2006/main"/>
+          <a:p xmlns:a="http://schemas.openxmlformats.org/drawingml/2006/main">
+            <a:pPr algn="l">
+              <a:buNone/>
+              <a:defRPr sz="1800">
+                <a:solidFill>
+                  <a:srgbClr val="000000"/>
+                </a:solidFill>
+                <a:latin typeface="Helvetica Neue"/>
+                <a:ea typeface="Helvetica Neue"/>
+                <a:cs typeface="Helvetica Neue"/>
+              </a:defRPr>
+            </a:pPr>
+            <a:r>
+              <a:t>SIL–SLV produced a positive TRAIN mean, but its 95% moving-block interval crossed zero and the forward-convergence upper bound remained barely positive.</a:t>
+            </a:r>
+          </a:p>
+        </p:txBody>
+      </p:sp>
+      <p:sp>
+        <p:nvSpPr>
+          <p:cNvPr id="6" name="left-stat">
+            <a:extLst xmlns:a="http://schemas.openxmlformats.org/drawingml/2006/main">
+              <a:ext uri="{FF2B5EF4-FFF2-40B4-BE49-F238E27FC236}">
+                <a16:creationId xmlns:a16="http://schemas.microsoft.com/office/drawing/2014/main" id="{5C6C71CB-7475-4DF6-B7F0-0931DF047551}"/>
+              </a:ext>
+            </a:extLst>
+          </p:cNvPr>
+          <p:cNvSpPr>
+            <a:spLocks xmlns:a="http://schemas.openxmlformats.org/drawingml/2006/main" noGrp="1"/>
+          </p:cNvSpPr>
+          <p:nvPr/>
+        </p:nvSpPr>
+        <p:spPr>
+          <a:xfrm xmlns:a="http://schemas.openxmlformats.org/drawingml/2006/main">
+            <a:off x="6509385" y="3579971"/>
+            <a:ext cx="2133314" cy="1155859"/>
+          </a:xfrm>
+          <a:prstGeom xmlns:a="http://schemas.openxmlformats.org/drawingml/2006/main" prst="rect">
+            <a:avLst/>
+          </a:prstGeom>
+        </p:spPr>
+        <p:txBody>
+          <a:bodyPr xmlns:a="http://schemas.openxmlformats.org/drawingml/2006/main" lIns="0" tIns="0" rIns="0" bIns="0" anchor="b">
+            <a:normAutofit fontScale="100000"/>
+          </a:bodyPr>
+          <a:lstStyle xmlns:a="http://schemas.openxmlformats.org/drawingml/2006/main"/>
+          <a:p xmlns:a="http://schemas.openxmlformats.org/drawingml/2006/main">
+            <a:pPr algn="l">
+              <a:buNone/>
+              <a:defRPr sz="2700">
+                <a:solidFill>
+                  <a:srgbClr val="3D8DFF"/>
+                </a:solidFill>
+                <a:latin typeface="Helvetica Neue"/>
+                <a:ea typeface="Helvetica Neue"/>
+                <a:cs typeface="Helvetica Neue"/>
+              </a:defRPr>
+            </a:pPr>
+            <a:r>
+              <a:t>0 / 25</a:t>
+            </a:r>
+          </a:p>
+        </p:txBody>
+      </p:sp>
+      <p:sp>
+        <p:nvSpPr>
+          <p:cNvPr id="7" name="left-stat-label">
+            <a:extLst xmlns:a="http://schemas.openxmlformats.org/drawingml/2006/main">
+              <a:ext uri="{FF2B5EF4-FFF2-40B4-BE49-F238E27FC236}">
+                <a16:creationId xmlns:a16="http://schemas.microsoft.com/office/drawing/2014/main" id="{471C1151-75AF-40A2-A5A1-4F7713D23356}"/>
+              </a:ext>
+            </a:extLst>
+          </p:cNvPr>
+          <p:cNvSpPr>
+            <a:spLocks xmlns:a="http://schemas.openxmlformats.org/drawingml/2006/main" noGrp="1"/>
+          </p:cNvSpPr>
+          <p:nvPr/>
+        </p:nvSpPr>
+        <p:spPr>
+          <a:xfrm xmlns:a="http://schemas.openxmlformats.org/drawingml/2006/main">
+            <a:off x="6575965" y="4953000"/>
+            <a:ext cx="2066735" cy="762000"/>
+          </a:xfrm>
+          <a:prstGeom xmlns:a="http://schemas.openxmlformats.org/drawingml/2006/main" prst="rect">
+            <a:avLst/>
+          </a:prstGeom>
+        </p:spPr>
+        <p:txBody>
+          <a:bodyPr xmlns:a="http://schemas.openxmlformats.org/drawingml/2006/main" lIns="0" tIns="0" rIns="0" bIns="0">
+            <a:normAutofit fontScale="100000"/>
+          </a:bodyPr>
+          <a:lstStyle xmlns:a="http://schemas.openxmlformats.org/drawingml/2006/main"/>
+          <a:p xmlns:a="http://schemas.openxmlformats.org/drawingml/2006/main">
+            <a:pPr algn="l">
+              <a:buNone/>
+              <a:defRPr sz="1500">
+                <a:solidFill>
+                  <a:srgbClr val="000000"/>
+                </a:solidFill>
+                <a:latin typeface="Helvetica Neue"/>
+                <a:ea typeface="Helvetica Neue"/>
+                <a:cs typeface="Helvetica Neue"/>
+              </a:defRPr>
+            </a:pPr>
+            <a:r>
+              <a:t>Pairs passing</a:t>
+            </a:r>
+          </a:p>
+          <a:p xmlns:a="http://schemas.openxmlformats.org/drawingml/2006/main">
+            <a:pPr algn="l">
+              <a:buNone/>
+              <a:defRPr sz="1500">
+                <a:solidFill>
+                  <a:srgbClr val="000000"/>
+                </a:solidFill>
+                <a:latin typeface="Helvetica Neue"/>
+                <a:ea typeface="Helvetica Neue"/>
+                <a:cs typeface="Helvetica Neue"/>
+              </a:defRPr>
+            </a:pPr>
+            <a:r>
+              <a:t>all eight TRAIN gates</a:t>
+            </a:r>
+          </a:p>
+        </p:txBody>
+      </p:sp>
+      <p:sp>
+        <p:nvSpPr>
+          <p:cNvPr id="8" name="right-stat">
+            <a:extLst xmlns:a="http://schemas.openxmlformats.org/drawingml/2006/main">
+              <a:ext uri="{FF2B5EF4-FFF2-40B4-BE49-F238E27FC236}">
+                <a16:creationId xmlns:a16="http://schemas.microsoft.com/office/drawing/2014/main" id="{423A9D83-D670-4C26-B583-F1C469F9EC40}"/>
+              </a:ext>
+            </a:extLst>
+          </p:cNvPr>
+          <p:cNvSpPr>
+            <a:spLocks xmlns:a="http://schemas.openxmlformats.org/drawingml/2006/main" noGrp="1"/>
+          </p:cNvSpPr>
+          <p:nvPr/>
+        </p:nvSpPr>
+        <p:spPr>
+          <a:xfrm xmlns:a="http://schemas.openxmlformats.org/drawingml/2006/main">
+            <a:off x="9461564" y="3579971"/>
+            <a:ext cx="2133314" cy="1155859"/>
+          </a:xfrm>
+          <a:prstGeom xmlns:a="http://schemas.openxmlformats.org/drawingml/2006/main" prst="rect">
+            <a:avLst/>
+          </a:prstGeom>
+        </p:spPr>
+        <p:txBody>
+          <a:bodyPr xmlns:a="http://schemas.openxmlformats.org/drawingml/2006/main" lIns="0" tIns="0" rIns="0" bIns="0" anchor="b">
+            <a:normAutofit fontScale="100000"/>
+          </a:bodyPr>
+          <a:lstStyle xmlns:a="http://schemas.openxmlformats.org/drawingml/2006/main"/>
+          <a:p xmlns:a="http://schemas.openxmlformats.org/drawingml/2006/main">
+            <a:pPr algn="l">
+              <a:buNone/>
+              <a:defRPr sz="2700">
+                <a:solidFill>
+                  <a:srgbClr val="B42318"/>
+                </a:solidFill>
+                <a:latin typeface="Helvetica Neue"/>
+                <a:ea typeface="Helvetica Neue"/>
+                <a:cs typeface="Helvetica Neue"/>
+              </a:defRPr>
+            </a:pPr>
+            <a:r>
+              <a:t>1 / 25</a:t>
+            </a:r>
+          </a:p>
+        </p:txBody>
+      </p:sp>
+      <p:sp>
+        <p:nvSpPr>
+          <p:cNvPr id="9" name="right-stat-label">
+            <a:extLst xmlns:a="http://schemas.openxmlformats.org/drawingml/2006/main">
+              <a:ext uri="{FF2B5EF4-FFF2-40B4-BE49-F238E27FC236}">
+                <a16:creationId xmlns:a16="http://schemas.microsoft.com/office/drawing/2014/main" id="{F039A1C2-F7F7-4D0E-BDC1-2BD29C9D7E4C}"/>
+              </a:ext>
+            </a:extLst>
+          </p:cNvPr>
+          <p:cNvSpPr>
+            <a:spLocks xmlns:a="http://schemas.openxmlformats.org/drawingml/2006/main" noGrp="1"/>
+          </p:cNvSpPr>
+          <p:nvPr/>
+        </p:nvSpPr>
+        <p:spPr>
+          <a:xfrm xmlns:a="http://schemas.openxmlformats.org/drawingml/2006/main">
+            <a:off x="9528143" y="4953000"/>
+            <a:ext cx="2066735" cy="762000"/>
+          </a:xfrm>
+          <a:prstGeom xmlns:a="http://schemas.openxmlformats.org/drawingml/2006/main" prst="rect">
+            <a:avLst/>
+          </a:prstGeom>
+        </p:spPr>
+        <p:txBody>
+          <a:bodyPr xmlns:a="http://schemas.openxmlformats.org/drawingml/2006/main" lIns="0" tIns="0" rIns="0" bIns="0">
+            <a:normAutofit fontScale="100000"/>
+          </a:bodyPr>
+          <a:lstStyle xmlns:a="http://schemas.openxmlformats.org/drawingml/2006/main"/>
+          <a:p xmlns:a="http://schemas.openxmlformats.org/drawingml/2006/main">
+            <a:pPr algn="l">
+              <a:buNone/>
+              <a:defRPr sz="1500">
+                <a:solidFill>
+                  <a:srgbClr val="000000"/>
+                </a:solidFill>
+                <a:latin typeface="Helvetica Neue"/>
+                <a:ea typeface="Helvetica Neue"/>
+                <a:cs typeface="Helvetica Neue"/>
+              </a:defRPr>
+            </a:pPr>
+            <a:r>
+              <a:t>Positive mean net return</a:t>
+            </a:r>
+          </a:p>
+          <a:p xmlns:a="http://schemas.openxmlformats.org/drawingml/2006/main">
+            <a:pPr algn="l">
+              <a:buNone/>
+              <a:defRPr sz="1500">
+                <a:solidFill>
+                  <a:srgbClr val="000000"/>
+                </a:solidFill>
+                <a:latin typeface="Helvetica Neue"/>
+                <a:ea typeface="Helvetica Neue"/>
+                <a:cs typeface="Helvetica Neue"/>
+              </a:defRPr>
+            </a:pPr>
+            <a:r>
+              <a:t>SIL–SLV only</a:t>
+            </a:r>
+          </a:p>
+        </p:txBody>
+      </p:sp>
+      <p:pic>
+        <p:nvPicPr>
+          <p:cNvPr id="31" name=""/>
+          <p:cNvPicPr>
+            <a:picLocks xmlns:a="http://schemas.openxmlformats.org/drawingml/2006/main" noChangeAspect="1"/>
+          </p:cNvPicPr>
+          <p:nvPr/>
+        </p:nvPicPr>
+        <p:blipFill>
+          <a:blip xmlns:r="http://schemas.openxmlformats.org/officeDocument/2006/relationships" xmlns:a="http://schemas.openxmlformats.org/drawingml/2006/main" r:embed="Rad16f3415ede4ac9"/>
+          <a:stretch xmlns:a="http://schemas.openxmlformats.org/drawingml/2006/main"/>
+        </p:blipFill>
+        <p:spPr>
+          <a:xfrm xmlns:a="http://schemas.openxmlformats.org/drawingml/2006/main">
+            <a:off x="385858" y="2576472"/>
+            <a:ext cx="5534216" cy="2371807"/>
+          </a:xfrm>
+          <a:prstGeom xmlns:a="http://schemas.openxmlformats.org/drawingml/2006/main" prst="rect">
+            <a:avLst/>
+          </a:prstGeom>
+        </p:spPr>
+      </p:pic>
+      <p:sp>
+        <p:nvSpPr>
+          <p:cNvPr id="13" name="">
+            <a:extLst xmlns:a="http://schemas.openxmlformats.org/drawingml/2006/main">
+              <a:ext uri="{FF2B5EF4-FFF2-40B4-BE49-F238E27FC236}">
+                <a16:creationId xmlns:a16="http://schemas.microsoft.com/office/drawing/2014/main" id="{D95C8B50-6D11-41E2-81BC-7768CA7E2749}"/>
+              </a:ext>
+            </a:extLst>
+          </p:cNvPr>
+          <p:cNvSpPr>
+            <a:spLocks xmlns:a="http://schemas.openxmlformats.org/drawingml/2006/main" noGrp="1"/>
+          </p:cNvSpPr>
+          <p:nvPr/>
+        </p:nvSpPr>
+        <p:spPr>
+          <a:xfrm xmlns:a="http://schemas.openxmlformats.org/drawingml/2006/main">
+            <a:off x="385858" y="2576472"/>
+            <a:ext cx="5534216" cy="2371807"/>
+          </a:xfrm>
+          <a:prstGeom xmlns:a="http://schemas.openxmlformats.org/drawingml/2006/main" prst="rect">
+            <a:avLst/>
+          </a:prstGeom>
+          <a:solidFill xmlns:a="http://schemas.openxmlformats.org/drawingml/2006/main">
+            <a:srgbClr val="FFFFFF"/>
+          </a:solidFill>
+          <a:ln xmlns:a="http://schemas.openxmlformats.org/drawingml/2006/main" w="0">
+            <a:solidFill>
+              <a:srgbClr val="FFFFFF"/>
+            </a:solidFill>
+            <a:prstDash val="solid"/>
+          </a:ln>
+        </p:spPr>
+      </p:sp>
+      <p:pic>
+        <p:nvPicPr>
+          <p:cNvPr id="33" name=""/>
+          <p:cNvPicPr>
+            <a:picLocks xmlns:a="http://schemas.openxmlformats.org/drawingml/2006/main" noChangeAspect="1"/>
+          </p:cNvPicPr>
+          <p:nvPr/>
+        </p:nvPicPr>
+        <p:blipFill>
+          <a:blip xmlns:r="http://schemas.openxmlformats.org/officeDocument/2006/relationships" xmlns:a="http://schemas.openxmlformats.org/drawingml/2006/main" r:embed="R4745c8f8a8cf4504"/>
+          <a:stretch xmlns:a="http://schemas.openxmlformats.org/drawingml/2006/main"/>
+        </p:blipFill>
+        <p:spPr>
+          <a:xfrm xmlns:a="http://schemas.openxmlformats.org/drawingml/2006/main">
+            <a:off x="1350393" y="2576472"/>
+            <a:ext cx="3605147" cy="2371807"/>
+          </a:xfrm>
+          <a:prstGeom xmlns:a="http://schemas.openxmlformats.org/drawingml/2006/main" prst="rect">
+            <a:avLst/>
+          </a:prstGeom>
+        </p:spPr>
+      </p:pic>
+      <p:sp>
+        <p:nvSpPr>
+          <p:cNvPr id="16" name="">
+            <a:extLst xmlns:a="http://schemas.openxmlformats.org/drawingml/2006/main">
+              <a:ext uri="{FF2B5EF4-FFF2-40B4-BE49-F238E27FC236}">
+                <a16:creationId xmlns:a16="http://schemas.microsoft.com/office/drawing/2014/main" id="{BCF1971E-0797-4B2A-9D4E-EA0B3D57963F}"/>
+              </a:ext>
+            </a:extLst>
+          </p:cNvPr>
+          <p:cNvSpPr>
+            <a:spLocks xmlns:a="http://schemas.openxmlformats.org/drawingml/2006/main" noGrp="1"/>
+          </p:cNvSpPr>
+          <p:nvPr/>
+        </p:nvSpPr>
+        <p:spPr>
+          <a:xfrm xmlns:a="http://schemas.openxmlformats.org/drawingml/2006/main">
+            <a:off x="385858" y="2576472"/>
+            <a:ext cx="5534216" cy="2371807"/>
+          </a:xfrm>
+          <a:prstGeom xmlns:a="http://schemas.openxmlformats.org/drawingml/2006/main" prst="rect">
+            <a:avLst/>
+          </a:prstGeom>
+          <a:solidFill xmlns:a="http://schemas.openxmlformats.org/drawingml/2006/main">
+            <a:srgbClr val="FFFFFF"/>
+          </a:solidFill>
+          <a:ln xmlns:a="http://schemas.openxmlformats.org/drawingml/2006/main" w="0">
+            <a:solidFill>
+              <a:srgbClr val="FFFFFF"/>
+            </a:solidFill>
+            <a:prstDash val="solid"/>
+          </a:ln>
+        </p:spPr>
+      </p:sp>
+      <p:pic>
+        <p:nvPicPr>
+          <p:cNvPr id="35" name=""/>
+          <p:cNvPicPr>
+            <a:picLocks xmlns:a="http://schemas.openxmlformats.org/drawingml/2006/main" noChangeAspect="1"/>
+          </p:cNvPicPr>
+          <p:nvPr/>
+        </p:nvPicPr>
+        <p:blipFill>
+          <a:blip xmlns:r="http://schemas.openxmlformats.org/officeDocument/2006/relationships" xmlns:a="http://schemas.openxmlformats.org/drawingml/2006/main" r:embed="R4296510ff1f4416f"/>
+          <a:stretch xmlns:a="http://schemas.openxmlformats.org/drawingml/2006/main"/>
+        </p:blipFill>
+        <p:spPr>
+          <a:xfrm xmlns:a="http://schemas.openxmlformats.org/drawingml/2006/main">
+            <a:off x="1350393" y="2576472"/>
+            <a:ext cx="3605147" cy="2371807"/>
+          </a:xfrm>
+          <a:prstGeom xmlns:a="http://schemas.openxmlformats.org/drawingml/2006/main" prst="rect">
+            <a:avLst/>
+          </a:prstGeom>
+        </p:spPr>
+      </p:pic>
+      <p:sp>
+        <p:nvSpPr>
+          <p:cNvPr id="20" name="">
+            <a:extLst xmlns:a="http://schemas.openxmlformats.org/drawingml/2006/main">
+              <a:ext uri="{FF2B5EF4-FFF2-40B4-BE49-F238E27FC236}">
+                <a16:creationId xmlns:a16="http://schemas.microsoft.com/office/drawing/2014/main" id="{8557D367-3D9B-468C-8B37-92E7AED724CE}"/>
+              </a:ext>
+            </a:extLst>
+          </p:cNvPr>
+          <p:cNvSpPr>
+            <a:spLocks xmlns:a="http://schemas.openxmlformats.org/drawingml/2006/main" noGrp="1"/>
+          </p:cNvSpPr>
+          <p:nvPr/>
+        </p:nvSpPr>
+        <p:spPr>
+          <a:xfrm xmlns:a="http://schemas.openxmlformats.org/drawingml/2006/main">
+            <a:off x="385858" y="2576472"/>
+            <a:ext cx="5534216" cy="2371807"/>
+          </a:xfrm>
+          <a:prstGeom xmlns:a="http://schemas.openxmlformats.org/drawingml/2006/main" prst="rect">
+            <a:avLst/>
+          </a:prstGeom>
+          <a:solidFill xmlns:a="http://schemas.openxmlformats.org/drawingml/2006/main">
+            <a:srgbClr val="FFFFFF"/>
+          </a:solidFill>
+          <a:ln xmlns:a="http://schemas.openxmlformats.org/drawingml/2006/main" w="0">
+            <a:solidFill>
+              <a:srgbClr val="FFFFFF"/>
+            </a:solidFill>
+            <a:prstDash val="solid"/>
+          </a:ln>
+        </p:spPr>
+      </p:sp>
+      <p:pic>
+        <p:nvPicPr>
+          <p:cNvPr id="37" name=""/>
+          <p:cNvPicPr>
+            <a:picLocks xmlns:a="http://schemas.openxmlformats.org/drawingml/2006/main" noChangeAspect="1"/>
+          </p:cNvPicPr>
+          <p:nvPr/>
+        </p:nvPicPr>
+        <p:blipFill>
+          <a:blip xmlns:r="http://schemas.openxmlformats.org/officeDocument/2006/relationships" xmlns:a="http://schemas.openxmlformats.org/drawingml/2006/main" r:embed="Rc4379cb2e5594c8f"/>
+          <a:stretch xmlns:a="http://schemas.openxmlformats.org/drawingml/2006/main"/>
+        </p:blipFill>
+        <p:spPr>
+          <a:xfrm xmlns:a="http://schemas.openxmlformats.org/drawingml/2006/main">
+            <a:off x="1350393" y="2576472"/>
+            <a:ext cx="3605147" cy="2371807"/>
+          </a:xfrm>
+          <a:prstGeom xmlns:a="http://schemas.openxmlformats.org/drawingml/2006/main" prst="rect">
+            <a:avLst/>
+          </a:prstGeom>
+        </p:spPr>
+      </p:pic>
+    </p:spTree>
+    <p:extLst>
+      <p:ext uri="{BB962C8B-B14F-4D97-AF65-F5344CB8AC3E}">
+        <p14:creationId xmlns:p14="http://schemas.microsoft.com/office/powerpoint/2010/main" val="227946046"/>
+      </p:ext>
+    </p:extLst>
+  </p:cSld>
+</p:sld>
+</file>
+
+<file path=ppt/slides/slide38.xml><?xml version="1.0" encoding="utf-8"?>
+<p:sld xmlns:p="http://schemas.openxmlformats.org/presentationml/2006/main">
+  <p:cSld>
+    <p:spTree>
+      <p:nvGrpSpPr>
+        <p:cNvPr id="1" name=""/>
+        <p:cNvGrpSpPr/>
+        <p:nvPr/>
+      </p:nvGrpSpPr>
+      <p:grpSpPr>
+        <a:xfrm xmlns:a="http://schemas.openxmlformats.org/drawingml/2006/main"/>
+      </p:grpSpPr>
+      <p:sp>
+        <p:nvSpPr>
+          <p:cNvPr id="6" name="footer">
+            <a:extLst xmlns:a="http://schemas.openxmlformats.org/drawingml/2006/main">
+              <a:ext uri="{FF2B5EF4-FFF2-40B4-BE49-F238E27FC236}">
+                <a16:creationId xmlns:a16="http://schemas.microsoft.com/office/drawing/2014/main" id="{5D1F4916-B18D-4F3F-8812-75A699D9A639}"/>
+              </a:ext>
+            </a:extLst>
+          </p:cNvPr>
+          <p:cNvSpPr>
+            <a:spLocks xmlns:a="http://schemas.openxmlformats.org/drawingml/2006/main" noGrp="1"/>
+          </p:cNvSpPr>
+          <p:nvPr/>
+        </p:nvSpPr>
+        <p:spPr>
+          <a:xfrm xmlns:a="http://schemas.openxmlformats.org/drawingml/2006/main">
+            <a:off x="11279315" y="6279261"/>
+            <a:ext cx="518922" cy="241268"/>
+          </a:xfrm>
+          <a:prstGeom xmlns:a="http://schemas.openxmlformats.org/drawingml/2006/main" prst="rect">
+            <a:avLst/>
+          </a:prstGeom>
+        </p:spPr>
+        <p:txBody>
+          <a:bodyPr xmlns:a="http://schemas.openxmlformats.org/drawingml/2006/main" lIns="0" tIns="0" rIns="0" bIns="0" anchor="b"/>
+          <a:lstStyle xmlns:a="http://schemas.openxmlformats.org/drawingml/2006/main"/>
+          <a:p xmlns:a="http://schemas.openxmlformats.org/drawingml/2006/main">
+            <a:pPr algn="r">
+              <a:buNone/>
+              <a:defRPr sz="1000">
+                <a:solidFill>
+                  <a:srgbClr val="000000"/>
+                </a:solidFill>
+                <a:latin typeface="Helvetica Neue"/>
+                <a:ea typeface="Helvetica Neue"/>
+                <a:cs typeface="Helvetica Neue"/>
+              </a:defRPr>
+            </a:pPr>
+            <a:r>
+              <a:t>38</a:t>
+            </a:r>
+          </a:p>
+        </p:txBody>
+      </p:sp>
+      <p:sp>
+        <p:nvSpPr>
+          <p:cNvPr id="2" name="title">
+            <a:extLst xmlns:a="http://schemas.openxmlformats.org/drawingml/2006/main">
+              <a:ext uri="{FF2B5EF4-FFF2-40B4-BE49-F238E27FC236}">
+                <a16:creationId xmlns:a16="http://schemas.microsoft.com/office/drawing/2014/main" id="{ECB77D9D-0CB0-4878-9A4A-2687A311CD30}"/>
+              </a:ext>
+            </a:extLst>
+          </p:cNvPr>
+          <p:cNvSpPr>
+            <a:spLocks xmlns:a="http://schemas.openxmlformats.org/drawingml/2006/main" noGrp="1"/>
+          </p:cNvSpPr>
+          <p:nvPr/>
+        </p:nvSpPr>
+        <p:spPr>
+          <a:xfrm xmlns:a="http://schemas.openxmlformats.org/drawingml/2006/main">
+            <a:off x="393668" y="344043"/>
+            <a:ext cx="5537168" cy="1143000"/>
+          </a:xfrm>
+          <a:prstGeom xmlns:a="http://schemas.openxmlformats.org/drawingml/2006/main" prst="rect">
+            <a:avLst/>
+          </a:prstGeom>
+        </p:spPr>
+        <p:txBody>
+          <a:bodyPr xmlns:a="http://schemas.openxmlformats.org/drawingml/2006/main" lIns="0" tIns="0" rIns="0" bIns="0" anchor="t">
+            <a:normAutofit fontScale="100000"/>
+          </a:bodyPr>
+          <a:lstStyle xmlns:a="http://schemas.openxmlformats.org/drawingml/2006/main"/>
+          <a:p xmlns:a="http://schemas.openxmlformats.org/drawingml/2006/main">
+            <a:pPr algn="l">
+              <a:buNone/>
+              <a:defRPr sz="2900">
+                <a:solidFill>
+                  <a:srgbClr val="000000"/>
+                </a:solidFill>
+                <a:latin typeface="Helvetica Neue"/>
+                <a:ea typeface="Helvetica Neue"/>
+                <a:cs typeface="Helvetica Neue"/>
+              </a:defRPr>
+            </a:pPr>
+            <a:r>
+              <a:t>Validity and activity were common; robust economics were not</a:t>
+            </a:r>
+          </a:p>
+        </p:txBody>
+      </p:sp>
+      <p:sp>
+        <p:nvSpPr>
+          <p:cNvPr id="3" name="image-backing">
+            <a:extLst xmlns:a="http://schemas.openxmlformats.org/drawingml/2006/main">
+              <a:ext uri="{FF2B5EF4-FFF2-40B4-BE49-F238E27FC236}">
+                <a16:creationId xmlns:a16="http://schemas.microsoft.com/office/drawing/2014/main" id="{6220C938-B9AD-4B79-90E3-107E303A9D02}"/>
+              </a:ext>
+            </a:extLst>
+          </p:cNvPr>
+          <p:cNvSpPr>
+            <a:spLocks xmlns:a="http://schemas.openxmlformats.org/drawingml/2006/main" noGrp="1"/>
+          </p:cNvSpPr>
+          <p:nvPr/>
+        </p:nvSpPr>
+        <p:spPr>
+          <a:xfrm xmlns:a="http://schemas.openxmlformats.org/drawingml/2006/main">
+            <a:off x="6269069" y="396431"/>
+            <a:ext cx="5539740" cy="5602034"/>
+          </a:xfrm>
+          <a:prstGeom xmlns:a="http://schemas.openxmlformats.org/drawingml/2006/main" prst="roundRect">
+            <a:avLst>
+              <a:gd name="adj" fmla="val 1376"/>
+            </a:avLst>
+          </a:prstGeom>
+          <a:solidFill xmlns:a="http://schemas.openxmlformats.org/drawingml/2006/main">
+            <a:srgbClr val="EAF5FB"/>
+          </a:solidFill>
+          <a:ln xmlns:a="http://schemas.openxmlformats.org/drawingml/2006/main" w="9525">
+            <a:solidFill>
+              <a:srgbClr val="B8BCC4"/>
+            </a:solidFill>
+            <a:prstDash val="solid"/>
+          </a:ln>
+        </p:spPr>
+      </p:sp>
+      <p:sp>
+        <p:nvSpPr>
+          <p:cNvPr id="4" name="body">
+            <a:extLst xmlns:a="http://schemas.openxmlformats.org/drawingml/2006/main">
+              <a:ext uri="{FF2B5EF4-FFF2-40B4-BE49-F238E27FC236}">
+                <a16:creationId xmlns:a16="http://schemas.microsoft.com/office/drawing/2014/main" id="{3F760EC2-C6B5-4968-A4B1-EBAD286BA351}"/>
+              </a:ext>
+            </a:extLst>
+          </p:cNvPr>
+          <p:cNvSpPr>
+            <a:spLocks xmlns:a="http://schemas.openxmlformats.org/drawingml/2006/main" noGrp="1"/>
+          </p:cNvSpPr>
+          <p:nvPr/>
+        </p:nvSpPr>
+        <p:spPr>
+          <a:xfrm xmlns:a="http://schemas.openxmlformats.org/drawingml/2006/main">
+            <a:off x="393668" y="1695450"/>
+            <a:ext cx="5537168" cy="4238625"/>
+          </a:xfrm>
+          <a:prstGeom xmlns:a="http://schemas.openxmlformats.org/drawingml/2006/main" prst="rect">
+            <a:avLst/>
+          </a:prstGeom>
+        </p:spPr>
+        <p:txBody>
+          <a:bodyPr xmlns:a="http://schemas.openxmlformats.org/drawingml/2006/main" lIns="0" tIns="0" rIns="0" bIns="0" anchor="t">
+            <a:normAutofit fontScale="100000"/>
+          </a:bodyPr>
+          <a:lstStyle xmlns:a="http://schemas.openxmlformats.org/drawingml/2006/main"/>
+          <a:p xmlns:a="http://schemas.openxmlformats.org/drawingml/2006/main">
+            <a:pPr algn="l">
+              <a:buNone/>
+              <a:defRPr sz="1950">
+                <a:solidFill>
+                  <a:srgbClr val="000000"/>
+                </a:solidFill>
+                <a:latin typeface="Helvetica Neue"/>
+                <a:ea typeface="Helvetica Neue"/>
+                <a:cs typeface="Helvetica Neue"/>
+              </a:defRPr>
+            </a:pPr>
+            <a:r>
+              <a:t>All 25 pairs passed integrity and two-sided trade support. Most retained positive-beta semantics.</a:t>
+            </a:r>
+          </a:p>
+          <a:p xmlns:a="http://schemas.openxmlformats.org/drawingml/2006/main">
+            <a:pPr algn="l">
+              <a:buNone/>
+              <a:defRPr sz="1950">
+                <a:solidFill>
+                  <a:srgbClr val="000000"/>
+                </a:solidFill>
+                <a:latin typeface="Helvetica Neue"/>
+                <a:ea typeface="Helvetica Neue"/>
+                <a:cs typeface="Helvetica Neue"/>
+              </a:defRPr>
+            </a:pPr>
+            <a:r>
+              <a:t/>
+            </a:r>
+          </a:p>
+          <a:p xmlns:a="http://schemas.openxmlformats.org/drawingml/2006/main">
+            <a:pPr algn="l">
+              <a:buNone/>
+              <a:defRPr sz="1950">
+                <a:solidFill>
+                  <a:srgbClr val="000000"/>
+                </a:solidFill>
+                <a:latin typeface="Helvetica Neue"/>
+                <a:ea typeface="Helvetica Neue"/>
+                <a:cs typeface="Helvetica Neue"/>
+              </a:defRPr>
+            </a:pPr>
+            <a:r>
+              <a:t>Only one had a positive net mean; none cleared its uncertainty interval. Three had negative forward-correlation point estimates, but none had a robust upper bound below zero.</a:t>
+            </a:r>
+          </a:p>
+          <a:p xmlns:a="http://schemas.openxmlformats.org/drawingml/2006/main">
+            <a:pPr algn="l">
+              <a:buNone/>
+              <a:defRPr sz="1950">
+                <a:solidFill>
+                  <a:srgbClr val="000000"/>
+                </a:solidFill>
+                <a:latin typeface="Helvetica Neue"/>
+                <a:ea typeface="Helvetica Neue"/>
+                <a:cs typeface="Helvetica Neue"/>
+              </a:defRPr>
+            </a:pPr>
+            <a:r>
+              <a:t/>
+            </a:r>
+          </a:p>
+          <a:p xmlns:a="http://schemas.openxmlformats.org/drawingml/2006/main">
+            <a:pPr algn="l">
+              <a:buNone/>
+              <a:defRPr sz="1950">
+                <a:solidFill>
+                  <a:srgbClr val="000000"/>
+                </a:solidFill>
+                <a:latin typeface="Helvetica Neue"/>
+                <a:ea typeface="Helvetica Neue"/>
+                <a:cs typeface="Helvetica Neue"/>
+              </a:defRPr>
+            </a:pPr>
+            <a:r>
+              <a:t>Because no pair cleared TRAIN, DEVELOPMENT was never opened.</a:t>
+            </a:r>
+          </a:p>
+        </p:txBody>
+      </p:sp>
+      <p:pic>
+        <p:nvPicPr>
+          <p:cNvPr id="21" name=""/>
+          <p:cNvPicPr>
+            <a:picLocks xmlns:a="http://schemas.openxmlformats.org/drawingml/2006/main" noChangeAspect="1"/>
+          </p:cNvPicPr>
+          <p:nvPr/>
+        </p:nvPicPr>
+        <p:blipFill>
+          <a:blip xmlns:r="http://schemas.openxmlformats.org/officeDocument/2006/relationships" xmlns:a="http://schemas.openxmlformats.org/drawingml/2006/main" r:embed="Rd9e589070cce4cf0"/>
+          <a:stretch xmlns:a="http://schemas.openxmlformats.org/drawingml/2006/main"/>
+        </p:blipFill>
+        <p:spPr>
+          <a:xfrm xmlns:a="http://schemas.openxmlformats.org/drawingml/2006/main">
+            <a:off x="6381750" y="1595005"/>
+            <a:ext cx="5314950" cy="3382241"/>
+          </a:xfrm>
+          <a:prstGeom xmlns:a="http://schemas.openxmlformats.org/drawingml/2006/main" prst="roundRect">
+            <a:avLst/>
+          </a:prstGeom>
+        </p:spPr>
+      </p:pic>
+      <p:sp>
+        <p:nvSpPr>
+          <p:cNvPr id="8" name="">
+            <a:extLst xmlns:a="http://schemas.openxmlformats.org/drawingml/2006/main">
+              <a:ext uri="{FF2B5EF4-FFF2-40B4-BE49-F238E27FC236}">
+                <a16:creationId xmlns:a16="http://schemas.microsoft.com/office/drawing/2014/main" id="{5F1B8A64-ACC9-4498-AEAE-0060DC180571}"/>
+              </a:ext>
+            </a:extLst>
+          </p:cNvPr>
+          <p:cNvSpPr>
+            <a:spLocks xmlns:a="http://schemas.openxmlformats.org/drawingml/2006/main" noGrp="1"/>
+          </p:cNvSpPr>
+          <p:nvPr/>
+        </p:nvSpPr>
+        <p:spPr>
+          <a:xfrm xmlns:a="http://schemas.openxmlformats.org/drawingml/2006/main">
+            <a:off x="6381750" y="1595005"/>
+            <a:ext cx="5314950" cy="3382241"/>
+          </a:xfrm>
+          <a:prstGeom xmlns:a="http://schemas.openxmlformats.org/drawingml/2006/main" prst="rect">
+            <a:avLst/>
+          </a:prstGeom>
+          <a:solidFill xmlns:a="http://schemas.openxmlformats.org/drawingml/2006/main">
+            <a:srgbClr val="FFFFFF"/>
+          </a:solidFill>
+          <a:ln xmlns:a="http://schemas.openxmlformats.org/drawingml/2006/main" w="0">
+            <a:solidFill>
+              <a:srgbClr val="FFFFFF"/>
+            </a:solidFill>
+            <a:prstDash val="solid"/>
+          </a:ln>
+        </p:spPr>
+      </p:sp>
+      <p:pic>
+        <p:nvPicPr>
+          <p:cNvPr id="23" name=""/>
+          <p:cNvPicPr>
+            <a:picLocks xmlns:a="http://schemas.openxmlformats.org/drawingml/2006/main" noChangeAspect="1"/>
+          </p:cNvPicPr>
+          <p:nvPr/>
+        </p:nvPicPr>
+        <p:blipFill>
+          <a:blip xmlns:r="http://schemas.openxmlformats.org/officeDocument/2006/relationships" xmlns:a="http://schemas.openxmlformats.org/drawingml/2006/main" r:embed="R1ba8deee89174e90"/>
+          <a:stretch xmlns:a="http://schemas.openxmlformats.org/drawingml/2006/main"/>
+        </p:blipFill>
+        <p:spPr>
+          <a:xfrm xmlns:a="http://schemas.openxmlformats.org/drawingml/2006/main">
+            <a:off x="6381750" y="1704295"/>
+            <a:ext cx="5314950" cy="3163661"/>
+          </a:xfrm>
+          <a:prstGeom xmlns:a="http://schemas.openxmlformats.org/drawingml/2006/main" prst="roundRect">
+            <a:avLst/>
+          </a:prstGeom>
+        </p:spPr>
+      </p:pic>
+      <p:sp>
+        <p:nvSpPr>
+          <p:cNvPr id="11" name="">
+            <a:extLst xmlns:a="http://schemas.openxmlformats.org/drawingml/2006/main">
+              <a:ext uri="{FF2B5EF4-FFF2-40B4-BE49-F238E27FC236}">
+                <a16:creationId xmlns:a16="http://schemas.microsoft.com/office/drawing/2014/main" id="{25209D2C-E63E-4C2B-9C87-FE274541976C}"/>
+              </a:ext>
+            </a:extLst>
+          </p:cNvPr>
+          <p:cNvSpPr>
+            <a:spLocks xmlns:a="http://schemas.openxmlformats.org/drawingml/2006/main" noGrp="1"/>
+          </p:cNvSpPr>
+          <p:nvPr/>
+        </p:nvSpPr>
+        <p:spPr>
+          <a:xfrm xmlns:a="http://schemas.openxmlformats.org/drawingml/2006/main">
+            <a:off x="6381750" y="1595005"/>
+            <a:ext cx="5314950" cy="3382241"/>
+          </a:xfrm>
+          <a:prstGeom xmlns:a="http://schemas.openxmlformats.org/drawingml/2006/main" prst="rect">
+            <a:avLst/>
+          </a:prstGeom>
+          <a:solidFill xmlns:a="http://schemas.openxmlformats.org/drawingml/2006/main">
+            <a:srgbClr val="FFFFFF"/>
+          </a:solidFill>
+          <a:ln xmlns:a="http://schemas.openxmlformats.org/drawingml/2006/main" w="0">
+            <a:solidFill>
+              <a:srgbClr val="FFFFFF"/>
+            </a:solidFill>
+            <a:prstDash val="solid"/>
+          </a:ln>
+        </p:spPr>
+      </p:sp>
+      <p:pic>
+        <p:nvPicPr>
+          <p:cNvPr id="25" name=""/>
+          <p:cNvPicPr>
+            <a:picLocks xmlns:a="http://schemas.openxmlformats.org/drawingml/2006/main" noChangeAspect="1"/>
+          </p:cNvPicPr>
+          <p:nvPr/>
+        </p:nvPicPr>
+        <p:blipFill>
+          <a:blip xmlns:r="http://schemas.openxmlformats.org/officeDocument/2006/relationships" xmlns:a="http://schemas.openxmlformats.org/drawingml/2006/main" r:embed="Rb8d99f43d31046ca"/>
+          <a:stretch xmlns:a="http://schemas.openxmlformats.org/drawingml/2006/main"/>
+        </p:blipFill>
+        <p:spPr>
+          <a:xfrm xmlns:a="http://schemas.openxmlformats.org/drawingml/2006/main">
+            <a:off x="6381750" y="1704295"/>
+            <a:ext cx="5314950" cy="3163661"/>
+          </a:xfrm>
+          <a:prstGeom xmlns:a="http://schemas.openxmlformats.org/drawingml/2006/main" prst="roundRect">
+            <a:avLst/>
+          </a:prstGeom>
+        </p:spPr>
+      </p:pic>
+      <p:sp>
+        <p:nvSpPr>
+          <p:cNvPr id="15" name="">
+            <a:extLst xmlns:a="http://schemas.openxmlformats.org/drawingml/2006/main">
+              <a:ext uri="{FF2B5EF4-FFF2-40B4-BE49-F238E27FC236}">
+                <a16:creationId xmlns:a16="http://schemas.microsoft.com/office/drawing/2014/main" id="{ABCED5F4-E309-4080-8AA8-7707B7312AEC}"/>
+              </a:ext>
+            </a:extLst>
+          </p:cNvPr>
+          <p:cNvSpPr>
+            <a:spLocks xmlns:a="http://schemas.openxmlformats.org/drawingml/2006/main" noGrp="1"/>
+          </p:cNvSpPr>
+          <p:nvPr/>
+        </p:nvSpPr>
+        <p:spPr>
+          <a:xfrm xmlns:a="http://schemas.openxmlformats.org/drawingml/2006/main">
+            <a:off x="6381750" y="1595005"/>
+            <a:ext cx="5314950" cy="3382241"/>
+          </a:xfrm>
+          <a:prstGeom xmlns:a="http://schemas.openxmlformats.org/drawingml/2006/main" prst="rect">
+            <a:avLst/>
+          </a:prstGeom>
+          <a:solidFill xmlns:a="http://schemas.openxmlformats.org/drawingml/2006/main">
+            <a:srgbClr val="FFFFFF"/>
+          </a:solidFill>
+          <a:ln xmlns:a="http://schemas.openxmlformats.org/drawingml/2006/main" w="0">
+            <a:solidFill>
+              <a:srgbClr val="FFFFFF"/>
+            </a:solidFill>
+            <a:prstDash val="solid"/>
+          </a:ln>
+        </p:spPr>
+      </p:sp>
+      <p:pic>
+        <p:nvPicPr>
+          <p:cNvPr id="27" name=""/>
+          <p:cNvPicPr>
+            <a:picLocks xmlns:a="http://schemas.openxmlformats.org/drawingml/2006/main" noChangeAspect="1"/>
+          </p:cNvPicPr>
+          <p:nvPr/>
+        </p:nvPicPr>
+        <p:blipFill>
+          <a:blip xmlns:r="http://schemas.openxmlformats.org/officeDocument/2006/relationships" xmlns:a="http://schemas.openxmlformats.org/drawingml/2006/main" r:embed="Rf2801f54a9f64a86"/>
+          <a:stretch xmlns:a="http://schemas.openxmlformats.org/drawingml/2006/main"/>
+        </p:blipFill>
+        <p:spPr>
+          <a:xfrm xmlns:a="http://schemas.openxmlformats.org/drawingml/2006/main">
+            <a:off x="6381750" y="1704295"/>
+            <a:ext cx="5314950" cy="3163661"/>
+          </a:xfrm>
+          <a:prstGeom xmlns:a="http://schemas.openxmlformats.org/drawingml/2006/main" prst="roundRect">
+            <a:avLst/>
+          </a:prstGeom>
+        </p:spPr>
+      </p:pic>
+    </p:spTree>
+    <p:extLst>
+      <p:ext uri="{BB962C8B-B14F-4D97-AF65-F5344CB8AC3E}">
+        <p14:creationId xmlns:p14="http://schemas.microsoft.com/office/powerpoint/2010/main" val="463436756"/>
+      </p:ext>
+    </p:extLst>
+  </p:cSld>
+</p:sld>
+</file>
+
+<file path=ppt/slides/slide39.xml><?xml version="1.0" encoding="utf-8"?>
+<p:sld xmlns:p="http://schemas.openxmlformats.org/presentationml/2006/main">
+  <p:cSld>
+    <p:spTree>
+      <p:nvGrpSpPr>
+        <p:cNvPr id="1" name=""/>
+        <p:cNvGrpSpPr/>
+        <p:nvPr/>
+      </p:nvGrpSpPr>
+      <p:grpSpPr>
+        <a:xfrm xmlns:a="http://schemas.openxmlformats.org/drawingml/2006/main"/>
+      </p:grpSpPr>
+      <p:sp>
+        <p:nvSpPr>
+          <p:cNvPr id="4" name="cover-headline">
+            <a:extLst xmlns:a="http://schemas.openxmlformats.org/drawingml/2006/main">
+              <a:ext uri="{FF2B5EF4-FFF2-40B4-BE49-F238E27FC236}">
+                <a16:creationId xmlns:a16="http://schemas.microsoft.com/office/drawing/2014/main" id="{E9F43BB9-4202-4A42-9916-7A06678333BD}"/>
+              </a:ext>
+            </a:extLst>
+          </p:cNvPr>
+          <p:cNvSpPr>
+            <a:spLocks xmlns:a="http://schemas.openxmlformats.org/drawingml/2006/main" noGrp="1"/>
+          </p:cNvSpPr>
+          <p:nvPr/>
+        </p:nvSpPr>
+        <p:spPr>
+          <a:xfrm xmlns:a="http://schemas.openxmlformats.org/drawingml/2006/main">
+            <a:off x="393668" y="1738789"/>
+            <a:ext cx="10287000" cy="2491454"/>
+          </a:xfrm>
+          <a:prstGeom xmlns:a="http://schemas.openxmlformats.org/drawingml/2006/main" prst="rect">
+            <a:avLst/>
+          </a:prstGeom>
+        </p:spPr>
+        <p:txBody>
+          <a:bodyPr xmlns:a="http://schemas.openxmlformats.org/drawingml/2006/main" lIns="0" tIns="0" rIns="0" bIns="0" anchor="b">
+            <a:normAutofit fontScale="100000"/>
+          </a:bodyPr>
+          <a:lstStyle xmlns:a="http://schemas.openxmlformats.org/drawingml/2006/main"/>
+          <a:p xmlns:a="http://schemas.openxmlformats.org/drawingml/2006/main">
+            <a:pPr algn="l">
+              <a:buNone/>
+              <a:defRPr sz="5700">
+                <a:solidFill>
+                  <a:srgbClr val="000000"/>
+                </a:solidFill>
+                <a:latin typeface="Helvetica Neue"/>
+                <a:ea typeface="Helvetica Neue"/>
+                <a:cs typeface="Helvetica Neue"/>
+              </a:defRPr>
+            </a:pPr>
+            <a:r>
+              <a:t>The atlas worked.</a:t>
+            </a:r>
+          </a:p>
+          <a:p xmlns:a="http://schemas.openxmlformats.org/drawingml/2006/main">
+            <a:pPr algn="l">
+              <a:buNone/>
+              <a:defRPr sz="5700">
+                <a:solidFill>
+                  <a:srgbClr val="000000"/>
+                </a:solidFill>
+                <a:latin typeface="Helvetica Neue"/>
+                <a:ea typeface="Helvetica Neue"/>
+                <a:cs typeface="Helvetica Neue"/>
+              </a:defRPr>
+            </a:pPr>
+            <a:r>
+              <a:t>The pair rule still did not.</a:t>
+            </a:r>
+          </a:p>
+        </p:txBody>
+      </p:sp>
+      <p:sp>
+        <p:nvSpPr>
+          <p:cNvPr id="2" name="cover-subtitle">
+            <a:extLst xmlns:a="http://schemas.openxmlformats.org/drawingml/2006/main">
+              <a:ext uri="{FF2B5EF4-FFF2-40B4-BE49-F238E27FC236}">
+                <a16:creationId xmlns:a16="http://schemas.microsoft.com/office/drawing/2014/main" id="{F6F90063-BA30-438B-9FD3-13AA22719785}"/>
+              </a:ext>
+            </a:extLst>
+          </p:cNvPr>
+          <p:cNvSpPr>
+            <a:spLocks xmlns:a="http://schemas.openxmlformats.org/drawingml/2006/main" noGrp="1"/>
+          </p:cNvSpPr>
+          <p:nvPr/>
+        </p:nvSpPr>
+        <p:spPr>
+          <a:xfrm xmlns:a="http://schemas.openxmlformats.org/drawingml/2006/main">
+            <a:off x="393668" y="4762500"/>
+            <a:ext cx="8001000" cy="1238250"/>
+          </a:xfrm>
+          <a:prstGeom xmlns:a="http://schemas.openxmlformats.org/drawingml/2006/main" prst="rect">
+            <a:avLst/>
+          </a:prstGeom>
+        </p:spPr>
+        <p:txBody>
+          <a:bodyPr xmlns:a="http://schemas.openxmlformats.org/drawingml/2006/main" lIns="0" tIns="0" rIns="0" bIns="0">
+            <a:normAutofit fontScale="100000"/>
+          </a:bodyPr>
+          <a:lstStyle xmlns:a="http://schemas.openxmlformats.org/drawingml/2006/main"/>
+          <a:p xmlns:a="http://schemas.openxmlformats.org/drawingml/2006/main">
+            <a:pPr algn="l">
+              <a:buNone/>
+              <a:defRPr sz="2250">
+                <a:solidFill>
+                  <a:srgbClr val="000000"/>
+                </a:solidFill>
+                <a:latin typeface="Helvetica Neue"/>
+                <a:ea typeface="Helvetica Neue"/>
+                <a:cs typeface="Helvetica Neue"/>
+              </a:defRPr>
+            </a:pPr>
+            <a:r>
+              <a:t>We now have a reusable, category-labeled generator and a stronger falsification result: 0 of 25 new instances cleared TRAIN, so no OOS performance claim was made.</a:t>
+            </a:r>
+          </a:p>
+        </p:txBody>
+      </p:sp>
+      <p:sp>
+        <p:nvSpPr>
+          <p:cNvPr id="3" name="cover-eyebrow">
+            <a:extLst xmlns:a="http://schemas.openxmlformats.org/drawingml/2006/main">
+              <a:ext uri="{FF2B5EF4-FFF2-40B4-BE49-F238E27FC236}">
+                <a16:creationId xmlns:a16="http://schemas.microsoft.com/office/drawing/2014/main" id="{45129715-75DE-4D50-B44D-3AFE3EBA3F0E}"/>
+              </a:ext>
+            </a:extLst>
+          </p:cNvPr>
+          <p:cNvSpPr>
+            <a:spLocks xmlns:a="http://schemas.openxmlformats.org/drawingml/2006/main" noGrp="1"/>
+          </p:cNvSpPr>
+          <p:nvPr/>
+        </p:nvSpPr>
+        <p:spPr>
+          <a:xfrm xmlns:a="http://schemas.openxmlformats.org/drawingml/2006/main">
+            <a:off x="393668" y="392240"/>
+            <a:ext cx="7239000" cy="649129"/>
+          </a:xfrm>
+          <a:prstGeom xmlns:a="http://schemas.openxmlformats.org/drawingml/2006/main" prst="rect">
+            <a:avLst/>
+          </a:prstGeom>
+        </p:spPr>
+        <p:txBody>
+          <a:bodyPr xmlns:a="http://schemas.openxmlformats.org/drawingml/2006/main" lIns="0" tIns="0" rIns="0" bIns="0">
+            <a:normAutofit fontScale="100000"/>
+          </a:bodyPr>
+          <a:lstStyle xmlns:a="http://schemas.openxmlformats.org/drawingml/2006/main"/>
+          <a:p xmlns:a="http://schemas.openxmlformats.org/drawingml/2006/main">
+            <a:pPr algn="l">
+              <a:buNone/>
+              <a:defRPr sz="2250">
+                <a:solidFill>
+                  <a:srgbClr val="000000"/>
+                </a:solidFill>
+                <a:latin typeface="Helvetica Neue"/>
+                <a:ea typeface="Helvetica Neue"/>
+                <a:cs typeface="Helvetica Neue"/>
+              </a:defRPr>
+            </a:pPr>
+            <a:r>
+              <a:t>RELATIONSHIP ATLAS 01 | STOP AT TRAIN</a:t>
+            </a:r>
+          </a:p>
+        </p:txBody>
+      </p:sp>
+    </p:spTree>
+    <p:extLst>
+      <p:ext uri="{BB962C8B-B14F-4D97-AF65-F5344CB8AC3E}">
+        <p14:creationId xmlns:p14="http://schemas.microsoft.com/office/powerpoint/2010/main" val="1664240194"/>
+      </p:ext>
+    </p:extLst>
+  </p:cSld>
+</p:sld>
+</file>
+
 <file path=ppt/slides/slide4.xml><?xml version="1.0" encoding="utf-8"?>
 <p:sld xmlns:p="http://schemas.openxmlformats.org/presentationml/2006/main">
   <p:cSld>
@@ -14528,7 +17282,7 @@
           <p:nvPr/>
         </p:nvPicPr>
         <p:blipFill>
-          <a:blip xmlns:r="http://schemas.openxmlformats.org/officeDocument/2006/relationships" xmlns:a="http://schemas.openxmlformats.org/drawingml/2006/main" r:embed="Rf426af2b6bc94e07"/>
+          <a:blip xmlns:r="http://schemas.openxmlformats.org/officeDocument/2006/relationships" xmlns:a="http://schemas.openxmlformats.org/drawingml/2006/main" r:embed="R06a40f276fdd442c"/>
           <a:stretch xmlns:a="http://schemas.openxmlformats.org/drawingml/2006/main"/>
         </p:blipFill>
         <p:spPr>
@@ -14583,7 +17337,7 @@
           <p:nvPr/>
         </p:nvPicPr>
         <p:blipFill>
-          <a:blip xmlns:r="http://schemas.openxmlformats.org/officeDocument/2006/relationships" xmlns:a="http://schemas.openxmlformats.org/drawingml/2006/main" r:embed="R26ea4091070d4101"/>
+          <a:blip xmlns:r="http://schemas.openxmlformats.org/officeDocument/2006/relationships" xmlns:a="http://schemas.openxmlformats.org/drawingml/2006/main" r:embed="R9c08206f5a464b58"/>
           <a:stretch xmlns:a="http://schemas.openxmlformats.org/drawingml/2006/main"/>
         </p:blipFill>
         <p:spPr>
